--- a/Entregas/06 Final Report/Cartaz v2.pptx
+++ b/Entregas/06 Final Report/Cartaz v2.pptx
@@ -5,14 +5,16 @@
     <p:sldMasterId id="2147483708" r:id="rId1"/>
   </p:sldMasterIdLst>
   <p:notesMasterIdLst>
-    <p:notesMasterId r:id="rId7"/>
+    <p:notesMasterId r:id="rId9"/>
   </p:notesMasterIdLst>
   <p:sldIdLst>
     <p:sldId id="256" r:id="rId2"/>
     <p:sldId id="258" r:id="rId3"/>
     <p:sldId id="257" r:id="rId4"/>
     <p:sldId id="259" r:id="rId5"/>
-    <p:sldId id="260" r:id="rId6"/>
+    <p:sldId id="261" r:id="rId6"/>
+    <p:sldId id="260" r:id="rId7"/>
+    <p:sldId id="262" r:id="rId8"/>
   </p:sldIdLst>
   <p:sldSz cx="12801600" cy="9601200" type="A3"/>
   <p:notesSz cx="6858000" cy="9144000"/>
@@ -6079,7 +6081,7 @@
           <a:p>
             <a:fld id="{D8D22204-511D-42DB-B769-E600439F120D}" type="datetimeFigureOut">
               <a:rPr lang="pt-PT" smtClean="0"/>
-              <a:t>07/07/2025</a:t>
+              <a:t>16/07/2025</a:t>
             </a:fld>
             <a:endParaRPr lang="pt-PT"/>
           </a:p>
@@ -6774,6 +6776,119 @@
 </p:notes>
 </file>
 
+<file path=ppt/notesSlides/notesSlide5.xml><?xml version="1.0" encoding="utf-8"?>
+<p:notes xmlns:a="http://schemas.openxmlformats.org/drawingml/2006/main" xmlns:r="http://schemas.openxmlformats.org/officeDocument/2006/relationships" xmlns:p="http://schemas.openxmlformats.org/presentationml/2006/main">
+  <p:cSld>
+    <p:spTree>
+      <p:nvGrpSpPr>
+        <p:cNvPr id="1" name="">
+          <a:extLst>
+            <a:ext uri="{FF2B5EF4-FFF2-40B4-BE49-F238E27FC236}">
+              <a16:creationId xmlns:a16="http://schemas.microsoft.com/office/drawing/2014/main" id="{BD25DE2C-0C26-8F85-692A-4471786827E2}"/>
+            </a:ext>
+          </a:extLst>
+        </p:cNvPr>
+        <p:cNvGrpSpPr/>
+        <p:nvPr/>
+      </p:nvGrpSpPr>
+      <p:grpSpPr>
+        <a:xfrm>
+          <a:off x="0" y="0"/>
+          <a:ext cx="0" cy="0"/>
+          <a:chOff x="0" y="0"/>
+          <a:chExt cx="0" cy="0"/>
+        </a:xfrm>
+      </p:grpSpPr>
+      <p:sp>
+        <p:nvSpPr>
+          <p:cNvPr id="2" name="Marcador de Posição da Imagem do Diapositivo 1">
+            <a:extLst>
+              <a:ext uri="{FF2B5EF4-FFF2-40B4-BE49-F238E27FC236}">
+                <a16:creationId xmlns:a16="http://schemas.microsoft.com/office/drawing/2014/main" id="{26EC3593-DDAF-B630-4896-C34FE4E31EC6}"/>
+              </a:ext>
+            </a:extLst>
+          </p:cNvPr>
+          <p:cNvSpPr>
+            <a:spLocks noGrp="1" noRot="1" noChangeAspect="1"/>
+          </p:cNvSpPr>
+          <p:nvPr>
+            <p:ph type="sldImg"/>
+          </p:nvPr>
+        </p:nvSpPr>
+        <p:spPr>
+          <a:xfrm>
+            <a:off x="1371600" y="1143000"/>
+            <a:ext cx="4114800" cy="3086100"/>
+          </a:xfrm>
+        </p:spPr>
+      </p:sp>
+      <p:sp>
+        <p:nvSpPr>
+          <p:cNvPr id="3" name="Marcador de Posição de Notas 2">
+            <a:extLst>
+              <a:ext uri="{FF2B5EF4-FFF2-40B4-BE49-F238E27FC236}">
+                <a16:creationId xmlns:a16="http://schemas.microsoft.com/office/drawing/2014/main" id="{1B470747-144A-2346-6AA6-89B844E0CBC7}"/>
+              </a:ext>
+            </a:extLst>
+          </p:cNvPr>
+          <p:cNvSpPr>
+            <a:spLocks noGrp="1"/>
+          </p:cNvSpPr>
+          <p:nvPr>
+            <p:ph type="body" idx="1"/>
+          </p:nvPr>
+        </p:nvSpPr>
+        <p:spPr/>
+        <p:txBody>
+          <a:bodyPr/>
+          <a:lstStyle/>
+          <a:p>
+            <a:endParaRPr lang="pt-PT" dirty="0"/>
+          </a:p>
+        </p:txBody>
+      </p:sp>
+      <p:sp>
+        <p:nvSpPr>
+          <p:cNvPr id="4" name="Marcador de Posição do Número do Diapositivo 3">
+            <a:extLst>
+              <a:ext uri="{FF2B5EF4-FFF2-40B4-BE49-F238E27FC236}">
+                <a16:creationId xmlns:a16="http://schemas.microsoft.com/office/drawing/2014/main" id="{21261B07-F878-5FC5-3FA0-10C7D8C624EC}"/>
+              </a:ext>
+            </a:extLst>
+          </p:cNvPr>
+          <p:cNvSpPr>
+            <a:spLocks noGrp="1"/>
+          </p:cNvSpPr>
+          <p:nvPr>
+            <p:ph type="sldNum" sz="quarter" idx="5"/>
+          </p:nvPr>
+        </p:nvSpPr>
+        <p:spPr/>
+        <p:txBody>
+          <a:bodyPr/>
+          <a:lstStyle/>
+          <a:p>
+            <a:fld id="{CABF9CC0-989A-4F43-8280-58B218C542C2}" type="slidenum">
+              <a:rPr lang="pt-PT" smtClean="0"/>
+              <a:t>5</a:t>
+            </a:fld>
+            <a:endParaRPr lang="pt-PT"/>
+          </a:p>
+        </p:txBody>
+      </p:sp>
+    </p:spTree>
+    <p:extLst>
+      <p:ext uri="{BB962C8B-B14F-4D97-AF65-F5344CB8AC3E}">
+        <p14:creationId xmlns:p14="http://schemas.microsoft.com/office/powerpoint/2010/main" val="186167993"/>
+      </p:ext>
+    </p:extLst>
+  </p:cSld>
+  <p:clrMapOvr>
+    <a:masterClrMapping/>
+  </p:clrMapOvr>
+</p:notes>
+</file>
+
 <file path=ppt/slideLayouts/slideLayout1.xml><?xml version="1.0" encoding="utf-8"?>
 <p:sldLayout xmlns:a="http://schemas.openxmlformats.org/drawingml/2006/main" xmlns:r="http://schemas.openxmlformats.org/officeDocument/2006/relationships" xmlns:p="http://schemas.openxmlformats.org/presentationml/2006/main" type="title" preserve="1">
   <p:cSld name="Diapositivo de Título">
@@ -6905,7 +7020,7 @@
           <a:p>
             <a:fld id="{FF3E7115-E5A5-49CB-9497-9E6CDBEED4A9}" type="datetimeFigureOut">
               <a:rPr lang="pt-PT" smtClean="0"/>
-              <a:t>07/07/2025</a:t>
+              <a:t>16/07/2025</a:t>
             </a:fld>
             <a:endParaRPr lang="pt-PT"/>
           </a:p>
@@ -7075,7 +7190,7 @@
           <a:p>
             <a:fld id="{FF3E7115-E5A5-49CB-9497-9E6CDBEED4A9}" type="datetimeFigureOut">
               <a:rPr lang="pt-PT" smtClean="0"/>
-              <a:t>07/07/2025</a:t>
+              <a:t>16/07/2025</a:t>
             </a:fld>
             <a:endParaRPr lang="pt-PT"/>
           </a:p>
@@ -7255,7 +7370,7 @@
           <a:p>
             <a:fld id="{FF3E7115-E5A5-49CB-9497-9E6CDBEED4A9}" type="datetimeFigureOut">
               <a:rPr lang="pt-PT" smtClean="0"/>
-              <a:t>07/07/2025</a:t>
+              <a:t>16/07/2025</a:t>
             </a:fld>
             <a:endParaRPr lang="pt-PT"/>
           </a:p>
@@ -7425,7 +7540,7 @@
           <a:p>
             <a:fld id="{FF3E7115-E5A5-49CB-9497-9E6CDBEED4A9}" type="datetimeFigureOut">
               <a:rPr lang="pt-PT" smtClean="0"/>
-              <a:t>07/07/2025</a:t>
+              <a:t>16/07/2025</a:t>
             </a:fld>
             <a:endParaRPr lang="pt-PT"/>
           </a:p>
@@ -7671,7 +7786,7 @@
           <a:p>
             <a:fld id="{FF3E7115-E5A5-49CB-9497-9E6CDBEED4A9}" type="datetimeFigureOut">
               <a:rPr lang="pt-PT" smtClean="0"/>
-              <a:t>07/07/2025</a:t>
+              <a:t>16/07/2025</a:t>
             </a:fld>
             <a:endParaRPr lang="pt-PT"/>
           </a:p>
@@ -7903,7 +8018,7 @@
           <a:p>
             <a:fld id="{FF3E7115-E5A5-49CB-9497-9E6CDBEED4A9}" type="datetimeFigureOut">
               <a:rPr lang="pt-PT" smtClean="0"/>
-              <a:t>07/07/2025</a:t>
+              <a:t>16/07/2025</a:t>
             </a:fld>
             <a:endParaRPr lang="pt-PT"/>
           </a:p>
@@ -8270,7 +8385,7 @@
           <a:p>
             <a:fld id="{FF3E7115-E5A5-49CB-9497-9E6CDBEED4A9}" type="datetimeFigureOut">
               <a:rPr lang="pt-PT" smtClean="0"/>
-              <a:t>07/07/2025</a:t>
+              <a:t>16/07/2025</a:t>
             </a:fld>
             <a:endParaRPr lang="pt-PT"/>
           </a:p>
@@ -8388,7 +8503,7 @@
           <a:p>
             <a:fld id="{FF3E7115-E5A5-49CB-9497-9E6CDBEED4A9}" type="datetimeFigureOut">
               <a:rPr lang="pt-PT" smtClean="0"/>
-              <a:t>07/07/2025</a:t>
+              <a:t>16/07/2025</a:t>
             </a:fld>
             <a:endParaRPr lang="pt-PT"/>
           </a:p>
@@ -8483,7 +8598,7 @@
           <a:p>
             <a:fld id="{FF3E7115-E5A5-49CB-9497-9E6CDBEED4A9}" type="datetimeFigureOut">
               <a:rPr lang="pt-PT" smtClean="0"/>
-              <a:t>07/07/2025</a:t>
+              <a:t>16/07/2025</a:t>
             </a:fld>
             <a:endParaRPr lang="pt-PT"/>
           </a:p>
@@ -8760,7 +8875,7 @@
           <a:p>
             <a:fld id="{FF3E7115-E5A5-49CB-9497-9E6CDBEED4A9}" type="datetimeFigureOut">
               <a:rPr lang="pt-PT" smtClean="0"/>
-              <a:t>07/07/2025</a:t>
+              <a:t>16/07/2025</a:t>
             </a:fld>
             <a:endParaRPr lang="pt-PT"/>
           </a:p>
@@ -9017,7 +9132,7 @@
           <a:p>
             <a:fld id="{FF3E7115-E5A5-49CB-9497-9E6CDBEED4A9}" type="datetimeFigureOut">
               <a:rPr lang="pt-PT" smtClean="0"/>
-              <a:t>07/07/2025</a:t>
+              <a:t>16/07/2025</a:t>
             </a:fld>
             <a:endParaRPr lang="pt-PT"/>
           </a:p>
@@ -9230,7 +9345,7 @@
           <a:p>
             <a:fld id="{FF3E7115-E5A5-49CB-9497-9E6CDBEED4A9}" type="datetimeFigureOut">
               <a:rPr lang="pt-PT" smtClean="0"/>
-              <a:t>07/07/2025</a:t>
+              <a:t>16/07/2025</a:t>
             </a:fld>
             <a:endParaRPr lang="pt-PT"/>
           </a:p>
@@ -15805,7 +15920,7 @@
         </p:nvSpPr>
         <p:spPr>
           <a:xfrm rot="21174172">
-            <a:off x="-964532" y="16857007"/>
+            <a:off x="1284434" y="10611940"/>
             <a:ext cx="5939679" cy="746808"/>
           </a:xfrm>
           <a:prstGeom prst="rect">
@@ -16951,6 +17066,2301 @@
 </file>
 
 <file path=ppt/slides/slide5.xml><?xml version="1.0" encoding="utf-8"?>
+<p:sld xmlns:a="http://schemas.openxmlformats.org/drawingml/2006/main" xmlns:r="http://schemas.openxmlformats.org/officeDocument/2006/relationships" xmlns:p="http://schemas.openxmlformats.org/presentationml/2006/main">
+  <p:cSld>
+    <p:spTree>
+      <p:nvGrpSpPr>
+        <p:cNvPr id="1" name="">
+          <a:extLst>
+            <a:ext uri="{FF2B5EF4-FFF2-40B4-BE49-F238E27FC236}">
+              <a16:creationId xmlns:a16="http://schemas.microsoft.com/office/drawing/2014/main" id="{3ADD79C5-5E6B-38E6-2298-F4122E429F7E}"/>
+            </a:ext>
+          </a:extLst>
+        </p:cNvPr>
+        <p:cNvGrpSpPr/>
+        <p:nvPr/>
+      </p:nvGrpSpPr>
+      <p:grpSpPr>
+        <a:xfrm>
+          <a:off x="0" y="0"/>
+          <a:ext cx="0" cy="0"/>
+          <a:chOff x="0" y="0"/>
+          <a:chExt cx="0" cy="0"/>
+        </a:xfrm>
+      </p:grpSpPr>
+      <p:grpSp>
+        <p:nvGrpSpPr>
+          <p:cNvPr id="16" name="Agrupar 15">
+            <a:extLst>
+              <a:ext uri="{FF2B5EF4-FFF2-40B4-BE49-F238E27FC236}">
+                <a16:creationId xmlns:a16="http://schemas.microsoft.com/office/drawing/2014/main" id="{62C61438-593D-376A-A9A9-3B9274A4AB0D}"/>
+              </a:ext>
+            </a:extLst>
+          </p:cNvPr>
+          <p:cNvGrpSpPr>
+            <a:grpSpLocks noChangeAspect="1"/>
+          </p:cNvGrpSpPr>
+          <p:nvPr/>
+        </p:nvGrpSpPr>
+        <p:grpSpPr>
+          <a:xfrm>
+            <a:off x="980010" y="4001614"/>
+            <a:ext cx="2588579" cy="1871996"/>
+            <a:chOff x="1330476" y="6556362"/>
+            <a:chExt cx="3939831" cy="2849181"/>
+          </a:xfrm>
+        </p:grpSpPr>
+        <p:pic>
+          <p:nvPicPr>
+            <p:cNvPr id="40" name="Picture 10">
+              <a:extLst>
+                <a:ext uri="{FF2B5EF4-FFF2-40B4-BE49-F238E27FC236}">
+                  <a16:creationId xmlns:a16="http://schemas.microsoft.com/office/drawing/2014/main" id="{1BE9FD7A-A49F-77B7-6341-D980B42D24F4}"/>
+                </a:ext>
+              </a:extLst>
+            </p:cNvPr>
+            <p:cNvPicPr>
+              <a:picLocks noChangeAspect="1" noChangeArrowheads="1"/>
+            </p:cNvPicPr>
+            <p:nvPr/>
+          </p:nvPicPr>
+          <p:blipFill>
+            <a:blip r:embed="rId3">
+              <a:extLst>
+                <a:ext uri="{28A0092B-C50C-407E-A947-70E740481C1C}">
+                  <a14:useLocalDpi xmlns:a14="http://schemas.microsoft.com/office/drawing/2010/main" val="0"/>
+                </a:ext>
+              </a:extLst>
+            </a:blip>
+            <a:srcRect/>
+            <a:stretch>
+              <a:fillRect/>
+            </a:stretch>
+          </p:blipFill>
+          <p:spPr bwMode="auto">
+            <a:xfrm>
+              <a:off x="1670422" y="7584334"/>
+              <a:ext cx="3259941" cy="839434"/>
+            </a:xfrm>
+            <a:prstGeom prst="rect">
+              <a:avLst/>
+            </a:prstGeom>
+            <a:noFill/>
+            <a:extLst>
+              <a:ext uri="{909E8E84-426E-40DD-AFC4-6F175D3DCCD1}">
+                <a14:hiddenFill xmlns:a14="http://schemas.microsoft.com/office/drawing/2010/main">
+                  <a:solidFill>
+                    <a:srgbClr val="FFFFFF"/>
+                  </a:solidFill>
+                </a14:hiddenFill>
+              </a:ext>
+            </a:extLst>
+          </p:spPr>
+        </p:pic>
+        <p:pic>
+          <p:nvPicPr>
+            <p:cNvPr id="41" name="Picture 20" descr="Kotlin Logo PNG Transparent &amp; SVG Vector - Freebie Supply">
+              <a:extLst>
+                <a:ext uri="{FF2B5EF4-FFF2-40B4-BE49-F238E27FC236}">
+                  <a16:creationId xmlns:a16="http://schemas.microsoft.com/office/drawing/2014/main" id="{85267AF5-1ADA-F033-006F-EB995CE30BC9}"/>
+                </a:ext>
+              </a:extLst>
+            </p:cNvPr>
+            <p:cNvPicPr>
+              <a:picLocks noChangeAspect="1" noChangeArrowheads="1"/>
+            </p:cNvPicPr>
+            <p:nvPr/>
+          </p:nvPicPr>
+          <p:blipFill>
+            <a:blip r:embed="rId4">
+              <a:extLst>
+                <a:ext uri="{28A0092B-C50C-407E-A947-70E740481C1C}">
+                  <a14:useLocalDpi xmlns:a14="http://schemas.microsoft.com/office/drawing/2010/main" val="0"/>
+                </a:ext>
+              </a:extLst>
+            </a:blip>
+            <a:srcRect/>
+            <a:stretch>
+              <a:fillRect/>
+            </a:stretch>
+          </p:blipFill>
+          <p:spPr bwMode="auto">
+            <a:xfrm>
+              <a:off x="2399778" y="7919019"/>
+              <a:ext cx="1800371" cy="1350277"/>
+            </a:xfrm>
+            <a:prstGeom prst="rect">
+              <a:avLst/>
+            </a:prstGeom>
+            <a:noFill/>
+            <a:extLst>
+              <a:ext uri="{909E8E84-426E-40DD-AFC4-6F175D3DCCD1}">
+                <a14:hiddenFill xmlns:a14="http://schemas.microsoft.com/office/drawing/2010/main">
+                  <a:solidFill>
+                    <a:srgbClr val="FFFFFF"/>
+                  </a:solidFill>
+                </a14:hiddenFill>
+              </a:ext>
+            </a:extLst>
+          </p:spPr>
+        </p:pic>
+        <p:pic>
+          <p:nvPicPr>
+            <p:cNvPr id="42" name="Picture 26" descr="Understanding JSON Web Tokens (JWT) for Secure Information Sharing | by  Safdar Ali | Medium">
+              <a:extLst>
+                <a:ext uri="{FF2B5EF4-FFF2-40B4-BE49-F238E27FC236}">
+                  <a16:creationId xmlns:a16="http://schemas.microsoft.com/office/drawing/2014/main" id="{F968120E-057E-ADEA-0DD0-6B0DCA293664}"/>
+                </a:ext>
+              </a:extLst>
+            </p:cNvPr>
+            <p:cNvPicPr>
+              <a:picLocks noChangeAspect="1" noChangeArrowheads="1"/>
+            </p:cNvPicPr>
+            <p:nvPr/>
+          </p:nvPicPr>
+          <p:blipFill>
+            <a:blip r:embed="rId5">
+              <a:extLst>
+                <a:ext uri="{28A0092B-C50C-407E-A947-70E740481C1C}">
+                  <a14:useLocalDpi xmlns:a14="http://schemas.microsoft.com/office/drawing/2010/main" val="0"/>
+                </a:ext>
+              </a:extLst>
+            </a:blip>
+            <a:srcRect/>
+            <a:stretch>
+              <a:fillRect/>
+            </a:stretch>
+          </p:blipFill>
+          <p:spPr bwMode="auto">
+            <a:xfrm>
+              <a:off x="2506635" y="8738789"/>
+              <a:ext cx="1587506" cy="666754"/>
+            </a:xfrm>
+            <a:prstGeom prst="rect">
+              <a:avLst/>
+            </a:prstGeom>
+            <a:noFill/>
+            <a:extLst>
+              <a:ext uri="{909E8E84-426E-40DD-AFC4-6F175D3DCCD1}">
+                <a14:hiddenFill xmlns:a14="http://schemas.microsoft.com/office/drawing/2010/main">
+                  <a:solidFill>
+                    <a:srgbClr val="FFFFFF"/>
+                  </a:solidFill>
+                </a14:hiddenFill>
+              </a:ext>
+            </a:extLst>
+          </p:spPr>
+        </p:pic>
+        <p:sp>
+          <p:nvSpPr>
+            <p:cNvPr id="43" name="Retângulo: Cantos Arredondados 42">
+              <a:extLst>
+                <a:ext uri="{FF2B5EF4-FFF2-40B4-BE49-F238E27FC236}">
+                  <a16:creationId xmlns:a16="http://schemas.microsoft.com/office/drawing/2014/main" id="{796105AF-192D-AF64-C87F-3A751B57A5FA}"/>
+                </a:ext>
+              </a:extLst>
+            </p:cNvPr>
+            <p:cNvSpPr>
+              <a:spLocks noChangeAspect="1"/>
+            </p:cNvSpPr>
+            <p:nvPr/>
+          </p:nvSpPr>
+          <p:spPr>
+            <a:xfrm>
+              <a:off x="1330476" y="6556362"/>
+              <a:ext cx="3939831" cy="2739602"/>
+            </a:xfrm>
+            <a:prstGeom prst="roundRect">
+              <a:avLst/>
+            </a:prstGeom>
+            <a:noFill/>
+            <a:ln>
+              <a:solidFill>
+                <a:schemeClr val="tx1"/>
+              </a:solidFill>
+            </a:ln>
+          </p:spPr>
+          <p:style>
+            <a:lnRef idx="2">
+              <a:schemeClr val="accent1">
+                <a:shade val="15000"/>
+              </a:schemeClr>
+            </a:lnRef>
+            <a:fillRef idx="1">
+              <a:schemeClr val="accent1"/>
+            </a:fillRef>
+            <a:effectRef idx="0">
+              <a:schemeClr val="accent1"/>
+            </a:effectRef>
+            <a:fontRef idx="minor">
+              <a:schemeClr val="lt1"/>
+            </a:fontRef>
+          </p:style>
+          <p:txBody>
+            <a:bodyPr rtlCol="0" anchor="ctr"/>
+            <a:lstStyle/>
+            <a:p>
+              <a:pPr algn="ctr"/>
+              <a:endParaRPr lang="pt-PT" sz="3360"/>
+            </a:p>
+          </p:txBody>
+        </p:sp>
+      </p:grpSp>
+      <p:pic>
+        <p:nvPicPr>
+          <p:cNvPr id="39" name="Picture 4" descr="Sql server Icons - Iconshock">
+            <a:extLst>
+              <a:ext uri="{FF2B5EF4-FFF2-40B4-BE49-F238E27FC236}">
+                <a16:creationId xmlns:a16="http://schemas.microsoft.com/office/drawing/2014/main" id="{39C713F1-F522-1ABC-501A-5219F0E8647D}"/>
+              </a:ext>
+            </a:extLst>
+          </p:cNvPr>
+          <p:cNvPicPr>
+            <a:picLocks noChangeAspect="1" noChangeArrowheads="1"/>
+          </p:cNvPicPr>
+          <p:nvPr/>
+        </p:nvPicPr>
+        <p:blipFill>
+          <a:blip r:embed="rId6">
+            <a:extLst>
+              <a:ext uri="{28A0092B-C50C-407E-A947-70E740481C1C}">
+                <a14:useLocalDpi xmlns:a14="http://schemas.microsoft.com/office/drawing/2010/main" val="0"/>
+              </a:ext>
+            </a:extLst>
+          </a:blip>
+          <a:srcRect/>
+          <a:stretch>
+            <a:fillRect/>
+          </a:stretch>
+        </p:blipFill>
+        <p:spPr bwMode="auto">
+          <a:xfrm>
+            <a:off x="1758065" y="7000791"/>
+            <a:ext cx="1032469" cy="1032469"/>
+          </a:xfrm>
+          <a:prstGeom prst="rect">
+            <a:avLst/>
+          </a:prstGeom>
+          <a:noFill/>
+          <a:extLst>
+            <a:ext uri="{909E8E84-426E-40DD-AFC4-6F175D3DCCD1}">
+              <a14:hiddenFill xmlns:a14="http://schemas.microsoft.com/office/drawing/2010/main">
+                <a:solidFill>
+                  <a:srgbClr val="FFFFFF"/>
+                </a:solidFill>
+              </a14:hiddenFill>
+            </a:ext>
+          </a:extLst>
+        </p:spPr>
+      </p:pic>
+      <p:sp>
+        <p:nvSpPr>
+          <p:cNvPr id="45" name="Retângulo: Cantos Arredondados 44">
+            <a:extLst>
+              <a:ext uri="{FF2B5EF4-FFF2-40B4-BE49-F238E27FC236}">
+                <a16:creationId xmlns:a16="http://schemas.microsoft.com/office/drawing/2014/main" id="{4875DFCA-C994-F855-374C-0F902C4AEBAC}"/>
+              </a:ext>
+            </a:extLst>
+          </p:cNvPr>
+          <p:cNvSpPr>
+            <a:spLocks noChangeAspect="1"/>
+          </p:cNvSpPr>
+          <p:nvPr/>
+        </p:nvSpPr>
+        <p:spPr>
+          <a:xfrm>
+            <a:off x="1236866" y="6440158"/>
+            <a:ext cx="2074867" cy="1744274"/>
+          </a:xfrm>
+          <a:prstGeom prst="roundRect">
+            <a:avLst>
+              <a:gd name="adj" fmla="val 13755"/>
+            </a:avLst>
+          </a:prstGeom>
+          <a:noFill/>
+          <a:ln>
+            <a:solidFill>
+              <a:schemeClr val="tx1"/>
+            </a:solidFill>
+          </a:ln>
+        </p:spPr>
+        <p:style>
+          <a:lnRef idx="2">
+            <a:schemeClr val="accent1">
+              <a:shade val="15000"/>
+            </a:schemeClr>
+          </a:lnRef>
+          <a:fillRef idx="1">
+            <a:schemeClr val="accent1"/>
+          </a:fillRef>
+          <a:effectRef idx="0">
+            <a:schemeClr val="accent1"/>
+          </a:effectRef>
+          <a:fontRef idx="minor">
+            <a:schemeClr val="lt1"/>
+          </a:fontRef>
+        </p:style>
+        <p:txBody>
+          <a:bodyPr rtlCol="0" anchor="ctr"/>
+          <a:lstStyle/>
+          <a:p>
+            <a:pPr algn="ctr"/>
+            <a:endParaRPr lang="pt-PT" sz="3360"/>
+          </a:p>
+        </p:txBody>
+      </p:sp>
+      <p:pic>
+        <p:nvPicPr>
+          <p:cNvPr id="49" name="Picture 42" descr="Cloud Icon PNGs for Free Download">
+            <a:extLst>
+              <a:ext uri="{FF2B5EF4-FFF2-40B4-BE49-F238E27FC236}">
+                <a16:creationId xmlns:a16="http://schemas.microsoft.com/office/drawing/2014/main" id="{3E7CC0FA-1E34-FCFF-E591-C23D6AD2E498}"/>
+              </a:ext>
+            </a:extLst>
+          </p:cNvPr>
+          <p:cNvPicPr>
+            <a:picLocks noChangeAspect="1" noChangeArrowheads="1"/>
+          </p:cNvPicPr>
+          <p:nvPr/>
+        </p:nvPicPr>
+        <p:blipFill>
+          <a:blip r:embed="rId7">
+            <a:extLst>
+              <a:ext uri="{28A0092B-C50C-407E-A947-70E740481C1C}">
+                <a14:useLocalDpi xmlns:a14="http://schemas.microsoft.com/office/drawing/2010/main" val="0"/>
+              </a:ext>
+            </a:extLst>
+          </a:blip>
+          <a:srcRect/>
+          <a:stretch>
+            <a:fillRect/>
+          </a:stretch>
+        </p:blipFill>
+        <p:spPr bwMode="auto">
+          <a:xfrm>
+            <a:off x="4394199" y="4226127"/>
+            <a:ext cx="2406291" cy="1336828"/>
+          </a:xfrm>
+          <a:prstGeom prst="rect">
+            <a:avLst/>
+          </a:prstGeom>
+          <a:noFill/>
+          <a:extLst>
+            <a:ext uri="{909E8E84-426E-40DD-AFC4-6F175D3DCCD1}">
+              <a14:hiddenFill xmlns:a14="http://schemas.microsoft.com/office/drawing/2010/main">
+                <a:solidFill>
+                  <a:srgbClr val="FFFFFF"/>
+                </a:solidFill>
+              </a14:hiddenFill>
+            </a:ext>
+          </a:extLst>
+        </p:spPr>
+      </p:pic>
+      <p:sp>
+        <p:nvSpPr>
+          <p:cNvPr id="51" name="Retângulo 50">
+            <a:extLst>
+              <a:ext uri="{FF2B5EF4-FFF2-40B4-BE49-F238E27FC236}">
+                <a16:creationId xmlns:a16="http://schemas.microsoft.com/office/drawing/2014/main" id="{3E2E7B4A-DDA1-5CBD-E555-0418F3EB33C4}"/>
+              </a:ext>
+            </a:extLst>
+          </p:cNvPr>
+          <p:cNvSpPr>
+            <a:spLocks noChangeAspect="1"/>
+          </p:cNvSpPr>
+          <p:nvPr/>
+        </p:nvSpPr>
+        <p:spPr>
+          <a:xfrm rot="21174172">
+            <a:off x="-964532" y="16857007"/>
+            <a:ext cx="5939679" cy="746808"/>
+          </a:xfrm>
+          <a:prstGeom prst="rect">
+            <a:avLst/>
+          </a:prstGeom>
+          <a:noFill/>
+        </p:spPr>
+        <p:txBody>
+          <a:bodyPr wrap="square" lIns="170688" tIns="85344" rIns="170688" bIns="85344">
+            <a:spAutoFit/>
+          </a:bodyPr>
+          <a:lstStyle/>
+          <a:p>
+            <a:pPr algn="ctr"/>
+            <a:r>
+              <a:rPr lang="pt-PT" sz="3733" dirty="0">
+                <a:ln w="0"/>
+                <a:effectLst>
+                  <a:outerShdw blurRad="38100" dist="19050" dir="2700000" algn="tl" rotWithShape="0">
+                    <a:schemeClr val="dk1">
+                      <a:alpha val="40000"/>
+                    </a:schemeClr>
+                  </a:outerShdw>
+                </a:effectLst>
+              </a:rPr>
+              <a:t>Web App</a:t>
+            </a:r>
+          </a:p>
+        </p:txBody>
+      </p:sp>
+      <p:cxnSp>
+        <p:nvCxnSpPr>
+          <p:cNvPr id="25" name="Conexão reta unidirecional 24">
+            <a:extLst>
+              <a:ext uri="{FF2B5EF4-FFF2-40B4-BE49-F238E27FC236}">
+                <a16:creationId xmlns:a16="http://schemas.microsoft.com/office/drawing/2014/main" id="{71172209-C42F-2986-E41A-4DF65292C1CA}"/>
+              </a:ext>
+            </a:extLst>
+          </p:cNvPr>
+          <p:cNvCxnSpPr>
+            <a:cxnSpLocks/>
+            <a:stCxn id="45" idx="0"/>
+            <a:endCxn id="43" idx="2"/>
+          </p:cNvCxnSpPr>
+          <p:nvPr/>
+        </p:nvCxnSpPr>
+        <p:spPr>
+          <a:xfrm flipV="1">
+            <a:off x="2274300" y="5801613"/>
+            <a:ext cx="0" cy="638545"/>
+          </a:xfrm>
+          <a:prstGeom prst="straightConnector1">
+            <a:avLst/>
+          </a:prstGeom>
+          <a:ln>
+            <a:headEnd type="triangle"/>
+            <a:tailEnd type="triangle"/>
+          </a:ln>
+        </p:spPr>
+        <p:style>
+          <a:lnRef idx="2">
+            <a:schemeClr val="accent1"/>
+          </a:lnRef>
+          <a:fillRef idx="0">
+            <a:schemeClr val="accent1"/>
+          </a:fillRef>
+          <a:effectRef idx="1">
+            <a:schemeClr val="accent1"/>
+          </a:effectRef>
+          <a:fontRef idx="minor">
+            <a:schemeClr val="tx1"/>
+          </a:fontRef>
+        </p:style>
+      </p:cxnSp>
+      <p:cxnSp>
+        <p:nvCxnSpPr>
+          <p:cNvPr id="35" name="Conexão reta unidirecional 34">
+            <a:extLst>
+              <a:ext uri="{FF2B5EF4-FFF2-40B4-BE49-F238E27FC236}">
+                <a16:creationId xmlns:a16="http://schemas.microsoft.com/office/drawing/2014/main" id="{AA2BF83B-D110-9D13-17A1-E66AB6192E20}"/>
+              </a:ext>
+            </a:extLst>
+          </p:cNvPr>
+          <p:cNvCxnSpPr>
+            <a:cxnSpLocks/>
+            <a:stCxn id="43" idx="3"/>
+            <a:endCxn id="49" idx="1"/>
+          </p:cNvCxnSpPr>
+          <p:nvPr/>
+        </p:nvCxnSpPr>
+        <p:spPr>
+          <a:xfrm flipV="1">
+            <a:off x="3568589" y="4894541"/>
+            <a:ext cx="825610" cy="7073"/>
+          </a:xfrm>
+          <a:prstGeom prst="straightConnector1">
+            <a:avLst/>
+          </a:prstGeom>
+          <a:ln>
+            <a:headEnd type="triangle"/>
+            <a:tailEnd type="triangle"/>
+          </a:ln>
+        </p:spPr>
+        <p:style>
+          <a:lnRef idx="2">
+            <a:schemeClr val="accent1"/>
+          </a:lnRef>
+          <a:fillRef idx="0">
+            <a:schemeClr val="accent1"/>
+          </a:fillRef>
+          <a:effectRef idx="1">
+            <a:schemeClr val="accent1"/>
+          </a:effectRef>
+          <a:fontRef idx="minor">
+            <a:schemeClr val="tx1"/>
+          </a:fontRef>
+        </p:style>
+      </p:cxnSp>
+      <p:pic>
+        <p:nvPicPr>
+          <p:cNvPr id="56" name="Picture 4" descr="Free Sync Icon - Free Download Design &amp; Development Icons | IconScout">
+            <a:extLst>
+              <a:ext uri="{FF2B5EF4-FFF2-40B4-BE49-F238E27FC236}">
+                <a16:creationId xmlns:a16="http://schemas.microsoft.com/office/drawing/2014/main" id="{7B045783-E90E-65C5-15E5-28D011690419}"/>
+              </a:ext>
+            </a:extLst>
+          </p:cNvPr>
+          <p:cNvPicPr>
+            <a:picLocks noChangeAspect="1" noChangeArrowheads="1"/>
+          </p:cNvPicPr>
+          <p:nvPr/>
+        </p:nvPicPr>
+        <p:blipFill>
+          <a:blip r:embed="rId8">
+            <a:extLst>
+              <a:ext uri="{28A0092B-C50C-407E-A947-70E740481C1C}">
+                <a14:useLocalDpi xmlns:a14="http://schemas.microsoft.com/office/drawing/2010/main" val="0"/>
+              </a:ext>
+            </a:extLst>
+          </a:blip>
+          <a:srcRect/>
+          <a:stretch>
+            <a:fillRect/>
+          </a:stretch>
+        </p:blipFill>
+        <p:spPr bwMode="auto">
+          <a:xfrm>
+            <a:off x="9511130" y="3600084"/>
+            <a:ext cx="533400" cy="533400"/>
+          </a:xfrm>
+          <a:prstGeom prst="rect">
+            <a:avLst/>
+          </a:prstGeom>
+          <a:noFill/>
+          <a:extLst>
+            <a:ext uri="{909E8E84-426E-40DD-AFC4-6F175D3DCCD1}">
+              <a14:hiddenFill xmlns:a14="http://schemas.microsoft.com/office/drawing/2010/main">
+                <a:solidFill>
+                  <a:srgbClr val="FFFFFF"/>
+                </a:solidFill>
+              </a14:hiddenFill>
+            </a:ext>
+          </a:extLst>
+        </p:spPr>
+      </p:pic>
+      <p:grpSp>
+        <p:nvGrpSpPr>
+          <p:cNvPr id="77" name="Agrupar 76">
+            <a:extLst>
+              <a:ext uri="{FF2B5EF4-FFF2-40B4-BE49-F238E27FC236}">
+                <a16:creationId xmlns:a16="http://schemas.microsoft.com/office/drawing/2014/main" id="{C7FF85D9-E498-5CDE-F772-D1E067022F02}"/>
+              </a:ext>
+            </a:extLst>
+          </p:cNvPr>
+          <p:cNvGrpSpPr/>
+          <p:nvPr/>
+        </p:nvGrpSpPr>
+        <p:grpSpPr>
+          <a:xfrm>
+            <a:off x="7478570" y="2010283"/>
+            <a:ext cx="2132051" cy="1449376"/>
+            <a:chOff x="8587622" y="4873842"/>
+            <a:chExt cx="2132051" cy="1449376"/>
+          </a:xfrm>
+        </p:grpSpPr>
+        <p:sp>
+          <p:nvSpPr>
+            <p:cNvPr id="50" name="Retângulo: Cantos Arredondados 49">
+              <a:extLst>
+                <a:ext uri="{FF2B5EF4-FFF2-40B4-BE49-F238E27FC236}">
+                  <a16:creationId xmlns:a16="http://schemas.microsoft.com/office/drawing/2014/main" id="{58FA809B-D7C9-5D4A-057F-B356CBDD3933}"/>
+                </a:ext>
+              </a:extLst>
+            </p:cNvPr>
+            <p:cNvSpPr>
+              <a:spLocks noChangeAspect="1"/>
+            </p:cNvSpPr>
+            <p:nvPr/>
+          </p:nvSpPr>
+          <p:spPr>
+            <a:xfrm>
+              <a:off x="8587623" y="4876960"/>
+              <a:ext cx="2132049" cy="1446258"/>
+            </a:xfrm>
+            <a:prstGeom prst="roundRect">
+              <a:avLst/>
+            </a:prstGeom>
+            <a:noFill/>
+            <a:ln>
+              <a:solidFill>
+                <a:schemeClr val="tx1"/>
+              </a:solidFill>
+            </a:ln>
+          </p:spPr>
+          <p:style>
+            <a:lnRef idx="2">
+              <a:schemeClr val="accent1">
+                <a:shade val="15000"/>
+              </a:schemeClr>
+            </a:lnRef>
+            <a:fillRef idx="1">
+              <a:schemeClr val="accent1"/>
+            </a:fillRef>
+            <a:effectRef idx="0">
+              <a:schemeClr val="accent1"/>
+            </a:effectRef>
+            <a:fontRef idx="minor">
+              <a:schemeClr val="lt1"/>
+            </a:fontRef>
+          </p:style>
+          <p:txBody>
+            <a:bodyPr rtlCol="0" anchor="ctr"/>
+            <a:lstStyle/>
+            <a:p>
+              <a:pPr algn="ctr"/>
+              <a:endParaRPr lang="pt-PT" sz="3360"/>
+            </a:p>
+          </p:txBody>
+        </p:sp>
+        <p:pic>
+          <p:nvPicPr>
+            <p:cNvPr id="53" name="Picture 8" descr="Brand">
+              <a:extLst>
+                <a:ext uri="{FF2B5EF4-FFF2-40B4-BE49-F238E27FC236}">
+                  <a16:creationId xmlns:a16="http://schemas.microsoft.com/office/drawing/2014/main" id="{0C0433AD-C9B0-F7B3-CCD4-3B0C124CA2F2}"/>
+                </a:ext>
+              </a:extLst>
+            </p:cNvPr>
+            <p:cNvPicPr>
+              <a:picLocks noChangeAspect="1" noChangeArrowheads="1"/>
+            </p:cNvPicPr>
+            <p:nvPr/>
+          </p:nvPicPr>
+          <p:blipFill>
+            <a:blip r:embed="rId9">
+              <a:extLst>
+                <a:ext uri="{28A0092B-C50C-407E-A947-70E740481C1C}">
+                  <a14:useLocalDpi xmlns:a14="http://schemas.microsoft.com/office/drawing/2010/main" val="0"/>
+                </a:ext>
+              </a:extLst>
+            </a:blip>
+            <a:srcRect/>
+            <a:stretch>
+              <a:fillRect/>
+            </a:stretch>
+          </p:blipFill>
+          <p:spPr bwMode="auto">
+            <a:xfrm>
+              <a:off x="9900865" y="5345661"/>
+              <a:ext cx="571589" cy="831802"/>
+            </a:xfrm>
+            <a:prstGeom prst="rect">
+              <a:avLst/>
+            </a:prstGeom>
+            <a:noFill/>
+            <a:extLst>
+              <a:ext uri="{909E8E84-426E-40DD-AFC4-6F175D3DCCD1}">
+                <a14:hiddenFill xmlns:a14="http://schemas.microsoft.com/office/drawing/2010/main">
+                  <a:solidFill>
+                    <a:srgbClr val="FFFFFF"/>
+                  </a:solidFill>
+                </a14:hiddenFill>
+              </a:ext>
+            </a:extLst>
+          </p:spPr>
+        </p:pic>
+        <p:pic>
+          <p:nvPicPr>
+            <p:cNvPr id="63" name="Picture 4" descr="Windows Logo PNGs for Free Download">
+              <a:extLst>
+                <a:ext uri="{FF2B5EF4-FFF2-40B4-BE49-F238E27FC236}">
+                  <a16:creationId xmlns:a16="http://schemas.microsoft.com/office/drawing/2014/main" id="{8F911A16-FCDB-F14B-EF8D-638B2027844C}"/>
+                </a:ext>
+              </a:extLst>
+            </p:cNvPr>
+            <p:cNvPicPr>
+              <a:picLocks noChangeAspect="1" noChangeArrowheads="1"/>
+            </p:cNvPicPr>
+            <p:nvPr/>
+          </p:nvPicPr>
+          <p:blipFill>
+            <a:blip r:embed="rId10">
+              <a:extLst>
+                <a:ext uri="{28A0092B-C50C-407E-A947-70E740481C1C}">
+                  <a14:useLocalDpi xmlns:a14="http://schemas.microsoft.com/office/drawing/2010/main" val="0"/>
+                </a:ext>
+              </a:extLst>
+            </a:blip>
+            <a:srcRect/>
+            <a:stretch>
+              <a:fillRect/>
+            </a:stretch>
+          </p:blipFill>
+          <p:spPr bwMode="auto">
+            <a:xfrm>
+              <a:off x="8654310" y="5049476"/>
+              <a:ext cx="1170535" cy="1170535"/>
+            </a:xfrm>
+            <a:prstGeom prst="rect">
+              <a:avLst/>
+            </a:prstGeom>
+            <a:noFill/>
+            <a:extLst>
+              <a:ext uri="{909E8E84-426E-40DD-AFC4-6F175D3DCCD1}">
+                <a14:hiddenFill xmlns:a14="http://schemas.microsoft.com/office/drawing/2010/main">
+                  <a:solidFill>
+                    <a:srgbClr val="FFFFFF"/>
+                  </a:solidFill>
+                </a14:hiddenFill>
+              </a:ext>
+            </a:extLst>
+          </p:spPr>
+        </p:pic>
+        <p:sp>
+          <p:nvSpPr>
+            <p:cNvPr id="57" name="CaixaDeTexto 56">
+              <a:extLst>
+                <a:ext uri="{FF2B5EF4-FFF2-40B4-BE49-F238E27FC236}">
+                  <a16:creationId xmlns:a16="http://schemas.microsoft.com/office/drawing/2014/main" id="{594EA650-2D4A-29AB-F1DB-694F0F92E200}"/>
+                </a:ext>
+              </a:extLst>
+            </p:cNvPr>
+            <p:cNvSpPr txBox="1"/>
+            <p:nvPr/>
+          </p:nvSpPr>
+          <p:spPr>
+            <a:xfrm>
+              <a:off x="8587622" y="4873842"/>
+              <a:ext cx="2132051" cy="369332"/>
+            </a:xfrm>
+            <a:prstGeom prst="rect">
+              <a:avLst/>
+            </a:prstGeom>
+            <a:noFill/>
+          </p:spPr>
+          <p:txBody>
+            <a:bodyPr wrap="square" rtlCol="0">
+              <a:spAutoFit/>
+            </a:bodyPr>
+            <a:lstStyle/>
+            <a:p>
+              <a:pPr algn="ctr"/>
+              <a:r>
+                <a:rPr lang="pt-PT" dirty="0"/>
+                <a:t>Desktop App</a:t>
+              </a:r>
+            </a:p>
+          </p:txBody>
+        </p:sp>
+      </p:grpSp>
+      <p:grpSp>
+        <p:nvGrpSpPr>
+          <p:cNvPr id="78" name="Agrupar 77">
+            <a:extLst>
+              <a:ext uri="{FF2B5EF4-FFF2-40B4-BE49-F238E27FC236}">
+                <a16:creationId xmlns:a16="http://schemas.microsoft.com/office/drawing/2014/main" id="{1E4FA824-2618-C225-B837-564D685C17EE}"/>
+              </a:ext>
+            </a:extLst>
+          </p:cNvPr>
+          <p:cNvGrpSpPr/>
+          <p:nvPr/>
+        </p:nvGrpSpPr>
+        <p:grpSpPr>
+          <a:xfrm>
+            <a:off x="9913599" y="2010282"/>
+            <a:ext cx="2132049" cy="1446259"/>
+            <a:chOff x="8603297" y="7086559"/>
+            <a:chExt cx="2132049" cy="1446258"/>
+          </a:xfrm>
+        </p:grpSpPr>
+        <p:pic>
+          <p:nvPicPr>
+            <p:cNvPr id="1028" name="Picture 4" descr="Database icon - Free download on Iconfinder">
+              <a:extLst>
+                <a:ext uri="{FF2B5EF4-FFF2-40B4-BE49-F238E27FC236}">
+                  <a16:creationId xmlns:a16="http://schemas.microsoft.com/office/drawing/2014/main" id="{5DCA103C-E198-05D4-BE1C-F920C72FFE58}"/>
+                </a:ext>
+              </a:extLst>
+            </p:cNvPr>
+            <p:cNvPicPr>
+              <a:picLocks noChangeAspect="1" noChangeArrowheads="1"/>
+            </p:cNvPicPr>
+            <p:nvPr/>
+          </p:nvPicPr>
+          <p:blipFill>
+            <a:blip r:embed="rId11">
+              <a:extLst>
+                <a:ext uri="{28A0092B-C50C-407E-A947-70E740481C1C}">
+                  <a14:useLocalDpi xmlns:a14="http://schemas.microsoft.com/office/drawing/2010/main" val="0"/>
+                </a:ext>
+              </a:extLst>
+            </a:blip>
+            <a:srcRect/>
+            <a:stretch>
+              <a:fillRect/>
+            </a:stretch>
+          </p:blipFill>
+          <p:spPr bwMode="auto">
+            <a:xfrm>
+              <a:off x="8953441" y="7538699"/>
+              <a:ext cx="741546" cy="741546"/>
+            </a:xfrm>
+            <a:prstGeom prst="rect">
+              <a:avLst/>
+            </a:prstGeom>
+            <a:noFill/>
+            <a:extLst>
+              <a:ext uri="{909E8E84-426E-40DD-AFC4-6F175D3DCCD1}">
+                <a14:hiddenFill xmlns:a14="http://schemas.microsoft.com/office/drawing/2010/main">
+                  <a:solidFill>
+                    <a:srgbClr val="FFFFFF"/>
+                  </a:solidFill>
+                </a14:hiddenFill>
+              </a:ext>
+            </a:extLst>
+          </p:spPr>
+        </p:pic>
+        <p:pic>
+          <p:nvPicPr>
+            <p:cNvPr id="10" name="Imagem 9">
+              <a:extLst>
+                <a:ext uri="{FF2B5EF4-FFF2-40B4-BE49-F238E27FC236}">
+                  <a16:creationId xmlns:a16="http://schemas.microsoft.com/office/drawing/2014/main" id="{D53D3909-1C4B-7D3A-F016-F72F95442156}"/>
+                </a:ext>
+              </a:extLst>
+            </p:cNvPr>
+            <p:cNvPicPr>
+              <a:picLocks noChangeAspect="1"/>
+            </p:cNvPicPr>
+            <p:nvPr/>
+          </p:nvPicPr>
+          <p:blipFill>
+            <a:blip r:embed="rId12"/>
+            <a:stretch>
+              <a:fillRect/>
+            </a:stretch>
+          </p:blipFill>
+          <p:spPr>
+            <a:xfrm>
+              <a:off x="9921674" y="7648767"/>
+              <a:ext cx="607493" cy="601242"/>
+            </a:xfrm>
+            <a:prstGeom prst="rect">
+              <a:avLst/>
+            </a:prstGeom>
+          </p:spPr>
+        </p:pic>
+        <p:sp>
+          <p:nvSpPr>
+            <p:cNvPr id="55" name="Retângulo: Cantos Arredondados 54">
+              <a:extLst>
+                <a:ext uri="{FF2B5EF4-FFF2-40B4-BE49-F238E27FC236}">
+                  <a16:creationId xmlns:a16="http://schemas.microsoft.com/office/drawing/2014/main" id="{EF7D29BA-5675-CF4F-3B9E-D797D898639D}"/>
+                </a:ext>
+              </a:extLst>
+            </p:cNvPr>
+            <p:cNvSpPr>
+              <a:spLocks noChangeAspect="1"/>
+            </p:cNvSpPr>
+            <p:nvPr/>
+          </p:nvSpPr>
+          <p:spPr>
+            <a:xfrm>
+              <a:off x="8603297" y="7086559"/>
+              <a:ext cx="2132049" cy="1446258"/>
+            </a:xfrm>
+            <a:prstGeom prst="roundRect">
+              <a:avLst/>
+            </a:prstGeom>
+            <a:noFill/>
+            <a:ln>
+              <a:solidFill>
+                <a:schemeClr val="tx1"/>
+              </a:solidFill>
+            </a:ln>
+          </p:spPr>
+          <p:style>
+            <a:lnRef idx="2">
+              <a:schemeClr val="accent1">
+                <a:shade val="15000"/>
+              </a:schemeClr>
+            </a:lnRef>
+            <a:fillRef idx="1">
+              <a:schemeClr val="accent1"/>
+            </a:fillRef>
+            <a:effectRef idx="0">
+              <a:schemeClr val="accent1"/>
+            </a:effectRef>
+            <a:fontRef idx="minor">
+              <a:schemeClr val="lt1"/>
+            </a:fontRef>
+          </p:style>
+          <p:txBody>
+            <a:bodyPr rtlCol="0" anchor="ctr"/>
+            <a:lstStyle/>
+            <a:p>
+              <a:pPr algn="ctr"/>
+              <a:endParaRPr lang="pt-PT" sz="3360"/>
+            </a:p>
+          </p:txBody>
+        </p:sp>
+        <p:sp>
+          <p:nvSpPr>
+            <p:cNvPr id="58" name="CaixaDeTexto 57">
+              <a:extLst>
+                <a:ext uri="{FF2B5EF4-FFF2-40B4-BE49-F238E27FC236}">
+                  <a16:creationId xmlns:a16="http://schemas.microsoft.com/office/drawing/2014/main" id="{B3A1C5EE-95BB-2B16-1ADD-EC1FE783BB0F}"/>
+                </a:ext>
+              </a:extLst>
+            </p:cNvPr>
+            <p:cNvSpPr txBox="1"/>
+            <p:nvPr/>
+          </p:nvSpPr>
+          <p:spPr>
+            <a:xfrm>
+              <a:off x="8603297" y="7092379"/>
+              <a:ext cx="2132049" cy="369332"/>
+            </a:xfrm>
+            <a:prstGeom prst="rect">
+              <a:avLst/>
+            </a:prstGeom>
+            <a:noFill/>
+          </p:spPr>
+          <p:txBody>
+            <a:bodyPr wrap="square" rtlCol="0">
+              <a:spAutoFit/>
+            </a:bodyPr>
+            <a:lstStyle/>
+            <a:p>
+              <a:pPr algn="ctr"/>
+              <a:r>
+                <a:rPr lang="pt-PT" dirty="0"/>
+                <a:t>Local Database</a:t>
+              </a:r>
+            </a:p>
+          </p:txBody>
+        </p:sp>
+      </p:grpSp>
+      <p:cxnSp>
+        <p:nvCxnSpPr>
+          <p:cNvPr id="60" name="Conexão reta unidirecional 59">
+            <a:extLst>
+              <a:ext uri="{FF2B5EF4-FFF2-40B4-BE49-F238E27FC236}">
+                <a16:creationId xmlns:a16="http://schemas.microsoft.com/office/drawing/2014/main" id="{ABA9D03E-1BD9-FA1A-8AE4-132F7C473FE4}"/>
+              </a:ext>
+            </a:extLst>
+          </p:cNvPr>
+          <p:cNvCxnSpPr>
+            <a:cxnSpLocks/>
+            <a:stCxn id="55" idx="1"/>
+            <a:endCxn id="50" idx="3"/>
+          </p:cNvCxnSpPr>
+          <p:nvPr/>
+        </p:nvCxnSpPr>
+        <p:spPr>
+          <a:xfrm flipH="1">
+            <a:off x="9610620" y="2733412"/>
+            <a:ext cx="302979" cy="3118"/>
+          </a:xfrm>
+          <a:prstGeom prst="straightConnector1">
+            <a:avLst/>
+          </a:prstGeom>
+          <a:ln>
+            <a:headEnd type="triangle"/>
+            <a:tailEnd type="triangle"/>
+          </a:ln>
+        </p:spPr>
+        <p:style>
+          <a:lnRef idx="2">
+            <a:schemeClr val="accent1"/>
+          </a:lnRef>
+          <a:fillRef idx="0">
+            <a:schemeClr val="accent1"/>
+          </a:fillRef>
+          <a:effectRef idx="1">
+            <a:schemeClr val="accent1"/>
+          </a:effectRef>
+          <a:fontRef idx="minor">
+            <a:schemeClr val="tx1"/>
+          </a:fontRef>
+        </p:style>
+      </p:cxnSp>
+      <p:cxnSp>
+        <p:nvCxnSpPr>
+          <p:cNvPr id="85" name="Conexão reta unidirecional 84">
+            <a:extLst>
+              <a:ext uri="{FF2B5EF4-FFF2-40B4-BE49-F238E27FC236}">
+                <a16:creationId xmlns:a16="http://schemas.microsoft.com/office/drawing/2014/main" id="{FEA7E4DA-08F6-E79E-6E62-C9FF29305C06}"/>
+              </a:ext>
+            </a:extLst>
+          </p:cNvPr>
+          <p:cNvCxnSpPr>
+            <a:cxnSpLocks/>
+            <a:stCxn id="56" idx="1"/>
+          </p:cNvCxnSpPr>
+          <p:nvPr/>
+        </p:nvCxnSpPr>
+        <p:spPr>
+          <a:xfrm rot="10800000" flipV="1">
+            <a:off x="6800490" y="3866783"/>
+            <a:ext cx="2710640" cy="1220011"/>
+          </a:xfrm>
+          <a:prstGeom prst="bentConnector3">
+            <a:avLst>
+              <a:gd name="adj1" fmla="val 50000"/>
+            </a:avLst>
+          </a:prstGeom>
+          <a:ln>
+            <a:headEnd type="triangle"/>
+            <a:tailEnd type="triangle"/>
+          </a:ln>
+        </p:spPr>
+        <p:style>
+          <a:lnRef idx="2">
+            <a:schemeClr val="accent1"/>
+          </a:lnRef>
+          <a:fillRef idx="0">
+            <a:schemeClr val="accent1"/>
+          </a:fillRef>
+          <a:effectRef idx="1">
+            <a:schemeClr val="accent1"/>
+          </a:effectRef>
+          <a:fontRef idx="minor">
+            <a:schemeClr val="tx1"/>
+          </a:fontRef>
+        </p:style>
+      </p:cxnSp>
+      <p:sp>
+        <p:nvSpPr>
+          <p:cNvPr id="88" name="CaixaDeTexto 87">
+            <a:extLst>
+              <a:ext uri="{FF2B5EF4-FFF2-40B4-BE49-F238E27FC236}">
+                <a16:creationId xmlns:a16="http://schemas.microsoft.com/office/drawing/2014/main" id="{473DD855-DDE2-4750-CA7C-5BDD31ACBF70}"/>
+              </a:ext>
+            </a:extLst>
+          </p:cNvPr>
+          <p:cNvSpPr txBox="1"/>
+          <p:nvPr/>
+        </p:nvSpPr>
+        <p:spPr>
+          <a:xfrm>
+            <a:off x="9121008" y="4132598"/>
+            <a:ext cx="1313641" cy="338554"/>
+          </a:xfrm>
+          <a:prstGeom prst="rect">
+            <a:avLst/>
+          </a:prstGeom>
+          <a:noFill/>
+        </p:spPr>
+        <p:txBody>
+          <a:bodyPr wrap="square" rtlCol="0">
+            <a:spAutoFit/>
+          </a:bodyPr>
+          <a:lstStyle/>
+          <a:p>
+            <a:pPr algn="ctr"/>
+            <a:r>
+              <a:rPr lang="pt-PT" sz="1600" dirty="0"/>
+              <a:t>Sync Service</a:t>
+            </a:r>
+          </a:p>
+        </p:txBody>
+      </p:sp>
+      <p:sp>
+        <p:nvSpPr>
+          <p:cNvPr id="89" name="CaixaDeTexto 88">
+            <a:extLst>
+              <a:ext uri="{FF2B5EF4-FFF2-40B4-BE49-F238E27FC236}">
+                <a16:creationId xmlns:a16="http://schemas.microsoft.com/office/drawing/2014/main" id="{7E12FBAD-4BB1-52F9-EE38-524F3B1BFEB0}"/>
+              </a:ext>
+            </a:extLst>
+          </p:cNvPr>
+          <p:cNvSpPr txBox="1"/>
+          <p:nvPr/>
+        </p:nvSpPr>
+        <p:spPr>
+          <a:xfrm>
+            <a:off x="980010" y="4035275"/>
+            <a:ext cx="2588579" cy="369332"/>
+          </a:xfrm>
+          <a:prstGeom prst="rect">
+            <a:avLst/>
+          </a:prstGeom>
+          <a:noFill/>
+        </p:spPr>
+        <p:txBody>
+          <a:bodyPr wrap="square" rtlCol="0">
+            <a:spAutoFit/>
+          </a:bodyPr>
+          <a:lstStyle/>
+          <a:p>
+            <a:pPr algn="ctr"/>
+            <a:r>
+              <a:rPr lang="pt-PT" dirty="0"/>
+              <a:t>Web API</a:t>
+            </a:r>
+          </a:p>
+        </p:txBody>
+      </p:sp>
+      <p:sp>
+        <p:nvSpPr>
+          <p:cNvPr id="95" name="CaixaDeTexto 94">
+            <a:extLst>
+              <a:ext uri="{FF2B5EF4-FFF2-40B4-BE49-F238E27FC236}">
+                <a16:creationId xmlns:a16="http://schemas.microsoft.com/office/drawing/2014/main" id="{D991A3BC-4920-3356-95FA-AB2C97E4BBF1}"/>
+              </a:ext>
+            </a:extLst>
+          </p:cNvPr>
+          <p:cNvSpPr txBox="1"/>
+          <p:nvPr/>
+        </p:nvSpPr>
+        <p:spPr>
+          <a:xfrm>
+            <a:off x="1236865" y="6512155"/>
+            <a:ext cx="2108371" cy="369332"/>
+          </a:xfrm>
+          <a:prstGeom prst="rect">
+            <a:avLst/>
+          </a:prstGeom>
+          <a:noFill/>
+        </p:spPr>
+        <p:txBody>
+          <a:bodyPr wrap="square" rtlCol="0">
+            <a:spAutoFit/>
+          </a:bodyPr>
+          <a:lstStyle/>
+          <a:p>
+            <a:pPr algn="ctr"/>
+            <a:r>
+              <a:rPr lang="pt-PT" dirty="0"/>
+              <a:t>DataBase</a:t>
+            </a:r>
+          </a:p>
+        </p:txBody>
+      </p:sp>
+      <p:sp>
+        <p:nvSpPr>
+          <p:cNvPr id="97" name="Retângulo: Cantos Arredondados 96">
+            <a:extLst>
+              <a:ext uri="{FF2B5EF4-FFF2-40B4-BE49-F238E27FC236}">
+                <a16:creationId xmlns:a16="http://schemas.microsoft.com/office/drawing/2014/main" id="{628E7235-38A4-67EB-7298-4D3D0C933016}"/>
+              </a:ext>
+            </a:extLst>
+          </p:cNvPr>
+          <p:cNvSpPr>
+            <a:spLocks noChangeAspect="1"/>
+          </p:cNvSpPr>
+          <p:nvPr/>
+        </p:nvSpPr>
+        <p:spPr>
+          <a:xfrm>
+            <a:off x="4559911" y="1710046"/>
+            <a:ext cx="2074867" cy="804554"/>
+          </a:xfrm>
+          <a:prstGeom prst="roundRect">
+            <a:avLst>
+              <a:gd name="adj" fmla="val 13755"/>
+            </a:avLst>
+          </a:prstGeom>
+          <a:noFill/>
+          <a:ln>
+            <a:solidFill>
+              <a:schemeClr val="tx1"/>
+            </a:solidFill>
+          </a:ln>
+        </p:spPr>
+        <p:style>
+          <a:lnRef idx="2">
+            <a:schemeClr val="accent1">
+              <a:shade val="15000"/>
+            </a:schemeClr>
+          </a:lnRef>
+          <a:fillRef idx="1">
+            <a:schemeClr val="accent1"/>
+          </a:fillRef>
+          <a:effectRef idx="0">
+            <a:schemeClr val="accent1"/>
+          </a:effectRef>
+          <a:fontRef idx="minor">
+            <a:schemeClr val="lt1"/>
+          </a:fontRef>
+        </p:style>
+        <p:txBody>
+          <a:bodyPr rtlCol="0" anchor="ctr"/>
+          <a:lstStyle/>
+          <a:p>
+            <a:pPr algn="ctr"/>
+            <a:endParaRPr lang="pt-PT" sz="3360"/>
+          </a:p>
+        </p:txBody>
+      </p:sp>
+      <p:sp>
+        <p:nvSpPr>
+          <p:cNvPr id="98" name="CaixaDeTexto 97">
+            <a:extLst>
+              <a:ext uri="{FF2B5EF4-FFF2-40B4-BE49-F238E27FC236}">
+                <a16:creationId xmlns:a16="http://schemas.microsoft.com/office/drawing/2014/main" id="{ED44DC56-05F8-8B09-AFFE-F5614C3C2900}"/>
+              </a:ext>
+            </a:extLst>
+          </p:cNvPr>
+          <p:cNvSpPr txBox="1"/>
+          <p:nvPr/>
+        </p:nvSpPr>
+        <p:spPr>
+          <a:xfrm>
+            <a:off x="4559910" y="1787925"/>
+            <a:ext cx="2074867" cy="646331"/>
+          </a:xfrm>
+          <a:prstGeom prst="rect">
+            <a:avLst/>
+          </a:prstGeom>
+          <a:noFill/>
+        </p:spPr>
+        <p:txBody>
+          <a:bodyPr wrap="square" rtlCol="0">
+            <a:spAutoFit/>
+          </a:bodyPr>
+          <a:lstStyle/>
+          <a:p>
+            <a:pPr algn="ctr"/>
+            <a:r>
+              <a:rPr lang="pt-PT" dirty="0"/>
+              <a:t>External </a:t>
+            </a:r>
+          </a:p>
+          <a:p>
+            <a:pPr algn="ctr"/>
+            <a:r>
+              <a:rPr lang="pt-PT" dirty="0"/>
+              <a:t>Clients</a:t>
+            </a:r>
+          </a:p>
+        </p:txBody>
+      </p:sp>
+      <p:cxnSp>
+        <p:nvCxnSpPr>
+          <p:cNvPr id="99" name="Conexão reta unidirecional 98">
+            <a:extLst>
+              <a:ext uri="{FF2B5EF4-FFF2-40B4-BE49-F238E27FC236}">
+                <a16:creationId xmlns:a16="http://schemas.microsoft.com/office/drawing/2014/main" id="{2425DC48-5D96-828C-AAA5-66ACCC507ECD}"/>
+              </a:ext>
+            </a:extLst>
+          </p:cNvPr>
+          <p:cNvCxnSpPr>
+            <a:cxnSpLocks/>
+            <a:stCxn id="49" idx="0"/>
+            <a:endCxn id="97" idx="2"/>
+          </p:cNvCxnSpPr>
+          <p:nvPr/>
+        </p:nvCxnSpPr>
+        <p:spPr>
+          <a:xfrm flipV="1">
+            <a:off x="5597345" y="2514600"/>
+            <a:ext cx="0" cy="1711527"/>
+          </a:xfrm>
+          <a:prstGeom prst="straightConnector1">
+            <a:avLst/>
+          </a:prstGeom>
+          <a:ln>
+            <a:headEnd type="triangle"/>
+            <a:tailEnd type="triangle"/>
+          </a:ln>
+        </p:spPr>
+        <p:style>
+          <a:lnRef idx="2">
+            <a:schemeClr val="accent1"/>
+          </a:lnRef>
+          <a:fillRef idx="0">
+            <a:schemeClr val="accent1"/>
+          </a:fillRef>
+          <a:effectRef idx="1">
+            <a:schemeClr val="accent1"/>
+          </a:effectRef>
+          <a:fontRef idx="minor">
+            <a:schemeClr val="tx1"/>
+          </a:fontRef>
+        </p:style>
+      </p:cxnSp>
+      <p:sp>
+        <p:nvSpPr>
+          <p:cNvPr id="102" name="Retângulo: Cantos Arredondados 101">
+            <a:extLst>
+              <a:ext uri="{FF2B5EF4-FFF2-40B4-BE49-F238E27FC236}">
+                <a16:creationId xmlns:a16="http://schemas.microsoft.com/office/drawing/2014/main" id="{962E7B48-147A-B269-E29D-8EF3670159AE}"/>
+              </a:ext>
+            </a:extLst>
+          </p:cNvPr>
+          <p:cNvSpPr>
+            <a:spLocks noChangeAspect="1"/>
+          </p:cNvSpPr>
+          <p:nvPr/>
+        </p:nvSpPr>
+        <p:spPr>
+          <a:xfrm>
+            <a:off x="787388" y="2733412"/>
+            <a:ext cx="2976378" cy="5940713"/>
+          </a:xfrm>
+          <a:prstGeom prst="roundRect">
+            <a:avLst>
+              <a:gd name="adj" fmla="val 13755"/>
+            </a:avLst>
+          </a:prstGeom>
+          <a:noFill/>
+          <a:ln>
+            <a:solidFill>
+              <a:schemeClr val="tx1"/>
+            </a:solidFill>
+          </a:ln>
+        </p:spPr>
+        <p:style>
+          <a:lnRef idx="2">
+            <a:schemeClr val="accent1">
+              <a:shade val="15000"/>
+            </a:schemeClr>
+          </a:lnRef>
+          <a:fillRef idx="1">
+            <a:schemeClr val="accent1"/>
+          </a:fillRef>
+          <a:effectRef idx="0">
+            <a:schemeClr val="accent1"/>
+          </a:effectRef>
+          <a:fontRef idx="minor">
+            <a:schemeClr val="lt1"/>
+          </a:fontRef>
+        </p:style>
+        <p:txBody>
+          <a:bodyPr rtlCol="0" anchor="ctr"/>
+          <a:lstStyle/>
+          <a:p>
+            <a:pPr algn="ctr"/>
+            <a:endParaRPr lang="pt-PT" sz="3360"/>
+          </a:p>
+        </p:txBody>
+      </p:sp>
+      <p:sp>
+        <p:nvSpPr>
+          <p:cNvPr id="103" name="CaixaDeTexto 102">
+            <a:extLst>
+              <a:ext uri="{FF2B5EF4-FFF2-40B4-BE49-F238E27FC236}">
+                <a16:creationId xmlns:a16="http://schemas.microsoft.com/office/drawing/2014/main" id="{2F3B66BC-57A0-0530-AB2C-D5643EDC6D13}"/>
+              </a:ext>
+            </a:extLst>
+          </p:cNvPr>
+          <p:cNvSpPr txBox="1"/>
+          <p:nvPr/>
+        </p:nvSpPr>
+        <p:spPr>
+          <a:xfrm>
+            <a:off x="787389" y="2744308"/>
+            <a:ext cx="2976378" cy="369332"/>
+          </a:xfrm>
+          <a:prstGeom prst="rect">
+            <a:avLst/>
+          </a:prstGeom>
+          <a:noFill/>
+        </p:spPr>
+        <p:txBody>
+          <a:bodyPr wrap="square" rtlCol="0">
+            <a:spAutoFit/>
+          </a:bodyPr>
+          <a:lstStyle/>
+          <a:p>
+            <a:pPr algn="ctr"/>
+            <a:r>
+              <a:rPr lang="pt-PT" b="1" dirty="0"/>
+              <a:t>Backend</a:t>
+            </a:r>
+          </a:p>
+        </p:txBody>
+      </p:sp>
+      <p:sp>
+        <p:nvSpPr>
+          <p:cNvPr id="104" name="Retângulo: Cantos Arredondados 103">
+            <a:extLst>
+              <a:ext uri="{FF2B5EF4-FFF2-40B4-BE49-F238E27FC236}">
+                <a16:creationId xmlns:a16="http://schemas.microsoft.com/office/drawing/2014/main" id="{23279E53-23F4-3B34-8683-341F0927051F}"/>
+              </a:ext>
+            </a:extLst>
+          </p:cNvPr>
+          <p:cNvSpPr>
+            <a:spLocks noChangeAspect="1"/>
+          </p:cNvSpPr>
+          <p:nvPr/>
+        </p:nvSpPr>
+        <p:spPr>
+          <a:xfrm>
+            <a:off x="7325558" y="1486982"/>
+            <a:ext cx="4904542" cy="3070006"/>
+          </a:xfrm>
+          <a:prstGeom prst="roundRect">
+            <a:avLst>
+              <a:gd name="adj" fmla="val 13755"/>
+            </a:avLst>
+          </a:prstGeom>
+          <a:noFill/>
+          <a:ln>
+            <a:solidFill>
+              <a:schemeClr val="tx1"/>
+            </a:solidFill>
+          </a:ln>
+        </p:spPr>
+        <p:style>
+          <a:lnRef idx="2">
+            <a:schemeClr val="accent1">
+              <a:shade val="15000"/>
+            </a:schemeClr>
+          </a:lnRef>
+          <a:fillRef idx="1">
+            <a:schemeClr val="accent1"/>
+          </a:fillRef>
+          <a:effectRef idx="0">
+            <a:schemeClr val="accent1"/>
+          </a:effectRef>
+          <a:fontRef idx="minor">
+            <a:schemeClr val="lt1"/>
+          </a:fontRef>
+        </p:style>
+        <p:txBody>
+          <a:bodyPr rtlCol="0" anchor="ctr"/>
+          <a:lstStyle/>
+          <a:p>
+            <a:pPr algn="ctr"/>
+            <a:endParaRPr lang="pt-PT" sz="3360"/>
+          </a:p>
+        </p:txBody>
+      </p:sp>
+      <p:sp>
+        <p:nvSpPr>
+          <p:cNvPr id="105" name="CaixaDeTexto 104">
+            <a:extLst>
+              <a:ext uri="{FF2B5EF4-FFF2-40B4-BE49-F238E27FC236}">
+                <a16:creationId xmlns:a16="http://schemas.microsoft.com/office/drawing/2014/main" id="{5B215A79-005A-0578-2122-6D42B4664234}"/>
+              </a:ext>
+            </a:extLst>
+          </p:cNvPr>
+          <p:cNvSpPr txBox="1"/>
+          <p:nvPr/>
+        </p:nvSpPr>
+        <p:spPr>
+          <a:xfrm>
+            <a:off x="7298505" y="1499682"/>
+            <a:ext cx="4931595" cy="369332"/>
+          </a:xfrm>
+          <a:prstGeom prst="rect">
+            <a:avLst/>
+          </a:prstGeom>
+          <a:noFill/>
+        </p:spPr>
+        <p:txBody>
+          <a:bodyPr wrap="square" rtlCol="0">
+            <a:spAutoFit/>
+          </a:bodyPr>
+          <a:lstStyle/>
+          <a:p>
+            <a:pPr algn="ctr"/>
+            <a:r>
+              <a:rPr lang="pt-PT" b="1" dirty="0"/>
+              <a:t>Frontend</a:t>
+            </a:r>
+          </a:p>
+        </p:txBody>
+      </p:sp>
+      <p:cxnSp>
+        <p:nvCxnSpPr>
+          <p:cNvPr id="20" name="Conexão reta unidirecional 84">
+            <a:extLst>
+              <a:ext uri="{FF2B5EF4-FFF2-40B4-BE49-F238E27FC236}">
+                <a16:creationId xmlns:a16="http://schemas.microsoft.com/office/drawing/2014/main" id="{88F10570-0E22-E576-6CFB-EBEDFD9FBCEB}"/>
+              </a:ext>
+            </a:extLst>
+          </p:cNvPr>
+          <p:cNvCxnSpPr>
+            <a:cxnSpLocks/>
+            <a:stCxn id="55" idx="2"/>
+            <a:endCxn id="56" idx="3"/>
+          </p:cNvCxnSpPr>
+          <p:nvPr/>
+        </p:nvCxnSpPr>
+        <p:spPr>
+          <a:xfrm rot="5400000">
+            <a:off x="10306956" y="3194115"/>
+            <a:ext cx="410243" cy="935094"/>
+          </a:xfrm>
+          <a:prstGeom prst="bentConnector2">
+            <a:avLst/>
+          </a:prstGeom>
+          <a:ln>
+            <a:headEnd type="triangle"/>
+            <a:tailEnd type="triangle"/>
+          </a:ln>
+        </p:spPr>
+        <p:style>
+          <a:lnRef idx="2">
+            <a:schemeClr val="accent1"/>
+          </a:lnRef>
+          <a:fillRef idx="0">
+            <a:schemeClr val="accent1"/>
+          </a:fillRef>
+          <a:effectRef idx="1">
+            <a:schemeClr val="accent1"/>
+          </a:effectRef>
+          <a:fontRef idx="minor">
+            <a:schemeClr val="tx1"/>
+          </a:fontRef>
+        </p:style>
+      </p:cxnSp>
+      <p:pic>
+        <p:nvPicPr>
+          <p:cNvPr id="32" name="Picture 4" descr="Free Sync Icon - Free Download Design &amp; Development Icons | IconScout">
+            <a:extLst>
+              <a:ext uri="{FF2B5EF4-FFF2-40B4-BE49-F238E27FC236}">
+                <a16:creationId xmlns:a16="http://schemas.microsoft.com/office/drawing/2014/main" id="{476ACF65-4C7F-3E56-3482-CCAD53E55C1C}"/>
+              </a:ext>
+            </a:extLst>
+          </p:cNvPr>
+          <p:cNvPicPr>
+            <a:picLocks noChangeAspect="1" noChangeArrowheads="1"/>
+          </p:cNvPicPr>
+          <p:nvPr/>
+        </p:nvPicPr>
+        <p:blipFill>
+          <a:blip r:embed="rId8">
+            <a:extLst>
+              <a:ext uri="{28A0092B-C50C-407E-A947-70E740481C1C}">
+                <a14:useLocalDpi xmlns:a14="http://schemas.microsoft.com/office/drawing/2010/main" val="0"/>
+              </a:ext>
+            </a:extLst>
+          </a:blip>
+          <a:srcRect/>
+          <a:stretch>
+            <a:fillRect/>
+          </a:stretch>
+        </p:blipFill>
+        <p:spPr bwMode="auto">
+          <a:xfrm>
+            <a:off x="9511130" y="7803057"/>
+            <a:ext cx="533400" cy="533400"/>
+          </a:xfrm>
+          <a:prstGeom prst="rect">
+            <a:avLst/>
+          </a:prstGeom>
+          <a:noFill/>
+          <a:extLst>
+            <a:ext uri="{909E8E84-426E-40DD-AFC4-6F175D3DCCD1}">
+              <a14:hiddenFill xmlns:a14="http://schemas.microsoft.com/office/drawing/2010/main">
+                <a:solidFill>
+                  <a:srgbClr val="FFFFFF"/>
+                </a:solidFill>
+              </a14:hiddenFill>
+            </a:ext>
+          </a:extLst>
+        </p:spPr>
+      </p:pic>
+      <p:grpSp>
+        <p:nvGrpSpPr>
+          <p:cNvPr id="33" name="Agrupar 32">
+            <a:extLst>
+              <a:ext uri="{FF2B5EF4-FFF2-40B4-BE49-F238E27FC236}">
+                <a16:creationId xmlns:a16="http://schemas.microsoft.com/office/drawing/2014/main" id="{2093DD43-F214-8525-F960-590558E9974A}"/>
+              </a:ext>
+            </a:extLst>
+          </p:cNvPr>
+          <p:cNvGrpSpPr/>
+          <p:nvPr/>
+        </p:nvGrpSpPr>
+        <p:grpSpPr>
+          <a:xfrm>
+            <a:off x="7478570" y="6213256"/>
+            <a:ext cx="2132051" cy="1449376"/>
+            <a:chOff x="8587622" y="4873842"/>
+            <a:chExt cx="2132051" cy="1449376"/>
+          </a:xfrm>
+        </p:grpSpPr>
+        <p:sp>
+          <p:nvSpPr>
+            <p:cNvPr id="34" name="Retângulo: Cantos Arredondados 33">
+              <a:extLst>
+                <a:ext uri="{FF2B5EF4-FFF2-40B4-BE49-F238E27FC236}">
+                  <a16:creationId xmlns:a16="http://schemas.microsoft.com/office/drawing/2014/main" id="{7B7AB3C7-2E70-E369-8C7E-58541ED2DA4A}"/>
+                </a:ext>
+              </a:extLst>
+            </p:cNvPr>
+            <p:cNvSpPr>
+              <a:spLocks noChangeAspect="1"/>
+            </p:cNvSpPr>
+            <p:nvPr/>
+          </p:nvSpPr>
+          <p:spPr>
+            <a:xfrm>
+              <a:off x="8587623" y="4876960"/>
+              <a:ext cx="2132049" cy="1446258"/>
+            </a:xfrm>
+            <a:prstGeom prst="roundRect">
+              <a:avLst/>
+            </a:prstGeom>
+            <a:noFill/>
+            <a:ln>
+              <a:solidFill>
+                <a:schemeClr val="tx1"/>
+              </a:solidFill>
+            </a:ln>
+          </p:spPr>
+          <p:style>
+            <a:lnRef idx="2">
+              <a:schemeClr val="accent1">
+                <a:shade val="15000"/>
+              </a:schemeClr>
+            </a:lnRef>
+            <a:fillRef idx="1">
+              <a:schemeClr val="accent1"/>
+            </a:fillRef>
+            <a:effectRef idx="0">
+              <a:schemeClr val="accent1"/>
+            </a:effectRef>
+            <a:fontRef idx="minor">
+              <a:schemeClr val="lt1"/>
+            </a:fontRef>
+          </p:style>
+          <p:txBody>
+            <a:bodyPr rtlCol="0" anchor="ctr"/>
+            <a:lstStyle/>
+            <a:p>
+              <a:pPr algn="ctr"/>
+              <a:endParaRPr lang="pt-PT" sz="3360"/>
+            </a:p>
+          </p:txBody>
+        </p:sp>
+        <p:pic>
+          <p:nvPicPr>
+            <p:cNvPr id="36" name="Picture 8" descr="Brand">
+              <a:extLst>
+                <a:ext uri="{FF2B5EF4-FFF2-40B4-BE49-F238E27FC236}">
+                  <a16:creationId xmlns:a16="http://schemas.microsoft.com/office/drawing/2014/main" id="{2837D065-83CF-DAB1-3CE0-048120EDD577}"/>
+                </a:ext>
+              </a:extLst>
+            </p:cNvPr>
+            <p:cNvPicPr>
+              <a:picLocks noChangeAspect="1" noChangeArrowheads="1"/>
+            </p:cNvPicPr>
+            <p:nvPr/>
+          </p:nvPicPr>
+          <p:blipFill>
+            <a:blip r:embed="rId9">
+              <a:extLst>
+                <a:ext uri="{28A0092B-C50C-407E-A947-70E740481C1C}">
+                  <a14:useLocalDpi xmlns:a14="http://schemas.microsoft.com/office/drawing/2010/main" val="0"/>
+                </a:ext>
+              </a:extLst>
+            </a:blip>
+            <a:srcRect/>
+            <a:stretch>
+              <a:fillRect/>
+            </a:stretch>
+          </p:blipFill>
+          <p:spPr bwMode="auto">
+            <a:xfrm>
+              <a:off x="9900865" y="5345661"/>
+              <a:ext cx="571589" cy="831802"/>
+            </a:xfrm>
+            <a:prstGeom prst="rect">
+              <a:avLst/>
+            </a:prstGeom>
+            <a:noFill/>
+            <a:extLst>
+              <a:ext uri="{909E8E84-426E-40DD-AFC4-6F175D3DCCD1}">
+                <a14:hiddenFill xmlns:a14="http://schemas.microsoft.com/office/drawing/2010/main">
+                  <a:solidFill>
+                    <a:srgbClr val="FFFFFF"/>
+                  </a:solidFill>
+                </a14:hiddenFill>
+              </a:ext>
+            </a:extLst>
+          </p:spPr>
+        </p:pic>
+        <p:pic>
+          <p:nvPicPr>
+            <p:cNvPr id="37" name="Picture 4" descr="Windows Logo PNGs for Free Download">
+              <a:extLst>
+                <a:ext uri="{FF2B5EF4-FFF2-40B4-BE49-F238E27FC236}">
+                  <a16:creationId xmlns:a16="http://schemas.microsoft.com/office/drawing/2014/main" id="{77A222DA-8D9E-3986-79D0-94F02919B02A}"/>
+                </a:ext>
+              </a:extLst>
+            </p:cNvPr>
+            <p:cNvPicPr>
+              <a:picLocks noChangeAspect="1" noChangeArrowheads="1"/>
+            </p:cNvPicPr>
+            <p:nvPr/>
+          </p:nvPicPr>
+          <p:blipFill>
+            <a:blip r:embed="rId10">
+              <a:extLst>
+                <a:ext uri="{28A0092B-C50C-407E-A947-70E740481C1C}">
+                  <a14:useLocalDpi xmlns:a14="http://schemas.microsoft.com/office/drawing/2010/main" val="0"/>
+                </a:ext>
+              </a:extLst>
+            </a:blip>
+            <a:srcRect/>
+            <a:stretch>
+              <a:fillRect/>
+            </a:stretch>
+          </p:blipFill>
+          <p:spPr bwMode="auto">
+            <a:xfrm>
+              <a:off x="8654310" y="5049476"/>
+              <a:ext cx="1170535" cy="1170535"/>
+            </a:xfrm>
+            <a:prstGeom prst="rect">
+              <a:avLst/>
+            </a:prstGeom>
+            <a:noFill/>
+            <a:extLst>
+              <a:ext uri="{909E8E84-426E-40DD-AFC4-6F175D3DCCD1}">
+                <a14:hiddenFill xmlns:a14="http://schemas.microsoft.com/office/drawing/2010/main">
+                  <a:solidFill>
+                    <a:srgbClr val="FFFFFF"/>
+                  </a:solidFill>
+                </a14:hiddenFill>
+              </a:ext>
+            </a:extLst>
+          </p:spPr>
+        </p:pic>
+        <p:sp>
+          <p:nvSpPr>
+            <p:cNvPr id="38" name="CaixaDeTexto 37">
+              <a:extLst>
+                <a:ext uri="{FF2B5EF4-FFF2-40B4-BE49-F238E27FC236}">
+                  <a16:creationId xmlns:a16="http://schemas.microsoft.com/office/drawing/2014/main" id="{A30423A7-0FDB-918A-7DB3-C69C441D38DA}"/>
+                </a:ext>
+              </a:extLst>
+            </p:cNvPr>
+            <p:cNvSpPr txBox="1"/>
+            <p:nvPr/>
+          </p:nvSpPr>
+          <p:spPr>
+            <a:xfrm>
+              <a:off x="8587622" y="4873842"/>
+              <a:ext cx="2132051" cy="369332"/>
+            </a:xfrm>
+            <a:prstGeom prst="rect">
+              <a:avLst/>
+            </a:prstGeom>
+            <a:noFill/>
+          </p:spPr>
+          <p:txBody>
+            <a:bodyPr wrap="square" rtlCol="0">
+              <a:spAutoFit/>
+            </a:bodyPr>
+            <a:lstStyle/>
+            <a:p>
+              <a:pPr algn="ctr"/>
+              <a:r>
+                <a:rPr lang="pt-PT" dirty="0"/>
+                <a:t>Desktop App</a:t>
+              </a:r>
+            </a:p>
+          </p:txBody>
+        </p:sp>
+      </p:grpSp>
+      <p:grpSp>
+        <p:nvGrpSpPr>
+          <p:cNvPr id="44" name="Agrupar 43">
+            <a:extLst>
+              <a:ext uri="{FF2B5EF4-FFF2-40B4-BE49-F238E27FC236}">
+                <a16:creationId xmlns:a16="http://schemas.microsoft.com/office/drawing/2014/main" id="{C94521AD-428A-B0E2-1E86-637BCA2BF259}"/>
+              </a:ext>
+            </a:extLst>
+          </p:cNvPr>
+          <p:cNvGrpSpPr/>
+          <p:nvPr/>
+        </p:nvGrpSpPr>
+        <p:grpSpPr>
+          <a:xfrm>
+            <a:off x="9913599" y="6213255"/>
+            <a:ext cx="2132049" cy="1446259"/>
+            <a:chOff x="8603297" y="7086559"/>
+            <a:chExt cx="2132049" cy="1446258"/>
+          </a:xfrm>
+        </p:grpSpPr>
+        <p:pic>
+          <p:nvPicPr>
+            <p:cNvPr id="46" name="Picture 4" descr="Database icon - Free download on Iconfinder">
+              <a:extLst>
+                <a:ext uri="{FF2B5EF4-FFF2-40B4-BE49-F238E27FC236}">
+                  <a16:creationId xmlns:a16="http://schemas.microsoft.com/office/drawing/2014/main" id="{9A927DF5-EBC0-DB48-9F31-F9ED30671242}"/>
+                </a:ext>
+              </a:extLst>
+            </p:cNvPr>
+            <p:cNvPicPr>
+              <a:picLocks noChangeAspect="1" noChangeArrowheads="1"/>
+            </p:cNvPicPr>
+            <p:nvPr/>
+          </p:nvPicPr>
+          <p:blipFill>
+            <a:blip r:embed="rId11">
+              <a:extLst>
+                <a:ext uri="{28A0092B-C50C-407E-A947-70E740481C1C}">
+                  <a14:useLocalDpi xmlns:a14="http://schemas.microsoft.com/office/drawing/2010/main" val="0"/>
+                </a:ext>
+              </a:extLst>
+            </a:blip>
+            <a:srcRect/>
+            <a:stretch>
+              <a:fillRect/>
+            </a:stretch>
+          </p:blipFill>
+          <p:spPr bwMode="auto">
+            <a:xfrm>
+              <a:off x="8953441" y="7538699"/>
+              <a:ext cx="741546" cy="741546"/>
+            </a:xfrm>
+            <a:prstGeom prst="rect">
+              <a:avLst/>
+            </a:prstGeom>
+            <a:noFill/>
+            <a:extLst>
+              <a:ext uri="{909E8E84-426E-40DD-AFC4-6F175D3DCCD1}">
+                <a14:hiddenFill xmlns:a14="http://schemas.microsoft.com/office/drawing/2010/main">
+                  <a:solidFill>
+                    <a:srgbClr val="FFFFFF"/>
+                  </a:solidFill>
+                </a14:hiddenFill>
+              </a:ext>
+            </a:extLst>
+          </p:spPr>
+        </p:pic>
+        <p:pic>
+          <p:nvPicPr>
+            <p:cNvPr id="47" name="Imagem 46">
+              <a:extLst>
+                <a:ext uri="{FF2B5EF4-FFF2-40B4-BE49-F238E27FC236}">
+                  <a16:creationId xmlns:a16="http://schemas.microsoft.com/office/drawing/2014/main" id="{50D839D2-87C3-64F8-FD71-3E12C4271F12}"/>
+                </a:ext>
+              </a:extLst>
+            </p:cNvPr>
+            <p:cNvPicPr>
+              <a:picLocks noChangeAspect="1"/>
+            </p:cNvPicPr>
+            <p:nvPr/>
+          </p:nvPicPr>
+          <p:blipFill>
+            <a:blip r:embed="rId12"/>
+            <a:stretch>
+              <a:fillRect/>
+            </a:stretch>
+          </p:blipFill>
+          <p:spPr>
+            <a:xfrm>
+              <a:off x="9921674" y="7648767"/>
+              <a:ext cx="607493" cy="601242"/>
+            </a:xfrm>
+            <a:prstGeom prst="rect">
+              <a:avLst/>
+            </a:prstGeom>
+          </p:spPr>
+        </p:pic>
+        <p:sp>
+          <p:nvSpPr>
+            <p:cNvPr id="48" name="Retângulo: Cantos Arredondados 47">
+              <a:extLst>
+                <a:ext uri="{FF2B5EF4-FFF2-40B4-BE49-F238E27FC236}">
+                  <a16:creationId xmlns:a16="http://schemas.microsoft.com/office/drawing/2014/main" id="{1D9DAD32-4049-449E-6B18-74514688355D}"/>
+                </a:ext>
+              </a:extLst>
+            </p:cNvPr>
+            <p:cNvSpPr>
+              <a:spLocks noChangeAspect="1"/>
+            </p:cNvSpPr>
+            <p:nvPr/>
+          </p:nvSpPr>
+          <p:spPr>
+            <a:xfrm>
+              <a:off x="8603297" y="7086559"/>
+              <a:ext cx="2132049" cy="1446258"/>
+            </a:xfrm>
+            <a:prstGeom prst="roundRect">
+              <a:avLst/>
+            </a:prstGeom>
+            <a:noFill/>
+            <a:ln>
+              <a:solidFill>
+                <a:schemeClr val="tx1"/>
+              </a:solidFill>
+            </a:ln>
+          </p:spPr>
+          <p:style>
+            <a:lnRef idx="2">
+              <a:schemeClr val="accent1">
+                <a:shade val="15000"/>
+              </a:schemeClr>
+            </a:lnRef>
+            <a:fillRef idx="1">
+              <a:schemeClr val="accent1"/>
+            </a:fillRef>
+            <a:effectRef idx="0">
+              <a:schemeClr val="accent1"/>
+            </a:effectRef>
+            <a:fontRef idx="minor">
+              <a:schemeClr val="lt1"/>
+            </a:fontRef>
+          </p:style>
+          <p:txBody>
+            <a:bodyPr rtlCol="0" anchor="ctr"/>
+            <a:lstStyle/>
+            <a:p>
+              <a:pPr algn="ctr"/>
+              <a:endParaRPr lang="pt-PT" sz="3360"/>
+            </a:p>
+          </p:txBody>
+        </p:sp>
+        <p:sp>
+          <p:nvSpPr>
+            <p:cNvPr id="52" name="CaixaDeTexto 51">
+              <a:extLst>
+                <a:ext uri="{FF2B5EF4-FFF2-40B4-BE49-F238E27FC236}">
+                  <a16:creationId xmlns:a16="http://schemas.microsoft.com/office/drawing/2014/main" id="{3F8F14B2-F2F4-3F86-0A6D-36A378341209}"/>
+                </a:ext>
+              </a:extLst>
+            </p:cNvPr>
+            <p:cNvSpPr txBox="1"/>
+            <p:nvPr/>
+          </p:nvSpPr>
+          <p:spPr>
+            <a:xfrm>
+              <a:off x="8603297" y="7092379"/>
+              <a:ext cx="2132049" cy="369332"/>
+            </a:xfrm>
+            <a:prstGeom prst="rect">
+              <a:avLst/>
+            </a:prstGeom>
+            <a:noFill/>
+          </p:spPr>
+          <p:txBody>
+            <a:bodyPr wrap="square" rtlCol="0">
+              <a:spAutoFit/>
+            </a:bodyPr>
+            <a:lstStyle/>
+            <a:p>
+              <a:pPr algn="ctr"/>
+              <a:r>
+                <a:rPr lang="pt-PT" dirty="0"/>
+                <a:t>Local Database</a:t>
+              </a:r>
+            </a:p>
+          </p:txBody>
+        </p:sp>
+      </p:grpSp>
+      <p:cxnSp>
+        <p:nvCxnSpPr>
+          <p:cNvPr id="54" name="Conexão reta unidirecional 53">
+            <a:extLst>
+              <a:ext uri="{FF2B5EF4-FFF2-40B4-BE49-F238E27FC236}">
+                <a16:creationId xmlns:a16="http://schemas.microsoft.com/office/drawing/2014/main" id="{9B4AE5F2-D33B-9A1F-D9C5-A5B0C1164C52}"/>
+              </a:ext>
+            </a:extLst>
+          </p:cNvPr>
+          <p:cNvCxnSpPr>
+            <a:cxnSpLocks/>
+            <a:stCxn id="48" idx="1"/>
+            <a:endCxn id="34" idx="3"/>
+          </p:cNvCxnSpPr>
+          <p:nvPr/>
+        </p:nvCxnSpPr>
+        <p:spPr>
+          <a:xfrm flipH="1">
+            <a:off x="9610620" y="6936385"/>
+            <a:ext cx="302979" cy="3118"/>
+          </a:xfrm>
+          <a:prstGeom prst="straightConnector1">
+            <a:avLst/>
+          </a:prstGeom>
+          <a:ln>
+            <a:headEnd type="triangle"/>
+            <a:tailEnd type="triangle"/>
+          </a:ln>
+        </p:spPr>
+        <p:style>
+          <a:lnRef idx="2">
+            <a:schemeClr val="accent1"/>
+          </a:lnRef>
+          <a:fillRef idx="0">
+            <a:schemeClr val="accent1"/>
+          </a:fillRef>
+          <a:effectRef idx="1">
+            <a:schemeClr val="accent1"/>
+          </a:effectRef>
+          <a:fontRef idx="minor">
+            <a:schemeClr val="tx1"/>
+          </a:fontRef>
+        </p:style>
+      </p:cxnSp>
+      <p:sp>
+        <p:nvSpPr>
+          <p:cNvPr id="59" name="CaixaDeTexto 58">
+            <a:extLst>
+              <a:ext uri="{FF2B5EF4-FFF2-40B4-BE49-F238E27FC236}">
+                <a16:creationId xmlns:a16="http://schemas.microsoft.com/office/drawing/2014/main" id="{5B0D24D9-A306-8F40-0C8C-D49D2E9DD638}"/>
+              </a:ext>
+            </a:extLst>
+          </p:cNvPr>
+          <p:cNvSpPr txBox="1"/>
+          <p:nvPr/>
+        </p:nvSpPr>
+        <p:spPr>
+          <a:xfrm>
+            <a:off x="9121008" y="8335571"/>
+            <a:ext cx="1313641" cy="338554"/>
+          </a:xfrm>
+          <a:prstGeom prst="rect">
+            <a:avLst/>
+          </a:prstGeom>
+          <a:noFill/>
+        </p:spPr>
+        <p:txBody>
+          <a:bodyPr wrap="square" rtlCol="0">
+            <a:spAutoFit/>
+          </a:bodyPr>
+          <a:lstStyle/>
+          <a:p>
+            <a:pPr algn="ctr"/>
+            <a:r>
+              <a:rPr lang="pt-PT" sz="1600" dirty="0"/>
+              <a:t>Sync Service</a:t>
+            </a:r>
+          </a:p>
+        </p:txBody>
+      </p:sp>
+      <p:sp>
+        <p:nvSpPr>
+          <p:cNvPr id="61" name="Retângulo: Cantos Arredondados 60">
+            <a:extLst>
+              <a:ext uri="{FF2B5EF4-FFF2-40B4-BE49-F238E27FC236}">
+                <a16:creationId xmlns:a16="http://schemas.microsoft.com/office/drawing/2014/main" id="{F4945026-8E1B-C608-1DFA-9904DC97D506}"/>
+              </a:ext>
+            </a:extLst>
+          </p:cNvPr>
+          <p:cNvSpPr>
+            <a:spLocks noChangeAspect="1"/>
+          </p:cNvSpPr>
+          <p:nvPr/>
+        </p:nvSpPr>
+        <p:spPr>
+          <a:xfrm>
+            <a:off x="7325558" y="5689955"/>
+            <a:ext cx="4904542" cy="3070006"/>
+          </a:xfrm>
+          <a:prstGeom prst="roundRect">
+            <a:avLst>
+              <a:gd name="adj" fmla="val 13755"/>
+            </a:avLst>
+          </a:prstGeom>
+          <a:noFill/>
+          <a:ln>
+            <a:solidFill>
+              <a:schemeClr val="tx1"/>
+            </a:solidFill>
+          </a:ln>
+        </p:spPr>
+        <p:style>
+          <a:lnRef idx="2">
+            <a:schemeClr val="accent1">
+              <a:shade val="15000"/>
+            </a:schemeClr>
+          </a:lnRef>
+          <a:fillRef idx="1">
+            <a:schemeClr val="accent1"/>
+          </a:fillRef>
+          <a:effectRef idx="0">
+            <a:schemeClr val="accent1"/>
+          </a:effectRef>
+          <a:fontRef idx="minor">
+            <a:schemeClr val="lt1"/>
+          </a:fontRef>
+        </p:style>
+        <p:txBody>
+          <a:bodyPr rtlCol="0" anchor="ctr"/>
+          <a:lstStyle/>
+          <a:p>
+            <a:pPr algn="ctr"/>
+            <a:endParaRPr lang="pt-PT" sz="3360"/>
+          </a:p>
+        </p:txBody>
+      </p:sp>
+      <p:sp>
+        <p:nvSpPr>
+          <p:cNvPr id="62" name="CaixaDeTexto 61">
+            <a:extLst>
+              <a:ext uri="{FF2B5EF4-FFF2-40B4-BE49-F238E27FC236}">
+                <a16:creationId xmlns:a16="http://schemas.microsoft.com/office/drawing/2014/main" id="{E3653AF3-290A-5E76-B819-5B51CCE4098C}"/>
+              </a:ext>
+            </a:extLst>
+          </p:cNvPr>
+          <p:cNvSpPr txBox="1"/>
+          <p:nvPr/>
+        </p:nvSpPr>
+        <p:spPr>
+          <a:xfrm>
+            <a:off x="7298505" y="5689955"/>
+            <a:ext cx="4931595" cy="369332"/>
+          </a:xfrm>
+          <a:prstGeom prst="rect">
+            <a:avLst/>
+          </a:prstGeom>
+          <a:noFill/>
+        </p:spPr>
+        <p:txBody>
+          <a:bodyPr wrap="square" rtlCol="0">
+            <a:spAutoFit/>
+          </a:bodyPr>
+          <a:lstStyle/>
+          <a:p>
+            <a:pPr algn="ctr"/>
+            <a:r>
+              <a:rPr lang="pt-PT" b="1" dirty="0"/>
+              <a:t>Frontend</a:t>
+            </a:r>
+          </a:p>
+        </p:txBody>
+      </p:sp>
+      <p:cxnSp>
+        <p:nvCxnSpPr>
+          <p:cNvPr id="64" name="Conexão reta unidirecional 84">
+            <a:extLst>
+              <a:ext uri="{FF2B5EF4-FFF2-40B4-BE49-F238E27FC236}">
+                <a16:creationId xmlns:a16="http://schemas.microsoft.com/office/drawing/2014/main" id="{1A345A34-DF53-FD8D-706A-327B3B90076C}"/>
+              </a:ext>
+            </a:extLst>
+          </p:cNvPr>
+          <p:cNvCxnSpPr>
+            <a:cxnSpLocks/>
+            <a:stCxn id="48" idx="2"/>
+            <a:endCxn id="32" idx="3"/>
+          </p:cNvCxnSpPr>
+          <p:nvPr/>
+        </p:nvCxnSpPr>
+        <p:spPr>
+          <a:xfrm rot="5400000">
+            <a:off x="10306956" y="7397088"/>
+            <a:ext cx="410243" cy="935094"/>
+          </a:xfrm>
+          <a:prstGeom prst="bentConnector2">
+            <a:avLst/>
+          </a:prstGeom>
+          <a:ln>
+            <a:headEnd type="triangle"/>
+            <a:tailEnd type="triangle"/>
+          </a:ln>
+        </p:spPr>
+        <p:style>
+          <a:lnRef idx="2">
+            <a:schemeClr val="accent1"/>
+          </a:lnRef>
+          <a:fillRef idx="0">
+            <a:schemeClr val="accent1"/>
+          </a:fillRef>
+          <a:effectRef idx="1">
+            <a:schemeClr val="accent1"/>
+          </a:effectRef>
+          <a:fontRef idx="minor">
+            <a:schemeClr val="tx1"/>
+          </a:fontRef>
+        </p:style>
+      </p:cxnSp>
+      <p:cxnSp>
+        <p:nvCxnSpPr>
+          <p:cNvPr id="69" name="Conexão reta unidirecional 84">
+            <a:extLst>
+              <a:ext uri="{FF2B5EF4-FFF2-40B4-BE49-F238E27FC236}">
+                <a16:creationId xmlns:a16="http://schemas.microsoft.com/office/drawing/2014/main" id="{7899CEAD-291D-9A50-3A52-80766964FBC6}"/>
+              </a:ext>
+            </a:extLst>
+          </p:cNvPr>
+          <p:cNvCxnSpPr>
+            <a:cxnSpLocks/>
+            <a:stCxn id="32" idx="1"/>
+            <a:endCxn id="49" idx="2"/>
+          </p:cNvCxnSpPr>
+          <p:nvPr/>
+        </p:nvCxnSpPr>
+        <p:spPr>
+          <a:xfrm rot="10800000">
+            <a:off x="5597346" y="5562955"/>
+            <a:ext cx="3913785" cy="2506802"/>
+          </a:xfrm>
+          <a:prstGeom prst="bentConnector2">
+            <a:avLst/>
+          </a:prstGeom>
+          <a:ln>
+            <a:headEnd type="triangle"/>
+            <a:tailEnd type="triangle"/>
+          </a:ln>
+        </p:spPr>
+        <p:style>
+          <a:lnRef idx="2">
+            <a:schemeClr val="accent1"/>
+          </a:lnRef>
+          <a:fillRef idx="0">
+            <a:schemeClr val="accent1"/>
+          </a:fillRef>
+          <a:effectRef idx="1">
+            <a:schemeClr val="accent1"/>
+          </a:effectRef>
+          <a:fontRef idx="minor">
+            <a:schemeClr val="tx1"/>
+          </a:fontRef>
+        </p:style>
+      </p:cxnSp>
+      <p:sp>
+        <p:nvSpPr>
+          <p:cNvPr id="81" name="Retângulo 80">
+            <a:extLst>
+              <a:ext uri="{FF2B5EF4-FFF2-40B4-BE49-F238E27FC236}">
+                <a16:creationId xmlns:a16="http://schemas.microsoft.com/office/drawing/2014/main" id="{97D182A5-8199-D9B2-F835-0415E8644306}"/>
+              </a:ext>
+            </a:extLst>
+          </p:cNvPr>
+          <p:cNvSpPr/>
+          <p:nvPr/>
+        </p:nvSpPr>
+        <p:spPr>
+          <a:xfrm rot="5400000">
+            <a:off x="9400362" y="4668384"/>
+            <a:ext cx="1144865" cy="923330"/>
+          </a:xfrm>
+          <a:prstGeom prst="rect">
+            <a:avLst/>
+          </a:prstGeom>
+          <a:noFill/>
+        </p:spPr>
+        <p:txBody>
+          <a:bodyPr wrap="none" lIns="91440" tIns="45720" rIns="91440" bIns="45720">
+            <a:spAutoFit/>
+          </a:bodyPr>
+          <a:lstStyle/>
+          <a:p>
+            <a:pPr algn="ctr"/>
+            <a:r>
+              <a:rPr lang="pt-PT" sz="5400" b="0" cap="none" spc="0" dirty="0">
+                <a:ln w="0"/>
+                <a:solidFill>
+                  <a:schemeClr val="tx1"/>
+                </a:solidFill>
+                <a:effectLst>
+                  <a:outerShdw blurRad="38100" dist="19050" dir="2700000" algn="tl" rotWithShape="0">
+                    <a:schemeClr val="dk1">
+                      <a:alpha val="40000"/>
+                    </a:schemeClr>
+                  </a:outerShdw>
+                </a:effectLst>
+              </a:rPr>
+              <a:t>…..</a:t>
+            </a:r>
+          </a:p>
+        </p:txBody>
+      </p:sp>
+    </p:spTree>
+    <p:extLst>
+      <p:ext uri="{BB962C8B-B14F-4D97-AF65-F5344CB8AC3E}">
+        <p14:creationId xmlns:p14="http://schemas.microsoft.com/office/powerpoint/2010/main" val="822737976"/>
+      </p:ext>
+    </p:extLst>
+  </p:cSld>
+  <p:clrMapOvr>
+    <a:masterClrMapping/>
+  </p:clrMapOvr>
+</p:sld>
+</file>
+
+<file path=ppt/slides/slide6.xml><?xml version="1.0" encoding="utf-8"?>
 <p:sld xmlns:a="http://schemas.openxmlformats.org/drawingml/2006/main" xmlns:r="http://schemas.openxmlformats.org/officeDocument/2006/relationships" xmlns:p="http://schemas.openxmlformats.org/presentationml/2006/main">
   <p:cSld>
     <p:spTree>
@@ -17273,6 +19683,594 @@
     <p:extLst>
       <p:ext uri="{BB962C8B-B14F-4D97-AF65-F5344CB8AC3E}">
         <p14:creationId xmlns:p14="http://schemas.microsoft.com/office/powerpoint/2010/main" val="408914952"/>
+      </p:ext>
+    </p:extLst>
+  </p:cSld>
+  <p:clrMapOvr>
+    <a:masterClrMapping/>
+  </p:clrMapOvr>
+</p:sld>
+</file>
+
+<file path=ppt/slides/slide7.xml><?xml version="1.0" encoding="utf-8"?>
+<p:sld xmlns:a="http://schemas.openxmlformats.org/drawingml/2006/main" xmlns:r="http://schemas.openxmlformats.org/officeDocument/2006/relationships" xmlns:p="http://schemas.openxmlformats.org/presentationml/2006/main">
+  <p:cSld>
+    <p:spTree>
+      <p:nvGrpSpPr>
+        <p:cNvPr id="1" name=""/>
+        <p:cNvGrpSpPr/>
+        <p:nvPr/>
+      </p:nvGrpSpPr>
+      <p:grpSpPr>
+        <a:xfrm>
+          <a:off x="0" y="0"/>
+          <a:ext cx="0" cy="0"/>
+          <a:chOff x="0" y="0"/>
+          <a:chExt cx="0" cy="0"/>
+        </a:xfrm>
+      </p:grpSpPr>
+      <p:sp>
+        <p:nvSpPr>
+          <p:cNvPr id="2" name="Oval 1">
+            <a:extLst>
+              <a:ext uri="{FF2B5EF4-FFF2-40B4-BE49-F238E27FC236}">
+                <a16:creationId xmlns:a16="http://schemas.microsoft.com/office/drawing/2014/main" id="{FDA1D22C-91E2-8381-7A9F-C2E6AF830C31}"/>
+              </a:ext>
+            </a:extLst>
+          </p:cNvPr>
+          <p:cNvSpPr/>
+          <p:nvPr/>
+        </p:nvSpPr>
+        <p:spPr>
+          <a:xfrm>
+            <a:off x="2273300" y="1625600"/>
+            <a:ext cx="360000" cy="360000"/>
+          </a:xfrm>
+          <a:prstGeom prst="ellipse">
+            <a:avLst/>
+          </a:prstGeom>
+          <a:solidFill>
+            <a:schemeClr val="accent2">
+              <a:lumMod val="20000"/>
+              <a:lumOff val="80000"/>
+            </a:schemeClr>
+          </a:solidFill>
+        </p:spPr>
+        <p:style>
+          <a:lnRef idx="2">
+            <a:schemeClr val="accent2"/>
+          </a:lnRef>
+          <a:fillRef idx="1">
+            <a:schemeClr val="lt1"/>
+          </a:fillRef>
+          <a:effectRef idx="0">
+            <a:schemeClr val="accent2"/>
+          </a:effectRef>
+          <a:fontRef idx="minor">
+            <a:schemeClr val="dk1"/>
+          </a:fontRef>
+        </p:style>
+        <p:txBody>
+          <a:bodyPr rtlCol="0" anchor="ctr"/>
+          <a:lstStyle/>
+          <a:p>
+            <a:pPr algn="ctr"/>
+            <a:r>
+              <a:rPr lang="pt-PT" sz="2000" dirty="0">
+                <a:solidFill>
+                  <a:schemeClr val="accent2"/>
+                </a:solidFill>
+              </a:rPr>
+              <a:t>1</a:t>
+            </a:r>
+            <a:endParaRPr lang="pt-PT" sz="1100" dirty="0">
+              <a:solidFill>
+                <a:schemeClr val="accent2"/>
+              </a:solidFill>
+            </a:endParaRPr>
+          </a:p>
+        </p:txBody>
+      </p:sp>
+      <p:sp>
+        <p:nvSpPr>
+          <p:cNvPr id="3" name="Oval 2">
+            <a:extLst>
+              <a:ext uri="{FF2B5EF4-FFF2-40B4-BE49-F238E27FC236}">
+                <a16:creationId xmlns:a16="http://schemas.microsoft.com/office/drawing/2014/main" id="{E6110478-6A13-2E86-8920-354FA5706E3C}"/>
+              </a:ext>
+            </a:extLst>
+          </p:cNvPr>
+          <p:cNvSpPr/>
+          <p:nvPr/>
+        </p:nvSpPr>
+        <p:spPr>
+          <a:xfrm>
+            <a:off x="2785700" y="1649050"/>
+            <a:ext cx="360000" cy="360000"/>
+          </a:xfrm>
+          <a:prstGeom prst="ellipse">
+            <a:avLst/>
+          </a:prstGeom>
+          <a:solidFill>
+            <a:schemeClr val="accent2">
+              <a:lumMod val="20000"/>
+              <a:lumOff val="80000"/>
+            </a:schemeClr>
+          </a:solidFill>
+        </p:spPr>
+        <p:style>
+          <a:lnRef idx="2">
+            <a:schemeClr val="accent2"/>
+          </a:lnRef>
+          <a:fillRef idx="1">
+            <a:schemeClr val="lt1"/>
+          </a:fillRef>
+          <a:effectRef idx="0">
+            <a:schemeClr val="accent2"/>
+          </a:effectRef>
+          <a:fontRef idx="minor">
+            <a:schemeClr val="dk1"/>
+          </a:fontRef>
+        </p:style>
+        <p:txBody>
+          <a:bodyPr rtlCol="0" anchor="ctr"/>
+          <a:lstStyle/>
+          <a:p>
+            <a:pPr algn="ctr"/>
+            <a:r>
+              <a:rPr lang="pt-PT" sz="2000" dirty="0">
+                <a:solidFill>
+                  <a:schemeClr val="accent2"/>
+                </a:solidFill>
+              </a:rPr>
+              <a:t>2</a:t>
+            </a:r>
+            <a:endParaRPr lang="pt-PT" sz="1100" dirty="0">
+              <a:solidFill>
+                <a:schemeClr val="accent2"/>
+              </a:solidFill>
+            </a:endParaRPr>
+          </a:p>
+        </p:txBody>
+      </p:sp>
+      <p:sp>
+        <p:nvSpPr>
+          <p:cNvPr id="4" name="Oval 3">
+            <a:extLst>
+              <a:ext uri="{FF2B5EF4-FFF2-40B4-BE49-F238E27FC236}">
+                <a16:creationId xmlns:a16="http://schemas.microsoft.com/office/drawing/2014/main" id="{1D4F8B29-8BB7-3061-51D1-9852414EFFD8}"/>
+              </a:ext>
+            </a:extLst>
+          </p:cNvPr>
+          <p:cNvSpPr/>
+          <p:nvPr/>
+        </p:nvSpPr>
+        <p:spPr>
+          <a:xfrm>
+            <a:off x="3298100" y="1649050"/>
+            <a:ext cx="360000" cy="360000"/>
+          </a:xfrm>
+          <a:prstGeom prst="ellipse">
+            <a:avLst/>
+          </a:prstGeom>
+          <a:solidFill>
+            <a:schemeClr val="accent2">
+              <a:lumMod val="20000"/>
+              <a:lumOff val="80000"/>
+            </a:schemeClr>
+          </a:solidFill>
+        </p:spPr>
+        <p:style>
+          <a:lnRef idx="2">
+            <a:schemeClr val="accent2"/>
+          </a:lnRef>
+          <a:fillRef idx="1">
+            <a:schemeClr val="lt1"/>
+          </a:fillRef>
+          <a:effectRef idx="0">
+            <a:schemeClr val="accent2"/>
+          </a:effectRef>
+          <a:fontRef idx="minor">
+            <a:schemeClr val="dk1"/>
+          </a:fontRef>
+        </p:style>
+        <p:txBody>
+          <a:bodyPr rtlCol="0" anchor="ctr"/>
+          <a:lstStyle/>
+          <a:p>
+            <a:pPr algn="ctr"/>
+            <a:r>
+              <a:rPr lang="pt-PT" sz="2000" dirty="0">
+                <a:solidFill>
+                  <a:schemeClr val="accent2"/>
+                </a:solidFill>
+              </a:rPr>
+              <a:t>3</a:t>
+            </a:r>
+            <a:endParaRPr lang="pt-PT" sz="1100" dirty="0">
+              <a:solidFill>
+                <a:schemeClr val="accent2"/>
+              </a:solidFill>
+            </a:endParaRPr>
+          </a:p>
+        </p:txBody>
+      </p:sp>
+      <p:sp>
+        <p:nvSpPr>
+          <p:cNvPr id="5" name="Oval 4">
+            <a:extLst>
+              <a:ext uri="{FF2B5EF4-FFF2-40B4-BE49-F238E27FC236}">
+                <a16:creationId xmlns:a16="http://schemas.microsoft.com/office/drawing/2014/main" id="{C5FD91B6-EEA4-4507-D035-0B7C3E662676}"/>
+              </a:ext>
+            </a:extLst>
+          </p:cNvPr>
+          <p:cNvSpPr/>
+          <p:nvPr/>
+        </p:nvSpPr>
+        <p:spPr>
+          <a:xfrm>
+            <a:off x="3810500" y="1649050"/>
+            <a:ext cx="360000" cy="360000"/>
+          </a:xfrm>
+          <a:prstGeom prst="ellipse">
+            <a:avLst/>
+          </a:prstGeom>
+          <a:solidFill>
+            <a:schemeClr val="accent2">
+              <a:lumMod val="20000"/>
+              <a:lumOff val="80000"/>
+            </a:schemeClr>
+          </a:solidFill>
+        </p:spPr>
+        <p:style>
+          <a:lnRef idx="2">
+            <a:schemeClr val="accent2"/>
+          </a:lnRef>
+          <a:fillRef idx="1">
+            <a:schemeClr val="lt1"/>
+          </a:fillRef>
+          <a:effectRef idx="0">
+            <a:schemeClr val="accent2"/>
+          </a:effectRef>
+          <a:fontRef idx="minor">
+            <a:schemeClr val="dk1"/>
+          </a:fontRef>
+        </p:style>
+        <p:txBody>
+          <a:bodyPr rtlCol="0" anchor="ctr"/>
+          <a:lstStyle/>
+          <a:p>
+            <a:pPr algn="ctr"/>
+            <a:r>
+              <a:rPr lang="pt-PT" sz="2000" dirty="0">
+                <a:solidFill>
+                  <a:schemeClr val="accent2"/>
+                </a:solidFill>
+              </a:rPr>
+              <a:t>4</a:t>
+            </a:r>
+            <a:endParaRPr lang="pt-PT" sz="1100" dirty="0">
+              <a:solidFill>
+                <a:schemeClr val="accent2"/>
+              </a:solidFill>
+            </a:endParaRPr>
+          </a:p>
+        </p:txBody>
+      </p:sp>
+      <p:sp>
+        <p:nvSpPr>
+          <p:cNvPr id="6" name="Oval 5">
+            <a:extLst>
+              <a:ext uri="{FF2B5EF4-FFF2-40B4-BE49-F238E27FC236}">
+                <a16:creationId xmlns:a16="http://schemas.microsoft.com/office/drawing/2014/main" id="{F4847276-439B-DA4F-B71E-F0DBBEB8B34E}"/>
+              </a:ext>
+            </a:extLst>
+          </p:cNvPr>
+          <p:cNvSpPr/>
+          <p:nvPr/>
+        </p:nvSpPr>
+        <p:spPr>
+          <a:xfrm>
+            <a:off x="4322900" y="1672500"/>
+            <a:ext cx="360000" cy="360000"/>
+          </a:xfrm>
+          <a:prstGeom prst="ellipse">
+            <a:avLst/>
+          </a:prstGeom>
+          <a:solidFill>
+            <a:schemeClr val="accent2">
+              <a:lumMod val="20000"/>
+              <a:lumOff val="80000"/>
+            </a:schemeClr>
+          </a:solidFill>
+        </p:spPr>
+        <p:style>
+          <a:lnRef idx="2">
+            <a:schemeClr val="accent2"/>
+          </a:lnRef>
+          <a:fillRef idx="1">
+            <a:schemeClr val="lt1"/>
+          </a:fillRef>
+          <a:effectRef idx="0">
+            <a:schemeClr val="accent2"/>
+          </a:effectRef>
+          <a:fontRef idx="minor">
+            <a:schemeClr val="dk1"/>
+          </a:fontRef>
+        </p:style>
+        <p:txBody>
+          <a:bodyPr rtlCol="0" anchor="ctr"/>
+          <a:lstStyle/>
+          <a:p>
+            <a:pPr algn="ctr"/>
+            <a:r>
+              <a:rPr lang="pt-PT" sz="2000" dirty="0">
+                <a:solidFill>
+                  <a:schemeClr val="accent2"/>
+                </a:solidFill>
+              </a:rPr>
+              <a:t>5</a:t>
+            </a:r>
+            <a:endParaRPr lang="pt-PT" sz="1100" dirty="0">
+              <a:solidFill>
+                <a:schemeClr val="accent2"/>
+              </a:solidFill>
+            </a:endParaRPr>
+          </a:p>
+        </p:txBody>
+      </p:sp>
+      <p:sp>
+        <p:nvSpPr>
+          <p:cNvPr id="7" name="Oval 6">
+            <a:extLst>
+              <a:ext uri="{FF2B5EF4-FFF2-40B4-BE49-F238E27FC236}">
+                <a16:creationId xmlns:a16="http://schemas.microsoft.com/office/drawing/2014/main" id="{118733FA-F06C-66C1-870E-54D0EE99C013}"/>
+              </a:ext>
+            </a:extLst>
+          </p:cNvPr>
+          <p:cNvSpPr/>
+          <p:nvPr/>
+        </p:nvSpPr>
+        <p:spPr>
+          <a:xfrm>
+            <a:off x="4835300" y="1672500"/>
+            <a:ext cx="360000" cy="360000"/>
+          </a:xfrm>
+          <a:prstGeom prst="ellipse">
+            <a:avLst/>
+          </a:prstGeom>
+          <a:solidFill>
+            <a:schemeClr val="accent2">
+              <a:lumMod val="20000"/>
+              <a:lumOff val="80000"/>
+            </a:schemeClr>
+          </a:solidFill>
+        </p:spPr>
+        <p:style>
+          <a:lnRef idx="2">
+            <a:schemeClr val="accent2"/>
+          </a:lnRef>
+          <a:fillRef idx="1">
+            <a:schemeClr val="lt1"/>
+          </a:fillRef>
+          <a:effectRef idx="0">
+            <a:schemeClr val="accent2"/>
+          </a:effectRef>
+          <a:fontRef idx="minor">
+            <a:schemeClr val="dk1"/>
+          </a:fontRef>
+        </p:style>
+        <p:txBody>
+          <a:bodyPr rtlCol="0" anchor="ctr"/>
+          <a:lstStyle/>
+          <a:p>
+            <a:pPr algn="ctr"/>
+            <a:r>
+              <a:rPr lang="pt-PT" sz="2000" dirty="0">
+                <a:solidFill>
+                  <a:schemeClr val="accent2"/>
+                </a:solidFill>
+              </a:rPr>
+              <a:t>6</a:t>
+            </a:r>
+            <a:endParaRPr lang="pt-PT" sz="1100" dirty="0">
+              <a:solidFill>
+                <a:schemeClr val="accent2"/>
+              </a:solidFill>
+            </a:endParaRPr>
+          </a:p>
+        </p:txBody>
+      </p:sp>
+      <p:sp>
+        <p:nvSpPr>
+          <p:cNvPr id="8" name="Oval 7">
+            <a:extLst>
+              <a:ext uri="{FF2B5EF4-FFF2-40B4-BE49-F238E27FC236}">
+                <a16:creationId xmlns:a16="http://schemas.microsoft.com/office/drawing/2014/main" id="{FF33FE58-86A8-4DA1-7275-3AB45578818A}"/>
+              </a:ext>
+            </a:extLst>
+          </p:cNvPr>
+          <p:cNvSpPr/>
+          <p:nvPr/>
+        </p:nvSpPr>
+        <p:spPr>
+          <a:xfrm>
+            <a:off x="5347700" y="1672500"/>
+            <a:ext cx="360000" cy="360000"/>
+          </a:xfrm>
+          <a:prstGeom prst="ellipse">
+            <a:avLst/>
+          </a:prstGeom>
+          <a:solidFill>
+            <a:schemeClr val="accent2">
+              <a:lumMod val="20000"/>
+              <a:lumOff val="80000"/>
+            </a:schemeClr>
+          </a:solidFill>
+        </p:spPr>
+        <p:style>
+          <a:lnRef idx="2">
+            <a:schemeClr val="accent2"/>
+          </a:lnRef>
+          <a:fillRef idx="1">
+            <a:schemeClr val="lt1"/>
+          </a:fillRef>
+          <a:effectRef idx="0">
+            <a:schemeClr val="accent2"/>
+          </a:effectRef>
+          <a:fontRef idx="minor">
+            <a:schemeClr val="dk1"/>
+          </a:fontRef>
+        </p:style>
+        <p:txBody>
+          <a:bodyPr rtlCol="0" anchor="ctr"/>
+          <a:lstStyle/>
+          <a:p>
+            <a:pPr algn="ctr"/>
+            <a:r>
+              <a:rPr lang="pt-PT" sz="2000" dirty="0">
+                <a:solidFill>
+                  <a:schemeClr val="accent2"/>
+                </a:solidFill>
+              </a:rPr>
+              <a:t>7</a:t>
+            </a:r>
+            <a:endParaRPr lang="pt-PT" sz="1100" dirty="0">
+              <a:solidFill>
+                <a:schemeClr val="accent2"/>
+              </a:solidFill>
+            </a:endParaRPr>
+          </a:p>
+        </p:txBody>
+      </p:sp>
+      <p:sp>
+        <p:nvSpPr>
+          <p:cNvPr id="9" name="Oval 8">
+            <a:extLst>
+              <a:ext uri="{FF2B5EF4-FFF2-40B4-BE49-F238E27FC236}">
+                <a16:creationId xmlns:a16="http://schemas.microsoft.com/office/drawing/2014/main" id="{6AEE2130-FB48-FCC5-81E4-264279432AB3}"/>
+              </a:ext>
+            </a:extLst>
+          </p:cNvPr>
+          <p:cNvSpPr/>
+          <p:nvPr/>
+        </p:nvSpPr>
+        <p:spPr>
+          <a:xfrm>
+            <a:off x="5860100" y="1695950"/>
+            <a:ext cx="360000" cy="360000"/>
+          </a:xfrm>
+          <a:prstGeom prst="ellipse">
+            <a:avLst/>
+          </a:prstGeom>
+          <a:solidFill>
+            <a:schemeClr val="accent2">
+              <a:lumMod val="20000"/>
+              <a:lumOff val="80000"/>
+            </a:schemeClr>
+          </a:solidFill>
+        </p:spPr>
+        <p:style>
+          <a:lnRef idx="2">
+            <a:schemeClr val="accent2"/>
+          </a:lnRef>
+          <a:fillRef idx="1">
+            <a:schemeClr val="lt1"/>
+          </a:fillRef>
+          <a:effectRef idx="0">
+            <a:schemeClr val="accent2"/>
+          </a:effectRef>
+          <a:fontRef idx="minor">
+            <a:schemeClr val="dk1"/>
+          </a:fontRef>
+        </p:style>
+        <p:txBody>
+          <a:bodyPr rtlCol="0" anchor="ctr"/>
+          <a:lstStyle/>
+          <a:p>
+            <a:pPr algn="ctr"/>
+            <a:r>
+              <a:rPr lang="pt-PT" sz="2000" dirty="0">
+                <a:solidFill>
+                  <a:schemeClr val="accent2"/>
+                </a:solidFill>
+              </a:rPr>
+              <a:t>8</a:t>
+            </a:r>
+            <a:endParaRPr lang="pt-PT" sz="1100" dirty="0">
+              <a:solidFill>
+                <a:schemeClr val="accent2"/>
+              </a:solidFill>
+            </a:endParaRPr>
+          </a:p>
+        </p:txBody>
+      </p:sp>
+      <p:sp>
+        <p:nvSpPr>
+          <p:cNvPr id="10" name="Oval 9">
+            <a:extLst>
+              <a:ext uri="{FF2B5EF4-FFF2-40B4-BE49-F238E27FC236}">
+                <a16:creationId xmlns:a16="http://schemas.microsoft.com/office/drawing/2014/main" id="{885802FE-4C06-AE32-119C-2B63D801AF6D}"/>
+              </a:ext>
+            </a:extLst>
+          </p:cNvPr>
+          <p:cNvSpPr/>
+          <p:nvPr/>
+        </p:nvSpPr>
+        <p:spPr>
+          <a:xfrm>
+            <a:off x="6372500" y="1695950"/>
+            <a:ext cx="360000" cy="360000"/>
+          </a:xfrm>
+          <a:prstGeom prst="ellipse">
+            <a:avLst/>
+          </a:prstGeom>
+          <a:solidFill>
+            <a:schemeClr val="accent2">
+              <a:lumMod val="20000"/>
+              <a:lumOff val="80000"/>
+            </a:schemeClr>
+          </a:solidFill>
+        </p:spPr>
+        <p:style>
+          <a:lnRef idx="2">
+            <a:schemeClr val="accent2"/>
+          </a:lnRef>
+          <a:fillRef idx="1">
+            <a:schemeClr val="lt1"/>
+          </a:fillRef>
+          <a:effectRef idx="0">
+            <a:schemeClr val="accent2"/>
+          </a:effectRef>
+          <a:fontRef idx="minor">
+            <a:schemeClr val="dk1"/>
+          </a:fontRef>
+        </p:style>
+        <p:txBody>
+          <a:bodyPr rtlCol="0" anchor="ctr"/>
+          <a:lstStyle/>
+          <a:p>
+            <a:pPr algn="ctr"/>
+            <a:r>
+              <a:rPr lang="pt-PT" sz="2000" dirty="0">
+                <a:solidFill>
+                  <a:schemeClr val="accent2"/>
+                </a:solidFill>
+              </a:rPr>
+              <a:t>9</a:t>
+            </a:r>
+            <a:endParaRPr lang="pt-PT" sz="1100" dirty="0">
+              <a:solidFill>
+                <a:schemeClr val="accent2"/>
+              </a:solidFill>
+            </a:endParaRPr>
+          </a:p>
+        </p:txBody>
+      </p:sp>
+    </p:spTree>
+    <p:extLst>
+      <p:ext uri="{BB962C8B-B14F-4D97-AF65-F5344CB8AC3E}">
+        <p14:creationId xmlns:p14="http://schemas.microsoft.com/office/powerpoint/2010/main" val="3017697166"/>
       </p:ext>
     </p:extLst>
   </p:cSld>

--- a/Entregas/06 Final Report/Cartaz v2.pptx
+++ b/Entregas/06 Final Report/Cartaz v2.pptx
@@ -5,7 +5,7 @@
     <p:sldMasterId id="2147483708" r:id="rId1"/>
   </p:sldMasterIdLst>
   <p:notesMasterIdLst>
-    <p:notesMasterId r:id="rId9"/>
+    <p:notesMasterId r:id="rId10"/>
   </p:notesMasterIdLst>
   <p:sldIdLst>
     <p:sldId id="256" r:id="rId2"/>
@@ -15,6 +15,7 @@
     <p:sldId id="261" r:id="rId6"/>
     <p:sldId id="260" r:id="rId7"/>
     <p:sldId id="262" r:id="rId8"/>
+    <p:sldId id="263" r:id="rId9"/>
   </p:sldIdLst>
   <p:sldSz cx="12801600" cy="9601200" type="A3"/>
   <p:notesSz cx="6858000" cy="9144000"/>
@@ -6081,7 +6082,7 @@
           <a:p>
             <a:fld id="{D8D22204-511D-42DB-B769-E600439F120D}" type="datetimeFigureOut">
               <a:rPr lang="pt-PT" smtClean="0"/>
-              <a:t>16/07/2025</a:t>
+              <a:t>17/07/2025</a:t>
             </a:fld>
             <a:endParaRPr lang="pt-PT"/>
           </a:p>
@@ -7020,7 +7021,7 @@
           <a:p>
             <a:fld id="{FF3E7115-E5A5-49CB-9497-9E6CDBEED4A9}" type="datetimeFigureOut">
               <a:rPr lang="pt-PT" smtClean="0"/>
-              <a:t>16/07/2025</a:t>
+              <a:t>17/07/2025</a:t>
             </a:fld>
             <a:endParaRPr lang="pt-PT"/>
           </a:p>
@@ -7190,7 +7191,7 @@
           <a:p>
             <a:fld id="{FF3E7115-E5A5-49CB-9497-9E6CDBEED4A9}" type="datetimeFigureOut">
               <a:rPr lang="pt-PT" smtClean="0"/>
-              <a:t>16/07/2025</a:t>
+              <a:t>17/07/2025</a:t>
             </a:fld>
             <a:endParaRPr lang="pt-PT"/>
           </a:p>
@@ -7370,7 +7371,7 @@
           <a:p>
             <a:fld id="{FF3E7115-E5A5-49CB-9497-9E6CDBEED4A9}" type="datetimeFigureOut">
               <a:rPr lang="pt-PT" smtClean="0"/>
-              <a:t>16/07/2025</a:t>
+              <a:t>17/07/2025</a:t>
             </a:fld>
             <a:endParaRPr lang="pt-PT"/>
           </a:p>
@@ -7540,7 +7541,7 @@
           <a:p>
             <a:fld id="{FF3E7115-E5A5-49CB-9497-9E6CDBEED4A9}" type="datetimeFigureOut">
               <a:rPr lang="pt-PT" smtClean="0"/>
-              <a:t>16/07/2025</a:t>
+              <a:t>17/07/2025</a:t>
             </a:fld>
             <a:endParaRPr lang="pt-PT"/>
           </a:p>
@@ -7786,7 +7787,7 @@
           <a:p>
             <a:fld id="{FF3E7115-E5A5-49CB-9497-9E6CDBEED4A9}" type="datetimeFigureOut">
               <a:rPr lang="pt-PT" smtClean="0"/>
-              <a:t>16/07/2025</a:t>
+              <a:t>17/07/2025</a:t>
             </a:fld>
             <a:endParaRPr lang="pt-PT"/>
           </a:p>
@@ -8018,7 +8019,7 @@
           <a:p>
             <a:fld id="{FF3E7115-E5A5-49CB-9497-9E6CDBEED4A9}" type="datetimeFigureOut">
               <a:rPr lang="pt-PT" smtClean="0"/>
-              <a:t>16/07/2025</a:t>
+              <a:t>17/07/2025</a:t>
             </a:fld>
             <a:endParaRPr lang="pt-PT"/>
           </a:p>
@@ -8385,7 +8386,7 @@
           <a:p>
             <a:fld id="{FF3E7115-E5A5-49CB-9497-9E6CDBEED4A9}" type="datetimeFigureOut">
               <a:rPr lang="pt-PT" smtClean="0"/>
-              <a:t>16/07/2025</a:t>
+              <a:t>17/07/2025</a:t>
             </a:fld>
             <a:endParaRPr lang="pt-PT"/>
           </a:p>
@@ -8503,7 +8504,7 @@
           <a:p>
             <a:fld id="{FF3E7115-E5A5-49CB-9497-9E6CDBEED4A9}" type="datetimeFigureOut">
               <a:rPr lang="pt-PT" smtClean="0"/>
-              <a:t>16/07/2025</a:t>
+              <a:t>17/07/2025</a:t>
             </a:fld>
             <a:endParaRPr lang="pt-PT"/>
           </a:p>
@@ -8598,7 +8599,7 @@
           <a:p>
             <a:fld id="{FF3E7115-E5A5-49CB-9497-9E6CDBEED4A9}" type="datetimeFigureOut">
               <a:rPr lang="pt-PT" smtClean="0"/>
-              <a:t>16/07/2025</a:t>
+              <a:t>17/07/2025</a:t>
             </a:fld>
             <a:endParaRPr lang="pt-PT"/>
           </a:p>
@@ -8875,7 +8876,7 @@
           <a:p>
             <a:fld id="{FF3E7115-E5A5-49CB-9497-9E6CDBEED4A9}" type="datetimeFigureOut">
               <a:rPr lang="pt-PT" smtClean="0"/>
-              <a:t>16/07/2025</a:t>
+              <a:t>17/07/2025</a:t>
             </a:fld>
             <a:endParaRPr lang="pt-PT"/>
           </a:p>
@@ -9132,7 +9133,7 @@
           <a:p>
             <a:fld id="{FF3E7115-E5A5-49CB-9497-9E6CDBEED4A9}" type="datetimeFigureOut">
               <a:rPr lang="pt-PT" smtClean="0"/>
-              <a:t>16/07/2025</a:t>
+              <a:t>17/07/2025</a:t>
             </a:fld>
             <a:endParaRPr lang="pt-PT"/>
           </a:p>
@@ -9345,7 +9346,7 @@
           <a:p>
             <a:fld id="{FF3E7115-E5A5-49CB-9497-9E6CDBEED4A9}" type="datetimeFigureOut">
               <a:rPr lang="pt-PT" smtClean="0"/>
-              <a:t>16/07/2025</a:t>
+              <a:t>17/07/2025</a:t>
             </a:fld>
             <a:endParaRPr lang="pt-PT"/>
           </a:p>
@@ -19723,7 +19724,7 @@
         </p:nvSpPr>
         <p:spPr>
           <a:xfrm>
-            <a:off x="2273300" y="1625600"/>
+            <a:off x="2273300" y="1660775"/>
             <a:ext cx="360000" cy="360000"/>
           </a:xfrm>
           <a:prstGeom prst="ellipse">
@@ -19785,7 +19786,7 @@
         </p:nvSpPr>
         <p:spPr>
           <a:xfrm>
-            <a:off x="2785700" y="1649050"/>
+            <a:off x="2785700" y="1660775"/>
             <a:ext cx="360000" cy="360000"/>
           </a:xfrm>
           <a:prstGeom prst="ellipse">
@@ -19847,7 +19848,7 @@
         </p:nvSpPr>
         <p:spPr>
           <a:xfrm>
-            <a:off x="3298100" y="1649050"/>
+            <a:off x="3298100" y="1660775"/>
             <a:ext cx="360000" cy="360000"/>
           </a:xfrm>
           <a:prstGeom prst="ellipse">
@@ -19909,7 +19910,7 @@
         </p:nvSpPr>
         <p:spPr>
           <a:xfrm>
-            <a:off x="3810500" y="1649050"/>
+            <a:off x="3810500" y="1660775"/>
             <a:ext cx="360000" cy="360000"/>
           </a:xfrm>
           <a:prstGeom prst="ellipse">
@@ -19971,7 +19972,7 @@
         </p:nvSpPr>
         <p:spPr>
           <a:xfrm>
-            <a:off x="4322900" y="1672500"/>
+            <a:off x="4322900" y="1660775"/>
             <a:ext cx="360000" cy="360000"/>
           </a:xfrm>
           <a:prstGeom prst="ellipse">
@@ -20033,7 +20034,7 @@
         </p:nvSpPr>
         <p:spPr>
           <a:xfrm>
-            <a:off x="4835300" y="1672500"/>
+            <a:off x="4835300" y="1660775"/>
             <a:ext cx="360000" cy="360000"/>
           </a:xfrm>
           <a:prstGeom prst="ellipse">
@@ -20095,7 +20096,7 @@
         </p:nvSpPr>
         <p:spPr>
           <a:xfrm>
-            <a:off x="5347700" y="1672500"/>
+            <a:off x="5347700" y="1660775"/>
             <a:ext cx="360000" cy="360000"/>
           </a:xfrm>
           <a:prstGeom prst="ellipse">
@@ -20157,7 +20158,7 @@
         </p:nvSpPr>
         <p:spPr>
           <a:xfrm>
-            <a:off x="5860100" y="1695950"/>
+            <a:off x="5860100" y="1660775"/>
             <a:ext cx="360000" cy="360000"/>
           </a:xfrm>
           <a:prstGeom prst="ellipse">
@@ -20219,7 +20220,7 @@
         </p:nvSpPr>
         <p:spPr>
           <a:xfrm>
-            <a:off x="6372500" y="1695950"/>
+            <a:off x="6372500" y="1660775"/>
             <a:ext cx="360000" cy="360000"/>
           </a:xfrm>
           <a:prstGeom prst="ellipse">
@@ -20271,6 +20272,1788 @@
     <p:extLst>
       <p:ext uri="{BB962C8B-B14F-4D97-AF65-F5344CB8AC3E}">
         <p14:creationId xmlns:p14="http://schemas.microsoft.com/office/powerpoint/2010/main" val="3017697166"/>
+      </p:ext>
+    </p:extLst>
+  </p:cSld>
+  <p:clrMapOvr>
+    <a:masterClrMapping/>
+  </p:clrMapOvr>
+</p:sld>
+</file>
+
+<file path=ppt/slides/slide8.xml><?xml version="1.0" encoding="utf-8"?>
+<p:sld xmlns:a="http://schemas.openxmlformats.org/drawingml/2006/main" xmlns:r="http://schemas.openxmlformats.org/officeDocument/2006/relationships" xmlns:p="http://schemas.openxmlformats.org/presentationml/2006/main">
+  <p:cSld>
+    <p:spTree>
+      <p:nvGrpSpPr>
+        <p:cNvPr id="1" name=""/>
+        <p:cNvGrpSpPr/>
+        <p:nvPr/>
+      </p:nvGrpSpPr>
+      <p:grpSpPr>
+        <a:xfrm>
+          <a:off x="0" y="0"/>
+          <a:ext cx="0" cy="0"/>
+          <a:chOff x="0" y="0"/>
+          <a:chExt cx="0" cy="0"/>
+        </a:xfrm>
+      </p:grpSpPr>
+      <p:sp>
+        <p:nvSpPr>
+          <p:cNvPr id="3" name="Retângulo: Cantos Arredondados 2">
+            <a:extLst>
+              <a:ext uri="{FF2B5EF4-FFF2-40B4-BE49-F238E27FC236}">
+                <a16:creationId xmlns:a16="http://schemas.microsoft.com/office/drawing/2014/main" id="{DFB80908-B472-3691-BCF4-95748E37C977}"/>
+              </a:ext>
+            </a:extLst>
+          </p:cNvPr>
+          <p:cNvSpPr/>
+          <p:nvPr/>
+        </p:nvSpPr>
+        <p:spPr>
+          <a:xfrm>
+            <a:off x="5435200" y="522514"/>
+            <a:ext cx="1728000" cy="720000"/>
+          </a:xfrm>
+          <a:prstGeom prst="roundRect">
+            <a:avLst/>
+          </a:prstGeom>
+          <a:ln w="31750"/>
+        </p:spPr>
+        <p:style>
+          <a:lnRef idx="2">
+            <a:schemeClr val="accent3"/>
+          </a:lnRef>
+          <a:fillRef idx="1">
+            <a:schemeClr val="lt1"/>
+          </a:fillRef>
+          <a:effectRef idx="0">
+            <a:schemeClr val="accent3"/>
+          </a:effectRef>
+          <a:fontRef idx="minor">
+            <a:schemeClr val="dk1"/>
+          </a:fontRef>
+        </p:style>
+        <p:txBody>
+          <a:bodyPr rtlCol="0" anchor="ctr"/>
+          <a:lstStyle/>
+          <a:p>
+            <a:pPr algn="ctr"/>
+            <a:r>
+              <a:rPr lang="pt-PT" dirty="0"/>
+              <a:t>Inicio / Login</a:t>
+            </a:r>
+          </a:p>
+        </p:txBody>
+      </p:sp>
+      <p:cxnSp>
+        <p:nvCxnSpPr>
+          <p:cNvPr id="8" name="Conexão reta unidirecional 7">
+            <a:extLst>
+              <a:ext uri="{FF2B5EF4-FFF2-40B4-BE49-F238E27FC236}">
+                <a16:creationId xmlns:a16="http://schemas.microsoft.com/office/drawing/2014/main" id="{EFD7567A-7E90-B310-1477-1044E38989B6}"/>
+              </a:ext>
+            </a:extLst>
+          </p:cNvPr>
+          <p:cNvCxnSpPr>
+            <a:cxnSpLocks/>
+            <a:stCxn id="3" idx="2"/>
+            <a:endCxn id="41" idx="0"/>
+          </p:cNvCxnSpPr>
+          <p:nvPr/>
+        </p:nvCxnSpPr>
+        <p:spPr>
+          <a:xfrm flipH="1">
+            <a:off x="6299199" y="1242514"/>
+            <a:ext cx="1" cy="342633"/>
+          </a:xfrm>
+          <a:prstGeom prst="straightConnector1">
+            <a:avLst/>
+          </a:prstGeom>
+          <a:ln w="31750">
+            <a:tailEnd type="triangle"/>
+          </a:ln>
+        </p:spPr>
+        <p:style>
+          <a:lnRef idx="2">
+            <a:schemeClr val="accent3"/>
+          </a:lnRef>
+          <a:fillRef idx="0">
+            <a:schemeClr val="accent3"/>
+          </a:fillRef>
+          <a:effectRef idx="1">
+            <a:schemeClr val="accent3"/>
+          </a:effectRef>
+          <a:fontRef idx="minor">
+            <a:schemeClr val="tx1"/>
+          </a:fontRef>
+        </p:style>
+      </p:cxnSp>
+      <p:cxnSp>
+        <p:nvCxnSpPr>
+          <p:cNvPr id="10" name="Conexão reta unidirecional 9">
+            <a:extLst>
+              <a:ext uri="{FF2B5EF4-FFF2-40B4-BE49-F238E27FC236}">
+                <a16:creationId xmlns:a16="http://schemas.microsoft.com/office/drawing/2014/main" id="{C1708409-074C-054F-AD8D-922F599C1D31}"/>
+              </a:ext>
+            </a:extLst>
+          </p:cNvPr>
+          <p:cNvCxnSpPr>
+            <a:cxnSpLocks/>
+            <a:stCxn id="41" idx="1"/>
+            <a:endCxn id="43" idx="0"/>
+          </p:cNvCxnSpPr>
+          <p:nvPr/>
+        </p:nvCxnSpPr>
+        <p:spPr>
+          <a:xfrm rot="10800000" flipV="1">
+            <a:off x="4023735" y="2125146"/>
+            <a:ext cx="1195464" cy="813529"/>
+          </a:xfrm>
+          <a:prstGeom prst="bentConnector2">
+            <a:avLst/>
+          </a:prstGeom>
+          <a:ln w="31750">
+            <a:tailEnd type="triangle"/>
+          </a:ln>
+        </p:spPr>
+        <p:style>
+          <a:lnRef idx="2">
+            <a:schemeClr val="accent3"/>
+          </a:lnRef>
+          <a:fillRef idx="0">
+            <a:schemeClr val="accent3"/>
+          </a:fillRef>
+          <a:effectRef idx="1">
+            <a:schemeClr val="accent3"/>
+          </a:effectRef>
+          <a:fontRef idx="minor">
+            <a:schemeClr val="tx1"/>
+          </a:fontRef>
+        </p:style>
+      </p:cxnSp>
+      <p:cxnSp>
+        <p:nvCxnSpPr>
+          <p:cNvPr id="13" name="Conexão reta unidirecional 9">
+            <a:extLst>
+              <a:ext uri="{FF2B5EF4-FFF2-40B4-BE49-F238E27FC236}">
+                <a16:creationId xmlns:a16="http://schemas.microsoft.com/office/drawing/2014/main" id="{A92C0769-234E-9618-40AA-A52F916274E3}"/>
+              </a:ext>
+            </a:extLst>
+          </p:cNvPr>
+          <p:cNvCxnSpPr>
+            <a:cxnSpLocks/>
+            <a:stCxn id="41" idx="3"/>
+            <a:endCxn id="50" idx="0"/>
+          </p:cNvCxnSpPr>
+          <p:nvPr/>
+        </p:nvCxnSpPr>
+        <p:spPr>
+          <a:xfrm>
+            <a:off x="7379199" y="2125147"/>
+            <a:ext cx="1370161" cy="813529"/>
+          </a:xfrm>
+          <a:prstGeom prst="bentConnector2">
+            <a:avLst/>
+          </a:prstGeom>
+          <a:ln w="31750">
+            <a:tailEnd type="triangle"/>
+          </a:ln>
+        </p:spPr>
+        <p:style>
+          <a:lnRef idx="2">
+            <a:schemeClr val="accent3"/>
+          </a:lnRef>
+          <a:fillRef idx="0">
+            <a:schemeClr val="accent3"/>
+          </a:fillRef>
+          <a:effectRef idx="1">
+            <a:schemeClr val="accent3"/>
+          </a:effectRef>
+          <a:fontRef idx="minor">
+            <a:schemeClr val="tx1"/>
+          </a:fontRef>
+        </p:style>
+      </p:cxnSp>
+      <p:pic>
+        <p:nvPicPr>
+          <p:cNvPr id="17" name="Gráfico 16">
+            <a:extLst>
+              <a:ext uri="{FF2B5EF4-FFF2-40B4-BE49-F238E27FC236}">
+                <a16:creationId xmlns:a16="http://schemas.microsoft.com/office/drawing/2014/main" id="{6E3A4D56-2F88-121F-5A43-7E9D28176412}"/>
+              </a:ext>
+            </a:extLst>
+          </p:cNvPr>
+          <p:cNvPicPr>
+            <a:picLocks noChangeAspect="1"/>
+          </p:cNvPicPr>
+          <p:nvPr/>
+        </p:nvPicPr>
+        <p:blipFill>
+          <a:blip r:embed="rId2">
+            <a:extLst>
+              <a:ext uri="{96DAC541-7B7A-43D3-8B79-37D633B846F1}">
+                <asvg:svgBlip xmlns:asvg="http://schemas.microsoft.com/office/drawing/2016/SVG/main" r:embed="rId3"/>
+              </a:ext>
+            </a:extLst>
+          </a:blip>
+          <a:stretch>
+            <a:fillRect/>
+          </a:stretch>
+        </p:blipFill>
+        <p:spPr>
+          <a:xfrm>
+            <a:off x="4100798" y="2125147"/>
+            <a:ext cx="540000" cy="540000"/>
+          </a:xfrm>
+          <a:prstGeom prst="rect">
+            <a:avLst/>
+          </a:prstGeom>
+        </p:spPr>
+      </p:pic>
+      <p:pic>
+        <p:nvPicPr>
+          <p:cNvPr id="19" name="Gráfico 18">
+            <a:extLst>
+              <a:ext uri="{FF2B5EF4-FFF2-40B4-BE49-F238E27FC236}">
+                <a16:creationId xmlns:a16="http://schemas.microsoft.com/office/drawing/2014/main" id="{D6463F69-64BB-4383-1EE7-A0C8F86C195B}"/>
+              </a:ext>
+            </a:extLst>
+          </p:cNvPr>
+          <p:cNvPicPr>
+            <a:picLocks noChangeAspect="1"/>
+          </p:cNvPicPr>
+          <p:nvPr/>
+        </p:nvPicPr>
+        <p:blipFill>
+          <a:blip r:embed="rId4">
+            <a:extLst>
+              <a:ext uri="{96DAC541-7B7A-43D3-8B79-37D633B846F1}">
+                <asvg:svgBlip xmlns:asvg="http://schemas.microsoft.com/office/drawing/2016/SVG/main" r:embed="rId5"/>
+              </a:ext>
+            </a:extLst>
+          </a:blip>
+          <a:stretch>
+            <a:fillRect/>
+          </a:stretch>
+        </p:blipFill>
+        <p:spPr>
+          <a:xfrm>
+            <a:off x="8090397" y="2136745"/>
+            <a:ext cx="540000" cy="540000"/>
+          </a:xfrm>
+          <a:prstGeom prst="rect">
+            <a:avLst/>
+          </a:prstGeom>
+        </p:spPr>
+      </p:pic>
+      <p:sp>
+        <p:nvSpPr>
+          <p:cNvPr id="20" name="Retângulo: Cantos Arredondados 19">
+            <a:extLst>
+              <a:ext uri="{FF2B5EF4-FFF2-40B4-BE49-F238E27FC236}">
+                <a16:creationId xmlns:a16="http://schemas.microsoft.com/office/drawing/2014/main" id="{1CFF9E1C-2A3F-4B4A-D2F8-F5DAE968A446}"/>
+              </a:ext>
+            </a:extLst>
+          </p:cNvPr>
+          <p:cNvSpPr/>
+          <p:nvPr/>
+        </p:nvSpPr>
+        <p:spPr>
+          <a:xfrm>
+            <a:off x="4867211" y="4237159"/>
+            <a:ext cx="1728000" cy="864000"/>
+          </a:xfrm>
+          <a:prstGeom prst="roundRect">
+            <a:avLst/>
+          </a:prstGeom>
+          <a:ln w="31750"/>
+        </p:spPr>
+        <p:style>
+          <a:lnRef idx="2">
+            <a:schemeClr val="accent3"/>
+          </a:lnRef>
+          <a:fillRef idx="1">
+            <a:schemeClr val="lt1"/>
+          </a:fillRef>
+          <a:effectRef idx="0">
+            <a:schemeClr val="accent3"/>
+          </a:effectRef>
+          <a:fontRef idx="minor">
+            <a:schemeClr val="dk1"/>
+          </a:fontRef>
+        </p:style>
+        <p:txBody>
+          <a:bodyPr rtlCol="0" anchor="ctr"/>
+          <a:lstStyle/>
+          <a:p>
+            <a:pPr algn="ctr"/>
+            <a:r>
+              <a:rPr lang="pt-PT" dirty="0"/>
+              <a:t>Devolve JWT</a:t>
+            </a:r>
+          </a:p>
+        </p:txBody>
+      </p:sp>
+      <p:sp>
+        <p:nvSpPr>
+          <p:cNvPr id="21" name="Retângulo: Cantos Arredondados 20">
+            <a:extLst>
+              <a:ext uri="{FF2B5EF4-FFF2-40B4-BE49-F238E27FC236}">
+                <a16:creationId xmlns:a16="http://schemas.microsoft.com/office/drawing/2014/main" id="{3E63C6F7-37C5-46EC-1C10-7465A74E8B85}"/>
+              </a:ext>
+            </a:extLst>
+          </p:cNvPr>
+          <p:cNvSpPr/>
+          <p:nvPr/>
+        </p:nvSpPr>
+        <p:spPr>
+          <a:xfrm>
+            <a:off x="9528815" y="4237159"/>
+            <a:ext cx="1728000" cy="864000"/>
+          </a:xfrm>
+          <a:prstGeom prst="roundRect">
+            <a:avLst/>
+          </a:prstGeom>
+          <a:ln w="31750"/>
+        </p:spPr>
+        <p:style>
+          <a:lnRef idx="2">
+            <a:schemeClr val="accent3"/>
+          </a:lnRef>
+          <a:fillRef idx="1">
+            <a:schemeClr val="lt1"/>
+          </a:fillRef>
+          <a:effectRef idx="0">
+            <a:schemeClr val="accent3"/>
+          </a:effectRef>
+          <a:fontRef idx="minor">
+            <a:schemeClr val="dk1"/>
+          </a:fontRef>
+        </p:style>
+        <p:txBody>
+          <a:bodyPr rtlCol="0" anchor="ctr"/>
+          <a:lstStyle/>
+          <a:p>
+            <a:pPr algn="ctr"/>
+            <a:r>
+              <a:rPr lang="pt-PT" sz="1600" dirty="0"/>
+              <a:t>User/Password inválidas</a:t>
+            </a:r>
+          </a:p>
+        </p:txBody>
+      </p:sp>
+      <p:sp>
+        <p:nvSpPr>
+          <p:cNvPr id="22" name="Retângulo: Cantos Arredondados 21">
+            <a:extLst>
+              <a:ext uri="{FF2B5EF4-FFF2-40B4-BE49-F238E27FC236}">
+                <a16:creationId xmlns:a16="http://schemas.microsoft.com/office/drawing/2014/main" id="{A55F615A-A9F4-D6E8-DB18-6F9F3D0A0227}"/>
+              </a:ext>
+            </a:extLst>
+          </p:cNvPr>
+          <p:cNvSpPr/>
+          <p:nvPr/>
+        </p:nvSpPr>
+        <p:spPr>
+          <a:xfrm>
+            <a:off x="7885360" y="7044053"/>
+            <a:ext cx="1728000" cy="864000"/>
+          </a:xfrm>
+          <a:prstGeom prst="roundRect">
+            <a:avLst/>
+          </a:prstGeom>
+          <a:ln w="31750"/>
+        </p:spPr>
+        <p:style>
+          <a:lnRef idx="2">
+            <a:schemeClr val="accent3"/>
+          </a:lnRef>
+          <a:fillRef idx="1">
+            <a:schemeClr val="lt1"/>
+          </a:fillRef>
+          <a:effectRef idx="0">
+            <a:schemeClr val="accent3"/>
+          </a:effectRef>
+          <a:fontRef idx="minor">
+            <a:schemeClr val="dk1"/>
+          </a:fontRef>
+        </p:style>
+        <p:txBody>
+          <a:bodyPr rtlCol="0" anchor="ctr"/>
+          <a:lstStyle/>
+          <a:p>
+            <a:pPr algn="ctr"/>
+            <a:r>
+              <a:rPr lang="pt-PT" dirty="0"/>
+              <a:t>Acesso permitido</a:t>
+            </a:r>
+          </a:p>
+        </p:txBody>
+      </p:sp>
+      <p:cxnSp>
+        <p:nvCxnSpPr>
+          <p:cNvPr id="23" name="Conexão reta unidirecional 9">
+            <a:extLst>
+              <a:ext uri="{FF2B5EF4-FFF2-40B4-BE49-F238E27FC236}">
+                <a16:creationId xmlns:a16="http://schemas.microsoft.com/office/drawing/2014/main" id="{9DC5B586-1576-6E93-1B1B-0A7F96077C14}"/>
+              </a:ext>
+            </a:extLst>
+          </p:cNvPr>
+          <p:cNvCxnSpPr>
+            <a:cxnSpLocks/>
+            <a:stCxn id="43" idx="3"/>
+            <a:endCxn id="20" idx="0"/>
+          </p:cNvCxnSpPr>
+          <p:nvPr/>
+        </p:nvCxnSpPr>
+        <p:spPr>
+          <a:xfrm>
+            <a:off x="5103735" y="3478676"/>
+            <a:ext cx="627476" cy="758483"/>
+          </a:xfrm>
+          <a:prstGeom prst="bentConnector2">
+            <a:avLst/>
+          </a:prstGeom>
+          <a:ln w="31750">
+            <a:tailEnd type="triangle"/>
+          </a:ln>
+        </p:spPr>
+        <p:style>
+          <a:lnRef idx="2">
+            <a:schemeClr val="accent3"/>
+          </a:lnRef>
+          <a:fillRef idx="0">
+            <a:schemeClr val="accent3"/>
+          </a:fillRef>
+          <a:effectRef idx="1">
+            <a:schemeClr val="accent3"/>
+          </a:effectRef>
+          <a:fontRef idx="minor">
+            <a:schemeClr val="tx1"/>
+          </a:fontRef>
+        </p:style>
+      </p:cxnSp>
+      <p:cxnSp>
+        <p:nvCxnSpPr>
+          <p:cNvPr id="26" name="Conexão reta unidirecional 9">
+            <a:extLst>
+              <a:ext uri="{FF2B5EF4-FFF2-40B4-BE49-F238E27FC236}">
+                <a16:creationId xmlns:a16="http://schemas.microsoft.com/office/drawing/2014/main" id="{99C33D5C-70C3-841C-391E-DB354FEB672D}"/>
+              </a:ext>
+            </a:extLst>
+          </p:cNvPr>
+          <p:cNvCxnSpPr>
+            <a:cxnSpLocks/>
+            <a:stCxn id="43" idx="1"/>
+            <a:endCxn id="69" idx="0"/>
+          </p:cNvCxnSpPr>
+          <p:nvPr/>
+        </p:nvCxnSpPr>
+        <p:spPr>
+          <a:xfrm rot="10800000" flipV="1">
+            <a:off x="2391545" y="3478675"/>
+            <a:ext cx="552191" cy="758483"/>
+          </a:xfrm>
+          <a:prstGeom prst="bentConnector2">
+            <a:avLst/>
+          </a:prstGeom>
+          <a:ln w="31750">
+            <a:solidFill>
+              <a:srgbClr val="FF0000"/>
+            </a:solidFill>
+            <a:tailEnd type="triangle"/>
+          </a:ln>
+        </p:spPr>
+        <p:style>
+          <a:lnRef idx="2">
+            <a:schemeClr val="accent3"/>
+          </a:lnRef>
+          <a:fillRef idx="0">
+            <a:schemeClr val="accent3"/>
+          </a:fillRef>
+          <a:effectRef idx="1">
+            <a:schemeClr val="accent3"/>
+          </a:effectRef>
+          <a:fontRef idx="minor">
+            <a:schemeClr val="tx1"/>
+          </a:fontRef>
+        </p:style>
+      </p:cxnSp>
+      <p:cxnSp>
+        <p:nvCxnSpPr>
+          <p:cNvPr id="29" name="Conexão reta unidirecional 9">
+            <a:extLst>
+              <a:ext uri="{FF2B5EF4-FFF2-40B4-BE49-F238E27FC236}">
+                <a16:creationId xmlns:a16="http://schemas.microsoft.com/office/drawing/2014/main" id="{0E02361E-592F-9EA0-EF1E-6675F6BC4EB9}"/>
+              </a:ext>
+            </a:extLst>
+          </p:cNvPr>
+          <p:cNvCxnSpPr>
+            <a:cxnSpLocks/>
+            <a:stCxn id="59" idx="3"/>
+            <a:endCxn id="22" idx="0"/>
+          </p:cNvCxnSpPr>
+          <p:nvPr/>
+        </p:nvCxnSpPr>
+        <p:spPr>
+          <a:xfrm>
+            <a:off x="6813143" y="6069198"/>
+            <a:ext cx="1936217" cy="974855"/>
+          </a:xfrm>
+          <a:prstGeom prst="bentConnector2">
+            <a:avLst/>
+          </a:prstGeom>
+          <a:ln w="31750">
+            <a:tailEnd type="triangle"/>
+          </a:ln>
+        </p:spPr>
+        <p:style>
+          <a:lnRef idx="2">
+            <a:schemeClr val="accent3"/>
+          </a:lnRef>
+          <a:fillRef idx="0">
+            <a:schemeClr val="accent3"/>
+          </a:fillRef>
+          <a:effectRef idx="1">
+            <a:schemeClr val="accent3"/>
+          </a:effectRef>
+          <a:fontRef idx="minor">
+            <a:schemeClr val="tx1"/>
+          </a:fontRef>
+        </p:style>
+      </p:cxnSp>
+      <p:cxnSp>
+        <p:nvCxnSpPr>
+          <p:cNvPr id="32" name="Conexão reta unidirecional 9">
+            <a:extLst>
+              <a:ext uri="{FF2B5EF4-FFF2-40B4-BE49-F238E27FC236}">
+                <a16:creationId xmlns:a16="http://schemas.microsoft.com/office/drawing/2014/main" id="{FDE2CDA6-262D-1AA0-FC5F-E32076C7EEF0}"/>
+              </a:ext>
+            </a:extLst>
+          </p:cNvPr>
+          <p:cNvCxnSpPr>
+            <a:cxnSpLocks/>
+            <a:stCxn id="50" idx="3"/>
+            <a:endCxn id="21" idx="0"/>
+          </p:cNvCxnSpPr>
+          <p:nvPr/>
+        </p:nvCxnSpPr>
+        <p:spPr>
+          <a:xfrm>
+            <a:off x="9829360" y="3478676"/>
+            <a:ext cx="563455" cy="758483"/>
+          </a:xfrm>
+          <a:prstGeom prst="bentConnector2">
+            <a:avLst/>
+          </a:prstGeom>
+          <a:ln w="31750">
+            <a:solidFill>
+              <a:srgbClr val="FF0000"/>
+            </a:solidFill>
+            <a:tailEnd type="triangle"/>
+          </a:ln>
+        </p:spPr>
+        <p:style>
+          <a:lnRef idx="2">
+            <a:schemeClr val="accent3"/>
+          </a:lnRef>
+          <a:fillRef idx="0">
+            <a:schemeClr val="accent3"/>
+          </a:fillRef>
+          <a:effectRef idx="1">
+            <a:schemeClr val="accent3"/>
+          </a:effectRef>
+          <a:fontRef idx="minor">
+            <a:schemeClr val="tx1"/>
+          </a:fontRef>
+        </p:style>
+      </p:cxnSp>
+      <p:sp>
+        <p:nvSpPr>
+          <p:cNvPr id="38" name="Retângulo 37">
+            <a:extLst>
+              <a:ext uri="{FF2B5EF4-FFF2-40B4-BE49-F238E27FC236}">
+                <a16:creationId xmlns:a16="http://schemas.microsoft.com/office/drawing/2014/main" id="{4773AAE4-5269-52E7-9208-AF10BD1087FD}"/>
+              </a:ext>
+            </a:extLst>
+          </p:cNvPr>
+          <p:cNvSpPr/>
+          <p:nvPr/>
+        </p:nvSpPr>
+        <p:spPr>
+          <a:xfrm>
+            <a:off x="5035187" y="3451494"/>
+            <a:ext cx="696024" cy="461665"/>
+          </a:xfrm>
+          <a:prstGeom prst="rect">
+            <a:avLst/>
+          </a:prstGeom>
+          <a:noFill/>
+        </p:spPr>
+        <p:txBody>
+          <a:bodyPr wrap="none" lIns="91440" tIns="45720" rIns="91440" bIns="45720">
+            <a:spAutoFit/>
+          </a:bodyPr>
+          <a:lstStyle/>
+          <a:p>
+            <a:pPr algn="ctr"/>
+            <a:r>
+              <a:rPr lang="pt-PT" sz="2400" b="0" cap="none" spc="0" dirty="0">
+                <a:ln w="0"/>
+                <a:solidFill>
+                  <a:schemeClr val="tx1"/>
+                </a:solidFill>
+                <a:effectLst>
+                  <a:outerShdw blurRad="38100" dist="19050" dir="2700000" algn="tl" rotWithShape="0">
+                    <a:schemeClr val="dk1">
+                      <a:alpha val="40000"/>
+                    </a:schemeClr>
+                  </a:outerShdw>
+                </a:effectLst>
+              </a:rPr>
+              <a:t>Sim</a:t>
+            </a:r>
+          </a:p>
+        </p:txBody>
+      </p:sp>
+      <p:sp>
+        <p:nvSpPr>
+          <p:cNvPr id="39" name="Retângulo 38">
+            <a:extLst>
+              <a:ext uri="{FF2B5EF4-FFF2-40B4-BE49-F238E27FC236}">
+                <a16:creationId xmlns:a16="http://schemas.microsoft.com/office/drawing/2014/main" id="{99789D91-7B2A-19AF-A141-7C2E8E9DAF63}"/>
+              </a:ext>
+            </a:extLst>
+          </p:cNvPr>
+          <p:cNvSpPr/>
+          <p:nvPr/>
+        </p:nvSpPr>
+        <p:spPr>
+          <a:xfrm>
+            <a:off x="8037513" y="3914623"/>
+            <a:ext cx="696024" cy="461665"/>
+          </a:xfrm>
+          <a:prstGeom prst="rect">
+            <a:avLst/>
+          </a:prstGeom>
+          <a:noFill/>
+        </p:spPr>
+        <p:txBody>
+          <a:bodyPr wrap="none" lIns="91440" tIns="45720" rIns="91440" bIns="45720">
+            <a:spAutoFit/>
+          </a:bodyPr>
+          <a:lstStyle/>
+          <a:p>
+            <a:pPr algn="ctr"/>
+            <a:r>
+              <a:rPr lang="pt-PT" sz="2400" b="0" cap="none" spc="0" dirty="0">
+                <a:ln w="0"/>
+                <a:solidFill>
+                  <a:schemeClr val="tx1"/>
+                </a:solidFill>
+                <a:effectLst>
+                  <a:outerShdw blurRad="38100" dist="19050" dir="2700000" algn="tl" rotWithShape="0">
+                    <a:schemeClr val="dk1">
+                      <a:alpha val="40000"/>
+                    </a:schemeClr>
+                  </a:outerShdw>
+                </a:effectLst>
+              </a:rPr>
+              <a:t>Sim</a:t>
+            </a:r>
+          </a:p>
+        </p:txBody>
+      </p:sp>
+      <p:sp>
+        <p:nvSpPr>
+          <p:cNvPr id="40" name="Retângulo 39">
+            <a:extLst>
+              <a:ext uri="{FF2B5EF4-FFF2-40B4-BE49-F238E27FC236}">
+                <a16:creationId xmlns:a16="http://schemas.microsoft.com/office/drawing/2014/main" id="{83992740-4B6A-B364-EDBF-A66CD986645F}"/>
+              </a:ext>
+            </a:extLst>
+          </p:cNvPr>
+          <p:cNvSpPr/>
+          <p:nvPr/>
+        </p:nvSpPr>
+        <p:spPr>
+          <a:xfrm>
+            <a:off x="9711900" y="3435419"/>
+            <a:ext cx="736100" cy="461665"/>
+          </a:xfrm>
+          <a:prstGeom prst="rect">
+            <a:avLst/>
+          </a:prstGeom>
+          <a:noFill/>
+        </p:spPr>
+        <p:txBody>
+          <a:bodyPr wrap="none" lIns="91440" tIns="45720" rIns="91440" bIns="45720">
+            <a:spAutoFit/>
+          </a:bodyPr>
+          <a:lstStyle/>
+          <a:p>
+            <a:pPr algn="ctr"/>
+            <a:r>
+              <a:rPr lang="pt-PT" sz="2400" b="0" cap="none" spc="0" dirty="0">
+                <a:ln w="0"/>
+                <a:solidFill>
+                  <a:schemeClr val="tx1"/>
+                </a:solidFill>
+                <a:effectLst>
+                  <a:outerShdw blurRad="38100" dist="19050" dir="2700000" algn="tl" rotWithShape="0">
+                    <a:schemeClr val="dk1">
+                      <a:alpha val="40000"/>
+                    </a:schemeClr>
+                  </a:outerShdw>
+                </a:effectLst>
+              </a:rPr>
+              <a:t>Não</a:t>
+            </a:r>
+          </a:p>
+        </p:txBody>
+      </p:sp>
+      <p:sp>
+        <p:nvSpPr>
+          <p:cNvPr id="41" name="Losango 40">
+            <a:extLst>
+              <a:ext uri="{FF2B5EF4-FFF2-40B4-BE49-F238E27FC236}">
+                <a16:creationId xmlns:a16="http://schemas.microsoft.com/office/drawing/2014/main" id="{A95EA889-AF40-9336-20AE-40DB52DDAB12}"/>
+              </a:ext>
+            </a:extLst>
+          </p:cNvPr>
+          <p:cNvSpPr/>
+          <p:nvPr/>
+        </p:nvSpPr>
+        <p:spPr>
+          <a:xfrm>
+            <a:off x="5219199" y="1585147"/>
+            <a:ext cx="2160000" cy="1080000"/>
+          </a:xfrm>
+          <a:prstGeom prst="diamond">
+            <a:avLst/>
+          </a:prstGeom>
+          <a:ln w="31750"/>
+        </p:spPr>
+        <p:style>
+          <a:lnRef idx="2">
+            <a:schemeClr val="accent3"/>
+          </a:lnRef>
+          <a:fillRef idx="1">
+            <a:schemeClr val="lt1"/>
+          </a:fillRef>
+          <a:effectRef idx="0">
+            <a:schemeClr val="accent3"/>
+          </a:effectRef>
+          <a:fontRef idx="minor">
+            <a:schemeClr val="dk1"/>
+          </a:fontRef>
+        </p:style>
+        <p:txBody>
+          <a:bodyPr rtlCol="0" anchor="ctr"/>
+          <a:lstStyle/>
+          <a:p>
+            <a:pPr algn="ctr"/>
+            <a:r>
+              <a:rPr lang="pt-PT" dirty="0">
+                <a:solidFill>
+                  <a:schemeClr val="dk1"/>
+                </a:solidFill>
+              </a:rPr>
+              <a:t>API Online?</a:t>
+            </a:r>
+          </a:p>
+        </p:txBody>
+      </p:sp>
+      <p:grpSp>
+        <p:nvGrpSpPr>
+          <p:cNvPr id="47" name="Agrupar 46">
+            <a:extLst>
+              <a:ext uri="{FF2B5EF4-FFF2-40B4-BE49-F238E27FC236}">
+                <a16:creationId xmlns:a16="http://schemas.microsoft.com/office/drawing/2014/main" id="{0A4FE25B-5274-EFDD-6D4C-CFFF5FB8B042}"/>
+              </a:ext>
+            </a:extLst>
+          </p:cNvPr>
+          <p:cNvGrpSpPr/>
+          <p:nvPr/>
+        </p:nvGrpSpPr>
+        <p:grpSpPr>
+          <a:xfrm>
+            <a:off x="2943735" y="2938676"/>
+            <a:ext cx="2160000" cy="1080000"/>
+            <a:chOff x="1547200" y="1500915"/>
+            <a:chExt cx="2160000" cy="1080000"/>
+          </a:xfrm>
+        </p:grpSpPr>
+        <p:sp>
+          <p:nvSpPr>
+            <p:cNvPr id="43" name="Losango 42">
+              <a:extLst>
+                <a:ext uri="{FF2B5EF4-FFF2-40B4-BE49-F238E27FC236}">
+                  <a16:creationId xmlns:a16="http://schemas.microsoft.com/office/drawing/2014/main" id="{3517BB71-1632-B18D-AAB5-8FBC8CE1763D}"/>
+                </a:ext>
+              </a:extLst>
+            </p:cNvPr>
+            <p:cNvSpPr/>
+            <p:nvPr/>
+          </p:nvSpPr>
+          <p:spPr>
+            <a:xfrm>
+              <a:off x="1547200" y="1500915"/>
+              <a:ext cx="2160000" cy="1080000"/>
+            </a:xfrm>
+            <a:prstGeom prst="diamond">
+              <a:avLst/>
+            </a:prstGeom>
+            <a:ln w="31750"/>
+          </p:spPr>
+          <p:style>
+            <a:lnRef idx="2">
+              <a:schemeClr val="accent3"/>
+            </a:lnRef>
+            <a:fillRef idx="1">
+              <a:schemeClr val="lt1"/>
+            </a:fillRef>
+            <a:effectRef idx="0">
+              <a:schemeClr val="accent3"/>
+            </a:effectRef>
+            <a:fontRef idx="minor">
+              <a:schemeClr val="dk1"/>
+            </a:fontRef>
+          </p:style>
+          <p:txBody>
+            <a:bodyPr rtlCol="0" anchor="ctr"/>
+            <a:lstStyle/>
+            <a:p>
+              <a:pPr algn="ctr"/>
+              <a:endParaRPr lang="pt-PT" sz="1600" dirty="0">
+                <a:solidFill>
+                  <a:schemeClr val="dk1"/>
+                </a:solidFill>
+              </a:endParaRPr>
+            </a:p>
+          </p:txBody>
+        </p:sp>
+        <p:sp>
+          <p:nvSpPr>
+            <p:cNvPr id="46" name="Retângulo 45">
+              <a:extLst>
+                <a:ext uri="{FF2B5EF4-FFF2-40B4-BE49-F238E27FC236}">
+                  <a16:creationId xmlns:a16="http://schemas.microsoft.com/office/drawing/2014/main" id="{59866C6E-68E8-B4BE-A421-D34C862B31C1}"/>
+                </a:ext>
+              </a:extLst>
+            </p:cNvPr>
+            <p:cNvSpPr/>
+            <p:nvPr/>
+          </p:nvSpPr>
+          <p:spPr>
+            <a:xfrm>
+              <a:off x="1853317" y="1759317"/>
+              <a:ext cx="1516121" cy="646331"/>
+            </a:xfrm>
+            <a:prstGeom prst="rect">
+              <a:avLst/>
+            </a:prstGeom>
+            <a:noFill/>
+          </p:spPr>
+          <p:txBody>
+            <a:bodyPr wrap="none" lIns="91440" tIns="45720" rIns="91440" bIns="45720">
+              <a:spAutoFit/>
+            </a:bodyPr>
+            <a:lstStyle/>
+            <a:p>
+              <a:pPr algn="ctr"/>
+              <a:r>
+                <a:rPr lang="pt-PT" b="0" cap="none" spc="0" dirty="0">
+                  <a:ln w="0"/>
+                  <a:solidFill>
+                    <a:schemeClr val="tx1"/>
+                  </a:solidFill>
+                  <a:effectLst>
+                    <a:outerShdw blurRad="38100" dist="19050" dir="2700000" algn="tl" rotWithShape="0">
+                      <a:schemeClr val="dk1">
+                        <a:alpha val="40000"/>
+                      </a:schemeClr>
+                    </a:outerShdw>
+                  </a:effectLst>
+                </a:rPr>
+                <a:t>Autenticação</a:t>
+              </a:r>
+            </a:p>
+            <a:p>
+              <a:pPr algn="ctr"/>
+              <a:r>
+                <a:rPr lang="pt-PT" dirty="0">
+                  <a:ln w="0"/>
+                  <a:effectLst>
+                    <a:outerShdw blurRad="38100" dist="19050" dir="2700000" algn="tl" rotWithShape="0">
+                      <a:schemeClr val="dk1">
+                        <a:alpha val="40000"/>
+                      </a:schemeClr>
+                    </a:outerShdw>
+                  </a:effectLst>
+                </a:rPr>
+                <a:t>OK?</a:t>
+              </a:r>
+              <a:endParaRPr lang="pt-PT" b="0" cap="none" spc="0" dirty="0">
+                <a:ln w="0"/>
+                <a:solidFill>
+                  <a:schemeClr val="tx1"/>
+                </a:solidFill>
+                <a:effectLst>
+                  <a:outerShdw blurRad="38100" dist="19050" dir="2700000" algn="tl" rotWithShape="0">
+                    <a:schemeClr val="dk1">
+                      <a:alpha val="40000"/>
+                    </a:schemeClr>
+                  </a:outerShdw>
+                </a:effectLst>
+              </a:endParaRPr>
+            </a:p>
+          </p:txBody>
+        </p:sp>
+      </p:grpSp>
+      <p:grpSp>
+        <p:nvGrpSpPr>
+          <p:cNvPr id="49" name="Agrupar 48">
+            <a:extLst>
+              <a:ext uri="{FF2B5EF4-FFF2-40B4-BE49-F238E27FC236}">
+                <a16:creationId xmlns:a16="http://schemas.microsoft.com/office/drawing/2014/main" id="{9915DFDA-6CE7-CC18-630B-F862702AACE9}"/>
+              </a:ext>
+            </a:extLst>
+          </p:cNvPr>
+          <p:cNvGrpSpPr/>
+          <p:nvPr/>
+        </p:nvGrpSpPr>
+        <p:grpSpPr>
+          <a:xfrm>
+            <a:off x="7669360" y="2938676"/>
+            <a:ext cx="2160000" cy="1080000"/>
+            <a:chOff x="1547200" y="1500915"/>
+            <a:chExt cx="2160000" cy="1080000"/>
+          </a:xfrm>
+        </p:grpSpPr>
+        <p:sp>
+          <p:nvSpPr>
+            <p:cNvPr id="50" name="Losango 49">
+              <a:extLst>
+                <a:ext uri="{FF2B5EF4-FFF2-40B4-BE49-F238E27FC236}">
+                  <a16:creationId xmlns:a16="http://schemas.microsoft.com/office/drawing/2014/main" id="{B81A2233-7602-E263-469C-D96A3F095C7E}"/>
+                </a:ext>
+              </a:extLst>
+            </p:cNvPr>
+            <p:cNvSpPr/>
+            <p:nvPr/>
+          </p:nvSpPr>
+          <p:spPr>
+            <a:xfrm>
+              <a:off x="1547200" y="1500915"/>
+              <a:ext cx="2160000" cy="1080000"/>
+            </a:xfrm>
+            <a:prstGeom prst="diamond">
+              <a:avLst/>
+            </a:prstGeom>
+            <a:ln w="31750"/>
+          </p:spPr>
+          <p:style>
+            <a:lnRef idx="2">
+              <a:schemeClr val="accent3"/>
+            </a:lnRef>
+            <a:fillRef idx="1">
+              <a:schemeClr val="lt1"/>
+            </a:fillRef>
+            <a:effectRef idx="0">
+              <a:schemeClr val="accent3"/>
+            </a:effectRef>
+            <a:fontRef idx="minor">
+              <a:schemeClr val="dk1"/>
+            </a:fontRef>
+          </p:style>
+          <p:txBody>
+            <a:bodyPr rtlCol="0" anchor="ctr"/>
+            <a:lstStyle/>
+            <a:p>
+              <a:pPr algn="ctr"/>
+              <a:endParaRPr lang="pt-PT" sz="1600" dirty="0">
+                <a:solidFill>
+                  <a:schemeClr val="dk1"/>
+                </a:solidFill>
+              </a:endParaRPr>
+            </a:p>
+          </p:txBody>
+        </p:sp>
+        <p:sp>
+          <p:nvSpPr>
+            <p:cNvPr id="51" name="Retângulo 50">
+              <a:extLst>
+                <a:ext uri="{FF2B5EF4-FFF2-40B4-BE49-F238E27FC236}">
+                  <a16:creationId xmlns:a16="http://schemas.microsoft.com/office/drawing/2014/main" id="{99FA537C-037B-8568-081E-AE7BD93192F2}"/>
+                </a:ext>
+              </a:extLst>
+            </p:cNvPr>
+            <p:cNvSpPr/>
+            <p:nvPr/>
+          </p:nvSpPr>
+          <p:spPr>
+            <a:xfrm>
+              <a:off x="1853317" y="1759317"/>
+              <a:ext cx="1516121" cy="646331"/>
+            </a:xfrm>
+            <a:prstGeom prst="rect">
+              <a:avLst/>
+            </a:prstGeom>
+            <a:noFill/>
+          </p:spPr>
+          <p:txBody>
+            <a:bodyPr wrap="none" lIns="91440" tIns="45720" rIns="91440" bIns="45720">
+              <a:spAutoFit/>
+            </a:bodyPr>
+            <a:lstStyle/>
+            <a:p>
+              <a:pPr algn="ctr"/>
+              <a:r>
+                <a:rPr lang="pt-PT" b="0" cap="none" spc="0" dirty="0">
+                  <a:ln w="0"/>
+                  <a:solidFill>
+                    <a:schemeClr val="tx1"/>
+                  </a:solidFill>
+                  <a:effectLst>
+                    <a:outerShdw blurRad="38100" dist="19050" dir="2700000" algn="tl" rotWithShape="0">
+                      <a:schemeClr val="dk1">
+                        <a:alpha val="40000"/>
+                      </a:schemeClr>
+                    </a:outerShdw>
+                  </a:effectLst>
+                </a:rPr>
+                <a:t>Autenticação</a:t>
+              </a:r>
+            </a:p>
+            <a:p>
+              <a:pPr algn="ctr"/>
+              <a:r>
+                <a:rPr lang="pt-PT" dirty="0">
+                  <a:ln w="0"/>
+                  <a:effectLst>
+                    <a:outerShdw blurRad="38100" dist="19050" dir="2700000" algn="tl" rotWithShape="0">
+                      <a:schemeClr val="dk1">
+                        <a:alpha val="40000"/>
+                      </a:schemeClr>
+                    </a:outerShdw>
+                  </a:effectLst>
+                </a:rPr>
+                <a:t>Local OK?</a:t>
+              </a:r>
+              <a:endParaRPr lang="pt-PT" b="0" cap="none" spc="0" dirty="0">
+                <a:ln w="0"/>
+                <a:solidFill>
+                  <a:schemeClr val="tx1"/>
+                </a:solidFill>
+                <a:effectLst>
+                  <a:outerShdw blurRad="38100" dist="19050" dir="2700000" algn="tl" rotWithShape="0">
+                    <a:schemeClr val="dk1">
+                      <a:alpha val="40000"/>
+                    </a:schemeClr>
+                  </a:outerShdw>
+                </a:effectLst>
+              </a:endParaRPr>
+            </a:p>
+          </p:txBody>
+        </p:sp>
+      </p:grpSp>
+      <p:grpSp>
+        <p:nvGrpSpPr>
+          <p:cNvPr id="58" name="Agrupar 57">
+            <a:extLst>
+              <a:ext uri="{FF2B5EF4-FFF2-40B4-BE49-F238E27FC236}">
+                <a16:creationId xmlns:a16="http://schemas.microsoft.com/office/drawing/2014/main" id="{3EB0C3C9-DE91-6946-1953-79731CD38414}"/>
+              </a:ext>
+            </a:extLst>
+          </p:cNvPr>
+          <p:cNvGrpSpPr/>
+          <p:nvPr/>
+        </p:nvGrpSpPr>
+        <p:grpSpPr>
+          <a:xfrm>
+            <a:off x="4653143" y="5529198"/>
+            <a:ext cx="2160000" cy="1080000"/>
+            <a:chOff x="1547200" y="1500915"/>
+            <a:chExt cx="2160000" cy="1080000"/>
+          </a:xfrm>
+        </p:grpSpPr>
+        <p:sp>
+          <p:nvSpPr>
+            <p:cNvPr id="59" name="Losango 58">
+              <a:extLst>
+                <a:ext uri="{FF2B5EF4-FFF2-40B4-BE49-F238E27FC236}">
+                  <a16:creationId xmlns:a16="http://schemas.microsoft.com/office/drawing/2014/main" id="{051894BA-99D7-09AB-C706-3986899D426C}"/>
+                </a:ext>
+              </a:extLst>
+            </p:cNvPr>
+            <p:cNvSpPr/>
+            <p:nvPr/>
+          </p:nvSpPr>
+          <p:spPr>
+            <a:xfrm>
+              <a:off x="1547200" y="1500915"/>
+              <a:ext cx="2160000" cy="1080000"/>
+            </a:xfrm>
+            <a:prstGeom prst="diamond">
+              <a:avLst/>
+            </a:prstGeom>
+            <a:ln w="31750"/>
+          </p:spPr>
+          <p:style>
+            <a:lnRef idx="2">
+              <a:schemeClr val="accent3"/>
+            </a:lnRef>
+            <a:fillRef idx="1">
+              <a:schemeClr val="lt1"/>
+            </a:fillRef>
+            <a:effectRef idx="0">
+              <a:schemeClr val="accent3"/>
+            </a:effectRef>
+            <a:fontRef idx="minor">
+              <a:schemeClr val="dk1"/>
+            </a:fontRef>
+          </p:style>
+          <p:txBody>
+            <a:bodyPr rtlCol="0" anchor="ctr"/>
+            <a:lstStyle/>
+            <a:p>
+              <a:pPr algn="ctr"/>
+              <a:endParaRPr lang="pt-PT" sz="1600" dirty="0">
+                <a:solidFill>
+                  <a:schemeClr val="dk1"/>
+                </a:solidFill>
+              </a:endParaRPr>
+            </a:p>
+          </p:txBody>
+        </p:sp>
+        <p:sp>
+          <p:nvSpPr>
+            <p:cNvPr id="60" name="Retângulo 59">
+              <a:extLst>
+                <a:ext uri="{FF2B5EF4-FFF2-40B4-BE49-F238E27FC236}">
+                  <a16:creationId xmlns:a16="http://schemas.microsoft.com/office/drawing/2014/main" id="{84E44B27-40E0-BA6E-9967-51CE2332635C}"/>
+                </a:ext>
+              </a:extLst>
+            </p:cNvPr>
+            <p:cNvSpPr/>
+            <p:nvPr/>
+          </p:nvSpPr>
+          <p:spPr>
+            <a:xfrm>
+              <a:off x="1887792" y="1730289"/>
+              <a:ext cx="1534266" cy="646331"/>
+            </a:xfrm>
+            <a:prstGeom prst="rect">
+              <a:avLst/>
+            </a:prstGeom>
+            <a:noFill/>
+          </p:spPr>
+          <p:txBody>
+            <a:bodyPr wrap="none" lIns="91440" tIns="45720" rIns="91440" bIns="45720">
+              <a:spAutoFit/>
+            </a:bodyPr>
+            <a:lstStyle/>
+            <a:p>
+              <a:pPr algn="ctr"/>
+              <a:r>
+                <a:rPr lang="pt-PT" dirty="0">
+                  <a:ln w="0"/>
+                  <a:effectLst>
+                    <a:outerShdw blurRad="38100" dist="19050" dir="2700000" algn="tl" rotWithShape="0">
+                      <a:schemeClr val="dk1">
+                        <a:alpha val="40000"/>
+                      </a:schemeClr>
+                    </a:outerShdw>
+                  </a:effectLst>
+                </a:rPr>
+                <a:t>User gravado </a:t>
+              </a:r>
+            </a:p>
+            <a:p>
+              <a:pPr algn="ctr"/>
+              <a:r>
+                <a:rPr lang="pt-PT" dirty="0">
+                  <a:ln w="0"/>
+                  <a:effectLst>
+                    <a:outerShdw blurRad="38100" dist="19050" dir="2700000" algn="tl" rotWithShape="0">
+                      <a:schemeClr val="dk1">
+                        <a:alpha val="40000"/>
+                      </a:schemeClr>
+                    </a:outerShdw>
+                  </a:effectLst>
+                </a:rPr>
+                <a:t>localmente?</a:t>
+              </a:r>
+              <a:endParaRPr lang="pt-PT" b="0" cap="none" spc="0" dirty="0">
+                <a:ln w="0"/>
+                <a:solidFill>
+                  <a:schemeClr val="tx1"/>
+                </a:solidFill>
+                <a:effectLst>
+                  <a:outerShdw blurRad="38100" dist="19050" dir="2700000" algn="tl" rotWithShape="0">
+                    <a:schemeClr val="dk1">
+                      <a:alpha val="40000"/>
+                    </a:schemeClr>
+                  </a:outerShdw>
+                </a:effectLst>
+              </a:endParaRPr>
+            </a:p>
+          </p:txBody>
+        </p:sp>
+      </p:grpSp>
+      <p:cxnSp>
+        <p:nvCxnSpPr>
+          <p:cNvPr id="61" name="Conexão reta unidirecional 60">
+            <a:extLst>
+              <a:ext uri="{FF2B5EF4-FFF2-40B4-BE49-F238E27FC236}">
+                <a16:creationId xmlns:a16="http://schemas.microsoft.com/office/drawing/2014/main" id="{F59C949E-C8E6-FE9B-FF78-CCEA19DFCF75}"/>
+              </a:ext>
+            </a:extLst>
+          </p:cNvPr>
+          <p:cNvCxnSpPr>
+            <a:cxnSpLocks/>
+            <a:stCxn id="20" idx="2"/>
+            <a:endCxn id="59" idx="0"/>
+          </p:cNvCxnSpPr>
+          <p:nvPr/>
+        </p:nvCxnSpPr>
+        <p:spPr>
+          <a:xfrm>
+            <a:off x="5731211" y="5101159"/>
+            <a:ext cx="1932" cy="428039"/>
+          </a:xfrm>
+          <a:prstGeom prst="straightConnector1">
+            <a:avLst/>
+          </a:prstGeom>
+          <a:ln w="31750">
+            <a:tailEnd type="triangle"/>
+          </a:ln>
+        </p:spPr>
+        <p:style>
+          <a:lnRef idx="2">
+            <a:schemeClr val="accent3"/>
+          </a:lnRef>
+          <a:fillRef idx="0">
+            <a:schemeClr val="accent3"/>
+          </a:fillRef>
+          <a:effectRef idx="1">
+            <a:schemeClr val="accent3"/>
+          </a:effectRef>
+          <a:fontRef idx="minor">
+            <a:schemeClr val="tx1"/>
+          </a:fontRef>
+        </p:style>
+      </p:cxnSp>
+      <p:sp>
+        <p:nvSpPr>
+          <p:cNvPr id="65" name="Retângulo: Cantos Arredondados 64">
+            <a:extLst>
+              <a:ext uri="{FF2B5EF4-FFF2-40B4-BE49-F238E27FC236}">
+                <a16:creationId xmlns:a16="http://schemas.microsoft.com/office/drawing/2014/main" id="{F5EC151D-CAFB-E5E2-C7FE-B69BF8AA670A}"/>
+              </a:ext>
+            </a:extLst>
+          </p:cNvPr>
+          <p:cNvSpPr/>
+          <p:nvPr/>
+        </p:nvSpPr>
+        <p:spPr>
+          <a:xfrm>
+            <a:off x="4861360" y="7041819"/>
+            <a:ext cx="1728000" cy="864000"/>
+          </a:xfrm>
+          <a:prstGeom prst="roundRect">
+            <a:avLst/>
+          </a:prstGeom>
+          <a:ln w="31750"/>
+        </p:spPr>
+        <p:style>
+          <a:lnRef idx="2">
+            <a:schemeClr val="accent3"/>
+          </a:lnRef>
+          <a:fillRef idx="1">
+            <a:schemeClr val="lt1"/>
+          </a:fillRef>
+          <a:effectRef idx="0">
+            <a:schemeClr val="accent3"/>
+          </a:effectRef>
+          <a:fontRef idx="minor">
+            <a:schemeClr val="dk1"/>
+          </a:fontRef>
+        </p:style>
+        <p:txBody>
+          <a:bodyPr rtlCol="0" anchor="ctr"/>
+          <a:lstStyle/>
+          <a:p>
+            <a:r>
+              <a:rPr lang="pt-PT" dirty="0"/>
+              <a:t>Sincronização</a:t>
+            </a:r>
+            <a:br>
+              <a:rPr lang="pt-PT" dirty="0"/>
+            </a:br>
+            <a:r>
+              <a:rPr lang="pt-PT" dirty="0"/>
+              <a:t>de dados</a:t>
+            </a:r>
+          </a:p>
+        </p:txBody>
+      </p:sp>
+      <p:sp>
+        <p:nvSpPr>
+          <p:cNvPr id="69" name="Retângulo: Cantos Arredondados 68">
+            <a:extLst>
+              <a:ext uri="{FF2B5EF4-FFF2-40B4-BE49-F238E27FC236}">
+                <a16:creationId xmlns:a16="http://schemas.microsoft.com/office/drawing/2014/main" id="{D5F7A8CD-DB1B-132A-D517-4000A3035A53}"/>
+              </a:ext>
+            </a:extLst>
+          </p:cNvPr>
+          <p:cNvSpPr/>
+          <p:nvPr/>
+        </p:nvSpPr>
+        <p:spPr>
+          <a:xfrm>
+            <a:off x="1527544" y="4237159"/>
+            <a:ext cx="1728000" cy="864000"/>
+          </a:xfrm>
+          <a:prstGeom prst="roundRect">
+            <a:avLst/>
+          </a:prstGeom>
+          <a:ln w="31750"/>
+        </p:spPr>
+        <p:style>
+          <a:lnRef idx="2">
+            <a:schemeClr val="accent3"/>
+          </a:lnRef>
+          <a:fillRef idx="1">
+            <a:schemeClr val="lt1"/>
+          </a:fillRef>
+          <a:effectRef idx="0">
+            <a:schemeClr val="accent3"/>
+          </a:effectRef>
+          <a:fontRef idx="minor">
+            <a:schemeClr val="dk1"/>
+          </a:fontRef>
+        </p:style>
+        <p:txBody>
+          <a:bodyPr rtlCol="0" anchor="ctr"/>
+          <a:lstStyle/>
+          <a:p>
+            <a:pPr algn="ctr"/>
+            <a:r>
+              <a:rPr lang="pt-PT" sz="1600" dirty="0"/>
+              <a:t>User/Password inválidas</a:t>
+            </a:r>
+          </a:p>
+        </p:txBody>
+      </p:sp>
+      <p:sp>
+        <p:nvSpPr>
+          <p:cNvPr id="87" name="Retângulo 86">
+            <a:extLst>
+              <a:ext uri="{FF2B5EF4-FFF2-40B4-BE49-F238E27FC236}">
+                <a16:creationId xmlns:a16="http://schemas.microsoft.com/office/drawing/2014/main" id="{69F0D51A-77EC-1E7A-C0A9-D5BEC5E52FAF}"/>
+              </a:ext>
+            </a:extLst>
+          </p:cNvPr>
+          <p:cNvSpPr/>
+          <p:nvPr/>
+        </p:nvSpPr>
+        <p:spPr>
+          <a:xfrm>
+            <a:off x="2353600" y="3435420"/>
+            <a:ext cx="736100" cy="461665"/>
+          </a:xfrm>
+          <a:prstGeom prst="rect">
+            <a:avLst/>
+          </a:prstGeom>
+          <a:noFill/>
+        </p:spPr>
+        <p:txBody>
+          <a:bodyPr wrap="none" lIns="91440" tIns="45720" rIns="91440" bIns="45720">
+            <a:spAutoFit/>
+          </a:bodyPr>
+          <a:lstStyle/>
+          <a:p>
+            <a:pPr algn="ctr"/>
+            <a:r>
+              <a:rPr lang="pt-PT" sz="2400" b="0" cap="none" spc="0" dirty="0">
+                <a:ln w="0"/>
+                <a:solidFill>
+                  <a:schemeClr val="tx1"/>
+                </a:solidFill>
+                <a:effectLst>
+                  <a:outerShdw blurRad="38100" dist="19050" dir="2700000" algn="tl" rotWithShape="0">
+                    <a:schemeClr val="dk1">
+                      <a:alpha val="40000"/>
+                    </a:schemeClr>
+                  </a:outerShdw>
+                </a:effectLst>
+              </a:rPr>
+              <a:t>Não</a:t>
+            </a:r>
+          </a:p>
+        </p:txBody>
+      </p:sp>
+      <p:cxnSp>
+        <p:nvCxnSpPr>
+          <p:cNvPr id="91" name="Conexão reta unidirecional 90">
+            <a:extLst>
+              <a:ext uri="{FF2B5EF4-FFF2-40B4-BE49-F238E27FC236}">
+                <a16:creationId xmlns:a16="http://schemas.microsoft.com/office/drawing/2014/main" id="{364F7566-B711-A07A-86C2-57B0A99246B2}"/>
+              </a:ext>
+            </a:extLst>
+          </p:cNvPr>
+          <p:cNvCxnSpPr>
+            <a:cxnSpLocks/>
+            <a:stCxn id="50" idx="2"/>
+            <a:endCxn id="22" idx="0"/>
+          </p:cNvCxnSpPr>
+          <p:nvPr/>
+        </p:nvCxnSpPr>
+        <p:spPr>
+          <a:xfrm>
+            <a:off x="8749360" y="4018676"/>
+            <a:ext cx="0" cy="3025377"/>
+          </a:xfrm>
+          <a:prstGeom prst="straightConnector1">
+            <a:avLst/>
+          </a:prstGeom>
+          <a:ln w="31750">
+            <a:tailEnd type="triangle"/>
+          </a:ln>
+        </p:spPr>
+        <p:style>
+          <a:lnRef idx="2">
+            <a:schemeClr val="accent3"/>
+          </a:lnRef>
+          <a:fillRef idx="0">
+            <a:schemeClr val="accent3"/>
+          </a:fillRef>
+          <a:effectRef idx="1">
+            <a:schemeClr val="accent3"/>
+          </a:effectRef>
+          <a:fontRef idx="minor">
+            <a:schemeClr val="tx1"/>
+          </a:fontRef>
+        </p:style>
+      </p:cxnSp>
+      <p:cxnSp>
+        <p:nvCxnSpPr>
+          <p:cNvPr id="94" name="Conexão reta unidirecional 93">
+            <a:extLst>
+              <a:ext uri="{FF2B5EF4-FFF2-40B4-BE49-F238E27FC236}">
+                <a16:creationId xmlns:a16="http://schemas.microsoft.com/office/drawing/2014/main" id="{9AC9BE3C-B80A-0E1D-5E15-37EECD72E0C8}"/>
+              </a:ext>
+            </a:extLst>
+          </p:cNvPr>
+          <p:cNvCxnSpPr>
+            <a:cxnSpLocks/>
+            <a:stCxn id="65" idx="3"/>
+            <a:endCxn id="22" idx="1"/>
+          </p:cNvCxnSpPr>
+          <p:nvPr/>
+        </p:nvCxnSpPr>
+        <p:spPr>
+          <a:xfrm>
+            <a:off x="6589360" y="7473819"/>
+            <a:ext cx="1296000" cy="2234"/>
+          </a:xfrm>
+          <a:prstGeom prst="straightConnector1">
+            <a:avLst/>
+          </a:prstGeom>
+          <a:ln w="31750">
+            <a:tailEnd type="triangle"/>
+          </a:ln>
+        </p:spPr>
+        <p:style>
+          <a:lnRef idx="2">
+            <a:schemeClr val="accent3"/>
+          </a:lnRef>
+          <a:fillRef idx="0">
+            <a:schemeClr val="accent3"/>
+          </a:fillRef>
+          <a:effectRef idx="1">
+            <a:schemeClr val="accent3"/>
+          </a:effectRef>
+          <a:fontRef idx="minor">
+            <a:schemeClr val="tx1"/>
+          </a:fontRef>
+        </p:style>
+      </p:cxnSp>
+      <p:cxnSp>
+        <p:nvCxnSpPr>
+          <p:cNvPr id="97" name="Conexão reta unidirecional 96">
+            <a:extLst>
+              <a:ext uri="{FF2B5EF4-FFF2-40B4-BE49-F238E27FC236}">
+                <a16:creationId xmlns:a16="http://schemas.microsoft.com/office/drawing/2014/main" id="{359D3A4C-3758-D004-F5E7-157058BBBA92}"/>
+              </a:ext>
+            </a:extLst>
+          </p:cNvPr>
+          <p:cNvCxnSpPr>
+            <a:cxnSpLocks/>
+            <a:stCxn id="59" idx="2"/>
+            <a:endCxn id="65" idx="0"/>
+          </p:cNvCxnSpPr>
+          <p:nvPr/>
+        </p:nvCxnSpPr>
+        <p:spPr>
+          <a:xfrm flipH="1">
+            <a:off x="5725360" y="6609198"/>
+            <a:ext cx="7783" cy="432621"/>
+          </a:xfrm>
+          <a:prstGeom prst="straightConnector1">
+            <a:avLst/>
+          </a:prstGeom>
+          <a:ln w="31750">
+            <a:solidFill>
+              <a:srgbClr val="FF0000"/>
+            </a:solidFill>
+            <a:tailEnd type="triangle"/>
+          </a:ln>
+        </p:spPr>
+        <p:style>
+          <a:lnRef idx="2">
+            <a:schemeClr val="accent3"/>
+          </a:lnRef>
+          <a:fillRef idx="0">
+            <a:schemeClr val="accent3"/>
+          </a:fillRef>
+          <a:effectRef idx="1">
+            <a:schemeClr val="accent3"/>
+          </a:effectRef>
+          <a:fontRef idx="minor">
+            <a:schemeClr val="tx1"/>
+          </a:fontRef>
+        </p:style>
+      </p:cxnSp>
+      <p:pic>
+        <p:nvPicPr>
+          <p:cNvPr id="101" name="Gráfico 100">
+            <a:extLst>
+              <a:ext uri="{FF2B5EF4-FFF2-40B4-BE49-F238E27FC236}">
+                <a16:creationId xmlns:a16="http://schemas.microsoft.com/office/drawing/2014/main" id="{0A7BC489-27EC-2EFE-3048-4FDF5A889920}"/>
+              </a:ext>
+            </a:extLst>
+          </p:cNvPr>
+          <p:cNvPicPr>
+            <a:picLocks noChangeAspect="1"/>
+          </p:cNvPicPr>
+          <p:nvPr/>
+        </p:nvPicPr>
+        <p:blipFill>
+          <a:blip r:embed="rId6">
+            <a:extLst>
+              <a:ext uri="{96DAC541-7B7A-43D3-8B79-37D633B846F1}">
+                <asvg:svgBlip xmlns:asvg="http://schemas.microsoft.com/office/drawing/2016/SVG/main" r:embed="rId7"/>
+              </a:ext>
+            </a:extLst>
+          </a:blip>
+          <a:stretch>
+            <a:fillRect/>
+          </a:stretch>
+        </p:blipFill>
+        <p:spPr>
+          <a:xfrm>
+            <a:off x="5964914" y="7365819"/>
+            <a:ext cx="540000" cy="540000"/>
+          </a:xfrm>
+          <a:prstGeom prst="rect">
+            <a:avLst/>
+          </a:prstGeom>
+        </p:spPr>
+      </p:pic>
+      <p:sp>
+        <p:nvSpPr>
+          <p:cNvPr id="102" name="Retângulo 101">
+            <a:extLst>
+              <a:ext uri="{FF2B5EF4-FFF2-40B4-BE49-F238E27FC236}">
+                <a16:creationId xmlns:a16="http://schemas.microsoft.com/office/drawing/2014/main" id="{1EC16B77-CC7E-4E4D-0557-6B0CFA664E65}"/>
+              </a:ext>
+            </a:extLst>
+          </p:cNvPr>
+          <p:cNvSpPr/>
+          <p:nvPr/>
+        </p:nvSpPr>
+        <p:spPr>
+          <a:xfrm>
+            <a:off x="4997043" y="6540330"/>
+            <a:ext cx="736100" cy="461665"/>
+          </a:xfrm>
+          <a:prstGeom prst="rect">
+            <a:avLst/>
+          </a:prstGeom>
+          <a:noFill/>
+        </p:spPr>
+        <p:txBody>
+          <a:bodyPr wrap="none" lIns="91440" tIns="45720" rIns="91440" bIns="45720">
+            <a:spAutoFit/>
+          </a:bodyPr>
+          <a:lstStyle/>
+          <a:p>
+            <a:pPr algn="ctr"/>
+            <a:r>
+              <a:rPr lang="pt-PT" sz="2400" b="0" cap="none" spc="0" dirty="0">
+                <a:ln w="0"/>
+                <a:solidFill>
+                  <a:schemeClr val="tx1"/>
+                </a:solidFill>
+                <a:effectLst>
+                  <a:outerShdw blurRad="38100" dist="19050" dir="2700000" algn="tl" rotWithShape="0">
+                    <a:schemeClr val="dk1">
+                      <a:alpha val="40000"/>
+                    </a:schemeClr>
+                  </a:outerShdw>
+                </a:effectLst>
+              </a:rPr>
+              <a:t>Não</a:t>
+            </a:r>
+          </a:p>
+        </p:txBody>
+      </p:sp>
+      <p:sp>
+        <p:nvSpPr>
+          <p:cNvPr id="103" name="Retângulo 102">
+            <a:extLst>
+              <a:ext uri="{FF2B5EF4-FFF2-40B4-BE49-F238E27FC236}">
+                <a16:creationId xmlns:a16="http://schemas.microsoft.com/office/drawing/2014/main" id="{3A2E6473-40A2-2F3A-1A7B-3E75CAFA6781}"/>
+              </a:ext>
+            </a:extLst>
+          </p:cNvPr>
+          <p:cNvSpPr/>
+          <p:nvPr/>
+        </p:nvSpPr>
+        <p:spPr>
+          <a:xfrm>
+            <a:off x="6695977" y="6069198"/>
+            <a:ext cx="696024" cy="461665"/>
+          </a:xfrm>
+          <a:prstGeom prst="rect">
+            <a:avLst/>
+          </a:prstGeom>
+          <a:noFill/>
+        </p:spPr>
+        <p:txBody>
+          <a:bodyPr wrap="none" lIns="91440" tIns="45720" rIns="91440" bIns="45720">
+            <a:spAutoFit/>
+          </a:bodyPr>
+          <a:lstStyle/>
+          <a:p>
+            <a:pPr algn="ctr"/>
+            <a:r>
+              <a:rPr lang="pt-PT" sz="2400" b="0" cap="none" spc="0" dirty="0">
+                <a:ln w="0"/>
+                <a:solidFill>
+                  <a:schemeClr val="tx1"/>
+                </a:solidFill>
+                <a:effectLst>
+                  <a:outerShdw blurRad="38100" dist="19050" dir="2700000" algn="tl" rotWithShape="0">
+                    <a:schemeClr val="dk1">
+                      <a:alpha val="40000"/>
+                    </a:schemeClr>
+                  </a:outerShdw>
+                </a:effectLst>
+              </a:rPr>
+              <a:t>Sim</a:t>
+            </a:r>
+          </a:p>
+        </p:txBody>
+      </p:sp>
+      <p:cxnSp>
+        <p:nvCxnSpPr>
+          <p:cNvPr id="104" name="Conexão reta unidirecional 9">
+            <a:extLst>
+              <a:ext uri="{FF2B5EF4-FFF2-40B4-BE49-F238E27FC236}">
+                <a16:creationId xmlns:a16="http://schemas.microsoft.com/office/drawing/2014/main" id="{D74F8127-ADB0-F250-F02E-14EDB47392E0}"/>
+              </a:ext>
+            </a:extLst>
+          </p:cNvPr>
+          <p:cNvCxnSpPr>
+            <a:cxnSpLocks/>
+            <a:stCxn id="69" idx="1"/>
+            <a:endCxn id="3" idx="1"/>
+          </p:cNvCxnSpPr>
+          <p:nvPr/>
+        </p:nvCxnSpPr>
+        <p:spPr>
+          <a:xfrm rot="10800000" flipH="1">
+            <a:off x="1527544" y="882515"/>
+            <a:ext cx="3907656" cy="3786645"/>
+          </a:xfrm>
+          <a:prstGeom prst="bentConnector3">
+            <a:avLst>
+              <a:gd name="adj1" fmla="val -5850"/>
+            </a:avLst>
+          </a:prstGeom>
+          <a:ln w="31750">
+            <a:tailEnd type="triangle"/>
+          </a:ln>
+        </p:spPr>
+        <p:style>
+          <a:lnRef idx="2">
+            <a:schemeClr val="accent3"/>
+          </a:lnRef>
+          <a:fillRef idx="0">
+            <a:schemeClr val="accent3"/>
+          </a:fillRef>
+          <a:effectRef idx="1">
+            <a:schemeClr val="accent3"/>
+          </a:effectRef>
+          <a:fontRef idx="minor">
+            <a:schemeClr val="tx1"/>
+          </a:fontRef>
+        </p:style>
+      </p:cxnSp>
+      <p:cxnSp>
+        <p:nvCxnSpPr>
+          <p:cNvPr id="109" name="Conexão reta unidirecional 9">
+            <a:extLst>
+              <a:ext uri="{FF2B5EF4-FFF2-40B4-BE49-F238E27FC236}">
+                <a16:creationId xmlns:a16="http://schemas.microsoft.com/office/drawing/2014/main" id="{F9EDE31C-E292-60CC-6D92-C2A61FF7FF4A}"/>
+              </a:ext>
+            </a:extLst>
+          </p:cNvPr>
+          <p:cNvCxnSpPr>
+            <a:cxnSpLocks/>
+            <a:stCxn id="21" idx="3"/>
+            <a:endCxn id="3" idx="3"/>
+          </p:cNvCxnSpPr>
+          <p:nvPr/>
+        </p:nvCxnSpPr>
+        <p:spPr>
+          <a:xfrm flipH="1" flipV="1">
+            <a:off x="7163200" y="882514"/>
+            <a:ext cx="4093615" cy="3786645"/>
+          </a:xfrm>
+          <a:prstGeom prst="bentConnector3">
+            <a:avLst>
+              <a:gd name="adj1" fmla="val -5584"/>
+            </a:avLst>
+          </a:prstGeom>
+          <a:ln w="31750">
+            <a:tailEnd type="triangle"/>
+          </a:ln>
+        </p:spPr>
+        <p:style>
+          <a:lnRef idx="2">
+            <a:schemeClr val="accent3"/>
+          </a:lnRef>
+          <a:fillRef idx="0">
+            <a:schemeClr val="accent3"/>
+          </a:fillRef>
+          <a:effectRef idx="1">
+            <a:schemeClr val="accent3"/>
+          </a:effectRef>
+          <a:fontRef idx="minor">
+            <a:schemeClr val="tx1"/>
+          </a:fontRef>
+        </p:style>
+      </p:cxnSp>
+    </p:spTree>
+    <p:extLst>
+      <p:ext uri="{BB962C8B-B14F-4D97-AF65-F5344CB8AC3E}">
+        <p14:creationId xmlns:p14="http://schemas.microsoft.com/office/powerpoint/2010/main" val="1467072477"/>
       </p:ext>
     </p:extLst>
   </p:cSld>

--- a/Entregas/06 Final Report/Cartaz v2.pptx
+++ b/Entregas/06 Final Report/Cartaz v2.pptx
@@ -5,7 +5,7 @@
     <p:sldMasterId id="2147483708" r:id="rId1"/>
   </p:sldMasterIdLst>
   <p:notesMasterIdLst>
-    <p:notesMasterId r:id="rId10"/>
+    <p:notesMasterId r:id="rId12"/>
   </p:notesMasterIdLst>
   <p:sldIdLst>
     <p:sldId id="256" r:id="rId2"/>
@@ -16,6 +16,8 @@
     <p:sldId id="260" r:id="rId7"/>
     <p:sldId id="262" r:id="rId8"/>
     <p:sldId id="263" r:id="rId9"/>
+    <p:sldId id="264" r:id="rId10"/>
+    <p:sldId id="265" r:id="rId11"/>
   </p:sldIdLst>
   <p:sldSz cx="12801600" cy="9601200" type="A3"/>
   <p:notesSz cx="6858000" cy="9144000"/>
@@ -6082,7 +6084,7 @@
           <a:p>
             <a:fld id="{D8D22204-511D-42DB-B769-E600439F120D}" type="datetimeFigureOut">
               <a:rPr lang="pt-PT" smtClean="0"/>
-              <a:t>17/07/2025</a:t>
+              <a:t>19/07/2025</a:t>
             </a:fld>
             <a:endParaRPr lang="pt-PT"/>
           </a:p>
@@ -7021,7 +7023,7 @@
           <a:p>
             <a:fld id="{FF3E7115-E5A5-49CB-9497-9E6CDBEED4A9}" type="datetimeFigureOut">
               <a:rPr lang="pt-PT" smtClean="0"/>
-              <a:t>17/07/2025</a:t>
+              <a:t>19/07/2025</a:t>
             </a:fld>
             <a:endParaRPr lang="pt-PT"/>
           </a:p>
@@ -7191,7 +7193,7 @@
           <a:p>
             <a:fld id="{FF3E7115-E5A5-49CB-9497-9E6CDBEED4A9}" type="datetimeFigureOut">
               <a:rPr lang="pt-PT" smtClean="0"/>
-              <a:t>17/07/2025</a:t>
+              <a:t>19/07/2025</a:t>
             </a:fld>
             <a:endParaRPr lang="pt-PT"/>
           </a:p>
@@ -7371,7 +7373,7 @@
           <a:p>
             <a:fld id="{FF3E7115-E5A5-49CB-9497-9E6CDBEED4A9}" type="datetimeFigureOut">
               <a:rPr lang="pt-PT" smtClean="0"/>
-              <a:t>17/07/2025</a:t>
+              <a:t>19/07/2025</a:t>
             </a:fld>
             <a:endParaRPr lang="pt-PT"/>
           </a:p>
@@ -7541,7 +7543,7 @@
           <a:p>
             <a:fld id="{FF3E7115-E5A5-49CB-9497-9E6CDBEED4A9}" type="datetimeFigureOut">
               <a:rPr lang="pt-PT" smtClean="0"/>
-              <a:t>17/07/2025</a:t>
+              <a:t>19/07/2025</a:t>
             </a:fld>
             <a:endParaRPr lang="pt-PT"/>
           </a:p>
@@ -7787,7 +7789,7 @@
           <a:p>
             <a:fld id="{FF3E7115-E5A5-49CB-9497-9E6CDBEED4A9}" type="datetimeFigureOut">
               <a:rPr lang="pt-PT" smtClean="0"/>
-              <a:t>17/07/2025</a:t>
+              <a:t>19/07/2025</a:t>
             </a:fld>
             <a:endParaRPr lang="pt-PT"/>
           </a:p>
@@ -8019,7 +8021,7 @@
           <a:p>
             <a:fld id="{FF3E7115-E5A5-49CB-9497-9E6CDBEED4A9}" type="datetimeFigureOut">
               <a:rPr lang="pt-PT" smtClean="0"/>
-              <a:t>17/07/2025</a:t>
+              <a:t>19/07/2025</a:t>
             </a:fld>
             <a:endParaRPr lang="pt-PT"/>
           </a:p>
@@ -8386,7 +8388,7 @@
           <a:p>
             <a:fld id="{FF3E7115-E5A5-49CB-9497-9E6CDBEED4A9}" type="datetimeFigureOut">
               <a:rPr lang="pt-PT" smtClean="0"/>
-              <a:t>17/07/2025</a:t>
+              <a:t>19/07/2025</a:t>
             </a:fld>
             <a:endParaRPr lang="pt-PT"/>
           </a:p>
@@ -8504,7 +8506,7 @@
           <a:p>
             <a:fld id="{FF3E7115-E5A5-49CB-9497-9E6CDBEED4A9}" type="datetimeFigureOut">
               <a:rPr lang="pt-PT" smtClean="0"/>
-              <a:t>17/07/2025</a:t>
+              <a:t>19/07/2025</a:t>
             </a:fld>
             <a:endParaRPr lang="pt-PT"/>
           </a:p>
@@ -8599,7 +8601,7 @@
           <a:p>
             <a:fld id="{FF3E7115-E5A5-49CB-9497-9E6CDBEED4A9}" type="datetimeFigureOut">
               <a:rPr lang="pt-PT" smtClean="0"/>
-              <a:t>17/07/2025</a:t>
+              <a:t>19/07/2025</a:t>
             </a:fld>
             <a:endParaRPr lang="pt-PT"/>
           </a:p>
@@ -8876,7 +8878,7 @@
           <a:p>
             <a:fld id="{FF3E7115-E5A5-49CB-9497-9E6CDBEED4A9}" type="datetimeFigureOut">
               <a:rPr lang="pt-PT" smtClean="0"/>
-              <a:t>17/07/2025</a:t>
+              <a:t>19/07/2025</a:t>
             </a:fld>
             <a:endParaRPr lang="pt-PT"/>
           </a:p>
@@ -9133,7 +9135,7 @@
           <a:p>
             <a:fld id="{FF3E7115-E5A5-49CB-9497-9E6CDBEED4A9}" type="datetimeFigureOut">
               <a:rPr lang="pt-PT" smtClean="0"/>
-              <a:t>17/07/2025</a:t>
+              <a:t>19/07/2025</a:t>
             </a:fld>
             <a:endParaRPr lang="pt-PT"/>
           </a:p>
@@ -9346,7 +9348,7 @@
           <a:p>
             <a:fld id="{FF3E7115-E5A5-49CB-9497-9E6CDBEED4A9}" type="datetimeFigureOut">
               <a:rPr lang="pt-PT" smtClean="0"/>
-              <a:t>17/07/2025</a:t>
+              <a:t>19/07/2025</a:t>
             </a:fld>
             <a:endParaRPr lang="pt-PT"/>
           </a:p>
@@ -11729,6 +11731,858 @@
 </p:sld>
 </file>
 
+<file path=ppt/slides/slide10.xml><?xml version="1.0" encoding="utf-8"?>
+<p:sld xmlns:a="http://schemas.openxmlformats.org/drawingml/2006/main" xmlns:r="http://schemas.openxmlformats.org/officeDocument/2006/relationships" xmlns:p="http://schemas.openxmlformats.org/presentationml/2006/main">
+  <p:cSld>
+    <p:spTree>
+      <p:nvGrpSpPr>
+        <p:cNvPr id="1" name=""/>
+        <p:cNvGrpSpPr/>
+        <p:nvPr/>
+      </p:nvGrpSpPr>
+      <p:grpSpPr>
+        <a:xfrm>
+          <a:off x="0" y="0"/>
+          <a:ext cx="0" cy="0"/>
+          <a:chOff x="0" y="0"/>
+          <a:chExt cx="0" cy="0"/>
+        </a:xfrm>
+      </p:grpSpPr>
+      <p:cxnSp>
+        <p:nvCxnSpPr>
+          <p:cNvPr id="3" name="Conexão reta unidirecional 17">
+            <a:extLst>
+              <a:ext uri="{FF2B5EF4-FFF2-40B4-BE49-F238E27FC236}">
+                <a16:creationId xmlns:a16="http://schemas.microsoft.com/office/drawing/2014/main" id="{1AF0E806-03E1-3DB6-D537-328DA3C27524}"/>
+              </a:ext>
+            </a:extLst>
+          </p:cNvPr>
+          <p:cNvCxnSpPr>
+            <a:cxnSpLocks/>
+            <a:stCxn id="80" idx="2"/>
+            <a:endCxn id="2" idx="0"/>
+          </p:cNvCxnSpPr>
+          <p:nvPr/>
+        </p:nvCxnSpPr>
+        <p:spPr>
+          <a:xfrm rot="16200000" flipH="1">
+            <a:off x="7214066" y="1558068"/>
+            <a:ext cx="812665" cy="4648598"/>
+          </a:xfrm>
+          <a:prstGeom prst="bentConnector3">
+            <a:avLst>
+              <a:gd name="adj1" fmla="val 48633"/>
+            </a:avLst>
+          </a:prstGeom>
+          <a:ln w="31750">
+            <a:prstDash val="dash"/>
+            <a:tailEnd type="triangle"/>
+          </a:ln>
+        </p:spPr>
+        <p:style>
+          <a:lnRef idx="2">
+            <a:schemeClr val="accent3"/>
+          </a:lnRef>
+          <a:fillRef idx="0">
+            <a:schemeClr val="accent3"/>
+          </a:fillRef>
+          <a:effectRef idx="1">
+            <a:schemeClr val="accent3"/>
+          </a:effectRef>
+          <a:fontRef idx="minor">
+            <a:schemeClr val="tx1"/>
+          </a:fontRef>
+        </p:style>
+      </p:cxnSp>
+      <p:sp>
+        <p:nvSpPr>
+          <p:cNvPr id="78" name="Retângulo: Cantos Arredondados 77">
+            <a:extLst>
+              <a:ext uri="{FF2B5EF4-FFF2-40B4-BE49-F238E27FC236}">
+                <a16:creationId xmlns:a16="http://schemas.microsoft.com/office/drawing/2014/main" id="{9B819D09-416E-23A9-D166-FB3467833BB1}"/>
+              </a:ext>
+            </a:extLst>
+          </p:cNvPr>
+          <p:cNvSpPr/>
+          <p:nvPr/>
+        </p:nvSpPr>
+        <p:spPr>
+          <a:xfrm>
+            <a:off x="3848100" y="1484219"/>
+            <a:ext cx="2896000" cy="720000"/>
+          </a:xfrm>
+          <a:prstGeom prst="roundRect">
+            <a:avLst/>
+          </a:prstGeom>
+          <a:ln w="31750"/>
+        </p:spPr>
+        <p:style>
+          <a:lnRef idx="2">
+            <a:schemeClr val="accent3"/>
+          </a:lnRef>
+          <a:fillRef idx="1">
+            <a:schemeClr val="lt1"/>
+          </a:fillRef>
+          <a:effectRef idx="0">
+            <a:schemeClr val="accent3"/>
+          </a:effectRef>
+          <a:fontRef idx="minor">
+            <a:schemeClr val="dk1"/>
+          </a:fontRef>
+        </p:style>
+        <p:txBody>
+          <a:bodyPr rtlCol="0" anchor="ctr"/>
+          <a:lstStyle/>
+          <a:p>
+            <a:pPr algn="ctr"/>
+            <a:r>
+              <a:rPr lang="pt-PT" b="1" dirty="0"/>
+              <a:t>Arvore</a:t>
+            </a:r>
+            <a:r>
+              <a:rPr lang="pt-PT" dirty="0"/>
+              <a:t> </a:t>
+            </a:r>
+            <a:r>
+              <a:rPr lang="pt-PT" b="1" dirty="0"/>
+              <a:t>Hierárquica</a:t>
+            </a:r>
+            <a:br>
+              <a:rPr lang="pt-PT" dirty="0"/>
+            </a:br>
+            <a:r>
+              <a:rPr lang="pt-PT" sz="1600" dirty="0"/>
+              <a:t>(ex.: Município Odivelas)</a:t>
+            </a:r>
+            <a:endParaRPr lang="pt-PT" dirty="0"/>
+          </a:p>
+        </p:txBody>
+      </p:sp>
+      <p:cxnSp>
+        <p:nvCxnSpPr>
+          <p:cNvPr id="79" name="Conexão reta unidirecional 78">
+            <a:extLst>
+              <a:ext uri="{FF2B5EF4-FFF2-40B4-BE49-F238E27FC236}">
+                <a16:creationId xmlns:a16="http://schemas.microsoft.com/office/drawing/2014/main" id="{CD10FA6E-EEA4-A20B-6620-1501C9A2DAFB}"/>
+              </a:ext>
+            </a:extLst>
+          </p:cNvPr>
+          <p:cNvCxnSpPr>
+            <a:cxnSpLocks/>
+            <a:stCxn id="78" idx="2"/>
+            <a:endCxn id="80" idx="0"/>
+          </p:cNvCxnSpPr>
+          <p:nvPr/>
+        </p:nvCxnSpPr>
+        <p:spPr>
+          <a:xfrm flipH="1">
+            <a:off x="5296099" y="2204219"/>
+            <a:ext cx="1" cy="429716"/>
+          </a:xfrm>
+          <a:prstGeom prst="straightConnector1">
+            <a:avLst/>
+          </a:prstGeom>
+          <a:ln w="31750">
+            <a:tailEnd type="triangle"/>
+          </a:ln>
+        </p:spPr>
+        <p:style>
+          <a:lnRef idx="2">
+            <a:schemeClr val="accent3"/>
+          </a:lnRef>
+          <a:fillRef idx="0">
+            <a:schemeClr val="accent3"/>
+          </a:fillRef>
+          <a:effectRef idx="1">
+            <a:schemeClr val="accent3"/>
+          </a:effectRef>
+          <a:fontRef idx="minor">
+            <a:schemeClr val="tx1"/>
+          </a:fontRef>
+        </p:style>
+      </p:cxnSp>
+      <p:sp>
+        <p:nvSpPr>
+          <p:cNvPr id="80" name="Retângulo: Cantos Arredondados 79">
+            <a:extLst>
+              <a:ext uri="{FF2B5EF4-FFF2-40B4-BE49-F238E27FC236}">
+                <a16:creationId xmlns:a16="http://schemas.microsoft.com/office/drawing/2014/main" id="{B2156871-7F27-AD0D-F2B9-B06379B41DB0}"/>
+              </a:ext>
+            </a:extLst>
+          </p:cNvPr>
+          <p:cNvSpPr/>
+          <p:nvPr/>
+        </p:nvSpPr>
+        <p:spPr>
+          <a:xfrm>
+            <a:off x="3848100" y="2633935"/>
+            <a:ext cx="2895998" cy="842100"/>
+          </a:xfrm>
+          <a:prstGeom prst="roundRect">
+            <a:avLst/>
+          </a:prstGeom>
+          <a:ln w="31750"/>
+        </p:spPr>
+        <p:style>
+          <a:lnRef idx="2">
+            <a:schemeClr val="accent3"/>
+          </a:lnRef>
+          <a:fillRef idx="1">
+            <a:schemeClr val="lt1"/>
+          </a:fillRef>
+          <a:effectRef idx="0">
+            <a:schemeClr val="accent3"/>
+          </a:effectRef>
+          <a:fontRef idx="minor">
+            <a:schemeClr val="dk1"/>
+          </a:fontRef>
+        </p:style>
+        <p:txBody>
+          <a:bodyPr rtlCol="0" anchor="ctr"/>
+          <a:lstStyle/>
+          <a:p>
+            <a:pPr algn="ctr"/>
+            <a:r>
+              <a:rPr lang="pt-PT" b="1" dirty="0"/>
+              <a:t>Incidente</a:t>
+            </a:r>
+            <a:br>
+              <a:rPr lang="pt-PT" dirty="0"/>
+            </a:br>
+            <a:r>
+              <a:rPr lang="pt-PT" sz="1600" dirty="0"/>
+              <a:t>(ex.: Incêndio Urbano)</a:t>
+            </a:r>
+            <a:endParaRPr lang="pt-PT" dirty="0"/>
+          </a:p>
+        </p:txBody>
+      </p:sp>
+      <p:sp>
+        <p:nvSpPr>
+          <p:cNvPr id="81" name="Retângulo: Cantos Arredondados 80">
+            <a:extLst>
+              <a:ext uri="{FF2B5EF4-FFF2-40B4-BE49-F238E27FC236}">
+                <a16:creationId xmlns:a16="http://schemas.microsoft.com/office/drawing/2014/main" id="{67CB8B4A-2779-3604-AB7C-CBB88BDD9381}"/>
+              </a:ext>
+            </a:extLst>
+          </p:cNvPr>
+          <p:cNvSpPr/>
+          <p:nvPr/>
+        </p:nvSpPr>
+        <p:spPr>
+          <a:xfrm>
+            <a:off x="5397500" y="4268472"/>
+            <a:ext cx="2895998" cy="842100"/>
+          </a:xfrm>
+          <a:prstGeom prst="roundRect">
+            <a:avLst/>
+          </a:prstGeom>
+          <a:solidFill>
+            <a:schemeClr val="accent6">
+              <a:lumMod val="20000"/>
+              <a:lumOff val="80000"/>
+            </a:schemeClr>
+          </a:solidFill>
+          <a:ln w="31750"/>
+        </p:spPr>
+        <p:style>
+          <a:lnRef idx="2">
+            <a:schemeClr val="accent3"/>
+          </a:lnRef>
+          <a:fillRef idx="1">
+            <a:schemeClr val="lt1"/>
+          </a:fillRef>
+          <a:effectRef idx="0">
+            <a:schemeClr val="accent3"/>
+          </a:effectRef>
+          <a:fontRef idx="minor">
+            <a:schemeClr val="dk1"/>
+          </a:fontRef>
+        </p:style>
+        <p:txBody>
+          <a:bodyPr rtlCol="0" anchor="ctr"/>
+          <a:lstStyle/>
+          <a:p>
+            <a:pPr algn="ctr"/>
+            <a:r>
+              <a:rPr lang="pt-PT" b="1" dirty="0"/>
+              <a:t>ZCAP</a:t>
+            </a:r>
+            <a:br>
+              <a:rPr lang="pt-PT" dirty="0"/>
+            </a:br>
+            <a:r>
+              <a:rPr lang="pt-PT" sz="1600" dirty="0"/>
+              <a:t>(ex.: Tenda campanha)</a:t>
+            </a:r>
+            <a:endParaRPr lang="pt-PT" dirty="0"/>
+          </a:p>
+        </p:txBody>
+      </p:sp>
+      <p:cxnSp>
+        <p:nvCxnSpPr>
+          <p:cNvPr id="82" name="Conexão reta unidirecional 17">
+            <a:extLst>
+              <a:ext uri="{FF2B5EF4-FFF2-40B4-BE49-F238E27FC236}">
+                <a16:creationId xmlns:a16="http://schemas.microsoft.com/office/drawing/2014/main" id="{784DB7AC-A8DB-2602-99F3-0E35981BDFAC}"/>
+              </a:ext>
+            </a:extLst>
+          </p:cNvPr>
+          <p:cNvCxnSpPr>
+            <a:cxnSpLocks/>
+            <a:stCxn id="80" idx="2"/>
+            <a:endCxn id="81" idx="0"/>
+          </p:cNvCxnSpPr>
+          <p:nvPr/>
+        </p:nvCxnSpPr>
+        <p:spPr>
+          <a:xfrm rot="16200000" flipH="1">
+            <a:off x="5674581" y="3097553"/>
+            <a:ext cx="792437" cy="1549400"/>
+          </a:xfrm>
+          <a:prstGeom prst="bentConnector3">
+            <a:avLst>
+              <a:gd name="adj1" fmla="val 50000"/>
+            </a:avLst>
+          </a:prstGeom>
+          <a:ln w="31750">
+            <a:tailEnd type="triangle"/>
+          </a:ln>
+        </p:spPr>
+        <p:style>
+          <a:lnRef idx="2">
+            <a:schemeClr val="accent3"/>
+          </a:lnRef>
+          <a:fillRef idx="0">
+            <a:schemeClr val="accent3"/>
+          </a:fillRef>
+          <a:effectRef idx="1">
+            <a:schemeClr val="accent3"/>
+          </a:effectRef>
+          <a:fontRef idx="minor">
+            <a:schemeClr val="tx1"/>
+          </a:fontRef>
+        </p:style>
+      </p:cxnSp>
+      <p:sp>
+        <p:nvSpPr>
+          <p:cNvPr id="83" name="Retângulo: Cantos Arredondados 82">
+            <a:extLst>
+              <a:ext uri="{FF2B5EF4-FFF2-40B4-BE49-F238E27FC236}">
+                <a16:creationId xmlns:a16="http://schemas.microsoft.com/office/drawing/2014/main" id="{668A6D9D-D16F-7C78-DDDA-6551CE218AF7}"/>
+              </a:ext>
+            </a:extLst>
+          </p:cNvPr>
+          <p:cNvSpPr/>
+          <p:nvPr/>
+        </p:nvSpPr>
+        <p:spPr>
+          <a:xfrm>
+            <a:off x="2298302" y="4288700"/>
+            <a:ext cx="2895998" cy="842100"/>
+          </a:xfrm>
+          <a:prstGeom prst="roundRect">
+            <a:avLst/>
+          </a:prstGeom>
+          <a:solidFill>
+            <a:schemeClr val="accent6">
+              <a:lumMod val="20000"/>
+              <a:lumOff val="80000"/>
+            </a:schemeClr>
+          </a:solidFill>
+          <a:ln w="31750"/>
+        </p:spPr>
+        <p:style>
+          <a:lnRef idx="2">
+            <a:schemeClr val="accent3"/>
+          </a:lnRef>
+          <a:fillRef idx="1">
+            <a:schemeClr val="lt1"/>
+          </a:fillRef>
+          <a:effectRef idx="0">
+            <a:schemeClr val="accent3"/>
+          </a:effectRef>
+          <a:fontRef idx="minor">
+            <a:schemeClr val="dk1"/>
+          </a:fontRef>
+        </p:style>
+        <p:txBody>
+          <a:bodyPr rtlCol="0" anchor="ctr"/>
+          <a:lstStyle/>
+          <a:p>
+            <a:pPr algn="ctr"/>
+            <a:r>
+              <a:rPr lang="pt-PT" b="1" dirty="0"/>
+              <a:t>ZCAP</a:t>
+            </a:r>
+            <a:br>
+              <a:rPr lang="pt-PT" dirty="0"/>
+            </a:br>
+            <a:r>
+              <a:rPr lang="pt-PT" sz="1600" dirty="0"/>
+              <a:t>(ex.: Escola Secundária)</a:t>
+            </a:r>
+            <a:endParaRPr lang="pt-PT" dirty="0"/>
+          </a:p>
+        </p:txBody>
+      </p:sp>
+      <p:cxnSp>
+        <p:nvCxnSpPr>
+          <p:cNvPr id="84" name="Conexão reta unidirecional 17">
+            <a:extLst>
+              <a:ext uri="{FF2B5EF4-FFF2-40B4-BE49-F238E27FC236}">
+                <a16:creationId xmlns:a16="http://schemas.microsoft.com/office/drawing/2014/main" id="{5CF8A74C-30DD-4EB0-BDF6-5588302FEF32}"/>
+              </a:ext>
+            </a:extLst>
+          </p:cNvPr>
+          <p:cNvCxnSpPr>
+            <a:cxnSpLocks/>
+            <a:stCxn id="80" idx="2"/>
+            <a:endCxn id="83" idx="0"/>
+          </p:cNvCxnSpPr>
+          <p:nvPr/>
+        </p:nvCxnSpPr>
+        <p:spPr>
+          <a:xfrm rot="5400000">
+            <a:off x="4114868" y="3107468"/>
+            <a:ext cx="812665" cy="1549798"/>
+          </a:xfrm>
+          <a:prstGeom prst="bentConnector3">
+            <a:avLst>
+              <a:gd name="adj1" fmla="val 48828"/>
+            </a:avLst>
+          </a:prstGeom>
+          <a:ln w="31750">
+            <a:tailEnd type="triangle"/>
+          </a:ln>
+        </p:spPr>
+        <p:style>
+          <a:lnRef idx="2">
+            <a:schemeClr val="accent3"/>
+          </a:lnRef>
+          <a:fillRef idx="0">
+            <a:schemeClr val="accent3"/>
+          </a:fillRef>
+          <a:effectRef idx="1">
+            <a:schemeClr val="accent3"/>
+          </a:effectRef>
+          <a:fontRef idx="minor">
+            <a:schemeClr val="tx1"/>
+          </a:fontRef>
+        </p:style>
+      </p:cxnSp>
+      <p:sp>
+        <p:nvSpPr>
+          <p:cNvPr id="2" name="Retângulo: Cantos Arredondados 1">
+            <a:extLst>
+              <a:ext uri="{FF2B5EF4-FFF2-40B4-BE49-F238E27FC236}">
+                <a16:creationId xmlns:a16="http://schemas.microsoft.com/office/drawing/2014/main" id="{E2D43AB4-CCDC-B781-B03C-53FEB6518171}"/>
+              </a:ext>
+            </a:extLst>
+          </p:cNvPr>
+          <p:cNvSpPr/>
+          <p:nvPr/>
+        </p:nvSpPr>
+        <p:spPr>
+          <a:xfrm>
+            <a:off x="8496698" y="4288700"/>
+            <a:ext cx="2895998" cy="842100"/>
+          </a:xfrm>
+          <a:prstGeom prst="roundRect">
+            <a:avLst/>
+          </a:prstGeom>
+          <a:solidFill>
+            <a:schemeClr val="accent6">
+              <a:lumMod val="20000"/>
+              <a:lumOff val="80000"/>
+            </a:schemeClr>
+          </a:solidFill>
+          <a:ln w="31750">
+            <a:prstDash val="dash"/>
+          </a:ln>
+        </p:spPr>
+        <p:style>
+          <a:lnRef idx="2">
+            <a:schemeClr val="accent3"/>
+          </a:lnRef>
+          <a:fillRef idx="1">
+            <a:schemeClr val="lt1"/>
+          </a:fillRef>
+          <a:effectRef idx="0">
+            <a:schemeClr val="accent3"/>
+          </a:effectRef>
+          <a:fontRef idx="minor">
+            <a:schemeClr val="dk1"/>
+          </a:fontRef>
+        </p:style>
+        <p:txBody>
+          <a:bodyPr rtlCol="0" anchor="ctr"/>
+          <a:lstStyle/>
+          <a:p>
+            <a:pPr algn="ctr"/>
+            <a:r>
+              <a:rPr lang="pt-PT" b="1" dirty="0"/>
+              <a:t>ZCAP</a:t>
+            </a:r>
+          </a:p>
+          <a:p>
+            <a:pPr algn="ctr"/>
+            <a:endParaRPr lang="pt-PT" dirty="0"/>
+          </a:p>
+        </p:txBody>
+      </p:sp>
+      <p:sp>
+        <p:nvSpPr>
+          <p:cNvPr id="7" name="Retângulo: Cantos Arredondados 6">
+            <a:extLst>
+              <a:ext uri="{FF2B5EF4-FFF2-40B4-BE49-F238E27FC236}">
+                <a16:creationId xmlns:a16="http://schemas.microsoft.com/office/drawing/2014/main" id="{E944FCBF-8620-DC6C-C814-F429F8B0521F}"/>
+              </a:ext>
+            </a:extLst>
+          </p:cNvPr>
+          <p:cNvSpPr/>
+          <p:nvPr/>
+        </p:nvSpPr>
+        <p:spPr>
+          <a:xfrm>
+            <a:off x="2298302" y="5380900"/>
+            <a:ext cx="2895998" cy="842100"/>
+          </a:xfrm>
+          <a:prstGeom prst="roundRect">
+            <a:avLst/>
+          </a:prstGeom>
+          <a:ln w="31750"/>
+        </p:spPr>
+        <p:style>
+          <a:lnRef idx="2">
+            <a:schemeClr val="accent3"/>
+          </a:lnRef>
+          <a:fillRef idx="1">
+            <a:schemeClr val="lt1"/>
+          </a:fillRef>
+          <a:effectRef idx="0">
+            <a:schemeClr val="accent3"/>
+          </a:effectRef>
+          <a:fontRef idx="minor">
+            <a:schemeClr val="dk1"/>
+          </a:fontRef>
+        </p:style>
+        <p:txBody>
+          <a:bodyPr rtlCol="0" anchor="ctr"/>
+          <a:lstStyle/>
+          <a:p>
+            <a:pPr algn="ctr"/>
+            <a:r>
+              <a:rPr lang="pt-PT" b="1" dirty="0"/>
+              <a:t>Pessoas</a:t>
+            </a:r>
+            <a:br>
+              <a:rPr lang="pt-PT" dirty="0"/>
+            </a:br>
+            <a:r>
+              <a:rPr lang="pt-PT" sz="1600" dirty="0"/>
+              <a:t>(ex.: José)</a:t>
+            </a:r>
+            <a:endParaRPr lang="pt-PT" dirty="0"/>
+          </a:p>
+        </p:txBody>
+      </p:sp>
+      <p:sp>
+        <p:nvSpPr>
+          <p:cNvPr id="8" name="Retângulo: Cantos Arredondados 7">
+            <a:extLst>
+              <a:ext uri="{FF2B5EF4-FFF2-40B4-BE49-F238E27FC236}">
+                <a16:creationId xmlns:a16="http://schemas.microsoft.com/office/drawing/2014/main" id="{974571E5-CE79-6E76-8429-2F98890EBDEF}"/>
+              </a:ext>
+            </a:extLst>
+          </p:cNvPr>
+          <p:cNvSpPr/>
+          <p:nvPr/>
+        </p:nvSpPr>
+        <p:spPr>
+          <a:xfrm>
+            <a:off x="2298302" y="7578000"/>
+            <a:ext cx="2895998" cy="842100"/>
+          </a:xfrm>
+          <a:prstGeom prst="roundRect">
+            <a:avLst/>
+          </a:prstGeom>
+          <a:ln w="31750"/>
+        </p:spPr>
+        <p:style>
+          <a:lnRef idx="2">
+            <a:schemeClr val="accent3"/>
+          </a:lnRef>
+          <a:fillRef idx="1">
+            <a:schemeClr val="lt1"/>
+          </a:fillRef>
+          <a:effectRef idx="0">
+            <a:schemeClr val="accent3"/>
+          </a:effectRef>
+          <a:fontRef idx="minor">
+            <a:schemeClr val="dk1"/>
+          </a:fontRef>
+        </p:style>
+        <p:txBody>
+          <a:bodyPr rtlCol="0" anchor="ctr"/>
+          <a:lstStyle/>
+          <a:p>
+            <a:pPr algn="ctr"/>
+            <a:r>
+              <a:rPr lang="pt-PT" b="1" dirty="0"/>
+              <a:t>Pessoas</a:t>
+            </a:r>
+            <a:br>
+              <a:rPr lang="pt-PT" dirty="0"/>
+            </a:br>
+            <a:r>
+              <a:rPr lang="pt-PT" sz="1600" dirty="0"/>
+              <a:t>(ex.: Maria)</a:t>
+            </a:r>
+            <a:endParaRPr lang="pt-PT" dirty="0"/>
+          </a:p>
+        </p:txBody>
+      </p:sp>
+      <p:cxnSp>
+        <p:nvCxnSpPr>
+          <p:cNvPr id="9" name="Conexão reta 8">
+            <a:extLst>
+              <a:ext uri="{FF2B5EF4-FFF2-40B4-BE49-F238E27FC236}">
+                <a16:creationId xmlns:a16="http://schemas.microsoft.com/office/drawing/2014/main" id="{033CCF02-EC34-2389-5CA6-E9FFEC789969}"/>
+              </a:ext>
+            </a:extLst>
+          </p:cNvPr>
+          <p:cNvCxnSpPr>
+            <a:cxnSpLocks/>
+            <a:stCxn id="7" idx="2"/>
+            <a:endCxn id="8" idx="0"/>
+          </p:cNvCxnSpPr>
+          <p:nvPr/>
+        </p:nvCxnSpPr>
+        <p:spPr>
+          <a:xfrm>
+            <a:off x="3746301" y="6223000"/>
+            <a:ext cx="0" cy="1355000"/>
+          </a:xfrm>
+          <a:prstGeom prst="line">
+            <a:avLst/>
+          </a:prstGeom>
+          <a:ln w="31750">
+            <a:prstDash val="dash"/>
+          </a:ln>
+        </p:spPr>
+        <p:style>
+          <a:lnRef idx="2">
+            <a:schemeClr val="accent3"/>
+          </a:lnRef>
+          <a:fillRef idx="0">
+            <a:schemeClr val="accent3"/>
+          </a:fillRef>
+          <a:effectRef idx="1">
+            <a:schemeClr val="accent3"/>
+          </a:effectRef>
+          <a:fontRef idx="minor">
+            <a:schemeClr val="tx1"/>
+          </a:fontRef>
+        </p:style>
+      </p:cxnSp>
+      <p:cxnSp>
+        <p:nvCxnSpPr>
+          <p:cNvPr id="12" name="Conexão reta 11">
+            <a:extLst>
+              <a:ext uri="{FF2B5EF4-FFF2-40B4-BE49-F238E27FC236}">
+                <a16:creationId xmlns:a16="http://schemas.microsoft.com/office/drawing/2014/main" id="{BFE22565-30E6-0844-CA48-D2C27286B8D3}"/>
+              </a:ext>
+            </a:extLst>
+          </p:cNvPr>
+          <p:cNvCxnSpPr>
+            <a:cxnSpLocks/>
+            <a:stCxn id="83" idx="2"/>
+            <a:endCxn id="7" idx="0"/>
+          </p:cNvCxnSpPr>
+          <p:nvPr/>
+        </p:nvCxnSpPr>
+        <p:spPr>
+          <a:xfrm>
+            <a:off x="3746301" y="5130800"/>
+            <a:ext cx="0" cy="250100"/>
+          </a:xfrm>
+          <a:prstGeom prst="line">
+            <a:avLst/>
+          </a:prstGeom>
+          <a:ln w="31750">
+            <a:prstDash val="solid"/>
+          </a:ln>
+        </p:spPr>
+        <p:style>
+          <a:lnRef idx="2">
+            <a:schemeClr val="accent3"/>
+          </a:lnRef>
+          <a:fillRef idx="0">
+            <a:schemeClr val="accent3"/>
+          </a:fillRef>
+          <a:effectRef idx="1">
+            <a:schemeClr val="accent3"/>
+          </a:effectRef>
+          <a:fontRef idx="minor">
+            <a:schemeClr val="tx1"/>
+          </a:fontRef>
+        </p:style>
+      </p:cxnSp>
+      <p:sp>
+        <p:nvSpPr>
+          <p:cNvPr id="16" name="Retângulo: Cantos Arredondados 15">
+            <a:extLst>
+              <a:ext uri="{FF2B5EF4-FFF2-40B4-BE49-F238E27FC236}">
+                <a16:creationId xmlns:a16="http://schemas.microsoft.com/office/drawing/2014/main" id="{C3AF9E76-2EF4-DD56-FB29-927279A9CB7B}"/>
+              </a:ext>
+            </a:extLst>
+          </p:cNvPr>
+          <p:cNvSpPr/>
+          <p:nvPr/>
+        </p:nvSpPr>
+        <p:spPr>
+          <a:xfrm>
+            <a:off x="5397500" y="5380900"/>
+            <a:ext cx="2895998" cy="842100"/>
+          </a:xfrm>
+          <a:prstGeom prst="roundRect">
+            <a:avLst/>
+          </a:prstGeom>
+          <a:ln w="31750"/>
+        </p:spPr>
+        <p:style>
+          <a:lnRef idx="2">
+            <a:schemeClr val="accent3"/>
+          </a:lnRef>
+          <a:fillRef idx="1">
+            <a:schemeClr val="lt1"/>
+          </a:fillRef>
+          <a:effectRef idx="0">
+            <a:schemeClr val="accent3"/>
+          </a:effectRef>
+          <a:fontRef idx="minor">
+            <a:schemeClr val="dk1"/>
+          </a:fontRef>
+        </p:style>
+        <p:txBody>
+          <a:bodyPr rtlCol="0" anchor="ctr"/>
+          <a:lstStyle/>
+          <a:p>
+            <a:pPr algn="ctr"/>
+            <a:r>
+              <a:rPr lang="pt-PT" b="1" dirty="0"/>
+              <a:t>Pessoas</a:t>
+            </a:r>
+            <a:br>
+              <a:rPr lang="pt-PT" dirty="0"/>
+            </a:br>
+            <a:r>
+              <a:rPr lang="pt-PT" sz="1600" dirty="0"/>
+              <a:t>(ex.: Fernando)</a:t>
+            </a:r>
+            <a:endParaRPr lang="pt-PT" dirty="0"/>
+          </a:p>
+        </p:txBody>
+      </p:sp>
+      <p:cxnSp>
+        <p:nvCxnSpPr>
+          <p:cNvPr id="17" name="Conexão reta 16">
+            <a:extLst>
+              <a:ext uri="{FF2B5EF4-FFF2-40B4-BE49-F238E27FC236}">
+                <a16:creationId xmlns:a16="http://schemas.microsoft.com/office/drawing/2014/main" id="{938E82EC-FEE4-5891-6230-AB0662599C83}"/>
+              </a:ext>
+            </a:extLst>
+          </p:cNvPr>
+          <p:cNvCxnSpPr>
+            <a:cxnSpLocks/>
+            <a:stCxn id="81" idx="2"/>
+            <a:endCxn id="16" idx="0"/>
+          </p:cNvCxnSpPr>
+          <p:nvPr/>
+        </p:nvCxnSpPr>
+        <p:spPr>
+          <a:xfrm>
+            <a:off x="6845499" y="5110572"/>
+            <a:ext cx="0" cy="270328"/>
+          </a:xfrm>
+          <a:prstGeom prst="line">
+            <a:avLst/>
+          </a:prstGeom>
+          <a:ln w="31750">
+            <a:prstDash val="solid"/>
+          </a:ln>
+        </p:spPr>
+        <p:style>
+          <a:lnRef idx="2">
+            <a:schemeClr val="accent3"/>
+          </a:lnRef>
+          <a:fillRef idx="0">
+            <a:schemeClr val="accent3"/>
+          </a:fillRef>
+          <a:effectRef idx="1">
+            <a:schemeClr val="accent3"/>
+          </a:effectRef>
+          <a:fontRef idx="minor">
+            <a:schemeClr val="tx1"/>
+          </a:fontRef>
+        </p:style>
+      </p:cxnSp>
+      <p:cxnSp>
+        <p:nvCxnSpPr>
+          <p:cNvPr id="20" name="Conexão reta 19">
+            <a:extLst>
+              <a:ext uri="{FF2B5EF4-FFF2-40B4-BE49-F238E27FC236}">
+                <a16:creationId xmlns:a16="http://schemas.microsoft.com/office/drawing/2014/main" id="{B690111F-5E34-32E1-F2A0-39C5C2752619}"/>
+              </a:ext>
+            </a:extLst>
+          </p:cNvPr>
+          <p:cNvCxnSpPr>
+            <a:cxnSpLocks/>
+            <a:stCxn id="16" idx="2"/>
+          </p:cNvCxnSpPr>
+          <p:nvPr/>
+        </p:nvCxnSpPr>
+        <p:spPr>
+          <a:xfrm>
+            <a:off x="6845499" y="6223000"/>
+            <a:ext cx="0" cy="863600"/>
+          </a:xfrm>
+          <a:prstGeom prst="line">
+            <a:avLst/>
+          </a:prstGeom>
+          <a:ln w="31750">
+            <a:prstDash val="dash"/>
+          </a:ln>
+        </p:spPr>
+        <p:style>
+          <a:lnRef idx="2">
+            <a:schemeClr val="accent3"/>
+          </a:lnRef>
+          <a:fillRef idx="0">
+            <a:schemeClr val="accent3"/>
+          </a:fillRef>
+          <a:effectRef idx="1">
+            <a:schemeClr val="accent3"/>
+          </a:effectRef>
+          <a:fontRef idx="minor">
+            <a:schemeClr val="tx1"/>
+          </a:fontRef>
+        </p:style>
+      </p:cxnSp>
+    </p:spTree>
+    <p:extLst>
+      <p:ext uri="{BB962C8B-B14F-4D97-AF65-F5344CB8AC3E}">
+        <p14:creationId xmlns:p14="http://schemas.microsoft.com/office/powerpoint/2010/main" val="771710921"/>
+      </p:ext>
+    </p:extLst>
+  </p:cSld>
+  <p:clrMapOvr>
+    <a:masterClrMapping/>
+  </p:clrMapOvr>
+</p:sld>
+</file>
+
 <file path=ppt/slides/slide2.xml><?xml version="1.0" encoding="utf-8"?>
 <p:sld xmlns:a="http://schemas.openxmlformats.org/drawingml/2006/main" xmlns:r="http://schemas.openxmlformats.org/officeDocument/2006/relationships" xmlns:p="http://schemas.openxmlformats.org/presentationml/2006/main">
   <p:cSld>
@@ -22054,6 +22908,1130 @@
     <p:extLst>
       <p:ext uri="{BB962C8B-B14F-4D97-AF65-F5344CB8AC3E}">
         <p14:creationId xmlns:p14="http://schemas.microsoft.com/office/powerpoint/2010/main" val="1467072477"/>
+      </p:ext>
+    </p:extLst>
+  </p:cSld>
+  <p:clrMapOvr>
+    <a:masterClrMapping/>
+  </p:clrMapOvr>
+</p:sld>
+</file>
+
+<file path=ppt/slides/slide9.xml><?xml version="1.0" encoding="utf-8"?>
+<p:sld xmlns:a="http://schemas.openxmlformats.org/drawingml/2006/main" xmlns:r="http://schemas.openxmlformats.org/officeDocument/2006/relationships" xmlns:p="http://schemas.openxmlformats.org/presentationml/2006/main">
+  <p:cSld>
+    <p:spTree>
+      <p:nvGrpSpPr>
+        <p:cNvPr id="1" name="">
+          <a:extLst>
+            <a:ext uri="{FF2B5EF4-FFF2-40B4-BE49-F238E27FC236}">
+              <a16:creationId xmlns:a16="http://schemas.microsoft.com/office/drawing/2014/main" id="{1B64089B-9AB7-DDCD-EE84-2805676DA16D}"/>
+            </a:ext>
+          </a:extLst>
+        </p:cNvPr>
+        <p:cNvGrpSpPr/>
+        <p:nvPr/>
+      </p:nvGrpSpPr>
+      <p:grpSpPr>
+        <a:xfrm>
+          <a:off x="0" y="0"/>
+          <a:ext cx="0" cy="0"/>
+          <a:chOff x="0" y="0"/>
+          <a:chExt cx="0" cy="0"/>
+        </a:xfrm>
+      </p:grpSpPr>
+      <p:sp>
+        <p:nvSpPr>
+          <p:cNvPr id="3" name="Retângulo: Cantos Arredondados 2">
+            <a:extLst>
+              <a:ext uri="{FF2B5EF4-FFF2-40B4-BE49-F238E27FC236}">
+                <a16:creationId xmlns:a16="http://schemas.microsoft.com/office/drawing/2014/main" id="{2D2712BD-6F10-ACED-14A6-F22481761721}"/>
+              </a:ext>
+            </a:extLst>
+          </p:cNvPr>
+          <p:cNvSpPr/>
+          <p:nvPr/>
+        </p:nvSpPr>
+        <p:spPr>
+          <a:xfrm>
+            <a:off x="4412850" y="205015"/>
+            <a:ext cx="2896000" cy="720000"/>
+          </a:xfrm>
+          <a:prstGeom prst="roundRect">
+            <a:avLst/>
+          </a:prstGeom>
+          <a:ln w="31750"/>
+        </p:spPr>
+        <p:style>
+          <a:lnRef idx="2">
+            <a:schemeClr val="accent3"/>
+          </a:lnRef>
+          <a:fillRef idx="1">
+            <a:schemeClr val="lt1"/>
+          </a:fillRef>
+          <a:effectRef idx="0">
+            <a:schemeClr val="accent3"/>
+          </a:effectRef>
+          <a:fontRef idx="minor">
+            <a:schemeClr val="dk1"/>
+          </a:fontRef>
+        </p:style>
+        <p:txBody>
+          <a:bodyPr rtlCol="0" anchor="ctr"/>
+          <a:lstStyle/>
+          <a:p>
+            <a:pPr algn="ctr"/>
+            <a:r>
+              <a:rPr lang="pt-PT" b="1" dirty="0"/>
+              <a:t>Arvore</a:t>
+            </a:r>
+            <a:r>
+              <a:rPr lang="pt-PT" dirty="0"/>
+              <a:t> </a:t>
+            </a:r>
+            <a:r>
+              <a:rPr lang="pt-PT" b="1" dirty="0"/>
+              <a:t>Hierárquica</a:t>
+            </a:r>
+            <a:br>
+              <a:rPr lang="pt-PT" dirty="0"/>
+            </a:br>
+            <a:r>
+              <a:rPr lang="pt-PT" sz="1600" dirty="0"/>
+              <a:t>(ex.: Município Odivelas)</a:t>
+            </a:r>
+            <a:endParaRPr lang="pt-PT" dirty="0"/>
+          </a:p>
+        </p:txBody>
+      </p:sp>
+      <p:cxnSp>
+        <p:nvCxnSpPr>
+          <p:cNvPr id="8" name="Conexão reta unidirecional 7">
+            <a:extLst>
+              <a:ext uri="{FF2B5EF4-FFF2-40B4-BE49-F238E27FC236}">
+                <a16:creationId xmlns:a16="http://schemas.microsoft.com/office/drawing/2014/main" id="{EDEEF49A-91AC-369B-2587-6BE0AF76B59F}"/>
+              </a:ext>
+            </a:extLst>
+          </p:cNvPr>
+          <p:cNvCxnSpPr>
+            <a:cxnSpLocks/>
+            <a:stCxn id="3" idx="2"/>
+            <a:endCxn id="2" idx="0"/>
+          </p:cNvCxnSpPr>
+          <p:nvPr/>
+        </p:nvCxnSpPr>
+        <p:spPr>
+          <a:xfrm flipH="1">
+            <a:off x="5860849" y="925015"/>
+            <a:ext cx="1" cy="429716"/>
+          </a:xfrm>
+          <a:prstGeom prst="straightConnector1">
+            <a:avLst/>
+          </a:prstGeom>
+          <a:ln w="31750">
+            <a:tailEnd type="triangle"/>
+          </a:ln>
+        </p:spPr>
+        <p:style>
+          <a:lnRef idx="2">
+            <a:schemeClr val="accent3"/>
+          </a:lnRef>
+          <a:fillRef idx="0">
+            <a:schemeClr val="accent3"/>
+          </a:fillRef>
+          <a:effectRef idx="1">
+            <a:schemeClr val="accent3"/>
+          </a:effectRef>
+          <a:fontRef idx="minor">
+            <a:schemeClr val="tx1"/>
+          </a:fontRef>
+        </p:style>
+      </p:cxnSp>
+      <p:sp>
+        <p:nvSpPr>
+          <p:cNvPr id="2" name="Retângulo: Cantos Arredondados 1">
+            <a:extLst>
+              <a:ext uri="{FF2B5EF4-FFF2-40B4-BE49-F238E27FC236}">
+                <a16:creationId xmlns:a16="http://schemas.microsoft.com/office/drawing/2014/main" id="{90D297B6-AA6C-21B9-F6BF-21F3BD70DCE5}"/>
+              </a:ext>
+            </a:extLst>
+          </p:cNvPr>
+          <p:cNvSpPr/>
+          <p:nvPr/>
+        </p:nvSpPr>
+        <p:spPr>
+          <a:xfrm>
+            <a:off x="4412850" y="1354731"/>
+            <a:ext cx="2895998" cy="842100"/>
+          </a:xfrm>
+          <a:prstGeom prst="roundRect">
+            <a:avLst/>
+          </a:prstGeom>
+          <a:solidFill>
+            <a:schemeClr val="accent6">
+              <a:lumMod val="20000"/>
+              <a:lumOff val="80000"/>
+            </a:schemeClr>
+          </a:solidFill>
+          <a:ln w="31750"/>
+        </p:spPr>
+        <p:style>
+          <a:lnRef idx="2">
+            <a:schemeClr val="accent3"/>
+          </a:lnRef>
+          <a:fillRef idx="1">
+            <a:schemeClr val="lt1"/>
+          </a:fillRef>
+          <a:effectRef idx="0">
+            <a:schemeClr val="accent3"/>
+          </a:effectRef>
+          <a:fontRef idx="minor">
+            <a:schemeClr val="dk1"/>
+          </a:fontRef>
+        </p:style>
+        <p:txBody>
+          <a:bodyPr rtlCol="0" anchor="ctr"/>
+          <a:lstStyle/>
+          <a:p>
+            <a:pPr algn="ctr"/>
+            <a:r>
+              <a:rPr lang="pt-PT" b="1" dirty="0"/>
+              <a:t>ZCAP</a:t>
+            </a:r>
+            <a:br>
+              <a:rPr lang="pt-PT" dirty="0"/>
+            </a:br>
+            <a:r>
+              <a:rPr lang="pt-PT" sz="1600" dirty="0"/>
+              <a:t>(ex.: Escola Secundária)</a:t>
+            </a:r>
+            <a:endParaRPr lang="pt-PT" dirty="0"/>
+          </a:p>
+        </p:txBody>
+      </p:sp>
+      <p:sp>
+        <p:nvSpPr>
+          <p:cNvPr id="4" name="Retângulo: Cantos Arredondados 3">
+            <a:extLst>
+              <a:ext uri="{FF2B5EF4-FFF2-40B4-BE49-F238E27FC236}">
+                <a16:creationId xmlns:a16="http://schemas.microsoft.com/office/drawing/2014/main" id="{57CD46D0-0F08-AAE9-05C2-BD7811154492}"/>
+              </a:ext>
+            </a:extLst>
+          </p:cNvPr>
+          <p:cNvSpPr/>
+          <p:nvPr/>
+        </p:nvSpPr>
+        <p:spPr>
+          <a:xfrm>
+            <a:off x="6400800" y="4194182"/>
+            <a:ext cx="2476498" cy="720000"/>
+          </a:xfrm>
+          <a:prstGeom prst="roundRect">
+            <a:avLst/>
+          </a:prstGeom>
+          <a:ln w="31750"/>
+        </p:spPr>
+        <p:style>
+          <a:lnRef idx="2">
+            <a:schemeClr val="accent3"/>
+          </a:lnRef>
+          <a:fillRef idx="1">
+            <a:schemeClr val="lt1"/>
+          </a:fillRef>
+          <a:effectRef idx="0">
+            <a:schemeClr val="accent3"/>
+          </a:effectRef>
+          <a:fontRef idx="minor">
+            <a:schemeClr val="dk1"/>
+          </a:fontRef>
+        </p:style>
+        <p:txBody>
+          <a:bodyPr rtlCol="0" anchor="ctr"/>
+          <a:lstStyle/>
+          <a:p>
+            <a:pPr algn="ctr"/>
+            <a:r>
+              <a:rPr lang="pt-PT" sz="1600" b="1" dirty="0"/>
+              <a:t>Categoria de detalhe</a:t>
+            </a:r>
+          </a:p>
+          <a:p>
+            <a:pPr algn="ctr"/>
+            <a:r>
+              <a:rPr lang="pt-PT" sz="1600" dirty="0"/>
+              <a:t>(ex. Área de Refeições)</a:t>
+            </a:r>
+          </a:p>
+        </p:txBody>
+      </p:sp>
+      <p:sp>
+        <p:nvSpPr>
+          <p:cNvPr id="5" name="Retângulo: Cantos Arredondados 4">
+            <a:extLst>
+              <a:ext uri="{FF2B5EF4-FFF2-40B4-BE49-F238E27FC236}">
+                <a16:creationId xmlns:a16="http://schemas.microsoft.com/office/drawing/2014/main" id="{AB6F5238-A7D8-27D5-EEA5-1E7E5FAE0AF9}"/>
+              </a:ext>
+            </a:extLst>
+          </p:cNvPr>
+          <p:cNvSpPr/>
+          <p:nvPr/>
+        </p:nvSpPr>
+        <p:spPr>
+          <a:xfrm>
+            <a:off x="7149298" y="5238896"/>
+            <a:ext cx="1728000" cy="720000"/>
+          </a:xfrm>
+          <a:prstGeom prst="roundRect">
+            <a:avLst/>
+          </a:prstGeom>
+          <a:ln w="31750"/>
+        </p:spPr>
+        <p:style>
+          <a:lnRef idx="2">
+            <a:schemeClr val="accent3"/>
+          </a:lnRef>
+          <a:fillRef idx="1">
+            <a:schemeClr val="lt1"/>
+          </a:fillRef>
+          <a:effectRef idx="0">
+            <a:schemeClr val="accent3"/>
+          </a:effectRef>
+          <a:fontRef idx="minor">
+            <a:schemeClr val="dk1"/>
+          </a:fontRef>
+        </p:style>
+        <p:txBody>
+          <a:bodyPr rtlCol="0" anchor="ctr"/>
+          <a:lstStyle/>
+          <a:p>
+            <a:pPr algn="ctr"/>
+            <a:r>
+              <a:rPr lang="pt-PT" b="1" dirty="0"/>
+              <a:t>Detalhe</a:t>
+            </a:r>
+            <a:r>
+              <a:rPr lang="pt-PT" dirty="0"/>
+              <a:t> </a:t>
+            </a:r>
+            <a:r>
+              <a:rPr lang="pt-PT" sz="1600" dirty="0"/>
+              <a:t>(</a:t>
+            </a:r>
+            <a:r>
+              <a:rPr lang="pt-PT" sz="1600" i="1" dirty="0" err="1"/>
+              <a:t>bool</a:t>
+            </a:r>
+            <a:r>
+              <a:rPr lang="pt-PT" sz="1600" dirty="0"/>
+              <a:t>)</a:t>
+            </a:r>
+            <a:br>
+              <a:rPr lang="pt-PT" dirty="0"/>
+            </a:br>
+            <a:r>
+              <a:rPr lang="pt-PT" sz="1600" dirty="0"/>
+              <a:t>(ex.: Cozinha)</a:t>
+            </a:r>
+            <a:endParaRPr lang="pt-PT" dirty="0"/>
+          </a:p>
+        </p:txBody>
+      </p:sp>
+      <p:sp>
+        <p:nvSpPr>
+          <p:cNvPr id="12" name="Retângulo: Cantos Arredondados 11">
+            <a:extLst>
+              <a:ext uri="{FF2B5EF4-FFF2-40B4-BE49-F238E27FC236}">
+                <a16:creationId xmlns:a16="http://schemas.microsoft.com/office/drawing/2014/main" id="{013F77CA-0E62-7507-EE07-6D225DC7B7EE}"/>
+              </a:ext>
+            </a:extLst>
+          </p:cNvPr>
+          <p:cNvSpPr/>
+          <p:nvPr/>
+        </p:nvSpPr>
+        <p:spPr>
+          <a:xfrm>
+            <a:off x="2609850" y="2995550"/>
+            <a:ext cx="3168250" cy="2368930"/>
+          </a:xfrm>
+          <a:prstGeom prst="roundRect">
+            <a:avLst/>
+          </a:prstGeom>
+          <a:ln w="31750"/>
+        </p:spPr>
+        <p:style>
+          <a:lnRef idx="2">
+            <a:schemeClr val="accent3"/>
+          </a:lnRef>
+          <a:fillRef idx="1">
+            <a:schemeClr val="lt1"/>
+          </a:fillRef>
+          <a:effectRef idx="0">
+            <a:schemeClr val="accent3"/>
+          </a:effectRef>
+          <a:fontRef idx="minor">
+            <a:schemeClr val="dk1"/>
+          </a:fontRef>
+        </p:style>
+        <p:txBody>
+          <a:bodyPr rtlCol="0" anchor="ctr"/>
+          <a:lstStyle/>
+          <a:p>
+            <a:pPr algn="ctr"/>
+            <a:r>
+              <a:rPr lang="pt-PT" b="1" dirty="0"/>
+              <a:t>Dados</a:t>
+            </a:r>
+            <a:r>
+              <a:rPr lang="pt-PT" dirty="0"/>
+              <a:t> </a:t>
+            </a:r>
+            <a:r>
+              <a:rPr lang="pt-PT" b="1" dirty="0"/>
+              <a:t>obrigatórios:</a:t>
+            </a:r>
+          </a:p>
+          <a:p>
+            <a:pPr marL="285750" indent="-285750">
+              <a:buFont typeface="Arial" panose="020B0604020202020204" pitchFamily="34" charset="0"/>
+              <a:buChar char="•"/>
+            </a:pPr>
+            <a:r>
+              <a:rPr lang="pt-PT" sz="1600" dirty="0"/>
+              <a:t>Morada</a:t>
+            </a:r>
+          </a:p>
+          <a:p>
+            <a:pPr marL="285750" indent="-285750">
+              <a:buFont typeface="Arial" panose="020B0604020202020204" pitchFamily="34" charset="0"/>
+              <a:buChar char="•"/>
+            </a:pPr>
+            <a:r>
+              <a:rPr lang="pt-PT" sz="1600" dirty="0"/>
+              <a:t>Entidade (lista de valores)</a:t>
+            </a:r>
+          </a:p>
+          <a:p>
+            <a:pPr marL="285750" indent="-285750">
+              <a:buFont typeface="Arial" panose="020B0604020202020204" pitchFamily="34" charset="0"/>
+              <a:buChar char="•"/>
+            </a:pPr>
+            <a:r>
+              <a:rPr lang="pt-PT" sz="1600" dirty="0"/>
+              <a:t>Tipologia (lista de valores)</a:t>
+            </a:r>
+          </a:p>
+          <a:p>
+            <a:pPr marL="285750" indent="-285750">
+              <a:buFont typeface="Arial" panose="020B0604020202020204" pitchFamily="34" charset="0"/>
+              <a:buChar char="•"/>
+            </a:pPr>
+            <a:r>
+              <a:rPr lang="pt-PT" sz="1600" dirty="0"/>
+              <a:t>Latitude</a:t>
+            </a:r>
+          </a:p>
+          <a:p>
+            <a:pPr marL="285750" indent="-285750">
+              <a:buFont typeface="Arial" panose="020B0604020202020204" pitchFamily="34" charset="0"/>
+              <a:buChar char="•"/>
+            </a:pPr>
+            <a:r>
+              <a:rPr lang="pt-PT" sz="1600" dirty="0"/>
+              <a:t>Longitude</a:t>
+            </a:r>
+          </a:p>
+          <a:p>
+            <a:pPr marL="285750" indent="-285750">
+              <a:buFont typeface="Arial" panose="020B0604020202020204" pitchFamily="34" charset="0"/>
+              <a:buChar char="•"/>
+            </a:pPr>
+            <a:r>
+              <a:rPr lang="pt-PT" sz="1600" dirty="0"/>
+              <a:t>…</a:t>
+            </a:r>
+            <a:endParaRPr lang="pt-PT" dirty="0"/>
+          </a:p>
+        </p:txBody>
+      </p:sp>
+      <p:sp>
+        <p:nvSpPr>
+          <p:cNvPr id="15" name="Retângulo: Cantos Arredondados 14">
+            <a:extLst>
+              <a:ext uri="{FF2B5EF4-FFF2-40B4-BE49-F238E27FC236}">
+                <a16:creationId xmlns:a16="http://schemas.microsoft.com/office/drawing/2014/main" id="{E996A90A-5E02-6850-83B2-5FD1A2CF4ADD}"/>
+              </a:ext>
+            </a:extLst>
+          </p:cNvPr>
+          <p:cNvSpPr/>
+          <p:nvPr/>
+        </p:nvSpPr>
+        <p:spPr>
+          <a:xfrm>
+            <a:off x="5981300" y="3027368"/>
+            <a:ext cx="2895998" cy="842100"/>
+          </a:xfrm>
+          <a:prstGeom prst="roundRect">
+            <a:avLst/>
+          </a:prstGeom>
+          <a:ln w="31750"/>
+        </p:spPr>
+        <p:style>
+          <a:lnRef idx="2">
+            <a:schemeClr val="accent3"/>
+          </a:lnRef>
+          <a:fillRef idx="1">
+            <a:schemeClr val="lt1"/>
+          </a:fillRef>
+          <a:effectRef idx="0">
+            <a:schemeClr val="accent3"/>
+          </a:effectRef>
+          <a:fontRef idx="minor">
+            <a:schemeClr val="dk1"/>
+          </a:fontRef>
+        </p:style>
+        <p:txBody>
+          <a:bodyPr rtlCol="0" anchor="ctr"/>
+          <a:lstStyle/>
+          <a:p>
+            <a:pPr algn="ctr"/>
+            <a:r>
+              <a:rPr lang="pt-PT" b="1" dirty="0"/>
+              <a:t>ZCAP Detalhes</a:t>
+            </a:r>
+          </a:p>
+        </p:txBody>
+      </p:sp>
+      <p:sp>
+        <p:nvSpPr>
+          <p:cNvPr id="16" name="Retângulo: Cantos Arredondados 15">
+            <a:extLst>
+              <a:ext uri="{FF2B5EF4-FFF2-40B4-BE49-F238E27FC236}">
+                <a16:creationId xmlns:a16="http://schemas.microsoft.com/office/drawing/2014/main" id="{A9FC112B-B517-AAFD-C86B-59EA42CF6E7F}"/>
+              </a:ext>
+            </a:extLst>
+          </p:cNvPr>
+          <p:cNvSpPr/>
+          <p:nvPr/>
+        </p:nvSpPr>
+        <p:spPr>
+          <a:xfrm>
+            <a:off x="7149298" y="6500818"/>
+            <a:ext cx="1728000" cy="720000"/>
+          </a:xfrm>
+          <a:prstGeom prst="roundRect">
+            <a:avLst/>
+          </a:prstGeom>
+          <a:ln w="31750"/>
+        </p:spPr>
+        <p:style>
+          <a:lnRef idx="2">
+            <a:schemeClr val="accent3"/>
+          </a:lnRef>
+          <a:fillRef idx="1">
+            <a:schemeClr val="lt1"/>
+          </a:fillRef>
+          <a:effectRef idx="0">
+            <a:schemeClr val="accent3"/>
+          </a:effectRef>
+          <a:fontRef idx="minor">
+            <a:schemeClr val="dk1"/>
+          </a:fontRef>
+        </p:style>
+        <p:txBody>
+          <a:bodyPr rtlCol="0" anchor="ctr"/>
+          <a:lstStyle/>
+          <a:p>
+            <a:pPr algn="ctr"/>
+            <a:r>
+              <a:rPr lang="pt-PT" b="1" dirty="0"/>
+              <a:t>Detalhe</a:t>
+            </a:r>
+            <a:r>
+              <a:rPr lang="pt-PT" dirty="0"/>
+              <a:t> </a:t>
+            </a:r>
+            <a:r>
+              <a:rPr lang="pt-PT" sz="1600" dirty="0"/>
+              <a:t>(</a:t>
+            </a:r>
+            <a:r>
+              <a:rPr lang="pt-PT" sz="1600" i="1" dirty="0" err="1"/>
+              <a:t>int</a:t>
+            </a:r>
+            <a:r>
+              <a:rPr lang="pt-PT" sz="1600" dirty="0"/>
+              <a:t>)</a:t>
+            </a:r>
+            <a:br>
+              <a:rPr lang="pt-PT" dirty="0"/>
+            </a:br>
+            <a:r>
+              <a:rPr lang="pt-PT" sz="1400" dirty="0"/>
+              <a:t>(ex.: Capacidade refeições)</a:t>
+            </a:r>
+            <a:endParaRPr lang="pt-PT" dirty="0"/>
+          </a:p>
+        </p:txBody>
+      </p:sp>
+      <p:cxnSp>
+        <p:nvCxnSpPr>
+          <p:cNvPr id="18" name="Conexão reta unidirecional 17">
+            <a:extLst>
+              <a:ext uri="{FF2B5EF4-FFF2-40B4-BE49-F238E27FC236}">
+                <a16:creationId xmlns:a16="http://schemas.microsoft.com/office/drawing/2014/main" id="{926F3D79-70D6-0BCC-C894-368B4C16F8DB}"/>
+              </a:ext>
+            </a:extLst>
+          </p:cNvPr>
+          <p:cNvCxnSpPr>
+            <a:cxnSpLocks/>
+            <a:stCxn id="2" idx="2"/>
+            <a:endCxn id="12" idx="0"/>
+          </p:cNvCxnSpPr>
+          <p:nvPr/>
+        </p:nvCxnSpPr>
+        <p:spPr>
+          <a:xfrm rot="5400000">
+            <a:off x="4628053" y="1762753"/>
+            <a:ext cx="798719" cy="1666874"/>
+          </a:xfrm>
+          <a:prstGeom prst="bentConnector3">
+            <a:avLst>
+              <a:gd name="adj1" fmla="val 50000"/>
+            </a:avLst>
+          </a:prstGeom>
+          <a:ln w="31750">
+            <a:tailEnd type="triangle"/>
+          </a:ln>
+        </p:spPr>
+        <p:style>
+          <a:lnRef idx="2">
+            <a:schemeClr val="accent3"/>
+          </a:lnRef>
+          <a:fillRef idx="0">
+            <a:schemeClr val="accent3"/>
+          </a:fillRef>
+          <a:effectRef idx="1">
+            <a:schemeClr val="accent3"/>
+          </a:effectRef>
+          <a:fontRef idx="minor">
+            <a:schemeClr val="tx1"/>
+          </a:fontRef>
+        </p:style>
+      </p:cxnSp>
+      <p:cxnSp>
+        <p:nvCxnSpPr>
+          <p:cNvPr id="27" name="Conexão reta unidirecional 17">
+            <a:extLst>
+              <a:ext uri="{FF2B5EF4-FFF2-40B4-BE49-F238E27FC236}">
+                <a16:creationId xmlns:a16="http://schemas.microsoft.com/office/drawing/2014/main" id="{1893C241-E4A0-3958-A719-09F88AA2AEBC}"/>
+              </a:ext>
+            </a:extLst>
+          </p:cNvPr>
+          <p:cNvCxnSpPr>
+            <a:cxnSpLocks/>
+            <a:stCxn id="2" idx="2"/>
+            <a:endCxn id="15" idx="0"/>
+          </p:cNvCxnSpPr>
+          <p:nvPr/>
+        </p:nvCxnSpPr>
+        <p:spPr>
+          <a:xfrm rot="16200000" flipH="1">
+            <a:off x="6229806" y="1827874"/>
+            <a:ext cx="830537" cy="1568450"/>
+          </a:xfrm>
+          <a:prstGeom prst="bentConnector3">
+            <a:avLst>
+              <a:gd name="adj1" fmla="val 47993"/>
+            </a:avLst>
+          </a:prstGeom>
+          <a:ln w="31750">
+            <a:tailEnd type="triangle"/>
+          </a:ln>
+        </p:spPr>
+        <p:style>
+          <a:lnRef idx="2">
+            <a:schemeClr val="accent3"/>
+          </a:lnRef>
+          <a:fillRef idx="0">
+            <a:schemeClr val="accent3"/>
+          </a:fillRef>
+          <a:effectRef idx="1">
+            <a:schemeClr val="accent3"/>
+          </a:effectRef>
+          <a:fontRef idx="minor">
+            <a:schemeClr val="tx1"/>
+          </a:fontRef>
+        </p:style>
+      </p:cxnSp>
+      <p:cxnSp>
+        <p:nvCxnSpPr>
+          <p:cNvPr id="33" name="Conexão reta unidirecional 17">
+            <a:extLst>
+              <a:ext uri="{FF2B5EF4-FFF2-40B4-BE49-F238E27FC236}">
+                <a16:creationId xmlns:a16="http://schemas.microsoft.com/office/drawing/2014/main" id="{413DC254-B62E-7DDE-CA82-27CC61D3D9AB}"/>
+              </a:ext>
+            </a:extLst>
+          </p:cNvPr>
+          <p:cNvCxnSpPr>
+            <a:cxnSpLocks/>
+            <a:endCxn id="4" idx="1"/>
+          </p:cNvCxnSpPr>
+          <p:nvPr/>
+        </p:nvCxnSpPr>
+        <p:spPr>
+          <a:xfrm rot="16200000" flipH="1">
+            <a:off x="5962897" y="4116279"/>
+            <a:ext cx="684710" cy="191096"/>
+          </a:xfrm>
+          <a:prstGeom prst="bentConnector2">
+            <a:avLst/>
+          </a:prstGeom>
+          <a:ln w="31750">
+            <a:tailEnd type="triangle"/>
+          </a:ln>
+        </p:spPr>
+        <p:style>
+          <a:lnRef idx="2">
+            <a:schemeClr val="accent3"/>
+          </a:lnRef>
+          <a:fillRef idx="0">
+            <a:schemeClr val="accent3"/>
+          </a:fillRef>
+          <a:effectRef idx="1">
+            <a:schemeClr val="accent3"/>
+          </a:effectRef>
+          <a:fontRef idx="minor">
+            <a:schemeClr val="tx1"/>
+          </a:fontRef>
+        </p:style>
+      </p:cxnSp>
+      <p:sp>
+        <p:nvSpPr>
+          <p:cNvPr id="36" name="Retângulo: Cantos Arredondados 35">
+            <a:extLst>
+              <a:ext uri="{FF2B5EF4-FFF2-40B4-BE49-F238E27FC236}">
+                <a16:creationId xmlns:a16="http://schemas.microsoft.com/office/drawing/2014/main" id="{7844AA58-FE87-DC33-E8F5-7C331922E4F6}"/>
+              </a:ext>
+            </a:extLst>
+          </p:cNvPr>
+          <p:cNvSpPr/>
+          <p:nvPr/>
+        </p:nvSpPr>
+        <p:spPr>
+          <a:xfrm>
+            <a:off x="6400800" y="7366007"/>
+            <a:ext cx="2476498" cy="720000"/>
+          </a:xfrm>
+          <a:prstGeom prst="roundRect">
+            <a:avLst/>
+          </a:prstGeom>
+          <a:ln w="31750"/>
+        </p:spPr>
+        <p:style>
+          <a:lnRef idx="2">
+            <a:schemeClr val="accent3"/>
+          </a:lnRef>
+          <a:fillRef idx="1">
+            <a:schemeClr val="lt1"/>
+          </a:fillRef>
+          <a:effectRef idx="0">
+            <a:schemeClr val="accent3"/>
+          </a:effectRef>
+          <a:fontRef idx="minor">
+            <a:schemeClr val="dk1"/>
+          </a:fontRef>
+        </p:style>
+        <p:txBody>
+          <a:bodyPr rtlCol="0" anchor="ctr"/>
+          <a:lstStyle/>
+          <a:p>
+            <a:pPr algn="ctr"/>
+            <a:r>
+              <a:rPr lang="pt-PT" sz="1600" b="1" dirty="0"/>
+              <a:t>Categoria de detalhe</a:t>
+            </a:r>
+          </a:p>
+          <a:p>
+            <a:pPr algn="ctr"/>
+            <a:r>
+              <a:rPr lang="pt-PT" sz="1600" dirty="0"/>
+              <a:t>(ex. Específicos)</a:t>
+            </a:r>
+          </a:p>
+        </p:txBody>
+      </p:sp>
+      <p:cxnSp>
+        <p:nvCxnSpPr>
+          <p:cNvPr id="37" name="Conexão reta unidirecional 17">
+            <a:extLst>
+              <a:ext uri="{FF2B5EF4-FFF2-40B4-BE49-F238E27FC236}">
+                <a16:creationId xmlns:a16="http://schemas.microsoft.com/office/drawing/2014/main" id="{60294D71-174D-6729-8850-6275B8610E08}"/>
+              </a:ext>
+            </a:extLst>
+          </p:cNvPr>
+          <p:cNvCxnSpPr>
+            <a:cxnSpLocks/>
+            <a:endCxn id="36" idx="1"/>
+          </p:cNvCxnSpPr>
+          <p:nvPr/>
+        </p:nvCxnSpPr>
+        <p:spPr>
+          <a:xfrm rot="16200000" flipH="1">
+            <a:off x="4376982" y="5702189"/>
+            <a:ext cx="3856540" cy="191096"/>
+          </a:xfrm>
+          <a:prstGeom prst="bentConnector2">
+            <a:avLst/>
+          </a:prstGeom>
+          <a:ln w="31750">
+            <a:tailEnd type="triangle"/>
+          </a:ln>
+        </p:spPr>
+        <p:style>
+          <a:lnRef idx="2">
+            <a:schemeClr val="accent3"/>
+          </a:lnRef>
+          <a:fillRef idx="0">
+            <a:schemeClr val="accent3"/>
+          </a:fillRef>
+          <a:effectRef idx="1">
+            <a:schemeClr val="accent3"/>
+          </a:effectRef>
+          <a:fontRef idx="minor">
+            <a:schemeClr val="tx1"/>
+          </a:fontRef>
+        </p:style>
+      </p:cxnSp>
+      <p:cxnSp>
+        <p:nvCxnSpPr>
+          <p:cNvPr id="45" name="Conexão reta unidirecional 17">
+            <a:extLst>
+              <a:ext uri="{FF2B5EF4-FFF2-40B4-BE49-F238E27FC236}">
+                <a16:creationId xmlns:a16="http://schemas.microsoft.com/office/drawing/2014/main" id="{63240237-714D-0356-2C00-5F2B93515B3A}"/>
+              </a:ext>
+            </a:extLst>
+          </p:cNvPr>
+          <p:cNvCxnSpPr>
+            <a:cxnSpLocks/>
+            <a:endCxn id="5" idx="1"/>
+          </p:cNvCxnSpPr>
+          <p:nvPr/>
+        </p:nvCxnSpPr>
+        <p:spPr>
+          <a:xfrm rot="16200000" flipH="1">
+            <a:off x="6552946" y="5002544"/>
+            <a:ext cx="684714" cy="507990"/>
+          </a:xfrm>
+          <a:prstGeom prst="bentConnector2">
+            <a:avLst/>
+          </a:prstGeom>
+          <a:ln w="31750">
+            <a:tailEnd type="triangle"/>
+          </a:ln>
+        </p:spPr>
+        <p:style>
+          <a:lnRef idx="2">
+            <a:schemeClr val="accent3"/>
+          </a:lnRef>
+          <a:fillRef idx="0">
+            <a:schemeClr val="accent3"/>
+          </a:fillRef>
+          <a:effectRef idx="1">
+            <a:schemeClr val="accent3"/>
+          </a:effectRef>
+          <a:fontRef idx="minor">
+            <a:schemeClr val="tx1"/>
+          </a:fontRef>
+        </p:style>
+      </p:cxnSp>
+      <p:cxnSp>
+        <p:nvCxnSpPr>
+          <p:cNvPr id="52" name="Conexão reta unidirecional 17">
+            <a:extLst>
+              <a:ext uri="{FF2B5EF4-FFF2-40B4-BE49-F238E27FC236}">
+                <a16:creationId xmlns:a16="http://schemas.microsoft.com/office/drawing/2014/main" id="{7453ACF5-0138-156F-5927-0B044A1E951C}"/>
+              </a:ext>
+            </a:extLst>
+          </p:cNvPr>
+          <p:cNvCxnSpPr>
+            <a:cxnSpLocks/>
+            <a:endCxn id="16" idx="1"/>
+          </p:cNvCxnSpPr>
+          <p:nvPr/>
+        </p:nvCxnSpPr>
+        <p:spPr>
+          <a:xfrm rot="16200000" flipH="1">
+            <a:off x="5921984" y="5633504"/>
+            <a:ext cx="1946638" cy="507990"/>
+          </a:xfrm>
+          <a:prstGeom prst="bentConnector2">
+            <a:avLst/>
+          </a:prstGeom>
+          <a:ln w="31750">
+            <a:tailEnd type="triangle"/>
+          </a:ln>
+        </p:spPr>
+        <p:style>
+          <a:lnRef idx="2">
+            <a:schemeClr val="accent3"/>
+          </a:lnRef>
+          <a:fillRef idx="0">
+            <a:schemeClr val="accent3"/>
+          </a:fillRef>
+          <a:effectRef idx="1">
+            <a:schemeClr val="accent3"/>
+          </a:effectRef>
+          <a:fontRef idx="minor">
+            <a:schemeClr val="tx1"/>
+          </a:fontRef>
+        </p:style>
+      </p:cxnSp>
+      <p:cxnSp>
+        <p:nvCxnSpPr>
+          <p:cNvPr id="64" name="Conexão reta 63">
+            <a:extLst>
+              <a:ext uri="{FF2B5EF4-FFF2-40B4-BE49-F238E27FC236}">
+                <a16:creationId xmlns:a16="http://schemas.microsoft.com/office/drawing/2014/main" id="{7DB2220D-4894-70D0-2563-16131368BF52}"/>
+              </a:ext>
+            </a:extLst>
+          </p:cNvPr>
+          <p:cNvCxnSpPr>
+            <a:cxnSpLocks/>
+            <a:stCxn id="5" idx="2"/>
+            <a:endCxn id="16" idx="0"/>
+          </p:cNvCxnSpPr>
+          <p:nvPr/>
+        </p:nvCxnSpPr>
+        <p:spPr>
+          <a:xfrm>
+            <a:off x="8013298" y="5958896"/>
+            <a:ext cx="0" cy="541922"/>
+          </a:xfrm>
+          <a:prstGeom prst="line">
+            <a:avLst/>
+          </a:prstGeom>
+          <a:ln w="31750">
+            <a:prstDash val="dash"/>
+          </a:ln>
+        </p:spPr>
+        <p:style>
+          <a:lnRef idx="2">
+            <a:schemeClr val="accent3"/>
+          </a:lnRef>
+          <a:fillRef idx="0">
+            <a:schemeClr val="accent3"/>
+          </a:fillRef>
+          <a:effectRef idx="1">
+            <a:schemeClr val="accent3"/>
+          </a:effectRef>
+          <a:fontRef idx="minor">
+            <a:schemeClr val="tx1"/>
+          </a:fontRef>
+        </p:style>
+      </p:cxnSp>
+      <p:sp>
+        <p:nvSpPr>
+          <p:cNvPr id="71" name="Retângulo: Cantos Arredondados 70">
+            <a:extLst>
+              <a:ext uri="{FF2B5EF4-FFF2-40B4-BE49-F238E27FC236}">
+                <a16:creationId xmlns:a16="http://schemas.microsoft.com/office/drawing/2014/main" id="{13FF6301-EAE7-1548-C704-17F9D0FD9075}"/>
+              </a:ext>
+            </a:extLst>
+          </p:cNvPr>
+          <p:cNvSpPr/>
+          <p:nvPr/>
+        </p:nvSpPr>
+        <p:spPr>
+          <a:xfrm>
+            <a:off x="7149298" y="8410721"/>
+            <a:ext cx="1728000" cy="720000"/>
+          </a:xfrm>
+          <a:prstGeom prst="roundRect">
+            <a:avLst/>
+          </a:prstGeom>
+          <a:ln w="31750"/>
+        </p:spPr>
+        <p:style>
+          <a:lnRef idx="2">
+            <a:schemeClr val="accent3"/>
+          </a:lnRef>
+          <a:fillRef idx="1">
+            <a:schemeClr val="lt1"/>
+          </a:fillRef>
+          <a:effectRef idx="0">
+            <a:schemeClr val="accent3"/>
+          </a:effectRef>
+          <a:fontRef idx="minor">
+            <a:schemeClr val="dk1"/>
+          </a:fontRef>
+        </p:style>
+        <p:txBody>
+          <a:bodyPr rtlCol="0" anchor="ctr"/>
+          <a:lstStyle/>
+          <a:p>
+            <a:pPr algn="ctr"/>
+            <a:r>
+              <a:rPr lang="pt-PT" b="1" dirty="0"/>
+              <a:t>Detalhe</a:t>
+            </a:r>
+            <a:r>
+              <a:rPr lang="pt-PT" dirty="0"/>
+              <a:t> </a:t>
+            </a:r>
+            <a:r>
+              <a:rPr lang="pt-PT" sz="1600" dirty="0"/>
+              <a:t>(</a:t>
+            </a:r>
+            <a:r>
+              <a:rPr lang="pt-PT" sz="1600" i="1" dirty="0"/>
+              <a:t>real</a:t>
+            </a:r>
+            <a:r>
+              <a:rPr lang="pt-PT" sz="1600" dirty="0"/>
+              <a:t>)</a:t>
+            </a:r>
+            <a:br>
+              <a:rPr lang="pt-PT" dirty="0"/>
+            </a:br>
+            <a:r>
+              <a:rPr lang="pt-PT" sz="1600" dirty="0"/>
+              <a:t>(ex.: Área)</a:t>
+            </a:r>
+            <a:endParaRPr lang="pt-PT" dirty="0"/>
+          </a:p>
+        </p:txBody>
+      </p:sp>
+      <p:cxnSp>
+        <p:nvCxnSpPr>
+          <p:cNvPr id="72" name="Conexão reta unidirecional 17">
+            <a:extLst>
+              <a:ext uri="{FF2B5EF4-FFF2-40B4-BE49-F238E27FC236}">
+                <a16:creationId xmlns:a16="http://schemas.microsoft.com/office/drawing/2014/main" id="{9F7BA2A0-BCF0-CD95-FAA0-447B3583E94C}"/>
+              </a:ext>
+            </a:extLst>
+          </p:cNvPr>
+          <p:cNvCxnSpPr>
+            <a:cxnSpLocks/>
+            <a:endCxn id="71" idx="1"/>
+          </p:cNvCxnSpPr>
+          <p:nvPr/>
+        </p:nvCxnSpPr>
+        <p:spPr>
+          <a:xfrm rot="16200000" flipH="1">
+            <a:off x="6629541" y="8250964"/>
+            <a:ext cx="684714" cy="354800"/>
+          </a:xfrm>
+          <a:prstGeom prst="bentConnector2">
+            <a:avLst/>
+          </a:prstGeom>
+          <a:ln w="31750">
+            <a:tailEnd type="triangle"/>
+          </a:ln>
+        </p:spPr>
+        <p:style>
+          <a:lnRef idx="2">
+            <a:schemeClr val="accent3"/>
+          </a:lnRef>
+          <a:fillRef idx="0">
+            <a:schemeClr val="accent3"/>
+          </a:fillRef>
+          <a:effectRef idx="1">
+            <a:schemeClr val="accent3"/>
+          </a:effectRef>
+          <a:fontRef idx="minor">
+            <a:schemeClr val="tx1"/>
+          </a:fontRef>
+        </p:style>
+      </p:cxnSp>
+      <p:cxnSp>
+        <p:nvCxnSpPr>
+          <p:cNvPr id="75" name="Conexão reta 74">
+            <a:extLst>
+              <a:ext uri="{FF2B5EF4-FFF2-40B4-BE49-F238E27FC236}">
+                <a16:creationId xmlns:a16="http://schemas.microsoft.com/office/drawing/2014/main" id="{448C3053-E6DB-65DA-6EEB-01BD6F30716D}"/>
+              </a:ext>
+            </a:extLst>
+          </p:cNvPr>
+          <p:cNvCxnSpPr>
+            <a:cxnSpLocks/>
+            <a:endCxn id="71" idx="2"/>
+          </p:cNvCxnSpPr>
+          <p:nvPr/>
+        </p:nvCxnSpPr>
+        <p:spPr>
+          <a:xfrm flipV="1">
+            <a:off x="8013297" y="9130721"/>
+            <a:ext cx="1" cy="470479"/>
+          </a:xfrm>
+          <a:prstGeom prst="line">
+            <a:avLst/>
+          </a:prstGeom>
+          <a:ln w="31750">
+            <a:prstDash val="dash"/>
+          </a:ln>
+        </p:spPr>
+        <p:style>
+          <a:lnRef idx="2">
+            <a:schemeClr val="accent3"/>
+          </a:lnRef>
+          <a:fillRef idx="0">
+            <a:schemeClr val="accent3"/>
+          </a:fillRef>
+          <a:effectRef idx="1">
+            <a:schemeClr val="accent3"/>
+          </a:effectRef>
+          <a:fontRef idx="minor">
+            <a:schemeClr val="tx1"/>
+          </a:fontRef>
+        </p:style>
+      </p:cxnSp>
+      <p:cxnSp>
+        <p:nvCxnSpPr>
+          <p:cNvPr id="93" name="Conexão reta unidirecional 17">
+            <a:extLst>
+              <a:ext uri="{FF2B5EF4-FFF2-40B4-BE49-F238E27FC236}">
+                <a16:creationId xmlns:a16="http://schemas.microsoft.com/office/drawing/2014/main" id="{6B685491-5E53-9EEB-43D0-7BF871C32669}"/>
+              </a:ext>
+            </a:extLst>
+          </p:cNvPr>
+          <p:cNvCxnSpPr>
+            <a:cxnSpLocks/>
+            <a:endCxn id="3" idx="1"/>
+          </p:cNvCxnSpPr>
+          <p:nvPr/>
+        </p:nvCxnSpPr>
+        <p:spPr>
+          <a:xfrm rot="16200000" flipH="1">
+            <a:off x="3645356" y="-202479"/>
+            <a:ext cx="789716" cy="745271"/>
+          </a:xfrm>
+          <a:prstGeom prst="bentConnector2">
+            <a:avLst/>
+          </a:prstGeom>
+          <a:ln w="31750">
+            <a:prstDash val="dash"/>
+            <a:tailEnd type="triangle"/>
+          </a:ln>
+        </p:spPr>
+        <p:style>
+          <a:lnRef idx="2">
+            <a:schemeClr val="accent3"/>
+          </a:lnRef>
+          <a:fillRef idx="0">
+            <a:schemeClr val="accent3"/>
+          </a:fillRef>
+          <a:effectRef idx="1">
+            <a:schemeClr val="accent3"/>
+          </a:effectRef>
+          <a:fontRef idx="minor">
+            <a:schemeClr val="tx1"/>
+          </a:fontRef>
+        </p:style>
+      </p:cxnSp>
+    </p:spTree>
+    <p:extLst>
+      <p:ext uri="{BB962C8B-B14F-4D97-AF65-F5344CB8AC3E}">
+        <p14:creationId xmlns:p14="http://schemas.microsoft.com/office/powerpoint/2010/main" val="202619048"/>
       </p:ext>
     </p:extLst>
   </p:cSld>

--- a/Entregas/06 Final Report/Cartaz v2.pptx
+++ b/Entregas/06 Final Report/Cartaz v2.pptx
@@ -5,19 +5,23 @@
     <p:sldMasterId id="2147483708" r:id="rId1"/>
   </p:sldMasterIdLst>
   <p:notesMasterIdLst>
-    <p:notesMasterId r:id="rId12"/>
+    <p:notesMasterId r:id="rId16"/>
   </p:notesMasterIdLst>
   <p:sldIdLst>
     <p:sldId id="256" r:id="rId2"/>
     <p:sldId id="258" r:id="rId3"/>
-    <p:sldId id="257" r:id="rId4"/>
-    <p:sldId id="259" r:id="rId5"/>
-    <p:sldId id="261" r:id="rId6"/>
-    <p:sldId id="260" r:id="rId7"/>
-    <p:sldId id="262" r:id="rId8"/>
-    <p:sldId id="263" r:id="rId9"/>
-    <p:sldId id="264" r:id="rId10"/>
-    <p:sldId id="265" r:id="rId11"/>
+    <p:sldId id="269" r:id="rId4"/>
+    <p:sldId id="257" r:id="rId5"/>
+    <p:sldId id="259" r:id="rId6"/>
+    <p:sldId id="261" r:id="rId7"/>
+    <p:sldId id="260" r:id="rId8"/>
+    <p:sldId id="262" r:id="rId9"/>
+    <p:sldId id="263" r:id="rId10"/>
+    <p:sldId id="264" r:id="rId11"/>
+    <p:sldId id="265" r:id="rId12"/>
+    <p:sldId id="266" r:id="rId13"/>
+    <p:sldId id="267" r:id="rId14"/>
+    <p:sldId id="268" r:id="rId15"/>
   </p:sldIdLst>
   <p:sldSz cx="12801600" cy="9601200" type="A3"/>
   <p:notesSz cx="6858000" cy="9144000"/>
@@ -6084,7 +6088,7 @@
           <a:p>
             <a:fld id="{D8D22204-511D-42DB-B769-E600439F120D}" type="datetimeFigureOut">
               <a:rPr lang="pt-PT" smtClean="0"/>
-              <a:t>19/07/2025</a:t>
+              <a:t>20/07/2025</a:t>
             </a:fld>
             <a:endParaRPr lang="pt-PT"/>
           </a:p>
@@ -6561,6 +6565,119 @@
         <p:cNvPr id="1" name="">
           <a:extLst>
             <a:ext uri="{FF2B5EF4-FFF2-40B4-BE49-F238E27FC236}">
+              <a16:creationId xmlns:a16="http://schemas.microsoft.com/office/drawing/2014/main" id="{9979681D-8733-36CF-D713-4444B62B2894}"/>
+            </a:ext>
+          </a:extLst>
+        </p:cNvPr>
+        <p:cNvGrpSpPr/>
+        <p:nvPr/>
+      </p:nvGrpSpPr>
+      <p:grpSpPr>
+        <a:xfrm>
+          <a:off x="0" y="0"/>
+          <a:ext cx="0" cy="0"/>
+          <a:chOff x="0" y="0"/>
+          <a:chExt cx="0" cy="0"/>
+        </a:xfrm>
+      </p:grpSpPr>
+      <p:sp>
+        <p:nvSpPr>
+          <p:cNvPr id="2" name="Marcador de Posição da Imagem do Diapositivo 1">
+            <a:extLst>
+              <a:ext uri="{FF2B5EF4-FFF2-40B4-BE49-F238E27FC236}">
+                <a16:creationId xmlns:a16="http://schemas.microsoft.com/office/drawing/2014/main" id="{CB014C6E-4995-906D-EA66-C4806DC02857}"/>
+              </a:ext>
+            </a:extLst>
+          </p:cNvPr>
+          <p:cNvSpPr>
+            <a:spLocks noGrp="1" noRot="1" noChangeAspect="1"/>
+          </p:cNvSpPr>
+          <p:nvPr>
+            <p:ph type="sldImg"/>
+          </p:nvPr>
+        </p:nvSpPr>
+        <p:spPr>
+          <a:xfrm>
+            <a:off x="1371600" y="1143000"/>
+            <a:ext cx="4114800" cy="3086100"/>
+          </a:xfrm>
+        </p:spPr>
+      </p:sp>
+      <p:sp>
+        <p:nvSpPr>
+          <p:cNvPr id="3" name="Marcador de Posição de Notas 2">
+            <a:extLst>
+              <a:ext uri="{FF2B5EF4-FFF2-40B4-BE49-F238E27FC236}">
+                <a16:creationId xmlns:a16="http://schemas.microsoft.com/office/drawing/2014/main" id="{8D6F13B4-68DC-CBE5-1346-68A2FBF88DAB}"/>
+              </a:ext>
+            </a:extLst>
+          </p:cNvPr>
+          <p:cNvSpPr>
+            <a:spLocks noGrp="1"/>
+          </p:cNvSpPr>
+          <p:nvPr>
+            <p:ph type="body" idx="1"/>
+          </p:nvPr>
+        </p:nvSpPr>
+        <p:spPr/>
+        <p:txBody>
+          <a:bodyPr/>
+          <a:lstStyle/>
+          <a:p>
+            <a:endParaRPr lang="pt-PT" dirty="0"/>
+          </a:p>
+        </p:txBody>
+      </p:sp>
+      <p:sp>
+        <p:nvSpPr>
+          <p:cNvPr id="4" name="Marcador de Posição do Número do Diapositivo 3">
+            <a:extLst>
+              <a:ext uri="{FF2B5EF4-FFF2-40B4-BE49-F238E27FC236}">
+                <a16:creationId xmlns:a16="http://schemas.microsoft.com/office/drawing/2014/main" id="{19FD662F-C27A-4BEE-AA66-A17C8682A6C7}"/>
+              </a:ext>
+            </a:extLst>
+          </p:cNvPr>
+          <p:cNvSpPr>
+            <a:spLocks noGrp="1"/>
+          </p:cNvSpPr>
+          <p:nvPr>
+            <p:ph type="sldNum" sz="quarter" idx="5"/>
+          </p:nvPr>
+        </p:nvSpPr>
+        <p:spPr/>
+        <p:txBody>
+          <a:bodyPr/>
+          <a:lstStyle/>
+          <a:p>
+            <a:fld id="{CABF9CC0-989A-4F43-8280-58B218C542C2}" type="slidenum">
+              <a:rPr lang="pt-PT" smtClean="0"/>
+              <a:t>3</a:t>
+            </a:fld>
+            <a:endParaRPr lang="pt-PT"/>
+          </a:p>
+        </p:txBody>
+      </p:sp>
+    </p:spTree>
+    <p:extLst>
+      <p:ext uri="{BB962C8B-B14F-4D97-AF65-F5344CB8AC3E}">
+        <p14:creationId xmlns:p14="http://schemas.microsoft.com/office/powerpoint/2010/main" val="2737277291"/>
+      </p:ext>
+    </p:extLst>
+  </p:cSld>
+  <p:clrMapOvr>
+    <a:masterClrMapping/>
+  </p:clrMapOvr>
+</p:notes>
+</file>
+
+<file path=ppt/notesSlides/notesSlide4.xml><?xml version="1.0" encoding="utf-8"?>
+<p:notes xmlns:a="http://schemas.openxmlformats.org/drawingml/2006/main" xmlns:r="http://schemas.openxmlformats.org/officeDocument/2006/relationships" xmlns:p="http://schemas.openxmlformats.org/presentationml/2006/main">
+  <p:cSld>
+    <p:spTree>
+      <p:nvGrpSpPr>
+        <p:cNvPr id="1" name="">
+          <a:extLst>
+            <a:ext uri="{FF2B5EF4-FFF2-40B4-BE49-F238E27FC236}">
               <a16:creationId xmlns:a16="http://schemas.microsoft.com/office/drawing/2014/main" id="{D2B44B0B-D78C-1193-DA9A-ED766C2425DD}"/>
             </a:ext>
           </a:extLst>
@@ -6647,7 +6764,7 @@
           <a:p>
             <a:fld id="{CABF9CC0-989A-4F43-8280-58B218C542C2}" type="slidenum">
               <a:rPr lang="pt-PT" smtClean="0"/>
-              <a:t>3</a:t>
+              <a:t>4</a:t>
             </a:fld>
             <a:endParaRPr lang="pt-PT"/>
           </a:p>
@@ -6666,7 +6783,7 @@
 </p:notes>
 </file>
 
-<file path=ppt/notesSlides/notesSlide4.xml><?xml version="1.0" encoding="utf-8"?>
+<file path=ppt/notesSlides/notesSlide5.xml><?xml version="1.0" encoding="utf-8"?>
 <p:notes xmlns:a="http://schemas.openxmlformats.org/drawingml/2006/main" xmlns:r="http://schemas.openxmlformats.org/officeDocument/2006/relationships" xmlns:p="http://schemas.openxmlformats.org/presentationml/2006/main">
   <p:cSld>
     <p:spTree>
@@ -6760,7 +6877,7 @@
           <a:p>
             <a:fld id="{CABF9CC0-989A-4F43-8280-58B218C542C2}" type="slidenum">
               <a:rPr lang="pt-PT" smtClean="0"/>
-              <a:t>4</a:t>
+              <a:t>5</a:t>
             </a:fld>
             <a:endParaRPr lang="pt-PT"/>
           </a:p>
@@ -6779,7 +6896,7 @@
 </p:notes>
 </file>
 
-<file path=ppt/notesSlides/notesSlide5.xml><?xml version="1.0" encoding="utf-8"?>
+<file path=ppt/notesSlides/notesSlide6.xml><?xml version="1.0" encoding="utf-8"?>
 <p:notes xmlns:a="http://schemas.openxmlformats.org/drawingml/2006/main" xmlns:r="http://schemas.openxmlformats.org/officeDocument/2006/relationships" xmlns:p="http://schemas.openxmlformats.org/presentationml/2006/main">
   <p:cSld>
     <p:spTree>
@@ -6873,7 +6990,7 @@
           <a:p>
             <a:fld id="{CABF9CC0-989A-4F43-8280-58B218C542C2}" type="slidenum">
               <a:rPr lang="pt-PT" smtClean="0"/>
-              <a:t>5</a:t>
+              <a:t>6</a:t>
             </a:fld>
             <a:endParaRPr lang="pt-PT"/>
           </a:p>
@@ -7023,7 +7140,7 @@
           <a:p>
             <a:fld id="{FF3E7115-E5A5-49CB-9497-9E6CDBEED4A9}" type="datetimeFigureOut">
               <a:rPr lang="pt-PT" smtClean="0"/>
-              <a:t>19/07/2025</a:t>
+              <a:t>20/07/2025</a:t>
             </a:fld>
             <a:endParaRPr lang="pt-PT"/>
           </a:p>
@@ -7193,7 +7310,7 @@
           <a:p>
             <a:fld id="{FF3E7115-E5A5-49CB-9497-9E6CDBEED4A9}" type="datetimeFigureOut">
               <a:rPr lang="pt-PT" smtClean="0"/>
-              <a:t>19/07/2025</a:t>
+              <a:t>20/07/2025</a:t>
             </a:fld>
             <a:endParaRPr lang="pt-PT"/>
           </a:p>
@@ -7373,7 +7490,7 @@
           <a:p>
             <a:fld id="{FF3E7115-E5A5-49CB-9497-9E6CDBEED4A9}" type="datetimeFigureOut">
               <a:rPr lang="pt-PT" smtClean="0"/>
-              <a:t>19/07/2025</a:t>
+              <a:t>20/07/2025</a:t>
             </a:fld>
             <a:endParaRPr lang="pt-PT"/>
           </a:p>
@@ -7543,7 +7660,7 @@
           <a:p>
             <a:fld id="{FF3E7115-E5A5-49CB-9497-9E6CDBEED4A9}" type="datetimeFigureOut">
               <a:rPr lang="pt-PT" smtClean="0"/>
-              <a:t>19/07/2025</a:t>
+              <a:t>20/07/2025</a:t>
             </a:fld>
             <a:endParaRPr lang="pt-PT"/>
           </a:p>
@@ -7789,7 +7906,7 @@
           <a:p>
             <a:fld id="{FF3E7115-E5A5-49CB-9497-9E6CDBEED4A9}" type="datetimeFigureOut">
               <a:rPr lang="pt-PT" smtClean="0"/>
-              <a:t>19/07/2025</a:t>
+              <a:t>20/07/2025</a:t>
             </a:fld>
             <a:endParaRPr lang="pt-PT"/>
           </a:p>
@@ -8021,7 +8138,7 @@
           <a:p>
             <a:fld id="{FF3E7115-E5A5-49CB-9497-9E6CDBEED4A9}" type="datetimeFigureOut">
               <a:rPr lang="pt-PT" smtClean="0"/>
-              <a:t>19/07/2025</a:t>
+              <a:t>20/07/2025</a:t>
             </a:fld>
             <a:endParaRPr lang="pt-PT"/>
           </a:p>
@@ -8388,7 +8505,7 @@
           <a:p>
             <a:fld id="{FF3E7115-E5A5-49CB-9497-9E6CDBEED4A9}" type="datetimeFigureOut">
               <a:rPr lang="pt-PT" smtClean="0"/>
-              <a:t>19/07/2025</a:t>
+              <a:t>20/07/2025</a:t>
             </a:fld>
             <a:endParaRPr lang="pt-PT"/>
           </a:p>
@@ -8506,7 +8623,7 @@
           <a:p>
             <a:fld id="{FF3E7115-E5A5-49CB-9497-9E6CDBEED4A9}" type="datetimeFigureOut">
               <a:rPr lang="pt-PT" smtClean="0"/>
-              <a:t>19/07/2025</a:t>
+              <a:t>20/07/2025</a:t>
             </a:fld>
             <a:endParaRPr lang="pt-PT"/>
           </a:p>
@@ -8601,7 +8718,7 @@
           <a:p>
             <a:fld id="{FF3E7115-E5A5-49CB-9497-9E6CDBEED4A9}" type="datetimeFigureOut">
               <a:rPr lang="pt-PT" smtClean="0"/>
-              <a:t>19/07/2025</a:t>
+              <a:t>20/07/2025</a:t>
             </a:fld>
             <a:endParaRPr lang="pt-PT"/>
           </a:p>
@@ -8878,7 +8995,7 @@
           <a:p>
             <a:fld id="{FF3E7115-E5A5-49CB-9497-9E6CDBEED4A9}" type="datetimeFigureOut">
               <a:rPr lang="pt-PT" smtClean="0"/>
-              <a:t>19/07/2025</a:t>
+              <a:t>20/07/2025</a:t>
             </a:fld>
             <a:endParaRPr lang="pt-PT"/>
           </a:p>
@@ -9135,7 +9252,7 @@
           <a:p>
             <a:fld id="{FF3E7115-E5A5-49CB-9497-9E6CDBEED4A9}" type="datetimeFigureOut">
               <a:rPr lang="pt-PT" smtClean="0"/>
-              <a:t>19/07/2025</a:t>
+              <a:t>20/07/2025</a:t>
             </a:fld>
             <a:endParaRPr lang="pt-PT"/>
           </a:p>
@@ -9348,7 +9465,7 @@
           <a:p>
             <a:fld id="{FF3E7115-E5A5-49CB-9497-9E6CDBEED4A9}" type="datetimeFigureOut">
               <a:rPr lang="pt-PT" smtClean="0"/>
-              <a:t>19/07/2025</a:t>
+              <a:t>20/07/2025</a:t>
             </a:fld>
             <a:endParaRPr lang="pt-PT"/>
           </a:p>
@@ -11736,6 +11853,1130 @@
   <p:cSld>
     <p:spTree>
       <p:nvGrpSpPr>
+        <p:cNvPr id="1" name="">
+          <a:extLst>
+            <a:ext uri="{FF2B5EF4-FFF2-40B4-BE49-F238E27FC236}">
+              <a16:creationId xmlns:a16="http://schemas.microsoft.com/office/drawing/2014/main" id="{1B64089B-9AB7-DDCD-EE84-2805676DA16D}"/>
+            </a:ext>
+          </a:extLst>
+        </p:cNvPr>
+        <p:cNvGrpSpPr/>
+        <p:nvPr/>
+      </p:nvGrpSpPr>
+      <p:grpSpPr>
+        <a:xfrm>
+          <a:off x="0" y="0"/>
+          <a:ext cx="0" cy="0"/>
+          <a:chOff x="0" y="0"/>
+          <a:chExt cx="0" cy="0"/>
+        </a:xfrm>
+      </p:grpSpPr>
+      <p:sp>
+        <p:nvSpPr>
+          <p:cNvPr id="3" name="Retângulo: Cantos Arredondados 2">
+            <a:extLst>
+              <a:ext uri="{FF2B5EF4-FFF2-40B4-BE49-F238E27FC236}">
+                <a16:creationId xmlns:a16="http://schemas.microsoft.com/office/drawing/2014/main" id="{2D2712BD-6F10-ACED-14A6-F22481761721}"/>
+              </a:ext>
+            </a:extLst>
+          </p:cNvPr>
+          <p:cNvSpPr/>
+          <p:nvPr/>
+        </p:nvSpPr>
+        <p:spPr>
+          <a:xfrm>
+            <a:off x="4412850" y="205015"/>
+            <a:ext cx="2896000" cy="720000"/>
+          </a:xfrm>
+          <a:prstGeom prst="roundRect">
+            <a:avLst/>
+          </a:prstGeom>
+          <a:ln w="31750"/>
+        </p:spPr>
+        <p:style>
+          <a:lnRef idx="2">
+            <a:schemeClr val="accent3"/>
+          </a:lnRef>
+          <a:fillRef idx="1">
+            <a:schemeClr val="lt1"/>
+          </a:fillRef>
+          <a:effectRef idx="0">
+            <a:schemeClr val="accent3"/>
+          </a:effectRef>
+          <a:fontRef idx="minor">
+            <a:schemeClr val="dk1"/>
+          </a:fontRef>
+        </p:style>
+        <p:txBody>
+          <a:bodyPr rtlCol="0" anchor="ctr"/>
+          <a:lstStyle/>
+          <a:p>
+            <a:pPr algn="ctr"/>
+            <a:r>
+              <a:rPr lang="pt-PT" b="1" dirty="0"/>
+              <a:t>Arvore</a:t>
+            </a:r>
+            <a:r>
+              <a:rPr lang="pt-PT" dirty="0"/>
+              <a:t> </a:t>
+            </a:r>
+            <a:r>
+              <a:rPr lang="pt-PT" b="1" dirty="0"/>
+              <a:t>Hierárquica</a:t>
+            </a:r>
+            <a:br>
+              <a:rPr lang="pt-PT" dirty="0"/>
+            </a:br>
+            <a:r>
+              <a:rPr lang="pt-PT" sz="1600" dirty="0"/>
+              <a:t>(ex.: Município Odivelas)</a:t>
+            </a:r>
+            <a:endParaRPr lang="pt-PT" dirty="0"/>
+          </a:p>
+        </p:txBody>
+      </p:sp>
+      <p:cxnSp>
+        <p:nvCxnSpPr>
+          <p:cNvPr id="8" name="Conexão reta unidirecional 7">
+            <a:extLst>
+              <a:ext uri="{FF2B5EF4-FFF2-40B4-BE49-F238E27FC236}">
+                <a16:creationId xmlns:a16="http://schemas.microsoft.com/office/drawing/2014/main" id="{EDEEF49A-91AC-369B-2587-6BE0AF76B59F}"/>
+              </a:ext>
+            </a:extLst>
+          </p:cNvPr>
+          <p:cNvCxnSpPr>
+            <a:cxnSpLocks/>
+            <a:stCxn id="3" idx="2"/>
+            <a:endCxn id="2" idx="0"/>
+          </p:cNvCxnSpPr>
+          <p:nvPr/>
+        </p:nvCxnSpPr>
+        <p:spPr>
+          <a:xfrm flipH="1">
+            <a:off x="5860849" y="925015"/>
+            <a:ext cx="1" cy="429716"/>
+          </a:xfrm>
+          <a:prstGeom prst="straightConnector1">
+            <a:avLst/>
+          </a:prstGeom>
+          <a:ln w="31750">
+            <a:tailEnd type="triangle"/>
+          </a:ln>
+        </p:spPr>
+        <p:style>
+          <a:lnRef idx="2">
+            <a:schemeClr val="accent3"/>
+          </a:lnRef>
+          <a:fillRef idx="0">
+            <a:schemeClr val="accent3"/>
+          </a:fillRef>
+          <a:effectRef idx="1">
+            <a:schemeClr val="accent3"/>
+          </a:effectRef>
+          <a:fontRef idx="minor">
+            <a:schemeClr val="tx1"/>
+          </a:fontRef>
+        </p:style>
+      </p:cxnSp>
+      <p:sp>
+        <p:nvSpPr>
+          <p:cNvPr id="2" name="Retângulo: Cantos Arredondados 1">
+            <a:extLst>
+              <a:ext uri="{FF2B5EF4-FFF2-40B4-BE49-F238E27FC236}">
+                <a16:creationId xmlns:a16="http://schemas.microsoft.com/office/drawing/2014/main" id="{90D297B6-AA6C-21B9-F6BF-21F3BD70DCE5}"/>
+              </a:ext>
+            </a:extLst>
+          </p:cNvPr>
+          <p:cNvSpPr/>
+          <p:nvPr/>
+        </p:nvSpPr>
+        <p:spPr>
+          <a:xfrm>
+            <a:off x="4412850" y="1354731"/>
+            <a:ext cx="2895998" cy="842100"/>
+          </a:xfrm>
+          <a:prstGeom prst="roundRect">
+            <a:avLst/>
+          </a:prstGeom>
+          <a:solidFill>
+            <a:schemeClr val="accent6">
+              <a:lumMod val="20000"/>
+              <a:lumOff val="80000"/>
+            </a:schemeClr>
+          </a:solidFill>
+          <a:ln w="31750"/>
+        </p:spPr>
+        <p:style>
+          <a:lnRef idx="2">
+            <a:schemeClr val="accent3"/>
+          </a:lnRef>
+          <a:fillRef idx="1">
+            <a:schemeClr val="lt1"/>
+          </a:fillRef>
+          <a:effectRef idx="0">
+            <a:schemeClr val="accent3"/>
+          </a:effectRef>
+          <a:fontRef idx="minor">
+            <a:schemeClr val="dk1"/>
+          </a:fontRef>
+        </p:style>
+        <p:txBody>
+          <a:bodyPr rtlCol="0" anchor="ctr"/>
+          <a:lstStyle/>
+          <a:p>
+            <a:pPr algn="ctr"/>
+            <a:r>
+              <a:rPr lang="pt-PT" b="1" dirty="0"/>
+              <a:t>ZCAP</a:t>
+            </a:r>
+            <a:br>
+              <a:rPr lang="pt-PT" dirty="0"/>
+            </a:br>
+            <a:r>
+              <a:rPr lang="pt-PT" sz="1600" dirty="0"/>
+              <a:t>(ex.: Escola Secundária)</a:t>
+            </a:r>
+            <a:endParaRPr lang="pt-PT" dirty="0"/>
+          </a:p>
+        </p:txBody>
+      </p:sp>
+      <p:sp>
+        <p:nvSpPr>
+          <p:cNvPr id="4" name="Retângulo: Cantos Arredondados 3">
+            <a:extLst>
+              <a:ext uri="{FF2B5EF4-FFF2-40B4-BE49-F238E27FC236}">
+                <a16:creationId xmlns:a16="http://schemas.microsoft.com/office/drawing/2014/main" id="{57CD46D0-0F08-AAE9-05C2-BD7811154492}"/>
+              </a:ext>
+            </a:extLst>
+          </p:cNvPr>
+          <p:cNvSpPr/>
+          <p:nvPr/>
+        </p:nvSpPr>
+        <p:spPr>
+          <a:xfrm>
+            <a:off x="6400800" y="4194182"/>
+            <a:ext cx="2476498" cy="720000"/>
+          </a:xfrm>
+          <a:prstGeom prst="roundRect">
+            <a:avLst/>
+          </a:prstGeom>
+          <a:ln w="31750"/>
+        </p:spPr>
+        <p:style>
+          <a:lnRef idx="2">
+            <a:schemeClr val="accent3"/>
+          </a:lnRef>
+          <a:fillRef idx="1">
+            <a:schemeClr val="lt1"/>
+          </a:fillRef>
+          <a:effectRef idx="0">
+            <a:schemeClr val="accent3"/>
+          </a:effectRef>
+          <a:fontRef idx="minor">
+            <a:schemeClr val="dk1"/>
+          </a:fontRef>
+        </p:style>
+        <p:txBody>
+          <a:bodyPr rtlCol="0" anchor="ctr"/>
+          <a:lstStyle/>
+          <a:p>
+            <a:pPr algn="ctr"/>
+            <a:r>
+              <a:rPr lang="pt-PT" sz="1600" b="1" dirty="0"/>
+              <a:t>Categoria de detalhe</a:t>
+            </a:r>
+          </a:p>
+          <a:p>
+            <a:pPr algn="ctr"/>
+            <a:r>
+              <a:rPr lang="pt-PT" sz="1600" dirty="0"/>
+              <a:t>(ex. Área de Refeições)</a:t>
+            </a:r>
+          </a:p>
+        </p:txBody>
+      </p:sp>
+      <p:sp>
+        <p:nvSpPr>
+          <p:cNvPr id="5" name="Retângulo: Cantos Arredondados 4">
+            <a:extLst>
+              <a:ext uri="{FF2B5EF4-FFF2-40B4-BE49-F238E27FC236}">
+                <a16:creationId xmlns:a16="http://schemas.microsoft.com/office/drawing/2014/main" id="{AB6F5238-A7D8-27D5-EEA5-1E7E5FAE0AF9}"/>
+              </a:ext>
+            </a:extLst>
+          </p:cNvPr>
+          <p:cNvSpPr/>
+          <p:nvPr/>
+        </p:nvSpPr>
+        <p:spPr>
+          <a:xfrm>
+            <a:off x="7149298" y="5238896"/>
+            <a:ext cx="1728000" cy="720000"/>
+          </a:xfrm>
+          <a:prstGeom prst="roundRect">
+            <a:avLst/>
+          </a:prstGeom>
+          <a:ln w="31750"/>
+        </p:spPr>
+        <p:style>
+          <a:lnRef idx="2">
+            <a:schemeClr val="accent3"/>
+          </a:lnRef>
+          <a:fillRef idx="1">
+            <a:schemeClr val="lt1"/>
+          </a:fillRef>
+          <a:effectRef idx="0">
+            <a:schemeClr val="accent3"/>
+          </a:effectRef>
+          <a:fontRef idx="minor">
+            <a:schemeClr val="dk1"/>
+          </a:fontRef>
+        </p:style>
+        <p:txBody>
+          <a:bodyPr rtlCol="0" anchor="ctr"/>
+          <a:lstStyle/>
+          <a:p>
+            <a:pPr algn="ctr"/>
+            <a:r>
+              <a:rPr lang="pt-PT" b="1" dirty="0"/>
+              <a:t>Detalhe</a:t>
+            </a:r>
+            <a:r>
+              <a:rPr lang="pt-PT" dirty="0"/>
+              <a:t> </a:t>
+            </a:r>
+            <a:r>
+              <a:rPr lang="pt-PT" sz="1600" dirty="0"/>
+              <a:t>(</a:t>
+            </a:r>
+            <a:r>
+              <a:rPr lang="pt-PT" sz="1600" i="1" dirty="0" err="1"/>
+              <a:t>bool</a:t>
+            </a:r>
+            <a:r>
+              <a:rPr lang="pt-PT" sz="1600" dirty="0"/>
+              <a:t>)</a:t>
+            </a:r>
+            <a:br>
+              <a:rPr lang="pt-PT" dirty="0"/>
+            </a:br>
+            <a:r>
+              <a:rPr lang="pt-PT" sz="1600" dirty="0"/>
+              <a:t>(ex.: Cozinha)</a:t>
+            </a:r>
+            <a:endParaRPr lang="pt-PT" dirty="0"/>
+          </a:p>
+        </p:txBody>
+      </p:sp>
+      <p:sp>
+        <p:nvSpPr>
+          <p:cNvPr id="12" name="Retângulo: Cantos Arredondados 11">
+            <a:extLst>
+              <a:ext uri="{FF2B5EF4-FFF2-40B4-BE49-F238E27FC236}">
+                <a16:creationId xmlns:a16="http://schemas.microsoft.com/office/drawing/2014/main" id="{013F77CA-0E62-7507-EE07-6D225DC7B7EE}"/>
+              </a:ext>
+            </a:extLst>
+          </p:cNvPr>
+          <p:cNvSpPr/>
+          <p:nvPr/>
+        </p:nvSpPr>
+        <p:spPr>
+          <a:xfrm>
+            <a:off x="2609850" y="2995550"/>
+            <a:ext cx="3168250" cy="2368930"/>
+          </a:xfrm>
+          <a:prstGeom prst="roundRect">
+            <a:avLst/>
+          </a:prstGeom>
+          <a:ln w="31750"/>
+        </p:spPr>
+        <p:style>
+          <a:lnRef idx="2">
+            <a:schemeClr val="accent3"/>
+          </a:lnRef>
+          <a:fillRef idx="1">
+            <a:schemeClr val="lt1"/>
+          </a:fillRef>
+          <a:effectRef idx="0">
+            <a:schemeClr val="accent3"/>
+          </a:effectRef>
+          <a:fontRef idx="minor">
+            <a:schemeClr val="dk1"/>
+          </a:fontRef>
+        </p:style>
+        <p:txBody>
+          <a:bodyPr rtlCol="0" anchor="ctr"/>
+          <a:lstStyle/>
+          <a:p>
+            <a:pPr algn="ctr"/>
+            <a:r>
+              <a:rPr lang="pt-PT" b="1" dirty="0"/>
+              <a:t>Dados</a:t>
+            </a:r>
+            <a:r>
+              <a:rPr lang="pt-PT" dirty="0"/>
+              <a:t> </a:t>
+            </a:r>
+            <a:r>
+              <a:rPr lang="pt-PT" b="1" dirty="0"/>
+              <a:t>obrigatórios:</a:t>
+            </a:r>
+          </a:p>
+          <a:p>
+            <a:pPr marL="285750" indent="-285750">
+              <a:buFont typeface="Arial" panose="020B0604020202020204" pitchFamily="34" charset="0"/>
+              <a:buChar char="•"/>
+            </a:pPr>
+            <a:r>
+              <a:rPr lang="pt-PT" sz="1600" dirty="0"/>
+              <a:t>Morada</a:t>
+            </a:r>
+          </a:p>
+          <a:p>
+            <a:pPr marL="285750" indent="-285750">
+              <a:buFont typeface="Arial" panose="020B0604020202020204" pitchFamily="34" charset="0"/>
+              <a:buChar char="•"/>
+            </a:pPr>
+            <a:r>
+              <a:rPr lang="pt-PT" sz="1600" dirty="0"/>
+              <a:t>Entidade (lista de valores)</a:t>
+            </a:r>
+          </a:p>
+          <a:p>
+            <a:pPr marL="285750" indent="-285750">
+              <a:buFont typeface="Arial" panose="020B0604020202020204" pitchFamily="34" charset="0"/>
+              <a:buChar char="•"/>
+            </a:pPr>
+            <a:r>
+              <a:rPr lang="pt-PT" sz="1600" dirty="0"/>
+              <a:t>Tipologia (lista de valores)</a:t>
+            </a:r>
+          </a:p>
+          <a:p>
+            <a:pPr marL="285750" indent="-285750">
+              <a:buFont typeface="Arial" panose="020B0604020202020204" pitchFamily="34" charset="0"/>
+              <a:buChar char="•"/>
+            </a:pPr>
+            <a:r>
+              <a:rPr lang="pt-PT" sz="1600" dirty="0"/>
+              <a:t>Latitude</a:t>
+            </a:r>
+          </a:p>
+          <a:p>
+            <a:pPr marL="285750" indent="-285750">
+              <a:buFont typeface="Arial" panose="020B0604020202020204" pitchFamily="34" charset="0"/>
+              <a:buChar char="•"/>
+            </a:pPr>
+            <a:r>
+              <a:rPr lang="pt-PT" sz="1600" dirty="0"/>
+              <a:t>Longitude</a:t>
+            </a:r>
+          </a:p>
+          <a:p>
+            <a:pPr marL="285750" indent="-285750">
+              <a:buFont typeface="Arial" panose="020B0604020202020204" pitchFamily="34" charset="0"/>
+              <a:buChar char="•"/>
+            </a:pPr>
+            <a:r>
+              <a:rPr lang="pt-PT" sz="1600" dirty="0"/>
+              <a:t>…</a:t>
+            </a:r>
+            <a:endParaRPr lang="pt-PT" dirty="0"/>
+          </a:p>
+        </p:txBody>
+      </p:sp>
+      <p:sp>
+        <p:nvSpPr>
+          <p:cNvPr id="15" name="Retângulo: Cantos Arredondados 14">
+            <a:extLst>
+              <a:ext uri="{FF2B5EF4-FFF2-40B4-BE49-F238E27FC236}">
+                <a16:creationId xmlns:a16="http://schemas.microsoft.com/office/drawing/2014/main" id="{E996A90A-5E02-6850-83B2-5FD1A2CF4ADD}"/>
+              </a:ext>
+            </a:extLst>
+          </p:cNvPr>
+          <p:cNvSpPr/>
+          <p:nvPr/>
+        </p:nvSpPr>
+        <p:spPr>
+          <a:xfrm>
+            <a:off x="5981300" y="3027368"/>
+            <a:ext cx="2895998" cy="842100"/>
+          </a:xfrm>
+          <a:prstGeom prst="roundRect">
+            <a:avLst/>
+          </a:prstGeom>
+          <a:ln w="31750"/>
+        </p:spPr>
+        <p:style>
+          <a:lnRef idx="2">
+            <a:schemeClr val="accent3"/>
+          </a:lnRef>
+          <a:fillRef idx="1">
+            <a:schemeClr val="lt1"/>
+          </a:fillRef>
+          <a:effectRef idx="0">
+            <a:schemeClr val="accent3"/>
+          </a:effectRef>
+          <a:fontRef idx="minor">
+            <a:schemeClr val="dk1"/>
+          </a:fontRef>
+        </p:style>
+        <p:txBody>
+          <a:bodyPr rtlCol="0" anchor="ctr"/>
+          <a:lstStyle/>
+          <a:p>
+            <a:pPr algn="ctr"/>
+            <a:r>
+              <a:rPr lang="pt-PT" b="1" dirty="0"/>
+              <a:t>ZCAP Detalhes</a:t>
+            </a:r>
+          </a:p>
+        </p:txBody>
+      </p:sp>
+      <p:sp>
+        <p:nvSpPr>
+          <p:cNvPr id="16" name="Retângulo: Cantos Arredondados 15">
+            <a:extLst>
+              <a:ext uri="{FF2B5EF4-FFF2-40B4-BE49-F238E27FC236}">
+                <a16:creationId xmlns:a16="http://schemas.microsoft.com/office/drawing/2014/main" id="{A9FC112B-B517-AAFD-C86B-59EA42CF6E7F}"/>
+              </a:ext>
+            </a:extLst>
+          </p:cNvPr>
+          <p:cNvSpPr/>
+          <p:nvPr/>
+        </p:nvSpPr>
+        <p:spPr>
+          <a:xfrm>
+            <a:off x="7149298" y="6500818"/>
+            <a:ext cx="1728000" cy="720000"/>
+          </a:xfrm>
+          <a:prstGeom prst="roundRect">
+            <a:avLst/>
+          </a:prstGeom>
+          <a:ln w="31750"/>
+        </p:spPr>
+        <p:style>
+          <a:lnRef idx="2">
+            <a:schemeClr val="accent3"/>
+          </a:lnRef>
+          <a:fillRef idx="1">
+            <a:schemeClr val="lt1"/>
+          </a:fillRef>
+          <a:effectRef idx="0">
+            <a:schemeClr val="accent3"/>
+          </a:effectRef>
+          <a:fontRef idx="minor">
+            <a:schemeClr val="dk1"/>
+          </a:fontRef>
+        </p:style>
+        <p:txBody>
+          <a:bodyPr rtlCol="0" anchor="ctr"/>
+          <a:lstStyle/>
+          <a:p>
+            <a:pPr algn="ctr"/>
+            <a:r>
+              <a:rPr lang="pt-PT" b="1" dirty="0"/>
+              <a:t>Detalhe</a:t>
+            </a:r>
+            <a:r>
+              <a:rPr lang="pt-PT" dirty="0"/>
+              <a:t> </a:t>
+            </a:r>
+            <a:r>
+              <a:rPr lang="pt-PT" sz="1600" dirty="0"/>
+              <a:t>(</a:t>
+            </a:r>
+            <a:r>
+              <a:rPr lang="pt-PT" sz="1600" i="1" dirty="0" err="1"/>
+              <a:t>int</a:t>
+            </a:r>
+            <a:r>
+              <a:rPr lang="pt-PT" sz="1600" dirty="0"/>
+              <a:t>)</a:t>
+            </a:r>
+            <a:br>
+              <a:rPr lang="pt-PT" dirty="0"/>
+            </a:br>
+            <a:r>
+              <a:rPr lang="pt-PT" sz="1400" dirty="0"/>
+              <a:t>(ex.: Capacidade refeições)</a:t>
+            </a:r>
+            <a:endParaRPr lang="pt-PT" dirty="0"/>
+          </a:p>
+        </p:txBody>
+      </p:sp>
+      <p:cxnSp>
+        <p:nvCxnSpPr>
+          <p:cNvPr id="18" name="Conexão reta unidirecional 17">
+            <a:extLst>
+              <a:ext uri="{FF2B5EF4-FFF2-40B4-BE49-F238E27FC236}">
+                <a16:creationId xmlns:a16="http://schemas.microsoft.com/office/drawing/2014/main" id="{926F3D79-70D6-0BCC-C894-368B4C16F8DB}"/>
+              </a:ext>
+            </a:extLst>
+          </p:cNvPr>
+          <p:cNvCxnSpPr>
+            <a:cxnSpLocks/>
+            <a:stCxn id="2" idx="2"/>
+            <a:endCxn id="12" idx="0"/>
+          </p:cNvCxnSpPr>
+          <p:nvPr/>
+        </p:nvCxnSpPr>
+        <p:spPr>
+          <a:xfrm rot="5400000">
+            <a:off x="4628053" y="1762753"/>
+            <a:ext cx="798719" cy="1666874"/>
+          </a:xfrm>
+          <a:prstGeom prst="bentConnector3">
+            <a:avLst>
+              <a:gd name="adj1" fmla="val 50000"/>
+            </a:avLst>
+          </a:prstGeom>
+          <a:ln w="31750">
+            <a:tailEnd type="triangle"/>
+          </a:ln>
+        </p:spPr>
+        <p:style>
+          <a:lnRef idx="2">
+            <a:schemeClr val="accent3"/>
+          </a:lnRef>
+          <a:fillRef idx="0">
+            <a:schemeClr val="accent3"/>
+          </a:fillRef>
+          <a:effectRef idx="1">
+            <a:schemeClr val="accent3"/>
+          </a:effectRef>
+          <a:fontRef idx="minor">
+            <a:schemeClr val="tx1"/>
+          </a:fontRef>
+        </p:style>
+      </p:cxnSp>
+      <p:cxnSp>
+        <p:nvCxnSpPr>
+          <p:cNvPr id="27" name="Conexão reta unidirecional 17">
+            <a:extLst>
+              <a:ext uri="{FF2B5EF4-FFF2-40B4-BE49-F238E27FC236}">
+                <a16:creationId xmlns:a16="http://schemas.microsoft.com/office/drawing/2014/main" id="{1893C241-E4A0-3958-A719-09F88AA2AEBC}"/>
+              </a:ext>
+            </a:extLst>
+          </p:cNvPr>
+          <p:cNvCxnSpPr>
+            <a:cxnSpLocks/>
+            <a:stCxn id="2" idx="2"/>
+            <a:endCxn id="15" idx="0"/>
+          </p:cNvCxnSpPr>
+          <p:nvPr/>
+        </p:nvCxnSpPr>
+        <p:spPr>
+          <a:xfrm rot="16200000" flipH="1">
+            <a:off x="6229806" y="1827874"/>
+            <a:ext cx="830537" cy="1568450"/>
+          </a:xfrm>
+          <a:prstGeom prst="bentConnector3">
+            <a:avLst>
+              <a:gd name="adj1" fmla="val 47993"/>
+            </a:avLst>
+          </a:prstGeom>
+          <a:ln w="31750">
+            <a:tailEnd type="triangle"/>
+          </a:ln>
+        </p:spPr>
+        <p:style>
+          <a:lnRef idx="2">
+            <a:schemeClr val="accent3"/>
+          </a:lnRef>
+          <a:fillRef idx="0">
+            <a:schemeClr val="accent3"/>
+          </a:fillRef>
+          <a:effectRef idx="1">
+            <a:schemeClr val="accent3"/>
+          </a:effectRef>
+          <a:fontRef idx="minor">
+            <a:schemeClr val="tx1"/>
+          </a:fontRef>
+        </p:style>
+      </p:cxnSp>
+      <p:cxnSp>
+        <p:nvCxnSpPr>
+          <p:cNvPr id="33" name="Conexão reta unidirecional 17">
+            <a:extLst>
+              <a:ext uri="{FF2B5EF4-FFF2-40B4-BE49-F238E27FC236}">
+                <a16:creationId xmlns:a16="http://schemas.microsoft.com/office/drawing/2014/main" id="{413DC254-B62E-7DDE-CA82-27CC61D3D9AB}"/>
+              </a:ext>
+            </a:extLst>
+          </p:cNvPr>
+          <p:cNvCxnSpPr>
+            <a:cxnSpLocks/>
+            <a:endCxn id="4" idx="1"/>
+          </p:cNvCxnSpPr>
+          <p:nvPr/>
+        </p:nvCxnSpPr>
+        <p:spPr>
+          <a:xfrm rot="16200000" flipH="1">
+            <a:off x="5962897" y="4116279"/>
+            <a:ext cx="684710" cy="191096"/>
+          </a:xfrm>
+          <a:prstGeom prst="bentConnector2">
+            <a:avLst/>
+          </a:prstGeom>
+          <a:ln w="31750">
+            <a:tailEnd type="triangle"/>
+          </a:ln>
+        </p:spPr>
+        <p:style>
+          <a:lnRef idx="2">
+            <a:schemeClr val="accent3"/>
+          </a:lnRef>
+          <a:fillRef idx="0">
+            <a:schemeClr val="accent3"/>
+          </a:fillRef>
+          <a:effectRef idx="1">
+            <a:schemeClr val="accent3"/>
+          </a:effectRef>
+          <a:fontRef idx="minor">
+            <a:schemeClr val="tx1"/>
+          </a:fontRef>
+        </p:style>
+      </p:cxnSp>
+      <p:sp>
+        <p:nvSpPr>
+          <p:cNvPr id="36" name="Retângulo: Cantos Arredondados 35">
+            <a:extLst>
+              <a:ext uri="{FF2B5EF4-FFF2-40B4-BE49-F238E27FC236}">
+                <a16:creationId xmlns:a16="http://schemas.microsoft.com/office/drawing/2014/main" id="{7844AA58-FE87-DC33-E8F5-7C331922E4F6}"/>
+              </a:ext>
+            </a:extLst>
+          </p:cNvPr>
+          <p:cNvSpPr/>
+          <p:nvPr/>
+        </p:nvSpPr>
+        <p:spPr>
+          <a:xfrm>
+            <a:off x="6400800" y="7366007"/>
+            <a:ext cx="2476498" cy="720000"/>
+          </a:xfrm>
+          <a:prstGeom prst="roundRect">
+            <a:avLst/>
+          </a:prstGeom>
+          <a:ln w="31750"/>
+        </p:spPr>
+        <p:style>
+          <a:lnRef idx="2">
+            <a:schemeClr val="accent3"/>
+          </a:lnRef>
+          <a:fillRef idx="1">
+            <a:schemeClr val="lt1"/>
+          </a:fillRef>
+          <a:effectRef idx="0">
+            <a:schemeClr val="accent3"/>
+          </a:effectRef>
+          <a:fontRef idx="minor">
+            <a:schemeClr val="dk1"/>
+          </a:fontRef>
+        </p:style>
+        <p:txBody>
+          <a:bodyPr rtlCol="0" anchor="ctr"/>
+          <a:lstStyle/>
+          <a:p>
+            <a:pPr algn="ctr"/>
+            <a:r>
+              <a:rPr lang="pt-PT" sz="1600" b="1" dirty="0"/>
+              <a:t>Categoria de detalhe</a:t>
+            </a:r>
+          </a:p>
+          <a:p>
+            <a:pPr algn="ctr"/>
+            <a:r>
+              <a:rPr lang="pt-PT" sz="1600" dirty="0"/>
+              <a:t>(ex. Específicos)</a:t>
+            </a:r>
+          </a:p>
+        </p:txBody>
+      </p:sp>
+      <p:cxnSp>
+        <p:nvCxnSpPr>
+          <p:cNvPr id="37" name="Conexão reta unidirecional 17">
+            <a:extLst>
+              <a:ext uri="{FF2B5EF4-FFF2-40B4-BE49-F238E27FC236}">
+                <a16:creationId xmlns:a16="http://schemas.microsoft.com/office/drawing/2014/main" id="{60294D71-174D-6729-8850-6275B8610E08}"/>
+              </a:ext>
+            </a:extLst>
+          </p:cNvPr>
+          <p:cNvCxnSpPr>
+            <a:cxnSpLocks/>
+            <a:endCxn id="36" idx="1"/>
+          </p:cNvCxnSpPr>
+          <p:nvPr/>
+        </p:nvCxnSpPr>
+        <p:spPr>
+          <a:xfrm rot="16200000" flipH="1">
+            <a:off x="4376982" y="5702189"/>
+            <a:ext cx="3856540" cy="191096"/>
+          </a:xfrm>
+          <a:prstGeom prst="bentConnector2">
+            <a:avLst/>
+          </a:prstGeom>
+          <a:ln w="31750">
+            <a:tailEnd type="triangle"/>
+          </a:ln>
+        </p:spPr>
+        <p:style>
+          <a:lnRef idx="2">
+            <a:schemeClr val="accent3"/>
+          </a:lnRef>
+          <a:fillRef idx="0">
+            <a:schemeClr val="accent3"/>
+          </a:fillRef>
+          <a:effectRef idx="1">
+            <a:schemeClr val="accent3"/>
+          </a:effectRef>
+          <a:fontRef idx="minor">
+            <a:schemeClr val="tx1"/>
+          </a:fontRef>
+        </p:style>
+      </p:cxnSp>
+      <p:cxnSp>
+        <p:nvCxnSpPr>
+          <p:cNvPr id="45" name="Conexão reta unidirecional 17">
+            <a:extLst>
+              <a:ext uri="{FF2B5EF4-FFF2-40B4-BE49-F238E27FC236}">
+                <a16:creationId xmlns:a16="http://schemas.microsoft.com/office/drawing/2014/main" id="{63240237-714D-0356-2C00-5F2B93515B3A}"/>
+              </a:ext>
+            </a:extLst>
+          </p:cNvPr>
+          <p:cNvCxnSpPr>
+            <a:cxnSpLocks/>
+            <a:endCxn id="5" idx="1"/>
+          </p:cNvCxnSpPr>
+          <p:nvPr/>
+        </p:nvCxnSpPr>
+        <p:spPr>
+          <a:xfrm rot="16200000" flipH="1">
+            <a:off x="6552946" y="5002544"/>
+            <a:ext cx="684714" cy="507990"/>
+          </a:xfrm>
+          <a:prstGeom prst="bentConnector2">
+            <a:avLst/>
+          </a:prstGeom>
+          <a:ln w="31750">
+            <a:tailEnd type="triangle"/>
+          </a:ln>
+        </p:spPr>
+        <p:style>
+          <a:lnRef idx="2">
+            <a:schemeClr val="accent3"/>
+          </a:lnRef>
+          <a:fillRef idx="0">
+            <a:schemeClr val="accent3"/>
+          </a:fillRef>
+          <a:effectRef idx="1">
+            <a:schemeClr val="accent3"/>
+          </a:effectRef>
+          <a:fontRef idx="minor">
+            <a:schemeClr val="tx1"/>
+          </a:fontRef>
+        </p:style>
+      </p:cxnSp>
+      <p:cxnSp>
+        <p:nvCxnSpPr>
+          <p:cNvPr id="52" name="Conexão reta unidirecional 17">
+            <a:extLst>
+              <a:ext uri="{FF2B5EF4-FFF2-40B4-BE49-F238E27FC236}">
+                <a16:creationId xmlns:a16="http://schemas.microsoft.com/office/drawing/2014/main" id="{7453ACF5-0138-156F-5927-0B044A1E951C}"/>
+              </a:ext>
+            </a:extLst>
+          </p:cNvPr>
+          <p:cNvCxnSpPr>
+            <a:cxnSpLocks/>
+            <a:endCxn id="16" idx="1"/>
+          </p:cNvCxnSpPr>
+          <p:nvPr/>
+        </p:nvCxnSpPr>
+        <p:spPr>
+          <a:xfrm rot="16200000" flipH="1">
+            <a:off x="5921984" y="5633504"/>
+            <a:ext cx="1946638" cy="507990"/>
+          </a:xfrm>
+          <a:prstGeom prst="bentConnector2">
+            <a:avLst/>
+          </a:prstGeom>
+          <a:ln w="31750">
+            <a:tailEnd type="triangle"/>
+          </a:ln>
+        </p:spPr>
+        <p:style>
+          <a:lnRef idx="2">
+            <a:schemeClr val="accent3"/>
+          </a:lnRef>
+          <a:fillRef idx="0">
+            <a:schemeClr val="accent3"/>
+          </a:fillRef>
+          <a:effectRef idx="1">
+            <a:schemeClr val="accent3"/>
+          </a:effectRef>
+          <a:fontRef idx="minor">
+            <a:schemeClr val="tx1"/>
+          </a:fontRef>
+        </p:style>
+      </p:cxnSp>
+      <p:cxnSp>
+        <p:nvCxnSpPr>
+          <p:cNvPr id="64" name="Conexão reta 63">
+            <a:extLst>
+              <a:ext uri="{FF2B5EF4-FFF2-40B4-BE49-F238E27FC236}">
+                <a16:creationId xmlns:a16="http://schemas.microsoft.com/office/drawing/2014/main" id="{7DB2220D-4894-70D0-2563-16131368BF52}"/>
+              </a:ext>
+            </a:extLst>
+          </p:cNvPr>
+          <p:cNvCxnSpPr>
+            <a:cxnSpLocks/>
+            <a:stCxn id="5" idx="2"/>
+            <a:endCxn id="16" idx="0"/>
+          </p:cNvCxnSpPr>
+          <p:nvPr/>
+        </p:nvCxnSpPr>
+        <p:spPr>
+          <a:xfrm>
+            <a:off x="8013298" y="5958896"/>
+            <a:ext cx="0" cy="541922"/>
+          </a:xfrm>
+          <a:prstGeom prst="line">
+            <a:avLst/>
+          </a:prstGeom>
+          <a:ln w="31750">
+            <a:prstDash val="dash"/>
+          </a:ln>
+        </p:spPr>
+        <p:style>
+          <a:lnRef idx="2">
+            <a:schemeClr val="accent3"/>
+          </a:lnRef>
+          <a:fillRef idx="0">
+            <a:schemeClr val="accent3"/>
+          </a:fillRef>
+          <a:effectRef idx="1">
+            <a:schemeClr val="accent3"/>
+          </a:effectRef>
+          <a:fontRef idx="minor">
+            <a:schemeClr val="tx1"/>
+          </a:fontRef>
+        </p:style>
+      </p:cxnSp>
+      <p:sp>
+        <p:nvSpPr>
+          <p:cNvPr id="71" name="Retângulo: Cantos Arredondados 70">
+            <a:extLst>
+              <a:ext uri="{FF2B5EF4-FFF2-40B4-BE49-F238E27FC236}">
+                <a16:creationId xmlns:a16="http://schemas.microsoft.com/office/drawing/2014/main" id="{13FF6301-EAE7-1548-C704-17F9D0FD9075}"/>
+              </a:ext>
+            </a:extLst>
+          </p:cNvPr>
+          <p:cNvSpPr/>
+          <p:nvPr/>
+        </p:nvSpPr>
+        <p:spPr>
+          <a:xfrm>
+            <a:off x="7149298" y="8410721"/>
+            <a:ext cx="1728000" cy="720000"/>
+          </a:xfrm>
+          <a:prstGeom prst="roundRect">
+            <a:avLst/>
+          </a:prstGeom>
+          <a:ln w="31750"/>
+        </p:spPr>
+        <p:style>
+          <a:lnRef idx="2">
+            <a:schemeClr val="accent3"/>
+          </a:lnRef>
+          <a:fillRef idx="1">
+            <a:schemeClr val="lt1"/>
+          </a:fillRef>
+          <a:effectRef idx="0">
+            <a:schemeClr val="accent3"/>
+          </a:effectRef>
+          <a:fontRef idx="minor">
+            <a:schemeClr val="dk1"/>
+          </a:fontRef>
+        </p:style>
+        <p:txBody>
+          <a:bodyPr rtlCol="0" anchor="ctr"/>
+          <a:lstStyle/>
+          <a:p>
+            <a:pPr algn="ctr"/>
+            <a:r>
+              <a:rPr lang="pt-PT" b="1" dirty="0"/>
+              <a:t>Detalhe</a:t>
+            </a:r>
+            <a:r>
+              <a:rPr lang="pt-PT" dirty="0"/>
+              <a:t> </a:t>
+            </a:r>
+            <a:r>
+              <a:rPr lang="pt-PT" sz="1600" dirty="0"/>
+              <a:t>(</a:t>
+            </a:r>
+            <a:r>
+              <a:rPr lang="pt-PT" sz="1600" i="1" dirty="0"/>
+              <a:t>real</a:t>
+            </a:r>
+            <a:r>
+              <a:rPr lang="pt-PT" sz="1600" dirty="0"/>
+              <a:t>)</a:t>
+            </a:r>
+            <a:br>
+              <a:rPr lang="pt-PT" dirty="0"/>
+            </a:br>
+            <a:r>
+              <a:rPr lang="pt-PT" sz="1600" dirty="0"/>
+              <a:t>(ex.: Área)</a:t>
+            </a:r>
+            <a:endParaRPr lang="pt-PT" dirty="0"/>
+          </a:p>
+        </p:txBody>
+      </p:sp>
+      <p:cxnSp>
+        <p:nvCxnSpPr>
+          <p:cNvPr id="72" name="Conexão reta unidirecional 17">
+            <a:extLst>
+              <a:ext uri="{FF2B5EF4-FFF2-40B4-BE49-F238E27FC236}">
+                <a16:creationId xmlns:a16="http://schemas.microsoft.com/office/drawing/2014/main" id="{9F7BA2A0-BCF0-CD95-FAA0-447B3583E94C}"/>
+              </a:ext>
+            </a:extLst>
+          </p:cNvPr>
+          <p:cNvCxnSpPr>
+            <a:cxnSpLocks/>
+            <a:endCxn id="71" idx="1"/>
+          </p:cNvCxnSpPr>
+          <p:nvPr/>
+        </p:nvCxnSpPr>
+        <p:spPr>
+          <a:xfrm rot="16200000" flipH="1">
+            <a:off x="6629541" y="8250964"/>
+            <a:ext cx="684714" cy="354800"/>
+          </a:xfrm>
+          <a:prstGeom prst="bentConnector2">
+            <a:avLst/>
+          </a:prstGeom>
+          <a:ln w="31750">
+            <a:tailEnd type="triangle"/>
+          </a:ln>
+        </p:spPr>
+        <p:style>
+          <a:lnRef idx="2">
+            <a:schemeClr val="accent3"/>
+          </a:lnRef>
+          <a:fillRef idx="0">
+            <a:schemeClr val="accent3"/>
+          </a:fillRef>
+          <a:effectRef idx="1">
+            <a:schemeClr val="accent3"/>
+          </a:effectRef>
+          <a:fontRef idx="minor">
+            <a:schemeClr val="tx1"/>
+          </a:fontRef>
+        </p:style>
+      </p:cxnSp>
+      <p:cxnSp>
+        <p:nvCxnSpPr>
+          <p:cNvPr id="75" name="Conexão reta 74">
+            <a:extLst>
+              <a:ext uri="{FF2B5EF4-FFF2-40B4-BE49-F238E27FC236}">
+                <a16:creationId xmlns:a16="http://schemas.microsoft.com/office/drawing/2014/main" id="{448C3053-E6DB-65DA-6EEB-01BD6F30716D}"/>
+              </a:ext>
+            </a:extLst>
+          </p:cNvPr>
+          <p:cNvCxnSpPr>
+            <a:cxnSpLocks/>
+            <a:endCxn id="71" idx="2"/>
+          </p:cNvCxnSpPr>
+          <p:nvPr/>
+        </p:nvCxnSpPr>
+        <p:spPr>
+          <a:xfrm flipV="1">
+            <a:off x="8013297" y="9130721"/>
+            <a:ext cx="1" cy="470479"/>
+          </a:xfrm>
+          <a:prstGeom prst="line">
+            <a:avLst/>
+          </a:prstGeom>
+          <a:ln w="31750">
+            <a:prstDash val="dash"/>
+          </a:ln>
+        </p:spPr>
+        <p:style>
+          <a:lnRef idx="2">
+            <a:schemeClr val="accent3"/>
+          </a:lnRef>
+          <a:fillRef idx="0">
+            <a:schemeClr val="accent3"/>
+          </a:fillRef>
+          <a:effectRef idx="1">
+            <a:schemeClr val="accent3"/>
+          </a:effectRef>
+          <a:fontRef idx="minor">
+            <a:schemeClr val="tx1"/>
+          </a:fontRef>
+        </p:style>
+      </p:cxnSp>
+      <p:cxnSp>
+        <p:nvCxnSpPr>
+          <p:cNvPr id="93" name="Conexão reta unidirecional 17">
+            <a:extLst>
+              <a:ext uri="{FF2B5EF4-FFF2-40B4-BE49-F238E27FC236}">
+                <a16:creationId xmlns:a16="http://schemas.microsoft.com/office/drawing/2014/main" id="{6B685491-5E53-9EEB-43D0-7BF871C32669}"/>
+              </a:ext>
+            </a:extLst>
+          </p:cNvPr>
+          <p:cNvCxnSpPr>
+            <a:cxnSpLocks/>
+            <a:endCxn id="3" idx="1"/>
+          </p:cNvCxnSpPr>
+          <p:nvPr/>
+        </p:nvCxnSpPr>
+        <p:spPr>
+          <a:xfrm rot="16200000" flipH="1">
+            <a:off x="3645356" y="-202479"/>
+            <a:ext cx="789716" cy="745271"/>
+          </a:xfrm>
+          <a:prstGeom prst="bentConnector2">
+            <a:avLst/>
+          </a:prstGeom>
+          <a:ln w="31750">
+            <a:prstDash val="dash"/>
+            <a:tailEnd type="triangle"/>
+          </a:ln>
+        </p:spPr>
+        <p:style>
+          <a:lnRef idx="2">
+            <a:schemeClr val="accent3"/>
+          </a:lnRef>
+          <a:fillRef idx="0">
+            <a:schemeClr val="accent3"/>
+          </a:fillRef>
+          <a:effectRef idx="1">
+            <a:schemeClr val="accent3"/>
+          </a:effectRef>
+          <a:fontRef idx="minor">
+            <a:schemeClr val="tx1"/>
+          </a:fontRef>
+        </p:style>
+      </p:cxnSp>
+    </p:spTree>
+    <p:extLst>
+      <p:ext uri="{BB962C8B-B14F-4D97-AF65-F5344CB8AC3E}">
+        <p14:creationId xmlns:p14="http://schemas.microsoft.com/office/powerpoint/2010/main" val="202619048"/>
+      </p:ext>
+    </p:extLst>
+  </p:cSld>
+  <p:clrMapOvr>
+    <a:masterClrMapping/>
+  </p:clrMapOvr>
+</p:sld>
+</file>
+
+<file path=ppt/slides/slide11.xml><?xml version="1.0" encoding="utf-8"?>
+<p:sld xmlns:a="http://schemas.openxmlformats.org/drawingml/2006/main" xmlns:r="http://schemas.openxmlformats.org/officeDocument/2006/relationships" xmlns:p="http://schemas.openxmlformats.org/presentationml/2006/main">
+  <p:cSld>
+    <p:spTree>
+      <p:nvGrpSpPr>
         <p:cNvPr id="1" name=""/>
         <p:cNvGrpSpPr/>
         <p:nvPr/>
@@ -12301,7 +13542,7 @@
         </p:nvSpPr>
         <p:spPr>
           <a:xfrm>
-            <a:off x="2298302" y="7578000"/>
+            <a:off x="2298302" y="7158900"/>
             <a:ext cx="2895998" cy="842100"/>
           </a:xfrm>
           <a:prstGeom prst="roundRect">
@@ -12362,7 +13603,7 @@
         <p:spPr>
           <a:xfrm>
             <a:off x="3746301" y="6223000"/>
-            <a:ext cx="0" cy="1355000"/>
+            <a:ext cx="0" cy="935900"/>
           </a:xfrm>
           <a:prstGeom prst="line">
             <a:avLst/>
@@ -12553,6 +13794,49 @@
           </a:prstGeom>
           <a:ln w="31750">
             <a:prstDash val="dash"/>
+          </a:ln>
+        </p:spPr>
+        <p:style>
+          <a:lnRef idx="2">
+            <a:schemeClr val="accent3"/>
+          </a:lnRef>
+          <a:fillRef idx="0">
+            <a:schemeClr val="accent3"/>
+          </a:fillRef>
+          <a:effectRef idx="1">
+            <a:schemeClr val="accent3"/>
+          </a:effectRef>
+          <a:fontRef idx="minor">
+            <a:schemeClr val="tx1"/>
+          </a:fontRef>
+        </p:style>
+      </p:cxnSp>
+      <p:cxnSp>
+        <p:nvCxnSpPr>
+          <p:cNvPr id="24" name="Conexão reta unidirecional 17">
+            <a:extLst>
+              <a:ext uri="{FF2B5EF4-FFF2-40B4-BE49-F238E27FC236}">
+                <a16:creationId xmlns:a16="http://schemas.microsoft.com/office/drawing/2014/main" id="{0958FADC-5978-F14F-BD89-C7B0D1EEF1CB}"/>
+              </a:ext>
+            </a:extLst>
+          </p:cNvPr>
+          <p:cNvCxnSpPr>
+            <a:cxnSpLocks/>
+            <a:endCxn id="78" idx="1"/>
+          </p:cNvCxnSpPr>
+          <p:nvPr/>
+        </p:nvCxnSpPr>
+        <p:spPr>
+          <a:xfrm rot="16200000" flipH="1">
+            <a:off x="3205592" y="1201711"/>
+            <a:ext cx="789716" cy="495300"/>
+          </a:xfrm>
+          <a:prstGeom prst="bentConnector2">
+            <a:avLst/>
+          </a:prstGeom>
+          <a:ln w="31750">
+            <a:prstDash val="dash"/>
+            <a:tailEnd type="triangle"/>
           </a:ln>
         </p:spPr>
         <p:style>
@@ -12574,6 +13858,4329 @@
     <p:extLst>
       <p:ext uri="{BB962C8B-B14F-4D97-AF65-F5344CB8AC3E}">
         <p14:creationId xmlns:p14="http://schemas.microsoft.com/office/powerpoint/2010/main" val="771710921"/>
+      </p:ext>
+    </p:extLst>
+  </p:cSld>
+  <p:clrMapOvr>
+    <a:masterClrMapping/>
+  </p:clrMapOvr>
+</p:sld>
+</file>
+
+<file path=ppt/slides/slide12.xml><?xml version="1.0" encoding="utf-8"?>
+<p:sld xmlns:a="http://schemas.openxmlformats.org/drawingml/2006/main" xmlns:r="http://schemas.openxmlformats.org/officeDocument/2006/relationships" xmlns:p="http://schemas.openxmlformats.org/presentationml/2006/main">
+  <p:cSld>
+    <p:spTree>
+      <p:nvGrpSpPr>
+        <p:cNvPr id="1" name="">
+          <a:extLst>
+            <a:ext uri="{FF2B5EF4-FFF2-40B4-BE49-F238E27FC236}">
+              <a16:creationId xmlns:a16="http://schemas.microsoft.com/office/drawing/2014/main" id="{6F35D3E8-66C8-E1B4-EAB5-73605E6998AF}"/>
+            </a:ext>
+          </a:extLst>
+        </p:cNvPr>
+        <p:cNvGrpSpPr/>
+        <p:nvPr/>
+      </p:nvGrpSpPr>
+      <p:grpSpPr>
+        <a:xfrm>
+          <a:off x="0" y="0"/>
+          <a:ext cx="0" cy="0"/>
+          <a:chOff x="0" y="0"/>
+          <a:chExt cx="0" cy="0"/>
+        </a:xfrm>
+      </p:grpSpPr>
+      <p:sp>
+        <p:nvSpPr>
+          <p:cNvPr id="3" name="Retângulo: Cantos Arredondados 2">
+            <a:extLst>
+              <a:ext uri="{FF2B5EF4-FFF2-40B4-BE49-F238E27FC236}">
+                <a16:creationId xmlns:a16="http://schemas.microsoft.com/office/drawing/2014/main" id="{AC8B8B1B-1DEC-5DDD-1EE4-D026A5584A60}"/>
+              </a:ext>
+            </a:extLst>
+          </p:cNvPr>
+          <p:cNvSpPr/>
+          <p:nvPr/>
+        </p:nvSpPr>
+        <p:spPr>
+          <a:xfrm>
+            <a:off x="4412850" y="205015"/>
+            <a:ext cx="2896000" cy="720000"/>
+          </a:xfrm>
+          <a:prstGeom prst="roundRect">
+            <a:avLst/>
+          </a:prstGeom>
+          <a:ln w="31750"/>
+        </p:spPr>
+        <p:style>
+          <a:lnRef idx="2">
+            <a:schemeClr val="accent3"/>
+          </a:lnRef>
+          <a:fillRef idx="1">
+            <a:schemeClr val="lt1"/>
+          </a:fillRef>
+          <a:effectRef idx="0">
+            <a:schemeClr val="accent3"/>
+          </a:effectRef>
+          <a:fontRef idx="minor">
+            <a:schemeClr val="dk1"/>
+          </a:fontRef>
+        </p:style>
+        <p:txBody>
+          <a:bodyPr rtlCol="0" anchor="ctr"/>
+          <a:lstStyle/>
+          <a:p>
+            <a:pPr algn="ctr"/>
+            <a:r>
+              <a:rPr lang="pt-PT" b="1" dirty="0"/>
+              <a:t>ZCAP</a:t>
+            </a:r>
+            <a:br>
+              <a:rPr lang="pt-PT" dirty="0"/>
+            </a:br>
+            <a:r>
+              <a:rPr lang="pt-PT" sz="1600" dirty="0"/>
+              <a:t>(ex.: Escola Secundária)</a:t>
+            </a:r>
+            <a:endParaRPr lang="pt-PT" dirty="0"/>
+          </a:p>
+        </p:txBody>
+      </p:sp>
+      <p:cxnSp>
+        <p:nvCxnSpPr>
+          <p:cNvPr id="8" name="Conexão reta unidirecional 7">
+            <a:extLst>
+              <a:ext uri="{FF2B5EF4-FFF2-40B4-BE49-F238E27FC236}">
+                <a16:creationId xmlns:a16="http://schemas.microsoft.com/office/drawing/2014/main" id="{DBE62B32-1877-EB90-334F-8048BA107E06}"/>
+              </a:ext>
+            </a:extLst>
+          </p:cNvPr>
+          <p:cNvCxnSpPr>
+            <a:cxnSpLocks/>
+            <a:stCxn id="3" idx="2"/>
+            <a:endCxn id="2" idx="0"/>
+          </p:cNvCxnSpPr>
+          <p:nvPr/>
+        </p:nvCxnSpPr>
+        <p:spPr>
+          <a:xfrm flipH="1">
+            <a:off x="5860849" y="925015"/>
+            <a:ext cx="1" cy="429716"/>
+          </a:xfrm>
+          <a:prstGeom prst="straightConnector1">
+            <a:avLst/>
+          </a:prstGeom>
+          <a:ln w="31750">
+            <a:tailEnd type="triangle"/>
+          </a:ln>
+        </p:spPr>
+        <p:style>
+          <a:lnRef idx="2">
+            <a:schemeClr val="accent3"/>
+          </a:lnRef>
+          <a:fillRef idx="0">
+            <a:schemeClr val="accent3"/>
+          </a:fillRef>
+          <a:effectRef idx="1">
+            <a:schemeClr val="accent3"/>
+          </a:effectRef>
+          <a:fontRef idx="minor">
+            <a:schemeClr val="tx1"/>
+          </a:fontRef>
+        </p:style>
+      </p:cxnSp>
+      <p:sp>
+        <p:nvSpPr>
+          <p:cNvPr id="2" name="Retângulo: Cantos Arredondados 1">
+            <a:extLst>
+              <a:ext uri="{FF2B5EF4-FFF2-40B4-BE49-F238E27FC236}">
+                <a16:creationId xmlns:a16="http://schemas.microsoft.com/office/drawing/2014/main" id="{1D5B3B04-44B1-42C1-0361-0925511E9D81}"/>
+              </a:ext>
+            </a:extLst>
+          </p:cNvPr>
+          <p:cNvSpPr/>
+          <p:nvPr/>
+        </p:nvSpPr>
+        <p:spPr>
+          <a:xfrm>
+            <a:off x="4412850" y="1354731"/>
+            <a:ext cx="2895998" cy="842100"/>
+          </a:xfrm>
+          <a:prstGeom prst="roundRect">
+            <a:avLst/>
+          </a:prstGeom>
+          <a:solidFill>
+            <a:schemeClr val="accent6">
+              <a:lumMod val="20000"/>
+              <a:lumOff val="80000"/>
+            </a:schemeClr>
+          </a:solidFill>
+          <a:ln w="31750"/>
+        </p:spPr>
+        <p:style>
+          <a:lnRef idx="2">
+            <a:schemeClr val="accent3"/>
+          </a:lnRef>
+          <a:fillRef idx="1">
+            <a:schemeClr val="lt1"/>
+          </a:fillRef>
+          <a:effectRef idx="0">
+            <a:schemeClr val="accent3"/>
+          </a:effectRef>
+          <a:fontRef idx="minor">
+            <a:schemeClr val="dk1"/>
+          </a:fontRef>
+        </p:style>
+        <p:txBody>
+          <a:bodyPr rtlCol="0" anchor="ctr"/>
+          <a:lstStyle/>
+          <a:p>
+            <a:pPr algn="ctr"/>
+            <a:r>
+              <a:rPr lang="pt-PT" b="1" dirty="0"/>
+              <a:t>Pessoa</a:t>
+            </a:r>
+            <a:br>
+              <a:rPr lang="pt-PT" dirty="0"/>
+            </a:br>
+            <a:r>
+              <a:rPr lang="pt-PT" sz="1600" dirty="0"/>
+              <a:t>(ex.: José)</a:t>
+            </a:r>
+            <a:endParaRPr lang="pt-PT" dirty="0"/>
+          </a:p>
+        </p:txBody>
+      </p:sp>
+      <p:sp>
+        <p:nvSpPr>
+          <p:cNvPr id="4" name="Retângulo: Cantos Arredondados 3">
+            <a:extLst>
+              <a:ext uri="{FF2B5EF4-FFF2-40B4-BE49-F238E27FC236}">
+                <a16:creationId xmlns:a16="http://schemas.microsoft.com/office/drawing/2014/main" id="{104A5F83-C2A0-C2E3-A3AC-3959B8F74637}"/>
+              </a:ext>
+            </a:extLst>
+          </p:cNvPr>
+          <p:cNvSpPr/>
+          <p:nvPr/>
+        </p:nvSpPr>
+        <p:spPr>
+          <a:xfrm>
+            <a:off x="6051944" y="2453600"/>
+            <a:ext cx="2476498" cy="720000"/>
+          </a:xfrm>
+          <a:prstGeom prst="roundRect">
+            <a:avLst/>
+          </a:prstGeom>
+          <a:ln w="31750"/>
+        </p:spPr>
+        <p:style>
+          <a:lnRef idx="2">
+            <a:schemeClr val="accent3"/>
+          </a:lnRef>
+          <a:fillRef idx="1">
+            <a:schemeClr val="lt1"/>
+          </a:fillRef>
+          <a:effectRef idx="0">
+            <a:schemeClr val="accent3"/>
+          </a:effectRef>
+          <a:fontRef idx="minor">
+            <a:schemeClr val="dk1"/>
+          </a:fontRef>
+        </p:style>
+        <p:txBody>
+          <a:bodyPr rtlCol="0" anchor="ctr"/>
+          <a:lstStyle/>
+          <a:p>
+            <a:pPr algn="ctr"/>
+            <a:r>
+              <a:rPr lang="pt-PT" sz="1600" b="1" dirty="0"/>
+              <a:t>Apoio Necessário</a:t>
+            </a:r>
+          </a:p>
+        </p:txBody>
+      </p:sp>
+      <p:sp>
+        <p:nvSpPr>
+          <p:cNvPr id="5" name="Retângulo: Cantos Arredondados 4">
+            <a:extLst>
+              <a:ext uri="{FF2B5EF4-FFF2-40B4-BE49-F238E27FC236}">
+                <a16:creationId xmlns:a16="http://schemas.microsoft.com/office/drawing/2014/main" id="{5AB3E47B-07FE-29E7-6624-9C143069DEF2}"/>
+              </a:ext>
+            </a:extLst>
+          </p:cNvPr>
+          <p:cNvSpPr/>
+          <p:nvPr/>
+        </p:nvSpPr>
+        <p:spPr>
+          <a:xfrm>
+            <a:off x="6800442" y="3331309"/>
+            <a:ext cx="1728000" cy="720000"/>
+          </a:xfrm>
+          <a:prstGeom prst="roundRect">
+            <a:avLst/>
+          </a:prstGeom>
+          <a:ln w="31750"/>
+        </p:spPr>
+        <p:style>
+          <a:lnRef idx="2">
+            <a:schemeClr val="accent3"/>
+          </a:lnRef>
+          <a:fillRef idx="1">
+            <a:schemeClr val="lt1"/>
+          </a:fillRef>
+          <a:effectRef idx="0">
+            <a:schemeClr val="accent3"/>
+          </a:effectRef>
+          <a:fontRef idx="minor">
+            <a:schemeClr val="dk1"/>
+          </a:fontRef>
+        </p:style>
+        <p:txBody>
+          <a:bodyPr rtlCol="0" anchor="ctr"/>
+          <a:lstStyle/>
+          <a:p>
+            <a:pPr algn="ctr"/>
+            <a:r>
+              <a:rPr lang="pt-PT" b="1" dirty="0"/>
+              <a:t>Refeição</a:t>
+            </a:r>
+            <a:endParaRPr lang="pt-PT" dirty="0"/>
+          </a:p>
+        </p:txBody>
+      </p:sp>
+      <p:sp>
+        <p:nvSpPr>
+          <p:cNvPr id="12" name="Retângulo: Cantos Arredondados 11">
+            <a:extLst>
+              <a:ext uri="{FF2B5EF4-FFF2-40B4-BE49-F238E27FC236}">
+                <a16:creationId xmlns:a16="http://schemas.microsoft.com/office/drawing/2014/main" id="{7AD6C794-405F-C50D-AE3B-F27C74FA7866}"/>
+              </a:ext>
+            </a:extLst>
+          </p:cNvPr>
+          <p:cNvSpPr/>
+          <p:nvPr/>
+        </p:nvSpPr>
+        <p:spPr>
+          <a:xfrm>
+            <a:off x="2609850" y="2995550"/>
+            <a:ext cx="3168250" cy="1635172"/>
+          </a:xfrm>
+          <a:prstGeom prst="roundRect">
+            <a:avLst/>
+          </a:prstGeom>
+          <a:ln w="31750"/>
+        </p:spPr>
+        <p:style>
+          <a:lnRef idx="2">
+            <a:schemeClr val="accent3"/>
+          </a:lnRef>
+          <a:fillRef idx="1">
+            <a:schemeClr val="lt1"/>
+          </a:fillRef>
+          <a:effectRef idx="0">
+            <a:schemeClr val="accent3"/>
+          </a:effectRef>
+          <a:fontRef idx="minor">
+            <a:schemeClr val="dk1"/>
+          </a:fontRef>
+        </p:style>
+        <p:txBody>
+          <a:bodyPr rtlCol="0" anchor="ctr"/>
+          <a:lstStyle/>
+          <a:p>
+            <a:pPr algn="ctr"/>
+            <a:r>
+              <a:rPr lang="pt-PT" b="1" dirty="0"/>
+              <a:t>Dados</a:t>
+            </a:r>
+            <a:r>
+              <a:rPr lang="pt-PT" dirty="0"/>
+              <a:t> </a:t>
+            </a:r>
+            <a:r>
+              <a:rPr lang="pt-PT" b="1" dirty="0"/>
+              <a:t>obrigatórios:</a:t>
+            </a:r>
+          </a:p>
+          <a:p>
+            <a:pPr marL="285750" indent="-285750">
+              <a:buFont typeface="Arial" panose="020B0604020202020204" pitchFamily="34" charset="0"/>
+              <a:buChar char="•"/>
+            </a:pPr>
+            <a:r>
+              <a:rPr lang="pt-PT" sz="1600" dirty="0"/>
+              <a:t>Nome</a:t>
+            </a:r>
+          </a:p>
+          <a:p>
+            <a:pPr marL="285750" indent="-285750">
+              <a:buFont typeface="Arial" panose="020B0604020202020204" pitchFamily="34" charset="0"/>
+              <a:buChar char="•"/>
+            </a:pPr>
+            <a:r>
+              <a:rPr lang="pt-PT" sz="1600" dirty="0"/>
+              <a:t>Idade</a:t>
+            </a:r>
+          </a:p>
+          <a:p>
+            <a:pPr marL="285750" indent="-285750">
+              <a:buFont typeface="Arial" panose="020B0604020202020204" pitchFamily="34" charset="0"/>
+              <a:buChar char="•"/>
+            </a:pPr>
+            <a:r>
+              <a:rPr lang="pt-PT" sz="1600" dirty="0"/>
+              <a:t>Contacto</a:t>
+            </a:r>
+          </a:p>
+          <a:p>
+            <a:pPr marL="285750" indent="-285750">
+              <a:buFont typeface="Arial" panose="020B0604020202020204" pitchFamily="34" charset="0"/>
+              <a:buChar char="•"/>
+            </a:pPr>
+            <a:r>
+              <a:rPr lang="pt-PT" sz="1600" dirty="0"/>
+              <a:t>…</a:t>
+            </a:r>
+            <a:endParaRPr lang="pt-PT" dirty="0"/>
+          </a:p>
+        </p:txBody>
+      </p:sp>
+      <p:sp>
+        <p:nvSpPr>
+          <p:cNvPr id="16" name="Retângulo: Cantos Arredondados 15">
+            <a:extLst>
+              <a:ext uri="{FF2B5EF4-FFF2-40B4-BE49-F238E27FC236}">
+                <a16:creationId xmlns:a16="http://schemas.microsoft.com/office/drawing/2014/main" id="{687CB99E-2088-EDD6-0964-8238702D5188}"/>
+              </a:ext>
+            </a:extLst>
+          </p:cNvPr>
+          <p:cNvSpPr/>
+          <p:nvPr/>
+        </p:nvSpPr>
+        <p:spPr>
+          <a:xfrm>
+            <a:off x="6800443" y="4270722"/>
+            <a:ext cx="1728000" cy="720000"/>
+          </a:xfrm>
+          <a:prstGeom prst="roundRect">
+            <a:avLst/>
+          </a:prstGeom>
+          <a:ln w="31750"/>
+        </p:spPr>
+        <p:style>
+          <a:lnRef idx="2">
+            <a:schemeClr val="accent3"/>
+          </a:lnRef>
+          <a:fillRef idx="1">
+            <a:schemeClr val="lt1"/>
+          </a:fillRef>
+          <a:effectRef idx="0">
+            <a:schemeClr val="accent3"/>
+          </a:effectRef>
+          <a:fontRef idx="minor">
+            <a:schemeClr val="dk1"/>
+          </a:fontRef>
+        </p:style>
+        <p:txBody>
+          <a:bodyPr rtlCol="0" anchor="ctr"/>
+          <a:lstStyle/>
+          <a:p>
+            <a:pPr algn="ctr"/>
+            <a:r>
+              <a:rPr lang="pt-PT" b="1" dirty="0"/>
+              <a:t>Vestuário</a:t>
+            </a:r>
+            <a:endParaRPr lang="pt-PT" dirty="0"/>
+          </a:p>
+        </p:txBody>
+      </p:sp>
+      <p:cxnSp>
+        <p:nvCxnSpPr>
+          <p:cNvPr id="18" name="Conexão reta unidirecional 17">
+            <a:extLst>
+              <a:ext uri="{FF2B5EF4-FFF2-40B4-BE49-F238E27FC236}">
+                <a16:creationId xmlns:a16="http://schemas.microsoft.com/office/drawing/2014/main" id="{84712686-4C2F-A7C9-BDC0-49CDB1F99016}"/>
+              </a:ext>
+            </a:extLst>
+          </p:cNvPr>
+          <p:cNvCxnSpPr>
+            <a:cxnSpLocks/>
+            <a:stCxn id="2" idx="2"/>
+            <a:endCxn id="12" idx="0"/>
+          </p:cNvCxnSpPr>
+          <p:nvPr/>
+        </p:nvCxnSpPr>
+        <p:spPr>
+          <a:xfrm rot="5400000">
+            <a:off x="4628053" y="1762753"/>
+            <a:ext cx="798719" cy="1666874"/>
+          </a:xfrm>
+          <a:prstGeom prst="bentConnector3">
+            <a:avLst>
+              <a:gd name="adj1" fmla="val 50000"/>
+            </a:avLst>
+          </a:prstGeom>
+          <a:ln w="31750">
+            <a:tailEnd type="triangle"/>
+          </a:ln>
+        </p:spPr>
+        <p:style>
+          <a:lnRef idx="2">
+            <a:schemeClr val="accent3"/>
+          </a:lnRef>
+          <a:fillRef idx="0">
+            <a:schemeClr val="accent3"/>
+          </a:fillRef>
+          <a:effectRef idx="1">
+            <a:schemeClr val="accent3"/>
+          </a:effectRef>
+          <a:fontRef idx="minor">
+            <a:schemeClr val="tx1"/>
+          </a:fontRef>
+        </p:style>
+      </p:cxnSp>
+      <p:cxnSp>
+        <p:nvCxnSpPr>
+          <p:cNvPr id="33" name="Conexão reta unidirecional 17">
+            <a:extLst>
+              <a:ext uri="{FF2B5EF4-FFF2-40B4-BE49-F238E27FC236}">
+                <a16:creationId xmlns:a16="http://schemas.microsoft.com/office/drawing/2014/main" id="{25EE5F34-EE80-1756-179F-58E3EAF1B584}"/>
+              </a:ext>
+            </a:extLst>
+          </p:cNvPr>
+          <p:cNvCxnSpPr>
+            <a:cxnSpLocks/>
+            <a:stCxn id="2" idx="2"/>
+            <a:endCxn id="4" idx="1"/>
+          </p:cNvCxnSpPr>
+          <p:nvPr/>
+        </p:nvCxnSpPr>
+        <p:spPr>
+          <a:xfrm rot="16200000" flipH="1">
+            <a:off x="5648012" y="2409667"/>
+            <a:ext cx="616769" cy="191095"/>
+          </a:xfrm>
+          <a:prstGeom prst="bentConnector2">
+            <a:avLst/>
+          </a:prstGeom>
+          <a:ln w="31750">
+            <a:tailEnd type="triangle"/>
+          </a:ln>
+        </p:spPr>
+        <p:style>
+          <a:lnRef idx="2">
+            <a:schemeClr val="accent3"/>
+          </a:lnRef>
+          <a:fillRef idx="0">
+            <a:schemeClr val="accent3"/>
+          </a:fillRef>
+          <a:effectRef idx="1">
+            <a:schemeClr val="accent3"/>
+          </a:effectRef>
+          <a:fontRef idx="minor">
+            <a:schemeClr val="tx1"/>
+          </a:fontRef>
+        </p:style>
+      </p:cxnSp>
+      <p:sp>
+        <p:nvSpPr>
+          <p:cNvPr id="36" name="Retângulo: Cantos Arredondados 35">
+            <a:extLst>
+              <a:ext uri="{FF2B5EF4-FFF2-40B4-BE49-F238E27FC236}">
+                <a16:creationId xmlns:a16="http://schemas.microsoft.com/office/drawing/2014/main" id="{29A318F8-135C-8A47-2B37-ADF26E699CDD}"/>
+              </a:ext>
+            </a:extLst>
+          </p:cNvPr>
+          <p:cNvSpPr/>
+          <p:nvPr/>
+        </p:nvSpPr>
+        <p:spPr>
+          <a:xfrm>
+            <a:off x="6051945" y="6508757"/>
+            <a:ext cx="2476498" cy="720000"/>
+          </a:xfrm>
+          <a:prstGeom prst="roundRect">
+            <a:avLst/>
+          </a:prstGeom>
+          <a:ln w="31750"/>
+        </p:spPr>
+        <p:style>
+          <a:lnRef idx="2">
+            <a:schemeClr val="accent3"/>
+          </a:lnRef>
+          <a:fillRef idx="1">
+            <a:schemeClr val="lt1"/>
+          </a:fillRef>
+          <a:effectRef idx="0">
+            <a:schemeClr val="accent3"/>
+          </a:effectRef>
+          <a:fontRef idx="minor">
+            <a:schemeClr val="dk1"/>
+          </a:fontRef>
+        </p:style>
+        <p:txBody>
+          <a:bodyPr rtlCol="0" anchor="ctr"/>
+          <a:lstStyle/>
+          <a:p>
+            <a:pPr algn="ctr"/>
+            <a:r>
+              <a:rPr lang="pt-PT" sz="1600" b="1" dirty="0"/>
+              <a:t>Necessidades Especiais</a:t>
+            </a:r>
+          </a:p>
+        </p:txBody>
+      </p:sp>
+      <p:cxnSp>
+        <p:nvCxnSpPr>
+          <p:cNvPr id="37" name="Conexão reta unidirecional 17">
+            <a:extLst>
+              <a:ext uri="{FF2B5EF4-FFF2-40B4-BE49-F238E27FC236}">
+                <a16:creationId xmlns:a16="http://schemas.microsoft.com/office/drawing/2014/main" id="{33B97150-2489-FFE9-688F-94513F560643}"/>
+              </a:ext>
+            </a:extLst>
+          </p:cNvPr>
+          <p:cNvCxnSpPr>
+            <a:cxnSpLocks/>
+            <a:endCxn id="36" idx="1"/>
+          </p:cNvCxnSpPr>
+          <p:nvPr/>
+        </p:nvCxnSpPr>
+        <p:spPr>
+          <a:xfrm rot="16200000" flipH="1">
+            <a:off x="4028127" y="4844939"/>
+            <a:ext cx="3856540" cy="191096"/>
+          </a:xfrm>
+          <a:prstGeom prst="bentConnector2">
+            <a:avLst/>
+          </a:prstGeom>
+          <a:ln w="31750">
+            <a:tailEnd type="triangle"/>
+          </a:ln>
+        </p:spPr>
+        <p:style>
+          <a:lnRef idx="2">
+            <a:schemeClr val="accent3"/>
+          </a:lnRef>
+          <a:fillRef idx="0">
+            <a:schemeClr val="accent3"/>
+          </a:fillRef>
+          <a:effectRef idx="1">
+            <a:schemeClr val="accent3"/>
+          </a:effectRef>
+          <a:fontRef idx="minor">
+            <a:schemeClr val="tx1"/>
+          </a:fontRef>
+        </p:style>
+      </p:cxnSp>
+      <p:cxnSp>
+        <p:nvCxnSpPr>
+          <p:cNvPr id="45" name="Conexão reta unidirecional 17">
+            <a:extLst>
+              <a:ext uri="{FF2B5EF4-FFF2-40B4-BE49-F238E27FC236}">
+                <a16:creationId xmlns:a16="http://schemas.microsoft.com/office/drawing/2014/main" id="{BED4C681-B0E5-97B8-A1D1-886BF8642F9B}"/>
+              </a:ext>
+            </a:extLst>
+          </p:cNvPr>
+          <p:cNvCxnSpPr>
+            <a:cxnSpLocks/>
+            <a:endCxn id="5" idx="1"/>
+          </p:cNvCxnSpPr>
+          <p:nvPr/>
+        </p:nvCxnSpPr>
+        <p:spPr>
+          <a:xfrm rot="16200000" flipH="1">
+            <a:off x="6279011" y="3169877"/>
+            <a:ext cx="534871" cy="507992"/>
+          </a:xfrm>
+          <a:prstGeom prst="bentConnector2">
+            <a:avLst/>
+          </a:prstGeom>
+          <a:ln w="31750">
+            <a:tailEnd type="triangle"/>
+          </a:ln>
+        </p:spPr>
+        <p:style>
+          <a:lnRef idx="2">
+            <a:schemeClr val="accent3"/>
+          </a:lnRef>
+          <a:fillRef idx="0">
+            <a:schemeClr val="accent3"/>
+          </a:fillRef>
+          <a:effectRef idx="1">
+            <a:schemeClr val="accent3"/>
+          </a:effectRef>
+          <a:fontRef idx="minor">
+            <a:schemeClr val="tx1"/>
+          </a:fontRef>
+        </p:style>
+      </p:cxnSp>
+      <p:cxnSp>
+        <p:nvCxnSpPr>
+          <p:cNvPr id="52" name="Conexão reta unidirecional 17">
+            <a:extLst>
+              <a:ext uri="{FF2B5EF4-FFF2-40B4-BE49-F238E27FC236}">
+                <a16:creationId xmlns:a16="http://schemas.microsoft.com/office/drawing/2014/main" id="{BA37729A-4856-EC6C-6E9D-291363D7B73F}"/>
+              </a:ext>
+            </a:extLst>
+          </p:cNvPr>
+          <p:cNvCxnSpPr>
+            <a:cxnSpLocks/>
+            <a:endCxn id="16" idx="1"/>
+          </p:cNvCxnSpPr>
+          <p:nvPr/>
+        </p:nvCxnSpPr>
+        <p:spPr>
+          <a:xfrm rot="16200000" flipH="1">
+            <a:off x="5809304" y="3639582"/>
+            <a:ext cx="1474285" cy="507993"/>
+          </a:xfrm>
+          <a:prstGeom prst="bentConnector2">
+            <a:avLst/>
+          </a:prstGeom>
+          <a:ln w="31750">
+            <a:tailEnd type="triangle"/>
+          </a:ln>
+        </p:spPr>
+        <p:style>
+          <a:lnRef idx="2">
+            <a:schemeClr val="accent3"/>
+          </a:lnRef>
+          <a:fillRef idx="0">
+            <a:schemeClr val="accent3"/>
+          </a:fillRef>
+          <a:effectRef idx="1">
+            <a:schemeClr val="accent3"/>
+          </a:effectRef>
+          <a:fontRef idx="minor">
+            <a:schemeClr val="tx1"/>
+          </a:fontRef>
+        </p:style>
+      </p:cxnSp>
+      <p:cxnSp>
+        <p:nvCxnSpPr>
+          <p:cNvPr id="64" name="Conexão reta 63">
+            <a:extLst>
+              <a:ext uri="{FF2B5EF4-FFF2-40B4-BE49-F238E27FC236}">
+                <a16:creationId xmlns:a16="http://schemas.microsoft.com/office/drawing/2014/main" id="{EB4ADF03-5C4F-829E-8192-BD0835A02D1C}"/>
+              </a:ext>
+            </a:extLst>
+          </p:cNvPr>
+          <p:cNvCxnSpPr>
+            <a:cxnSpLocks/>
+            <a:stCxn id="16" idx="2"/>
+            <a:endCxn id="7" idx="0"/>
+          </p:cNvCxnSpPr>
+          <p:nvPr/>
+        </p:nvCxnSpPr>
+        <p:spPr>
+          <a:xfrm flipH="1">
+            <a:off x="7664442" y="4990722"/>
+            <a:ext cx="1" cy="581253"/>
+          </a:xfrm>
+          <a:prstGeom prst="line">
+            <a:avLst/>
+          </a:prstGeom>
+          <a:ln w="31750">
+            <a:prstDash val="dash"/>
+          </a:ln>
+        </p:spPr>
+        <p:style>
+          <a:lnRef idx="2">
+            <a:schemeClr val="accent3"/>
+          </a:lnRef>
+          <a:fillRef idx="0">
+            <a:schemeClr val="accent3"/>
+          </a:fillRef>
+          <a:effectRef idx="1">
+            <a:schemeClr val="accent3"/>
+          </a:effectRef>
+          <a:fontRef idx="minor">
+            <a:schemeClr val="tx1"/>
+          </a:fontRef>
+        </p:style>
+      </p:cxnSp>
+      <p:sp>
+        <p:nvSpPr>
+          <p:cNvPr id="71" name="Retângulo: Cantos Arredondados 70">
+            <a:extLst>
+              <a:ext uri="{FF2B5EF4-FFF2-40B4-BE49-F238E27FC236}">
+                <a16:creationId xmlns:a16="http://schemas.microsoft.com/office/drawing/2014/main" id="{B5E21D36-1371-ABFB-C416-BB4379403EC8}"/>
+              </a:ext>
+            </a:extLst>
+          </p:cNvPr>
+          <p:cNvSpPr/>
+          <p:nvPr/>
+        </p:nvSpPr>
+        <p:spPr>
+          <a:xfrm>
+            <a:off x="6800443" y="7427741"/>
+            <a:ext cx="1728000" cy="720000"/>
+          </a:xfrm>
+          <a:prstGeom prst="roundRect">
+            <a:avLst/>
+          </a:prstGeom>
+          <a:ln w="31750"/>
+        </p:spPr>
+        <p:style>
+          <a:lnRef idx="2">
+            <a:schemeClr val="accent3"/>
+          </a:lnRef>
+          <a:fillRef idx="1">
+            <a:schemeClr val="lt1"/>
+          </a:fillRef>
+          <a:effectRef idx="0">
+            <a:schemeClr val="accent3"/>
+          </a:effectRef>
+          <a:fontRef idx="minor">
+            <a:schemeClr val="dk1"/>
+          </a:fontRef>
+        </p:style>
+        <p:txBody>
+          <a:bodyPr rtlCol="0" anchor="ctr"/>
+          <a:lstStyle/>
+          <a:p>
+            <a:pPr algn="ctr"/>
+            <a:r>
+              <a:rPr lang="pt-PT" b="1" dirty="0"/>
+              <a:t>Medicação</a:t>
+            </a:r>
+            <a:endParaRPr lang="pt-PT" dirty="0"/>
+          </a:p>
+        </p:txBody>
+      </p:sp>
+      <p:cxnSp>
+        <p:nvCxnSpPr>
+          <p:cNvPr id="72" name="Conexão reta unidirecional 17">
+            <a:extLst>
+              <a:ext uri="{FF2B5EF4-FFF2-40B4-BE49-F238E27FC236}">
+                <a16:creationId xmlns:a16="http://schemas.microsoft.com/office/drawing/2014/main" id="{3168A170-9210-FDF7-AE97-E84CF8C80888}"/>
+              </a:ext>
+            </a:extLst>
+          </p:cNvPr>
+          <p:cNvCxnSpPr>
+            <a:cxnSpLocks/>
+            <a:endCxn id="71" idx="1"/>
+          </p:cNvCxnSpPr>
+          <p:nvPr/>
+        </p:nvCxnSpPr>
+        <p:spPr>
+          <a:xfrm rot="16200000" flipH="1">
+            <a:off x="6343989" y="7331287"/>
+            <a:ext cx="551364" cy="361543"/>
+          </a:xfrm>
+          <a:prstGeom prst="bentConnector2">
+            <a:avLst/>
+          </a:prstGeom>
+          <a:ln w="31750">
+            <a:tailEnd type="triangle"/>
+          </a:ln>
+        </p:spPr>
+        <p:style>
+          <a:lnRef idx="2">
+            <a:schemeClr val="accent3"/>
+          </a:lnRef>
+          <a:fillRef idx="0">
+            <a:schemeClr val="accent3"/>
+          </a:fillRef>
+          <a:effectRef idx="1">
+            <a:schemeClr val="accent3"/>
+          </a:effectRef>
+          <a:fontRef idx="minor">
+            <a:schemeClr val="tx1"/>
+          </a:fontRef>
+        </p:style>
+      </p:cxnSp>
+      <p:cxnSp>
+        <p:nvCxnSpPr>
+          <p:cNvPr id="75" name="Conexão reta 74">
+            <a:extLst>
+              <a:ext uri="{FF2B5EF4-FFF2-40B4-BE49-F238E27FC236}">
+                <a16:creationId xmlns:a16="http://schemas.microsoft.com/office/drawing/2014/main" id="{AC5EC188-0920-1755-F5F1-589B6B99242F}"/>
+              </a:ext>
+            </a:extLst>
+          </p:cNvPr>
+          <p:cNvCxnSpPr>
+            <a:cxnSpLocks/>
+            <a:stCxn id="30" idx="0"/>
+            <a:endCxn id="71" idx="2"/>
+          </p:cNvCxnSpPr>
+          <p:nvPr/>
+        </p:nvCxnSpPr>
+        <p:spPr>
+          <a:xfrm flipV="1">
+            <a:off x="7664442" y="8147741"/>
+            <a:ext cx="1" cy="193325"/>
+          </a:xfrm>
+          <a:prstGeom prst="line">
+            <a:avLst/>
+          </a:prstGeom>
+          <a:ln w="31750">
+            <a:prstDash val="solid"/>
+          </a:ln>
+        </p:spPr>
+        <p:style>
+          <a:lnRef idx="2">
+            <a:schemeClr val="accent3"/>
+          </a:lnRef>
+          <a:fillRef idx="0">
+            <a:schemeClr val="accent3"/>
+          </a:fillRef>
+          <a:effectRef idx="1">
+            <a:schemeClr val="accent3"/>
+          </a:effectRef>
+          <a:fontRef idx="minor">
+            <a:schemeClr val="tx1"/>
+          </a:fontRef>
+        </p:style>
+      </p:cxnSp>
+      <p:cxnSp>
+        <p:nvCxnSpPr>
+          <p:cNvPr id="93" name="Conexão reta unidirecional 17">
+            <a:extLst>
+              <a:ext uri="{FF2B5EF4-FFF2-40B4-BE49-F238E27FC236}">
+                <a16:creationId xmlns:a16="http://schemas.microsoft.com/office/drawing/2014/main" id="{22F4F3F6-78A7-CA81-DF0D-CB1813211F11}"/>
+              </a:ext>
+            </a:extLst>
+          </p:cNvPr>
+          <p:cNvCxnSpPr>
+            <a:cxnSpLocks/>
+            <a:endCxn id="3" idx="1"/>
+          </p:cNvCxnSpPr>
+          <p:nvPr/>
+        </p:nvCxnSpPr>
+        <p:spPr>
+          <a:xfrm rot="16200000" flipH="1">
+            <a:off x="3645356" y="-202479"/>
+            <a:ext cx="789716" cy="745271"/>
+          </a:xfrm>
+          <a:prstGeom prst="bentConnector2">
+            <a:avLst/>
+          </a:prstGeom>
+          <a:ln w="31750">
+            <a:prstDash val="dash"/>
+            <a:tailEnd type="triangle"/>
+          </a:ln>
+        </p:spPr>
+        <p:style>
+          <a:lnRef idx="2">
+            <a:schemeClr val="accent3"/>
+          </a:lnRef>
+          <a:fillRef idx="0">
+            <a:schemeClr val="accent3"/>
+          </a:fillRef>
+          <a:effectRef idx="1">
+            <a:schemeClr val="accent3"/>
+          </a:effectRef>
+          <a:fontRef idx="minor">
+            <a:schemeClr val="tx1"/>
+          </a:fontRef>
+        </p:style>
+      </p:cxnSp>
+      <p:sp>
+        <p:nvSpPr>
+          <p:cNvPr id="7" name="Retângulo: Cantos Arredondados 6">
+            <a:extLst>
+              <a:ext uri="{FF2B5EF4-FFF2-40B4-BE49-F238E27FC236}">
+                <a16:creationId xmlns:a16="http://schemas.microsoft.com/office/drawing/2014/main" id="{54172E66-8464-5325-D359-FE0E3739B627}"/>
+              </a:ext>
+            </a:extLst>
+          </p:cNvPr>
+          <p:cNvSpPr/>
+          <p:nvPr/>
+        </p:nvSpPr>
+        <p:spPr>
+          <a:xfrm>
+            <a:off x="6800442" y="5571975"/>
+            <a:ext cx="1728000" cy="720000"/>
+          </a:xfrm>
+          <a:prstGeom prst="roundRect">
+            <a:avLst/>
+          </a:prstGeom>
+          <a:ln w="31750"/>
+        </p:spPr>
+        <p:style>
+          <a:lnRef idx="2">
+            <a:schemeClr val="accent3"/>
+          </a:lnRef>
+          <a:fillRef idx="1">
+            <a:schemeClr val="lt1"/>
+          </a:fillRef>
+          <a:effectRef idx="0">
+            <a:schemeClr val="accent3"/>
+          </a:effectRef>
+          <a:fontRef idx="minor">
+            <a:schemeClr val="dk1"/>
+          </a:fontRef>
+        </p:style>
+        <p:txBody>
+          <a:bodyPr rtlCol="0" anchor="ctr"/>
+          <a:lstStyle/>
+          <a:p>
+            <a:pPr algn="ctr"/>
+            <a:r>
+              <a:rPr lang="pt-PT" b="1" dirty="0"/>
+              <a:t>Pernoita</a:t>
+            </a:r>
+            <a:endParaRPr lang="pt-PT" dirty="0"/>
+          </a:p>
+        </p:txBody>
+      </p:sp>
+      <p:cxnSp>
+        <p:nvCxnSpPr>
+          <p:cNvPr id="13" name="Conexão reta unidirecional 17">
+            <a:extLst>
+              <a:ext uri="{FF2B5EF4-FFF2-40B4-BE49-F238E27FC236}">
+                <a16:creationId xmlns:a16="http://schemas.microsoft.com/office/drawing/2014/main" id="{82CD8421-37DB-29E9-F178-7742E5249781}"/>
+              </a:ext>
+            </a:extLst>
+          </p:cNvPr>
+          <p:cNvCxnSpPr>
+            <a:cxnSpLocks/>
+            <a:endCxn id="7" idx="1"/>
+          </p:cNvCxnSpPr>
+          <p:nvPr/>
+        </p:nvCxnSpPr>
+        <p:spPr>
+          <a:xfrm rot="16200000" flipH="1">
+            <a:off x="5431971" y="4563503"/>
+            <a:ext cx="2228951" cy="507991"/>
+          </a:xfrm>
+          <a:prstGeom prst="bentConnector2">
+            <a:avLst/>
+          </a:prstGeom>
+          <a:ln w="31750">
+            <a:tailEnd type="triangle"/>
+          </a:ln>
+        </p:spPr>
+        <p:style>
+          <a:lnRef idx="2">
+            <a:schemeClr val="accent3"/>
+          </a:lnRef>
+          <a:fillRef idx="0">
+            <a:schemeClr val="accent3"/>
+          </a:fillRef>
+          <a:effectRef idx="1">
+            <a:schemeClr val="accent3"/>
+          </a:effectRef>
+          <a:fontRef idx="minor">
+            <a:schemeClr val="tx1"/>
+          </a:fontRef>
+        </p:style>
+      </p:cxnSp>
+      <p:cxnSp>
+        <p:nvCxnSpPr>
+          <p:cNvPr id="23" name="Conexão reta 22">
+            <a:extLst>
+              <a:ext uri="{FF2B5EF4-FFF2-40B4-BE49-F238E27FC236}">
+                <a16:creationId xmlns:a16="http://schemas.microsoft.com/office/drawing/2014/main" id="{2EB36873-A80C-2083-EA57-6CDD5685BA87}"/>
+              </a:ext>
+            </a:extLst>
+          </p:cNvPr>
+          <p:cNvCxnSpPr>
+            <a:cxnSpLocks/>
+            <a:stCxn id="5" idx="2"/>
+            <a:endCxn id="16" idx="0"/>
+          </p:cNvCxnSpPr>
+          <p:nvPr/>
+        </p:nvCxnSpPr>
+        <p:spPr>
+          <a:xfrm>
+            <a:off x="7664442" y="4051309"/>
+            <a:ext cx="1" cy="219413"/>
+          </a:xfrm>
+          <a:prstGeom prst="line">
+            <a:avLst/>
+          </a:prstGeom>
+          <a:ln w="31750">
+            <a:prstDash val="solid"/>
+          </a:ln>
+        </p:spPr>
+        <p:style>
+          <a:lnRef idx="2">
+            <a:schemeClr val="accent3"/>
+          </a:lnRef>
+          <a:fillRef idx="0">
+            <a:schemeClr val="accent3"/>
+          </a:fillRef>
+          <a:effectRef idx="1">
+            <a:schemeClr val="accent3"/>
+          </a:effectRef>
+          <a:fontRef idx="minor">
+            <a:schemeClr val="tx1"/>
+          </a:fontRef>
+        </p:style>
+      </p:cxnSp>
+      <p:sp>
+        <p:nvSpPr>
+          <p:cNvPr id="30" name="Retângulo: Cantos Arredondados 29">
+            <a:extLst>
+              <a:ext uri="{FF2B5EF4-FFF2-40B4-BE49-F238E27FC236}">
+                <a16:creationId xmlns:a16="http://schemas.microsoft.com/office/drawing/2014/main" id="{58E5D1CD-AFEB-71EF-72F1-995FA1334959}"/>
+              </a:ext>
+            </a:extLst>
+          </p:cNvPr>
+          <p:cNvSpPr/>
+          <p:nvPr/>
+        </p:nvSpPr>
+        <p:spPr>
+          <a:xfrm>
+            <a:off x="6800442" y="8341066"/>
+            <a:ext cx="1728000" cy="720000"/>
+          </a:xfrm>
+          <a:prstGeom prst="roundRect">
+            <a:avLst/>
+          </a:prstGeom>
+          <a:ln w="31750"/>
+        </p:spPr>
+        <p:style>
+          <a:lnRef idx="2">
+            <a:schemeClr val="accent3"/>
+          </a:lnRef>
+          <a:fillRef idx="1">
+            <a:schemeClr val="lt1"/>
+          </a:fillRef>
+          <a:effectRef idx="0">
+            <a:schemeClr val="accent3"/>
+          </a:effectRef>
+          <a:fontRef idx="minor">
+            <a:schemeClr val="dk1"/>
+          </a:fontRef>
+        </p:style>
+        <p:txBody>
+          <a:bodyPr rtlCol="0" anchor="ctr"/>
+          <a:lstStyle/>
+          <a:p>
+            <a:pPr algn="ctr"/>
+            <a:r>
+              <a:rPr lang="pt-PT" b="1" dirty="0"/>
+              <a:t>Gravidez</a:t>
+            </a:r>
+            <a:endParaRPr lang="pt-PT" dirty="0"/>
+          </a:p>
+        </p:txBody>
+      </p:sp>
+      <p:cxnSp>
+        <p:nvCxnSpPr>
+          <p:cNvPr id="31" name="Conexão reta 30">
+            <a:extLst>
+              <a:ext uri="{FF2B5EF4-FFF2-40B4-BE49-F238E27FC236}">
+                <a16:creationId xmlns:a16="http://schemas.microsoft.com/office/drawing/2014/main" id="{DBAFF694-C24D-29F3-6851-26715A7E234F}"/>
+              </a:ext>
+            </a:extLst>
+          </p:cNvPr>
+          <p:cNvCxnSpPr>
+            <a:cxnSpLocks/>
+            <a:endCxn id="30" idx="2"/>
+          </p:cNvCxnSpPr>
+          <p:nvPr/>
+        </p:nvCxnSpPr>
+        <p:spPr>
+          <a:xfrm flipV="1">
+            <a:off x="7664442" y="9061066"/>
+            <a:ext cx="0" cy="471554"/>
+          </a:xfrm>
+          <a:prstGeom prst="line">
+            <a:avLst/>
+          </a:prstGeom>
+          <a:ln w="31750">
+            <a:prstDash val="dash"/>
+          </a:ln>
+        </p:spPr>
+        <p:style>
+          <a:lnRef idx="2">
+            <a:schemeClr val="accent3"/>
+          </a:lnRef>
+          <a:fillRef idx="0">
+            <a:schemeClr val="accent3"/>
+          </a:fillRef>
+          <a:effectRef idx="1">
+            <a:schemeClr val="accent3"/>
+          </a:effectRef>
+          <a:fontRef idx="minor">
+            <a:schemeClr val="tx1"/>
+          </a:fontRef>
+        </p:style>
+      </p:cxnSp>
+      <p:cxnSp>
+        <p:nvCxnSpPr>
+          <p:cNvPr id="42" name="Conexão reta unidirecional 17">
+            <a:extLst>
+              <a:ext uri="{FF2B5EF4-FFF2-40B4-BE49-F238E27FC236}">
+                <a16:creationId xmlns:a16="http://schemas.microsoft.com/office/drawing/2014/main" id="{3E884DB7-E350-9212-CB28-7802E87F23D7}"/>
+              </a:ext>
+            </a:extLst>
+          </p:cNvPr>
+          <p:cNvCxnSpPr>
+            <a:cxnSpLocks/>
+            <a:endCxn id="30" idx="1"/>
+          </p:cNvCxnSpPr>
+          <p:nvPr/>
+        </p:nvCxnSpPr>
+        <p:spPr>
+          <a:xfrm rot="16200000" flipH="1">
+            <a:off x="5887325" y="7787949"/>
+            <a:ext cx="1464690" cy="361544"/>
+          </a:xfrm>
+          <a:prstGeom prst="bentConnector2">
+            <a:avLst/>
+          </a:prstGeom>
+          <a:ln w="31750">
+            <a:tailEnd type="triangle"/>
+          </a:ln>
+        </p:spPr>
+        <p:style>
+          <a:lnRef idx="2">
+            <a:schemeClr val="accent3"/>
+          </a:lnRef>
+          <a:fillRef idx="0">
+            <a:schemeClr val="accent3"/>
+          </a:fillRef>
+          <a:effectRef idx="1">
+            <a:schemeClr val="accent3"/>
+          </a:effectRef>
+          <a:fontRef idx="minor">
+            <a:schemeClr val="tx1"/>
+          </a:fontRef>
+        </p:style>
+      </p:cxnSp>
+    </p:spTree>
+    <p:extLst>
+      <p:ext uri="{BB962C8B-B14F-4D97-AF65-F5344CB8AC3E}">
+        <p14:creationId xmlns:p14="http://schemas.microsoft.com/office/powerpoint/2010/main" val="2871872721"/>
+      </p:ext>
+    </p:extLst>
+  </p:cSld>
+  <p:clrMapOvr>
+    <a:masterClrMapping/>
+  </p:clrMapOvr>
+</p:sld>
+</file>
+
+<file path=ppt/slides/slide13.xml><?xml version="1.0" encoding="utf-8"?>
+<p:sld xmlns:a="http://schemas.openxmlformats.org/drawingml/2006/main" xmlns:r="http://schemas.openxmlformats.org/officeDocument/2006/relationships" xmlns:p="http://schemas.openxmlformats.org/presentationml/2006/main">
+  <p:cSld>
+    <p:spTree>
+      <p:nvGrpSpPr>
+        <p:cNvPr id="1" name="">
+          <a:extLst>
+            <a:ext uri="{FF2B5EF4-FFF2-40B4-BE49-F238E27FC236}">
+              <a16:creationId xmlns:a16="http://schemas.microsoft.com/office/drawing/2014/main" id="{6564CEC6-9633-9969-7706-60B70483B11D}"/>
+            </a:ext>
+          </a:extLst>
+        </p:cNvPr>
+        <p:cNvGrpSpPr/>
+        <p:nvPr/>
+      </p:nvGrpSpPr>
+      <p:grpSpPr>
+        <a:xfrm>
+          <a:off x="0" y="0"/>
+          <a:ext cx="0" cy="0"/>
+          <a:chOff x="0" y="0"/>
+          <a:chExt cx="0" cy="0"/>
+        </a:xfrm>
+      </p:grpSpPr>
+      <p:sp>
+        <p:nvSpPr>
+          <p:cNvPr id="3" name="Retângulo: Cantos Arredondados 2">
+            <a:extLst>
+              <a:ext uri="{FF2B5EF4-FFF2-40B4-BE49-F238E27FC236}">
+                <a16:creationId xmlns:a16="http://schemas.microsoft.com/office/drawing/2014/main" id="{9C66B4F1-C559-0A91-DE5B-403D22942EA3}"/>
+              </a:ext>
+            </a:extLst>
+          </p:cNvPr>
+          <p:cNvSpPr/>
+          <p:nvPr/>
+        </p:nvSpPr>
+        <p:spPr>
+          <a:xfrm>
+            <a:off x="100205" y="306615"/>
+            <a:ext cx="5075045" cy="720000"/>
+          </a:xfrm>
+          <a:prstGeom prst="roundRect">
+            <a:avLst/>
+          </a:prstGeom>
+          <a:ln w="31750"/>
+        </p:spPr>
+        <p:style>
+          <a:lnRef idx="2">
+            <a:schemeClr val="accent3"/>
+          </a:lnRef>
+          <a:fillRef idx="1">
+            <a:schemeClr val="lt1"/>
+          </a:fillRef>
+          <a:effectRef idx="0">
+            <a:schemeClr val="accent3"/>
+          </a:effectRef>
+          <a:fontRef idx="minor">
+            <a:schemeClr val="dk1"/>
+          </a:fontRef>
+        </p:style>
+        <p:txBody>
+          <a:bodyPr rtlCol="0" anchor="ctr"/>
+          <a:lstStyle/>
+          <a:p>
+            <a:pPr algn="ctr"/>
+            <a:r>
+              <a:rPr lang="pt-PT" b="1" dirty="0"/>
+              <a:t>Inicio de Sincronização</a:t>
+            </a:r>
+            <a:endParaRPr lang="pt-PT" dirty="0"/>
+          </a:p>
+        </p:txBody>
+      </p:sp>
+      <p:cxnSp>
+        <p:nvCxnSpPr>
+          <p:cNvPr id="8" name="Conexão reta unidirecional 7">
+            <a:extLst>
+              <a:ext uri="{FF2B5EF4-FFF2-40B4-BE49-F238E27FC236}">
+                <a16:creationId xmlns:a16="http://schemas.microsoft.com/office/drawing/2014/main" id="{72C0F4B1-285E-1152-5F61-696E6D03A2B5}"/>
+              </a:ext>
+            </a:extLst>
+          </p:cNvPr>
+          <p:cNvCxnSpPr>
+            <a:cxnSpLocks/>
+            <a:stCxn id="3" idx="2"/>
+            <a:endCxn id="51" idx="0"/>
+          </p:cNvCxnSpPr>
+          <p:nvPr/>
+        </p:nvCxnSpPr>
+        <p:spPr>
+          <a:xfrm>
+            <a:off x="2637728" y="1026615"/>
+            <a:ext cx="475" cy="310544"/>
+          </a:xfrm>
+          <a:prstGeom prst="straightConnector1">
+            <a:avLst/>
+          </a:prstGeom>
+          <a:ln w="31750">
+            <a:tailEnd type="triangle"/>
+          </a:ln>
+        </p:spPr>
+        <p:style>
+          <a:lnRef idx="2">
+            <a:schemeClr val="accent3"/>
+          </a:lnRef>
+          <a:fillRef idx="0">
+            <a:schemeClr val="accent3"/>
+          </a:fillRef>
+          <a:effectRef idx="1">
+            <a:schemeClr val="accent3"/>
+          </a:effectRef>
+          <a:fontRef idx="minor">
+            <a:schemeClr val="tx1"/>
+          </a:fontRef>
+        </p:style>
+      </p:cxnSp>
+      <p:sp>
+        <p:nvSpPr>
+          <p:cNvPr id="4" name="Retângulo: Cantos Arredondados 3">
+            <a:extLst>
+              <a:ext uri="{FF2B5EF4-FFF2-40B4-BE49-F238E27FC236}">
+                <a16:creationId xmlns:a16="http://schemas.microsoft.com/office/drawing/2014/main" id="{41D751A1-251D-A886-DA2D-AA68EB09F57D}"/>
+              </a:ext>
+            </a:extLst>
+          </p:cNvPr>
+          <p:cNvSpPr/>
+          <p:nvPr/>
+        </p:nvSpPr>
+        <p:spPr>
+          <a:xfrm>
+            <a:off x="100204" y="2394565"/>
+            <a:ext cx="5075044" cy="720000"/>
+          </a:xfrm>
+          <a:prstGeom prst="roundRect">
+            <a:avLst/>
+          </a:prstGeom>
+          <a:ln w="31750"/>
+        </p:spPr>
+        <p:style>
+          <a:lnRef idx="2">
+            <a:schemeClr val="accent3"/>
+          </a:lnRef>
+          <a:fillRef idx="1">
+            <a:schemeClr val="lt1"/>
+          </a:fillRef>
+          <a:effectRef idx="0">
+            <a:schemeClr val="accent3"/>
+          </a:effectRef>
+          <a:fontRef idx="minor">
+            <a:schemeClr val="dk1"/>
+          </a:fontRef>
+        </p:style>
+        <p:txBody>
+          <a:bodyPr rtlCol="0" anchor="ctr"/>
+          <a:lstStyle/>
+          <a:p>
+            <a:pPr algn="ctr"/>
+            <a:r>
+              <a:rPr lang="pt-PT" sz="1600" b="1" dirty="0"/>
+              <a:t>Itera registos locais</a:t>
+            </a:r>
+          </a:p>
+        </p:txBody>
+      </p:sp>
+      <p:cxnSp>
+        <p:nvCxnSpPr>
+          <p:cNvPr id="37" name="Conexão reta unidirecional 17">
+            <a:extLst>
+              <a:ext uri="{FF2B5EF4-FFF2-40B4-BE49-F238E27FC236}">
+                <a16:creationId xmlns:a16="http://schemas.microsoft.com/office/drawing/2014/main" id="{20A16386-1B62-0F6C-0156-079096EC0422}"/>
+              </a:ext>
+            </a:extLst>
+          </p:cNvPr>
+          <p:cNvCxnSpPr>
+            <a:cxnSpLocks/>
+            <a:stCxn id="9" idx="3"/>
+            <a:endCxn id="11" idx="0"/>
+          </p:cNvCxnSpPr>
+          <p:nvPr/>
+        </p:nvCxnSpPr>
+        <p:spPr>
+          <a:xfrm>
+            <a:off x="4976594" y="4054822"/>
+            <a:ext cx="134951" cy="810078"/>
+          </a:xfrm>
+          <a:prstGeom prst="bentConnector2">
+            <a:avLst/>
+          </a:prstGeom>
+          <a:ln w="31750">
+            <a:tailEnd type="triangle"/>
+          </a:ln>
+        </p:spPr>
+        <p:style>
+          <a:lnRef idx="2">
+            <a:schemeClr val="accent3"/>
+          </a:lnRef>
+          <a:fillRef idx="0">
+            <a:schemeClr val="accent3"/>
+          </a:fillRef>
+          <a:effectRef idx="1">
+            <a:schemeClr val="accent3"/>
+          </a:effectRef>
+          <a:fontRef idx="minor">
+            <a:schemeClr val="tx1"/>
+          </a:fontRef>
+        </p:style>
+      </p:cxnSp>
+      <p:sp>
+        <p:nvSpPr>
+          <p:cNvPr id="9" name="Losango 8">
+            <a:extLst>
+              <a:ext uri="{FF2B5EF4-FFF2-40B4-BE49-F238E27FC236}">
+                <a16:creationId xmlns:a16="http://schemas.microsoft.com/office/drawing/2014/main" id="{B5C25C0C-B379-8F14-72A1-64D465EF62AA}"/>
+              </a:ext>
+            </a:extLst>
+          </p:cNvPr>
+          <p:cNvSpPr/>
+          <p:nvPr/>
+        </p:nvSpPr>
+        <p:spPr>
+          <a:xfrm>
+            <a:off x="2500096" y="3472367"/>
+            <a:ext cx="2476498" cy="1164909"/>
+          </a:xfrm>
+          <a:prstGeom prst="diamond">
+            <a:avLst/>
+          </a:prstGeom>
+          <a:ln w="31750"/>
+        </p:spPr>
+        <p:style>
+          <a:lnRef idx="2">
+            <a:schemeClr val="accent3"/>
+          </a:lnRef>
+          <a:fillRef idx="1">
+            <a:schemeClr val="lt1"/>
+          </a:fillRef>
+          <a:effectRef idx="0">
+            <a:schemeClr val="accent3"/>
+          </a:effectRef>
+          <a:fontRef idx="minor">
+            <a:schemeClr val="dk1"/>
+          </a:fontRef>
+        </p:style>
+        <p:txBody>
+          <a:bodyPr rtlCol="0" anchor="ctr"/>
+          <a:lstStyle/>
+          <a:p>
+            <a:pPr algn="ctr"/>
+            <a:r>
+              <a:rPr lang="pt-PT" dirty="0" err="1">
+                <a:solidFill>
+                  <a:schemeClr val="dk1"/>
+                </a:solidFill>
+                <a:latin typeface="Consolas" panose="020B0609020204030204" pitchFamily="49" charset="0"/>
+              </a:rPr>
+              <a:t>isSynced</a:t>
+            </a:r>
+            <a:r>
+              <a:rPr lang="pt-PT" dirty="0">
+                <a:solidFill>
+                  <a:schemeClr val="dk1"/>
+                </a:solidFill>
+              </a:rPr>
+              <a:t>?</a:t>
+            </a:r>
+          </a:p>
+        </p:txBody>
+      </p:sp>
+      <p:sp>
+        <p:nvSpPr>
+          <p:cNvPr id="10" name="Retângulo: Cantos Arredondados 9">
+            <a:extLst>
+              <a:ext uri="{FF2B5EF4-FFF2-40B4-BE49-F238E27FC236}">
+                <a16:creationId xmlns:a16="http://schemas.microsoft.com/office/drawing/2014/main" id="{A444283F-035E-0611-B1B2-5A4EF9AD96CA}"/>
+              </a:ext>
+            </a:extLst>
+          </p:cNvPr>
+          <p:cNvSpPr/>
+          <p:nvPr/>
+        </p:nvSpPr>
+        <p:spPr>
+          <a:xfrm>
+            <a:off x="100205" y="6014145"/>
+            <a:ext cx="1728000" cy="720000"/>
+          </a:xfrm>
+          <a:prstGeom prst="roundRect">
+            <a:avLst/>
+          </a:prstGeom>
+          <a:ln w="31750"/>
+        </p:spPr>
+        <p:style>
+          <a:lnRef idx="2">
+            <a:schemeClr val="accent3"/>
+          </a:lnRef>
+          <a:fillRef idx="1">
+            <a:schemeClr val="lt1"/>
+          </a:fillRef>
+          <a:effectRef idx="0">
+            <a:schemeClr val="accent3"/>
+          </a:effectRef>
+          <a:fontRef idx="minor">
+            <a:schemeClr val="dk1"/>
+          </a:fontRef>
+        </p:style>
+        <p:txBody>
+          <a:bodyPr rtlCol="0" anchor="ctr"/>
+          <a:lstStyle/>
+          <a:p>
+            <a:pPr algn="ctr"/>
+            <a:r>
+              <a:rPr lang="pt-PT" b="1" dirty="0"/>
+              <a:t>POST</a:t>
+            </a:r>
+            <a:endParaRPr lang="pt-PT" dirty="0"/>
+          </a:p>
+        </p:txBody>
+      </p:sp>
+      <p:sp>
+        <p:nvSpPr>
+          <p:cNvPr id="11" name="Retângulo: Cantos Arredondados 10">
+            <a:extLst>
+              <a:ext uri="{FF2B5EF4-FFF2-40B4-BE49-F238E27FC236}">
+                <a16:creationId xmlns:a16="http://schemas.microsoft.com/office/drawing/2014/main" id="{E5D68924-0A9F-35BF-A323-D84961C92132}"/>
+              </a:ext>
+            </a:extLst>
+          </p:cNvPr>
+          <p:cNvSpPr/>
+          <p:nvPr/>
+        </p:nvSpPr>
+        <p:spPr>
+          <a:xfrm>
+            <a:off x="4247545" y="4864900"/>
+            <a:ext cx="1728000" cy="720000"/>
+          </a:xfrm>
+          <a:prstGeom prst="roundRect">
+            <a:avLst/>
+          </a:prstGeom>
+          <a:ln w="31750"/>
+        </p:spPr>
+        <p:style>
+          <a:lnRef idx="2">
+            <a:schemeClr val="accent3"/>
+          </a:lnRef>
+          <a:fillRef idx="1">
+            <a:schemeClr val="lt1"/>
+          </a:fillRef>
+          <a:effectRef idx="0">
+            <a:schemeClr val="accent3"/>
+          </a:effectRef>
+          <a:fontRef idx="minor">
+            <a:schemeClr val="dk1"/>
+          </a:fontRef>
+        </p:style>
+        <p:txBody>
+          <a:bodyPr rtlCol="0" anchor="ctr"/>
+          <a:lstStyle/>
+          <a:p>
+            <a:pPr algn="ctr"/>
+            <a:r>
+              <a:rPr lang="pt-PT" b="1" dirty="0"/>
+              <a:t>Ignora</a:t>
+            </a:r>
+            <a:br>
+              <a:rPr lang="pt-PT" b="1" dirty="0"/>
+            </a:br>
+            <a:r>
+              <a:rPr lang="pt-PT" sz="1600" dirty="0"/>
+              <a:t>(já sincronizado)</a:t>
+            </a:r>
+            <a:endParaRPr lang="pt-PT" dirty="0"/>
+          </a:p>
+        </p:txBody>
+      </p:sp>
+      <p:sp>
+        <p:nvSpPr>
+          <p:cNvPr id="21" name="Losango 20">
+            <a:extLst>
+              <a:ext uri="{FF2B5EF4-FFF2-40B4-BE49-F238E27FC236}">
+                <a16:creationId xmlns:a16="http://schemas.microsoft.com/office/drawing/2014/main" id="{9122E015-E86D-ACA3-A087-3DE26ED4D7AA}"/>
+              </a:ext>
+            </a:extLst>
+          </p:cNvPr>
+          <p:cNvSpPr/>
+          <p:nvPr/>
+        </p:nvSpPr>
+        <p:spPr>
+          <a:xfrm>
+            <a:off x="1071548" y="4642446"/>
+            <a:ext cx="2476498" cy="1164909"/>
+          </a:xfrm>
+          <a:prstGeom prst="diamond">
+            <a:avLst/>
+          </a:prstGeom>
+          <a:ln w="31750"/>
+        </p:spPr>
+        <p:style>
+          <a:lnRef idx="2">
+            <a:schemeClr val="accent3"/>
+          </a:lnRef>
+          <a:fillRef idx="1">
+            <a:schemeClr val="lt1"/>
+          </a:fillRef>
+          <a:effectRef idx="0">
+            <a:schemeClr val="accent3"/>
+          </a:effectRef>
+          <a:fontRef idx="minor">
+            <a:schemeClr val="dk1"/>
+          </a:fontRef>
+        </p:style>
+        <p:txBody>
+          <a:bodyPr rtlCol="0" anchor="ctr"/>
+          <a:lstStyle/>
+          <a:p>
+            <a:pPr algn="ctr"/>
+            <a:r>
+              <a:rPr lang="pt-PT" dirty="0" err="1">
+                <a:solidFill>
+                  <a:schemeClr val="dk1"/>
+                </a:solidFill>
+                <a:latin typeface="Consolas" panose="020B0609020204030204" pitchFamily="49" charset="0"/>
+              </a:rPr>
+              <a:t>remoteID</a:t>
+            </a:r>
+            <a:r>
+              <a:rPr lang="pt-PT" dirty="0">
+                <a:solidFill>
+                  <a:schemeClr val="dk1"/>
+                </a:solidFill>
+              </a:rPr>
+              <a:t>?</a:t>
+            </a:r>
+          </a:p>
+        </p:txBody>
+      </p:sp>
+      <p:cxnSp>
+        <p:nvCxnSpPr>
+          <p:cNvPr id="22" name="Conexão reta unidirecional 17">
+            <a:extLst>
+              <a:ext uri="{FF2B5EF4-FFF2-40B4-BE49-F238E27FC236}">
+                <a16:creationId xmlns:a16="http://schemas.microsoft.com/office/drawing/2014/main" id="{8988BA05-4C58-4693-AC14-C05E08121AA4}"/>
+              </a:ext>
+            </a:extLst>
+          </p:cNvPr>
+          <p:cNvCxnSpPr>
+            <a:cxnSpLocks/>
+            <a:stCxn id="9" idx="1"/>
+            <a:endCxn id="21" idx="0"/>
+          </p:cNvCxnSpPr>
+          <p:nvPr/>
+        </p:nvCxnSpPr>
+        <p:spPr>
+          <a:xfrm rot="10800000" flipV="1">
+            <a:off x="2309798" y="4054822"/>
+            <a:ext cx="190299" cy="587624"/>
+          </a:xfrm>
+          <a:prstGeom prst="bentConnector2">
+            <a:avLst/>
+          </a:prstGeom>
+          <a:ln w="31750">
+            <a:tailEnd type="triangle"/>
+          </a:ln>
+        </p:spPr>
+        <p:style>
+          <a:lnRef idx="2">
+            <a:schemeClr val="accent3"/>
+          </a:lnRef>
+          <a:fillRef idx="0">
+            <a:schemeClr val="accent3"/>
+          </a:fillRef>
+          <a:effectRef idx="1">
+            <a:schemeClr val="accent3"/>
+          </a:effectRef>
+          <a:fontRef idx="minor">
+            <a:schemeClr val="tx1"/>
+          </a:fontRef>
+        </p:style>
+      </p:cxnSp>
+      <p:sp>
+        <p:nvSpPr>
+          <p:cNvPr id="27" name="Retângulo: Cantos Arredondados 26">
+            <a:extLst>
+              <a:ext uri="{FF2B5EF4-FFF2-40B4-BE49-F238E27FC236}">
+                <a16:creationId xmlns:a16="http://schemas.microsoft.com/office/drawing/2014/main" id="{5A4ED2AA-E772-F453-2D7A-3BB5780B7A4C}"/>
+              </a:ext>
+            </a:extLst>
+          </p:cNvPr>
+          <p:cNvSpPr/>
+          <p:nvPr/>
+        </p:nvSpPr>
+        <p:spPr>
+          <a:xfrm>
+            <a:off x="2795073" y="6014145"/>
+            <a:ext cx="1728000" cy="720000"/>
+          </a:xfrm>
+          <a:prstGeom prst="roundRect">
+            <a:avLst/>
+          </a:prstGeom>
+          <a:ln w="31750"/>
+        </p:spPr>
+        <p:style>
+          <a:lnRef idx="2">
+            <a:schemeClr val="accent3"/>
+          </a:lnRef>
+          <a:fillRef idx="1">
+            <a:schemeClr val="lt1"/>
+          </a:fillRef>
+          <a:effectRef idx="0">
+            <a:schemeClr val="accent3"/>
+          </a:effectRef>
+          <a:fontRef idx="minor">
+            <a:schemeClr val="dk1"/>
+          </a:fontRef>
+        </p:style>
+        <p:txBody>
+          <a:bodyPr rtlCol="0" anchor="ctr"/>
+          <a:lstStyle/>
+          <a:p>
+            <a:pPr algn="ctr"/>
+            <a:r>
+              <a:rPr lang="pt-PT" b="1" dirty="0"/>
+              <a:t>PUT</a:t>
+            </a:r>
+            <a:endParaRPr lang="pt-PT" dirty="0"/>
+          </a:p>
+        </p:txBody>
+      </p:sp>
+      <p:sp>
+        <p:nvSpPr>
+          <p:cNvPr id="28" name="Retângulo 27">
+            <a:extLst>
+              <a:ext uri="{FF2B5EF4-FFF2-40B4-BE49-F238E27FC236}">
+                <a16:creationId xmlns:a16="http://schemas.microsoft.com/office/drawing/2014/main" id="{EE8F22D9-3BEC-98E4-AA4E-B2D1010BDBA8}"/>
+              </a:ext>
+            </a:extLst>
+          </p:cNvPr>
+          <p:cNvSpPr/>
+          <p:nvPr/>
+        </p:nvSpPr>
+        <p:spPr>
+          <a:xfrm>
+            <a:off x="4491323" y="4117801"/>
+            <a:ext cx="696024" cy="461665"/>
+          </a:xfrm>
+          <a:prstGeom prst="rect">
+            <a:avLst/>
+          </a:prstGeom>
+          <a:noFill/>
+        </p:spPr>
+        <p:txBody>
+          <a:bodyPr wrap="none" lIns="91440" tIns="45720" rIns="91440" bIns="45720">
+            <a:spAutoFit/>
+          </a:bodyPr>
+          <a:lstStyle/>
+          <a:p>
+            <a:pPr algn="ctr"/>
+            <a:r>
+              <a:rPr lang="pt-PT" sz="2400" b="0" cap="none" spc="0" dirty="0">
+                <a:ln w="0"/>
+                <a:solidFill>
+                  <a:schemeClr val="tx1"/>
+                </a:solidFill>
+                <a:effectLst>
+                  <a:outerShdw blurRad="38100" dist="19050" dir="2700000" algn="tl" rotWithShape="0">
+                    <a:schemeClr val="dk1">
+                      <a:alpha val="40000"/>
+                    </a:schemeClr>
+                  </a:outerShdw>
+                </a:effectLst>
+              </a:rPr>
+              <a:t>Sim</a:t>
+            </a:r>
+          </a:p>
+        </p:txBody>
+      </p:sp>
+      <p:sp>
+        <p:nvSpPr>
+          <p:cNvPr id="29" name="Retângulo 28">
+            <a:extLst>
+              <a:ext uri="{FF2B5EF4-FFF2-40B4-BE49-F238E27FC236}">
+                <a16:creationId xmlns:a16="http://schemas.microsoft.com/office/drawing/2014/main" id="{8CC3A52F-9DCF-F551-E6E1-DBB02F6C5152}"/>
+              </a:ext>
+            </a:extLst>
+          </p:cNvPr>
+          <p:cNvSpPr/>
+          <p:nvPr/>
+        </p:nvSpPr>
+        <p:spPr>
+          <a:xfrm>
+            <a:off x="2228619" y="4054168"/>
+            <a:ext cx="736100" cy="461665"/>
+          </a:xfrm>
+          <a:prstGeom prst="rect">
+            <a:avLst/>
+          </a:prstGeom>
+          <a:noFill/>
+        </p:spPr>
+        <p:txBody>
+          <a:bodyPr wrap="none" lIns="91440" tIns="45720" rIns="91440" bIns="45720">
+            <a:spAutoFit/>
+          </a:bodyPr>
+          <a:lstStyle/>
+          <a:p>
+            <a:pPr algn="ctr"/>
+            <a:r>
+              <a:rPr lang="pt-PT" sz="2400" b="0" cap="none" spc="0" dirty="0">
+                <a:ln w="0"/>
+                <a:solidFill>
+                  <a:schemeClr val="tx1"/>
+                </a:solidFill>
+                <a:effectLst>
+                  <a:outerShdw blurRad="38100" dist="19050" dir="2700000" algn="tl" rotWithShape="0">
+                    <a:schemeClr val="dk1">
+                      <a:alpha val="40000"/>
+                    </a:schemeClr>
+                  </a:outerShdw>
+                </a:effectLst>
+              </a:rPr>
+              <a:t>Não</a:t>
+            </a:r>
+          </a:p>
+        </p:txBody>
+      </p:sp>
+      <p:cxnSp>
+        <p:nvCxnSpPr>
+          <p:cNvPr id="32" name="Conexão reta unidirecional 17">
+            <a:extLst>
+              <a:ext uri="{FF2B5EF4-FFF2-40B4-BE49-F238E27FC236}">
+                <a16:creationId xmlns:a16="http://schemas.microsoft.com/office/drawing/2014/main" id="{2E40A46C-74FF-C891-6354-5B42C9A16791}"/>
+              </a:ext>
+            </a:extLst>
+          </p:cNvPr>
+          <p:cNvCxnSpPr>
+            <a:cxnSpLocks/>
+            <a:stCxn id="21" idx="1"/>
+            <a:endCxn id="10" idx="0"/>
+          </p:cNvCxnSpPr>
+          <p:nvPr/>
+        </p:nvCxnSpPr>
+        <p:spPr>
+          <a:xfrm rot="10800000" flipV="1">
+            <a:off x="964206" y="5224901"/>
+            <a:ext cx="107343" cy="789244"/>
+          </a:xfrm>
+          <a:prstGeom prst="bentConnector2">
+            <a:avLst/>
+          </a:prstGeom>
+          <a:ln w="31750">
+            <a:tailEnd type="triangle"/>
+          </a:ln>
+        </p:spPr>
+        <p:style>
+          <a:lnRef idx="2">
+            <a:schemeClr val="accent3"/>
+          </a:lnRef>
+          <a:fillRef idx="0">
+            <a:schemeClr val="accent3"/>
+          </a:fillRef>
+          <a:effectRef idx="1">
+            <a:schemeClr val="accent3"/>
+          </a:effectRef>
+          <a:fontRef idx="minor">
+            <a:schemeClr val="tx1"/>
+          </a:fontRef>
+        </p:style>
+      </p:cxnSp>
+      <p:sp>
+        <p:nvSpPr>
+          <p:cNvPr id="38" name="Retângulo 37">
+            <a:extLst>
+              <a:ext uri="{FF2B5EF4-FFF2-40B4-BE49-F238E27FC236}">
+                <a16:creationId xmlns:a16="http://schemas.microsoft.com/office/drawing/2014/main" id="{F9910CB4-FB84-F434-4E3B-561F810A38A8}"/>
+              </a:ext>
+            </a:extLst>
+          </p:cNvPr>
+          <p:cNvSpPr/>
+          <p:nvPr/>
+        </p:nvSpPr>
+        <p:spPr>
+          <a:xfrm>
+            <a:off x="878873" y="5294145"/>
+            <a:ext cx="736100" cy="461665"/>
+          </a:xfrm>
+          <a:prstGeom prst="rect">
+            <a:avLst/>
+          </a:prstGeom>
+          <a:noFill/>
+        </p:spPr>
+        <p:txBody>
+          <a:bodyPr wrap="none" lIns="91440" tIns="45720" rIns="91440" bIns="45720">
+            <a:spAutoFit/>
+          </a:bodyPr>
+          <a:lstStyle/>
+          <a:p>
+            <a:pPr algn="ctr"/>
+            <a:r>
+              <a:rPr lang="pt-PT" sz="2400" b="0" cap="none" spc="0" dirty="0">
+                <a:ln w="0"/>
+                <a:solidFill>
+                  <a:schemeClr val="tx1"/>
+                </a:solidFill>
+                <a:effectLst>
+                  <a:outerShdw blurRad="38100" dist="19050" dir="2700000" algn="tl" rotWithShape="0">
+                    <a:schemeClr val="dk1">
+                      <a:alpha val="40000"/>
+                    </a:schemeClr>
+                  </a:outerShdw>
+                </a:effectLst>
+              </a:rPr>
+              <a:t>Não</a:t>
+            </a:r>
+          </a:p>
+        </p:txBody>
+      </p:sp>
+      <p:cxnSp>
+        <p:nvCxnSpPr>
+          <p:cNvPr id="39" name="Conexão reta unidirecional 17">
+            <a:extLst>
+              <a:ext uri="{FF2B5EF4-FFF2-40B4-BE49-F238E27FC236}">
+                <a16:creationId xmlns:a16="http://schemas.microsoft.com/office/drawing/2014/main" id="{F32C4B75-CC38-80B6-2EF8-20AB5E1E3033}"/>
+              </a:ext>
+            </a:extLst>
+          </p:cNvPr>
+          <p:cNvCxnSpPr>
+            <a:cxnSpLocks/>
+            <a:stCxn id="21" idx="3"/>
+            <a:endCxn id="27" idx="0"/>
+          </p:cNvCxnSpPr>
+          <p:nvPr/>
+        </p:nvCxnSpPr>
+        <p:spPr>
+          <a:xfrm>
+            <a:off x="3548046" y="5224901"/>
+            <a:ext cx="111027" cy="789244"/>
+          </a:xfrm>
+          <a:prstGeom prst="bentConnector2">
+            <a:avLst/>
+          </a:prstGeom>
+          <a:ln w="31750">
+            <a:tailEnd type="triangle"/>
+          </a:ln>
+        </p:spPr>
+        <p:style>
+          <a:lnRef idx="2">
+            <a:schemeClr val="accent3"/>
+          </a:lnRef>
+          <a:fillRef idx="0">
+            <a:schemeClr val="accent3"/>
+          </a:fillRef>
+          <a:effectRef idx="1">
+            <a:schemeClr val="accent3"/>
+          </a:effectRef>
+          <a:fontRef idx="minor">
+            <a:schemeClr val="tx1"/>
+          </a:fontRef>
+        </p:style>
+      </p:cxnSp>
+      <p:cxnSp>
+        <p:nvCxnSpPr>
+          <p:cNvPr id="47" name="Conexão reta unidirecional 46">
+            <a:extLst>
+              <a:ext uri="{FF2B5EF4-FFF2-40B4-BE49-F238E27FC236}">
+                <a16:creationId xmlns:a16="http://schemas.microsoft.com/office/drawing/2014/main" id="{81B1177A-9C15-1454-3335-3B965F173B49}"/>
+              </a:ext>
+            </a:extLst>
+          </p:cNvPr>
+          <p:cNvCxnSpPr>
+            <a:cxnSpLocks/>
+            <a:endCxn id="9" idx="0"/>
+          </p:cNvCxnSpPr>
+          <p:nvPr/>
+        </p:nvCxnSpPr>
+        <p:spPr>
+          <a:xfrm>
+            <a:off x="3738345" y="3114565"/>
+            <a:ext cx="0" cy="357802"/>
+          </a:xfrm>
+          <a:prstGeom prst="straightConnector1">
+            <a:avLst/>
+          </a:prstGeom>
+          <a:ln w="31750">
+            <a:tailEnd type="triangle"/>
+          </a:ln>
+        </p:spPr>
+        <p:style>
+          <a:lnRef idx="2">
+            <a:schemeClr val="accent3"/>
+          </a:lnRef>
+          <a:fillRef idx="0">
+            <a:schemeClr val="accent3"/>
+          </a:fillRef>
+          <a:effectRef idx="1">
+            <a:schemeClr val="accent3"/>
+          </a:effectRef>
+          <a:fontRef idx="minor">
+            <a:schemeClr val="tx1"/>
+          </a:fontRef>
+        </p:style>
+      </p:cxnSp>
+      <p:sp>
+        <p:nvSpPr>
+          <p:cNvPr id="51" name="Retângulo: Cantos Arredondados 50">
+            <a:extLst>
+              <a:ext uri="{FF2B5EF4-FFF2-40B4-BE49-F238E27FC236}">
+                <a16:creationId xmlns:a16="http://schemas.microsoft.com/office/drawing/2014/main" id="{8E0D880A-109B-F9ED-35AE-2CACE841F189}"/>
+              </a:ext>
+            </a:extLst>
+          </p:cNvPr>
+          <p:cNvSpPr/>
+          <p:nvPr/>
+        </p:nvSpPr>
+        <p:spPr>
+          <a:xfrm>
+            <a:off x="100203" y="1337159"/>
+            <a:ext cx="5076000" cy="720000"/>
+          </a:xfrm>
+          <a:prstGeom prst="roundRect">
+            <a:avLst/>
+          </a:prstGeom>
+          <a:ln w="31750"/>
+        </p:spPr>
+        <p:style>
+          <a:lnRef idx="2">
+            <a:schemeClr val="accent3"/>
+          </a:lnRef>
+          <a:fillRef idx="1">
+            <a:schemeClr val="lt1"/>
+          </a:fillRef>
+          <a:effectRef idx="0">
+            <a:schemeClr val="accent3"/>
+          </a:effectRef>
+          <a:fontRef idx="minor">
+            <a:schemeClr val="dk1"/>
+          </a:fontRef>
+        </p:style>
+        <p:txBody>
+          <a:bodyPr rtlCol="0" anchor="ctr"/>
+          <a:lstStyle/>
+          <a:p>
+            <a:pPr algn="ctr"/>
+            <a:r>
+              <a:rPr lang="pt-PT" sz="1600" b="1" dirty="0"/>
+              <a:t>Itera tabelas locais</a:t>
+            </a:r>
+          </a:p>
+        </p:txBody>
+      </p:sp>
+      <p:cxnSp>
+        <p:nvCxnSpPr>
+          <p:cNvPr id="55" name="Conexão reta unidirecional 54">
+            <a:extLst>
+              <a:ext uri="{FF2B5EF4-FFF2-40B4-BE49-F238E27FC236}">
+                <a16:creationId xmlns:a16="http://schemas.microsoft.com/office/drawing/2014/main" id="{D1269BAC-8B2F-2BA6-0512-DE91FEDC29B1}"/>
+              </a:ext>
+            </a:extLst>
+          </p:cNvPr>
+          <p:cNvCxnSpPr>
+            <a:cxnSpLocks/>
+            <a:stCxn id="51" idx="2"/>
+            <a:endCxn id="4" idx="0"/>
+          </p:cNvCxnSpPr>
+          <p:nvPr/>
+        </p:nvCxnSpPr>
+        <p:spPr>
+          <a:xfrm flipH="1">
+            <a:off x="2637726" y="2057159"/>
+            <a:ext cx="477" cy="337406"/>
+          </a:xfrm>
+          <a:prstGeom prst="straightConnector1">
+            <a:avLst/>
+          </a:prstGeom>
+          <a:ln w="31750">
+            <a:tailEnd type="triangle"/>
+          </a:ln>
+        </p:spPr>
+        <p:style>
+          <a:lnRef idx="2">
+            <a:schemeClr val="accent3"/>
+          </a:lnRef>
+          <a:fillRef idx="0">
+            <a:schemeClr val="accent3"/>
+          </a:fillRef>
+          <a:effectRef idx="1">
+            <a:schemeClr val="accent3"/>
+          </a:effectRef>
+          <a:fontRef idx="minor">
+            <a:schemeClr val="tx1"/>
+          </a:fontRef>
+        </p:style>
+      </p:cxnSp>
+      <p:sp>
+        <p:nvSpPr>
+          <p:cNvPr id="58" name="Retângulo: Cantos Arredondados 57">
+            <a:extLst>
+              <a:ext uri="{FF2B5EF4-FFF2-40B4-BE49-F238E27FC236}">
+                <a16:creationId xmlns:a16="http://schemas.microsoft.com/office/drawing/2014/main" id="{19CE77E1-E571-F988-1A59-80D2EF2482E2}"/>
+              </a:ext>
+            </a:extLst>
+          </p:cNvPr>
+          <p:cNvSpPr/>
+          <p:nvPr/>
+        </p:nvSpPr>
+        <p:spPr>
+          <a:xfrm>
+            <a:off x="100205" y="7406203"/>
+            <a:ext cx="1728001" cy="720000"/>
+          </a:xfrm>
+          <a:prstGeom prst="roundRect">
+            <a:avLst/>
+          </a:prstGeom>
+          <a:ln w="31750"/>
+        </p:spPr>
+        <p:style>
+          <a:lnRef idx="2">
+            <a:schemeClr val="accent3"/>
+          </a:lnRef>
+          <a:fillRef idx="1">
+            <a:schemeClr val="lt1"/>
+          </a:fillRef>
+          <a:effectRef idx="0">
+            <a:schemeClr val="accent3"/>
+          </a:effectRef>
+          <a:fontRef idx="minor">
+            <a:schemeClr val="dk1"/>
+          </a:fontRef>
+        </p:style>
+        <p:txBody>
+          <a:bodyPr rtlCol="0" anchor="ctr"/>
+          <a:lstStyle/>
+          <a:p>
+            <a:pPr algn="ctr"/>
+            <a:r>
+              <a:rPr lang="pt-PT" b="1" dirty="0"/>
+              <a:t>Atualiza</a:t>
+            </a:r>
+            <a:br>
+              <a:rPr lang="pt-PT" b="1" dirty="0"/>
+            </a:br>
+            <a:r>
+              <a:rPr lang="pt-PT" sz="1600" dirty="0" err="1">
+                <a:latin typeface="Consolas" panose="020B0609020204030204" pitchFamily="49" charset="0"/>
+                <a:ea typeface="Sans Serif Collection" panose="020B0502040504020204" pitchFamily="34" charset="0"/>
+                <a:cs typeface="Sans Serif Collection" panose="020B0502040504020204" pitchFamily="34" charset="0"/>
+              </a:rPr>
+              <a:t>isSynced</a:t>
+            </a:r>
+            <a:r>
+              <a:rPr lang="pt-PT" sz="1600" dirty="0"/>
+              <a:t>=</a:t>
+            </a:r>
+            <a:r>
+              <a:rPr lang="pt-PT" sz="1600" dirty="0" err="1">
+                <a:latin typeface="Consolas" panose="020B0609020204030204" pitchFamily="49" charset="0"/>
+                <a:ea typeface="Sans Serif Collection" panose="020B0502040504020204" pitchFamily="34" charset="0"/>
+                <a:cs typeface="Sans Serif Collection" panose="020B0502040504020204" pitchFamily="34" charset="0"/>
+              </a:rPr>
+              <a:t>true</a:t>
+            </a:r>
+            <a:r>
+              <a:rPr lang="pt-PT" sz="1600" dirty="0"/>
+              <a:t> </a:t>
+            </a:r>
+          </a:p>
+          <a:p>
+            <a:pPr algn="ctr"/>
+            <a:r>
+              <a:rPr lang="pt-PT" sz="1600" dirty="0" err="1">
+                <a:latin typeface="Consolas" panose="020B0609020204030204" pitchFamily="49" charset="0"/>
+                <a:ea typeface="Sans Serif Collection" panose="020B0502040504020204" pitchFamily="34" charset="0"/>
+                <a:cs typeface="Sans Serif Collection" panose="020B0502040504020204" pitchFamily="34" charset="0"/>
+              </a:rPr>
+              <a:t>remoteId</a:t>
+            </a:r>
+            <a:endParaRPr lang="pt-PT" dirty="0">
+              <a:latin typeface="Consolas" panose="020B0609020204030204" pitchFamily="49" charset="0"/>
+              <a:ea typeface="Sans Serif Collection" panose="020B0502040504020204" pitchFamily="34" charset="0"/>
+              <a:cs typeface="Sans Serif Collection" panose="020B0502040504020204" pitchFamily="34" charset="0"/>
+            </a:endParaRPr>
+          </a:p>
+        </p:txBody>
+      </p:sp>
+      <p:cxnSp>
+        <p:nvCxnSpPr>
+          <p:cNvPr id="59" name="Conexão reta unidirecional 58">
+            <a:extLst>
+              <a:ext uri="{FF2B5EF4-FFF2-40B4-BE49-F238E27FC236}">
+                <a16:creationId xmlns:a16="http://schemas.microsoft.com/office/drawing/2014/main" id="{B17CA494-7BBA-7B48-39DF-18392A6D25FD}"/>
+              </a:ext>
+            </a:extLst>
+          </p:cNvPr>
+          <p:cNvCxnSpPr>
+            <a:cxnSpLocks/>
+            <a:stCxn id="10" idx="2"/>
+          </p:cNvCxnSpPr>
+          <p:nvPr/>
+        </p:nvCxnSpPr>
+        <p:spPr>
+          <a:xfrm>
+            <a:off x="964205" y="6734145"/>
+            <a:ext cx="0" cy="672058"/>
+          </a:xfrm>
+          <a:prstGeom prst="straightConnector1">
+            <a:avLst/>
+          </a:prstGeom>
+          <a:ln w="31750">
+            <a:tailEnd type="triangle"/>
+          </a:ln>
+        </p:spPr>
+        <p:style>
+          <a:lnRef idx="2">
+            <a:schemeClr val="accent3"/>
+          </a:lnRef>
+          <a:fillRef idx="0">
+            <a:schemeClr val="accent3"/>
+          </a:fillRef>
+          <a:effectRef idx="1">
+            <a:schemeClr val="accent3"/>
+          </a:effectRef>
+          <a:fontRef idx="minor">
+            <a:schemeClr val="tx1"/>
+          </a:fontRef>
+        </p:style>
+      </p:cxnSp>
+      <p:cxnSp>
+        <p:nvCxnSpPr>
+          <p:cNvPr id="63" name="Conexão reta unidirecional 62">
+            <a:extLst>
+              <a:ext uri="{FF2B5EF4-FFF2-40B4-BE49-F238E27FC236}">
+                <a16:creationId xmlns:a16="http://schemas.microsoft.com/office/drawing/2014/main" id="{98AE9F7A-7372-803B-96CA-54DC186F1F61}"/>
+              </a:ext>
+            </a:extLst>
+          </p:cNvPr>
+          <p:cNvCxnSpPr>
+            <a:cxnSpLocks/>
+            <a:stCxn id="27" idx="2"/>
+            <a:endCxn id="68" idx="0"/>
+          </p:cNvCxnSpPr>
+          <p:nvPr/>
+        </p:nvCxnSpPr>
+        <p:spPr>
+          <a:xfrm>
+            <a:off x="3659073" y="6734145"/>
+            <a:ext cx="454" cy="672058"/>
+          </a:xfrm>
+          <a:prstGeom prst="straightConnector1">
+            <a:avLst/>
+          </a:prstGeom>
+          <a:ln w="31750">
+            <a:tailEnd type="triangle"/>
+          </a:ln>
+        </p:spPr>
+        <p:style>
+          <a:lnRef idx="2">
+            <a:schemeClr val="accent3"/>
+          </a:lnRef>
+          <a:fillRef idx="0">
+            <a:schemeClr val="accent3"/>
+          </a:fillRef>
+          <a:effectRef idx="1">
+            <a:schemeClr val="accent3"/>
+          </a:effectRef>
+          <a:fontRef idx="minor">
+            <a:schemeClr val="tx1"/>
+          </a:fontRef>
+        </p:style>
+      </p:cxnSp>
+      <p:sp>
+        <p:nvSpPr>
+          <p:cNvPr id="68" name="Retângulo: Cantos Arredondados 67">
+            <a:extLst>
+              <a:ext uri="{FF2B5EF4-FFF2-40B4-BE49-F238E27FC236}">
+                <a16:creationId xmlns:a16="http://schemas.microsoft.com/office/drawing/2014/main" id="{D1A75888-6919-3555-B56E-667561497553}"/>
+              </a:ext>
+            </a:extLst>
+          </p:cNvPr>
+          <p:cNvSpPr/>
+          <p:nvPr/>
+        </p:nvSpPr>
+        <p:spPr>
+          <a:xfrm>
+            <a:off x="2795526" y="7406203"/>
+            <a:ext cx="1728001" cy="720000"/>
+          </a:xfrm>
+          <a:prstGeom prst="roundRect">
+            <a:avLst/>
+          </a:prstGeom>
+          <a:ln w="31750"/>
+        </p:spPr>
+        <p:style>
+          <a:lnRef idx="2">
+            <a:schemeClr val="accent3"/>
+          </a:lnRef>
+          <a:fillRef idx="1">
+            <a:schemeClr val="lt1"/>
+          </a:fillRef>
+          <a:effectRef idx="0">
+            <a:schemeClr val="accent3"/>
+          </a:effectRef>
+          <a:fontRef idx="minor">
+            <a:schemeClr val="dk1"/>
+          </a:fontRef>
+        </p:style>
+        <p:txBody>
+          <a:bodyPr rtlCol="0" anchor="ctr"/>
+          <a:lstStyle/>
+          <a:p>
+            <a:pPr algn="ctr"/>
+            <a:r>
+              <a:rPr lang="pt-PT" b="1" dirty="0"/>
+              <a:t>Atualiza</a:t>
+            </a:r>
+            <a:br>
+              <a:rPr lang="pt-PT" b="1" dirty="0"/>
+            </a:br>
+            <a:r>
+              <a:rPr lang="pt-PT" sz="1600" dirty="0" err="1">
+                <a:latin typeface="Consolas" panose="020B0609020204030204" pitchFamily="49" charset="0"/>
+                <a:ea typeface="Sans Serif Collection" panose="020B0502040504020204" pitchFamily="34" charset="0"/>
+                <a:cs typeface="Sans Serif Collection" panose="020B0502040504020204" pitchFamily="34" charset="0"/>
+              </a:rPr>
+              <a:t>isSynced</a:t>
+            </a:r>
+            <a:r>
+              <a:rPr lang="pt-PT" sz="1600" dirty="0">
+                <a:latin typeface="Consolas" panose="020B0609020204030204" pitchFamily="49" charset="0"/>
+                <a:ea typeface="Sans Serif Collection" panose="020B0502040504020204" pitchFamily="34" charset="0"/>
+                <a:cs typeface="Sans Serif Collection" panose="020B0502040504020204" pitchFamily="34" charset="0"/>
+              </a:rPr>
+              <a:t>=</a:t>
+            </a:r>
+            <a:r>
+              <a:rPr lang="pt-PT" sz="1600" dirty="0" err="1">
+                <a:latin typeface="Consolas" panose="020B0609020204030204" pitchFamily="49" charset="0"/>
+                <a:ea typeface="Sans Serif Collection" panose="020B0502040504020204" pitchFamily="34" charset="0"/>
+                <a:cs typeface="Sans Serif Collection" panose="020B0502040504020204" pitchFamily="34" charset="0"/>
+              </a:rPr>
+              <a:t>true</a:t>
+            </a:r>
+            <a:endParaRPr lang="pt-PT" sz="1600" dirty="0">
+              <a:latin typeface="Consolas" panose="020B0609020204030204" pitchFamily="49" charset="0"/>
+              <a:ea typeface="Sans Serif Collection" panose="020B0502040504020204" pitchFamily="34" charset="0"/>
+              <a:cs typeface="Sans Serif Collection" panose="020B0502040504020204" pitchFamily="34" charset="0"/>
+            </a:endParaRPr>
+          </a:p>
+        </p:txBody>
+      </p:sp>
+      <p:sp>
+        <p:nvSpPr>
+          <p:cNvPr id="70" name="Retângulo 69">
+            <a:extLst>
+              <a:ext uri="{FF2B5EF4-FFF2-40B4-BE49-F238E27FC236}">
+                <a16:creationId xmlns:a16="http://schemas.microsoft.com/office/drawing/2014/main" id="{00EF7E2F-0CD3-9EA5-C609-5355997D03DB}"/>
+              </a:ext>
+            </a:extLst>
+          </p:cNvPr>
+          <p:cNvSpPr/>
+          <p:nvPr/>
+        </p:nvSpPr>
+        <p:spPr>
+          <a:xfrm>
+            <a:off x="3031226" y="5318355"/>
+            <a:ext cx="696024" cy="461665"/>
+          </a:xfrm>
+          <a:prstGeom prst="rect">
+            <a:avLst/>
+          </a:prstGeom>
+          <a:noFill/>
+        </p:spPr>
+        <p:txBody>
+          <a:bodyPr wrap="none" lIns="91440" tIns="45720" rIns="91440" bIns="45720">
+            <a:spAutoFit/>
+          </a:bodyPr>
+          <a:lstStyle/>
+          <a:p>
+            <a:pPr algn="ctr"/>
+            <a:r>
+              <a:rPr lang="pt-PT" sz="2400" b="0" cap="none" spc="0" dirty="0">
+                <a:ln w="0"/>
+                <a:solidFill>
+                  <a:schemeClr val="tx1"/>
+                </a:solidFill>
+                <a:effectLst>
+                  <a:outerShdw blurRad="38100" dist="19050" dir="2700000" algn="tl" rotWithShape="0">
+                    <a:schemeClr val="dk1">
+                      <a:alpha val="40000"/>
+                    </a:schemeClr>
+                  </a:outerShdw>
+                </a:effectLst>
+              </a:rPr>
+              <a:t>Sim</a:t>
+            </a:r>
+          </a:p>
+        </p:txBody>
+      </p:sp>
+      <p:sp>
+        <p:nvSpPr>
+          <p:cNvPr id="73" name="Retângulo: Cantos Arredondados 72">
+            <a:extLst>
+              <a:ext uri="{FF2B5EF4-FFF2-40B4-BE49-F238E27FC236}">
+                <a16:creationId xmlns:a16="http://schemas.microsoft.com/office/drawing/2014/main" id="{1907EE18-9AF0-8F8C-4B22-A0B008DFE460}"/>
+              </a:ext>
+            </a:extLst>
+          </p:cNvPr>
+          <p:cNvSpPr/>
+          <p:nvPr/>
+        </p:nvSpPr>
+        <p:spPr>
+          <a:xfrm>
+            <a:off x="100205" y="8491664"/>
+            <a:ext cx="5875340" cy="720000"/>
+          </a:xfrm>
+          <a:prstGeom prst="roundRect">
+            <a:avLst/>
+          </a:prstGeom>
+          <a:ln w="31750"/>
+        </p:spPr>
+        <p:style>
+          <a:lnRef idx="2">
+            <a:schemeClr val="accent3"/>
+          </a:lnRef>
+          <a:fillRef idx="1">
+            <a:schemeClr val="lt1"/>
+          </a:fillRef>
+          <a:effectRef idx="0">
+            <a:schemeClr val="accent3"/>
+          </a:effectRef>
+          <a:fontRef idx="minor">
+            <a:schemeClr val="dk1"/>
+          </a:fontRef>
+        </p:style>
+        <p:txBody>
+          <a:bodyPr rtlCol="0" anchor="ctr"/>
+          <a:lstStyle/>
+          <a:p>
+            <a:pPr algn="ctr"/>
+            <a:r>
+              <a:rPr lang="pt-PT" b="1" dirty="0"/>
+              <a:t>Fim de  envio</a:t>
+            </a:r>
+            <a:endParaRPr lang="pt-PT" dirty="0"/>
+          </a:p>
+        </p:txBody>
+      </p:sp>
+      <p:cxnSp>
+        <p:nvCxnSpPr>
+          <p:cNvPr id="77" name="Conexão reta unidirecional 76">
+            <a:extLst>
+              <a:ext uri="{FF2B5EF4-FFF2-40B4-BE49-F238E27FC236}">
+                <a16:creationId xmlns:a16="http://schemas.microsoft.com/office/drawing/2014/main" id="{60A94DEC-A373-79F7-B645-59F9543F41C6}"/>
+              </a:ext>
+            </a:extLst>
+          </p:cNvPr>
+          <p:cNvCxnSpPr>
+            <a:cxnSpLocks/>
+            <a:stCxn id="11" idx="2"/>
+          </p:cNvCxnSpPr>
+          <p:nvPr/>
+        </p:nvCxnSpPr>
+        <p:spPr>
+          <a:xfrm>
+            <a:off x="5111545" y="5584900"/>
+            <a:ext cx="31504" cy="2906764"/>
+          </a:xfrm>
+          <a:prstGeom prst="straightConnector1">
+            <a:avLst/>
+          </a:prstGeom>
+          <a:ln w="31750">
+            <a:tailEnd type="triangle"/>
+          </a:ln>
+        </p:spPr>
+        <p:style>
+          <a:lnRef idx="2">
+            <a:schemeClr val="accent3"/>
+          </a:lnRef>
+          <a:fillRef idx="0">
+            <a:schemeClr val="accent3"/>
+          </a:fillRef>
+          <a:effectRef idx="1">
+            <a:schemeClr val="accent3"/>
+          </a:effectRef>
+          <a:fontRef idx="minor">
+            <a:schemeClr val="tx1"/>
+          </a:fontRef>
+        </p:style>
+      </p:cxnSp>
+      <p:cxnSp>
+        <p:nvCxnSpPr>
+          <p:cNvPr id="82" name="Conexão reta unidirecional 81">
+            <a:extLst>
+              <a:ext uri="{FF2B5EF4-FFF2-40B4-BE49-F238E27FC236}">
+                <a16:creationId xmlns:a16="http://schemas.microsoft.com/office/drawing/2014/main" id="{F60F99CC-5AC6-AACE-3A9E-FA552ECD309E}"/>
+              </a:ext>
+            </a:extLst>
+          </p:cNvPr>
+          <p:cNvCxnSpPr>
+            <a:cxnSpLocks/>
+            <a:stCxn id="68" idx="2"/>
+          </p:cNvCxnSpPr>
+          <p:nvPr/>
+        </p:nvCxnSpPr>
+        <p:spPr>
+          <a:xfrm flipH="1">
+            <a:off x="3659073" y="8126203"/>
+            <a:ext cx="454" cy="365461"/>
+          </a:xfrm>
+          <a:prstGeom prst="straightConnector1">
+            <a:avLst/>
+          </a:prstGeom>
+          <a:ln w="31750">
+            <a:tailEnd type="triangle"/>
+          </a:ln>
+        </p:spPr>
+        <p:style>
+          <a:lnRef idx="2">
+            <a:schemeClr val="accent3"/>
+          </a:lnRef>
+          <a:fillRef idx="0">
+            <a:schemeClr val="accent3"/>
+          </a:fillRef>
+          <a:effectRef idx="1">
+            <a:schemeClr val="accent3"/>
+          </a:effectRef>
+          <a:fontRef idx="minor">
+            <a:schemeClr val="tx1"/>
+          </a:fontRef>
+        </p:style>
+      </p:cxnSp>
+      <p:cxnSp>
+        <p:nvCxnSpPr>
+          <p:cNvPr id="85" name="Conexão reta unidirecional 84">
+            <a:extLst>
+              <a:ext uri="{FF2B5EF4-FFF2-40B4-BE49-F238E27FC236}">
+                <a16:creationId xmlns:a16="http://schemas.microsoft.com/office/drawing/2014/main" id="{5CF2C95A-A4FE-8C63-A8FE-2F537A327D51}"/>
+              </a:ext>
+            </a:extLst>
+          </p:cNvPr>
+          <p:cNvCxnSpPr>
+            <a:cxnSpLocks/>
+            <a:stCxn id="58" idx="2"/>
+          </p:cNvCxnSpPr>
+          <p:nvPr/>
+        </p:nvCxnSpPr>
+        <p:spPr>
+          <a:xfrm>
+            <a:off x="964206" y="8126203"/>
+            <a:ext cx="0" cy="365461"/>
+          </a:xfrm>
+          <a:prstGeom prst="straightConnector1">
+            <a:avLst/>
+          </a:prstGeom>
+          <a:ln w="31750">
+            <a:tailEnd type="triangle"/>
+          </a:ln>
+        </p:spPr>
+        <p:style>
+          <a:lnRef idx="2">
+            <a:schemeClr val="accent3"/>
+          </a:lnRef>
+          <a:fillRef idx="0">
+            <a:schemeClr val="accent3"/>
+          </a:fillRef>
+          <a:effectRef idx="1">
+            <a:schemeClr val="accent3"/>
+          </a:effectRef>
+          <a:fontRef idx="minor">
+            <a:schemeClr val="tx1"/>
+          </a:fontRef>
+        </p:style>
+      </p:cxnSp>
+      <p:sp>
+        <p:nvSpPr>
+          <p:cNvPr id="88" name="Retângulo: Cantos Arredondados 87">
+            <a:extLst>
+              <a:ext uri="{FF2B5EF4-FFF2-40B4-BE49-F238E27FC236}">
+                <a16:creationId xmlns:a16="http://schemas.microsoft.com/office/drawing/2014/main" id="{72BCEEAE-49CC-445C-7D6F-8EAF4311B585}"/>
+              </a:ext>
+            </a:extLst>
+          </p:cNvPr>
+          <p:cNvSpPr/>
+          <p:nvPr/>
+        </p:nvSpPr>
+        <p:spPr>
+          <a:xfrm>
+            <a:off x="6764375" y="8491664"/>
+            <a:ext cx="5942717" cy="720000"/>
+          </a:xfrm>
+          <a:prstGeom prst="roundRect">
+            <a:avLst/>
+          </a:prstGeom>
+          <a:ln w="31750"/>
+        </p:spPr>
+        <p:style>
+          <a:lnRef idx="2">
+            <a:schemeClr val="accent3"/>
+          </a:lnRef>
+          <a:fillRef idx="1">
+            <a:schemeClr val="lt1"/>
+          </a:fillRef>
+          <a:effectRef idx="0">
+            <a:schemeClr val="accent3"/>
+          </a:effectRef>
+          <a:fontRef idx="minor">
+            <a:schemeClr val="dk1"/>
+          </a:fontRef>
+        </p:style>
+        <p:txBody>
+          <a:bodyPr rtlCol="0" anchor="ctr"/>
+          <a:lstStyle/>
+          <a:p>
+            <a:pPr algn="ctr"/>
+            <a:r>
+              <a:rPr lang="pt-PT" b="1" dirty="0"/>
+              <a:t>Inicio da  receção</a:t>
+            </a:r>
+            <a:endParaRPr lang="pt-PT" dirty="0"/>
+          </a:p>
+        </p:txBody>
+      </p:sp>
+      <p:sp>
+        <p:nvSpPr>
+          <p:cNvPr id="89" name="Retângulo: Cantos Arredondados 88">
+            <a:extLst>
+              <a:ext uri="{FF2B5EF4-FFF2-40B4-BE49-F238E27FC236}">
+                <a16:creationId xmlns:a16="http://schemas.microsoft.com/office/drawing/2014/main" id="{B65DEC03-A2F7-247D-518F-8CF74CDDCF84}"/>
+              </a:ext>
+            </a:extLst>
+          </p:cNvPr>
+          <p:cNvSpPr/>
+          <p:nvPr/>
+        </p:nvSpPr>
+        <p:spPr>
+          <a:xfrm>
+            <a:off x="6764375" y="7509516"/>
+            <a:ext cx="5931271" cy="720000"/>
+          </a:xfrm>
+          <a:prstGeom prst="roundRect">
+            <a:avLst/>
+          </a:prstGeom>
+          <a:ln w="31750"/>
+        </p:spPr>
+        <p:style>
+          <a:lnRef idx="2">
+            <a:schemeClr val="accent3"/>
+          </a:lnRef>
+          <a:fillRef idx="1">
+            <a:schemeClr val="lt1"/>
+          </a:fillRef>
+          <a:effectRef idx="0">
+            <a:schemeClr val="accent3"/>
+          </a:effectRef>
+          <a:fontRef idx="minor">
+            <a:schemeClr val="dk1"/>
+          </a:fontRef>
+        </p:style>
+        <p:txBody>
+          <a:bodyPr rtlCol="0" anchor="ctr"/>
+          <a:lstStyle/>
+          <a:p>
+            <a:pPr algn="ctr"/>
+            <a:r>
+              <a:rPr lang="pt-PT" b="1" dirty="0"/>
+              <a:t>GET</a:t>
+            </a:r>
+            <a:br>
+              <a:rPr lang="pt-PT" b="1" dirty="0"/>
+            </a:br>
+            <a:r>
+              <a:rPr lang="pt-PT" sz="1600" dirty="0"/>
+              <a:t>(</a:t>
+            </a:r>
+            <a:r>
+              <a:rPr lang="pt-PT" sz="1600" dirty="0" err="1"/>
+              <a:t>all</a:t>
+            </a:r>
+            <a:r>
+              <a:rPr lang="pt-PT" sz="1600" dirty="0"/>
+              <a:t> records)</a:t>
+            </a:r>
+            <a:endParaRPr lang="pt-PT" dirty="0"/>
+          </a:p>
+        </p:txBody>
+      </p:sp>
+      <p:cxnSp>
+        <p:nvCxnSpPr>
+          <p:cNvPr id="90" name="Conexão reta unidirecional 89">
+            <a:extLst>
+              <a:ext uri="{FF2B5EF4-FFF2-40B4-BE49-F238E27FC236}">
+                <a16:creationId xmlns:a16="http://schemas.microsoft.com/office/drawing/2014/main" id="{C6CB33E6-C1FF-35D9-EF61-DD258CA229F6}"/>
+              </a:ext>
+            </a:extLst>
+          </p:cNvPr>
+          <p:cNvCxnSpPr>
+            <a:cxnSpLocks/>
+            <a:stCxn id="73" idx="3"/>
+            <a:endCxn id="88" idx="1"/>
+          </p:cNvCxnSpPr>
+          <p:nvPr/>
+        </p:nvCxnSpPr>
+        <p:spPr>
+          <a:xfrm>
+            <a:off x="5975545" y="8851664"/>
+            <a:ext cx="788830" cy="0"/>
+          </a:xfrm>
+          <a:prstGeom prst="straightConnector1">
+            <a:avLst/>
+          </a:prstGeom>
+          <a:ln w="31750">
+            <a:tailEnd type="triangle"/>
+          </a:ln>
+        </p:spPr>
+        <p:style>
+          <a:lnRef idx="2">
+            <a:schemeClr val="accent3"/>
+          </a:lnRef>
+          <a:fillRef idx="0">
+            <a:schemeClr val="accent3"/>
+          </a:fillRef>
+          <a:effectRef idx="1">
+            <a:schemeClr val="accent3"/>
+          </a:effectRef>
+          <a:fontRef idx="minor">
+            <a:schemeClr val="tx1"/>
+          </a:fontRef>
+        </p:style>
+      </p:cxnSp>
+      <p:cxnSp>
+        <p:nvCxnSpPr>
+          <p:cNvPr id="94" name="Conexão reta unidirecional 93">
+            <a:extLst>
+              <a:ext uri="{FF2B5EF4-FFF2-40B4-BE49-F238E27FC236}">
+                <a16:creationId xmlns:a16="http://schemas.microsoft.com/office/drawing/2014/main" id="{B36866C3-4F0C-BDC7-1685-CA475986748F}"/>
+              </a:ext>
+            </a:extLst>
+          </p:cNvPr>
+          <p:cNvCxnSpPr>
+            <a:cxnSpLocks/>
+            <a:stCxn id="88" idx="0"/>
+            <a:endCxn id="89" idx="2"/>
+          </p:cNvCxnSpPr>
+          <p:nvPr/>
+        </p:nvCxnSpPr>
+        <p:spPr>
+          <a:xfrm flipH="1" flipV="1">
+            <a:off x="9730011" y="8229516"/>
+            <a:ext cx="5723" cy="262148"/>
+          </a:xfrm>
+          <a:prstGeom prst="straightConnector1">
+            <a:avLst/>
+          </a:prstGeom>
+          <a:ln w="31750">
+            <a:tailEnd type="triangle"/>
+          </a:ln>
+        </p:spPr>
+        <p:style>
+          <a:lnRef idx="2">
+            <a:schemeClr val="accent3"/>
+          </a:lnRef>
+          <a:fillRef idx="0">
+            <a:schemeClr val="accent3"/>
+          </a:fillRef>
+          <a:effectRef idx="1">
+            <a:schemeClr val="accent3"/>
+          </a:effectRef>
+          <a:fontRef idx="minor">
+            <a:schemeClr val="tx1"/>
+          </a:fontRef>
+        </p:style>
+      </p:cxnSp>
+      <p:sp>
+        <p:nvSpPr>
+          <p:cNvPr id="97" name="Losango 96">
+            <a:extLst>
+              <a:ext uri="{FF2B5EF4-FFF2-40B4-BE49-F238E27FC236}">
+                <a16:creationId xmlns:a16="http://schemas.microsoft.com/office/drawing/2014/main" id="{BA093CF0-BED2-E607-F33B-165EDA8AD75F}"/>
+              </a:ext>
+            </a:extLst>
+          </p:cNvPr>
+          <p:cNvSpPr/>
+          <p:nvPr/>
+        </p:nvSpPr>
+        <p:spPr>
+          <a:xfrm>
+            <a:off x="9877074" y="2952210"/>
+            <a:ext cx="2476498" cy="1164909"/>
+          </a:xfrm>
+          <a:prstGeom prst="diamond">
+            <a:avLst/>
+          </a:prstGeom>
+          <a:ln w="31750"/>
+        </p:spPr>
+        <p:style>
+          <a:lnRef idx="2">
+            <a:schemeClr val="accent3"/>
+          </a:lnRef>
+          <a:fillRef idx="1">
+            <a:schemeClr val="lt1"/>
+          </a:fillRef>
+          <a:effectRef idx="0">
+            <a:schemeClr val="accent3"/>
+          </a:effectRef>
+          <a:fontRef idx="minor">
+            <a:schemeClr val="dk1"/>
+          </a:fontRef>
+        </p:style>
+        <p:txBody>
+          <a:bodyPr rtlCol="0" anchor="ctr"/>
+          <a:lstStyle/>
+          <a:p>
+            <a:pPr algn="ctr"/>
+            <a:endParaRPr lang="pt-PT" sz="1600" dirty="0">
+              <a:solidFill>
+                <a:schemeClr val="dk1"/>
+              </a:solidFill>
+            </a:endParaRPr>
+          </a:p>
+        </p:txBody>
+      </p:sp>
+      <p:sp>
+        <p:nvSpPr>
+          <p:cNvPr id="98" name="Retângulo 97">
+            <a:extLst>
+              <a:ext uri="{FF2B5EF4-FFF2-40B4-BE49-F238E27FC236}">
+                <a16:creationId xmlns:a16="http://schemas.microsoft.com/office/drawing/2014/main" id="{5E422243-B949-847E-CB37-6679C5BE07DB}"/>
+              </a:ext>
+            </a:extLst>
+          </p:cNvPr>
+          <p:cNvSpPr/>
+          <p:nvPr/>
+        </p:nvSpPr>
+        <p:spPr>
+          <a:xfrm>
+            <a:off x="10251323" y="3135324"/>
+            <a:ext cx="1745991" cy="615553"/>
+          </a:xfrm>
+          <a:prstGeom prst="rect">
+            <a:avLst/>
+          </a:prstGeom>
+          <a:noFill/>
+        </p:spPr>
+        <p:txBody>
+          <a:bodyPr wrap="none" lIns="91440" tIns="45720" rIns="91440" bIns="45720">
+            <a:spAutoFit/>
+          </a:bodyPr>
+          <a:lstStyle/>
+          <a:p>
+            <a:pPr algn="ctr"/>
+            <a:r>
+              <a:rPr lang="pt-PT" b="1" dirty="0">
+                <a:solidFill>
+                  <a:schemeClr val="dk1"/>
+                </a:solidFill>
+              </a:rPr>
+              <a:t>Compara</a:t>
+            </a:r>
+          </a:p>
+          <a:p>
+            <a:pPr algn="ctr"/>
+            <a:r>
+              <a:rPr lang="pt-PT" sz="1600" dirty="0" err="1">
+                <a:latin typeface="Consolas" panose="020B0609020204030204" pitchFamily="49" charset="0"/>
+              </a:rPr>
+              <a:t>lastUpdatedAt</a:t>
+            </a:r>
+            <a:r>
+              <a:rPr lang="pt-PT" sz="1600" dirty="0">
+                <a:solidFill>
+                  <a:schemeClr val="dk1"/>
+                </a:solidFill>
+              </a:rPr>
+              <a:t>?</a:t>
+            </a:r>
+          </a:p>
+        </p:txBody>
+      </p:sp>
+      <p:sp>
+        <p:nvSpPr>
+          <p:cNvPr id="102" name="Retângulo: Cantos Arredondados 101">
+            <a:extLst>
+              <a:ext uri="{FF2B5EF4-FFF2-40B4-BE49-F238E27FC236}">
+                <a16:creationId xmlns:a16="http://schemas.microsoft.com/office/drawing/2014/main" id="{2AC539F2-6E62-283D-A878-4E442E06CD18}"/>
+              </a:ext>
+            </a:extLst>
+          </p:cNvPr>
+          <p:cNvSpPr/>
+          <p:nvPr/>
+        </p:nvSpPr>
+        <p:spPr>
+          <a:xfrm>
+            <a:off x="9554459" y="1758776"/>
+            <a:ext cx="1471286" cy="720000"/>
+          </a:xfrm>
+          <a:prstGeom prst="roundRect">
+            <a:avLst/>
+          </a:prstGeom>
+          <a:ln w="31750"/>
+        </p:spPr>
+        <p:style>
+          <a:lnRef idx="2">
+            <a:schemeClr val="accent3"/>
+          </a:lnRef>
+          <a:fillRef idx="1">
+            <a:schemeClr val="lt1"/>
+          </a:fillRef>
+          <a:effectRef idx="0">
+            <a:schemeClr val="accent3"/>
+          </a:effectRef>
+          <a:fontRef idx="minor">
+            <a:schemeClr val="dk1"/>
+          </a:fontRef>
+        </p:style>
+        <p:txBody>
+          <a:bodyPr rtlCol="0" anchor="ctr"/>
+          <a:lstStyle/>
+          <a:p>
+            <a:pPr algn="ctr"/>
+            <a:r>
+              <a:rPr lang="pt-PT" b="1" dirty="0"/>
+              <a:t>Atualiza localmente</a:t>
+            </a:r>
+            <a:endParaRPr lang="pt-PT" dirty="0"/>
+          </a:p>
+        </p:txBody>
+      </p:sp>
+      <p:sp>
+        <p:nvSpPr>
+          <p:cNvPr id="104" name="Retângulo: Cantos Arredondados 103">
+            <a:extLst>
+              <a:ext uri="{FF2B5EF4-FFF2-40B4-BE49-F238E27FC236}">
+                <a16:creationId xmlns:a16="http://schemas.microsoft.com/office/drawing/2014/main" id="{E0C7AB62-FB74-9DE9-B527-FDC9F74DF909}"/>
+              </a:ext>
+            </a:extLst>
+          </p:cNvPr>
+          <p:cNvSpPr/>
+          <p:nvPr/>
+        </p:nvSpPr>
+        <p:spPr>
+          <a:xfrm>
+            <a:off x="11115322" y="1758776"/>
+            <a:ext cx="1580323" cy="720000"/>
+          </a:xfrm>
+          <a:prstGeom prst="roundRect">
+            <a:avLst/>
+          </a:prstGeom>
+          <a:ln w="31750"/>
+        </p:spPr>
+        <p:style>
+          <a:lnRef idx="2">
+            <a:schemeClr val="accent3"/>
+          </a:lnRef>
+          <a:fillRef idx="1">
+            <a:schemeClr val="lt1"/>
+          </a:fillRef>
+          <a:effectRef idx="0">
+            <a:schemeClr val="accent3"/>
+          </a:effectRef>
+          <a:fontRef idx="minor">
+            <a:schemeClr val="dk1"/>
+          </a:fontRef>
+        </p:style>
+        <p:txBody>
+          <a:bodyPr rtlCol="0" anchor="ctr"/>
+          <a:lstStyle/>
+          <a:p>
+            <a:pPr algn="ctr"/>
+            <a:r>
+              <a:rPr lang="pt-PT" b="1" dirty="0"/>
+              <a:t>Ignora</a:t>
+            </a:r>
+            <a:br>
+              <a:rPr lang="pt-PT" b="1" dirty="0"/>
+            </a:br>
+            <a:r>
+              <a:rPr lang="pt-PT" sz="1400" dirty="0"/>
+              <a:t>(já sincronizado)</a:t>
+            </a:r>
+            <a:endParaRPr lang="pt-PT" dirty="0"/>
+          </a:p>
+        </p:txBody>
+      </p:sp>
+      <p:cxnSp>
+        <p:nvCxnSpPr>
+          <p:cNvPr id="105" name="Conexão reta unidirecional 17">
+            <a:extLst>
+              <a:ext uri="{FF2B5EF4-FFF2-40B4-BE49-F238E27FC236}">
+                <a16:creationId xmlns:a16="http://schemas.microsoft.com/office/drawing/2014/main" id="{EC162F5C-D1D8-A9C5-9615-429BC20E945C}"/>
+              </a:ext>
+            </a:extLst>
+          </p:cNvPr>
+          <p:cNvCxnSpPr>
+            <a:cxnSpLocks/>
+            <a:stCxn id="97" idx="1"/>
+            <a:endCxn id="102" idx="2"/>
+          </p:cNvCxnSpPr>
+          <p:nvPr/>
+        </p:nvCxnSpPr>
+        <p:spPr>
+          <a:xfrm rot="10800000" flipH="1">
+            <a:off x="9877074" y="2478777"/>
+            <a:ext cx="413028" cy="1055889"/>
+          </a:xfrm>
+          <a:prstGeom prst="bentConnector4">
+            <a:avLst>
+              <a:gd name="adj1" fmla="val -55347"/>
+              <a:gd name="adj2" fmla="val 77581"/>
+            </a:avLst>
+          </a:prstGeom>
+          <a:ln w="31750">
+            <a:tailEnd type="triangle"/>
+          </a:ln>
+        </p:spPr>
+        <p:style>
+          <a:lnRef idx="2">
+            <a:schemeClr val="accent3"/>
+          </a:lnRef>
+          <a:fillRef idx="0">
+            <a:schemeClr val="accent3"/>
+          </a:fillRef>
+          <a:effectRef idx="1">
+            <a:schemeClr val="accent3"/>
+          </a:effectRef>
+          <a:fontRef idx="minor">
+            <a:schemeClr val="tx1"/>
+          </a:fontRef>
+        </p:style>
+      </p:cxnSp>
+      <p:cxnSp>
+        <p:nvCxnSpPr>
+          <p:cNvPr id="108" name="Conexão reta unidirecional 17">
+            <a:extLst>
+              <a:ext uri="{FF2B5EF4-FFF2-40B4-BE49-F238E27FC236}">
+                <a16:creationId xmlns:a16="http://schemas.microsoft.com/office/drawing/2014/main" id="{7725BB62-1D59-C471-1852-D71925FEE24F}"/>
+              </a:ext>
+            </a:extLst>
+          </p:cNvPr>
+          <p:cNvCxnSpPr>
+            <a:cxnSpLocks/>
+            <a:stCxn id="97" idx="3"/>
+          </p:cNvCxnSpPr>
+          <p:nvPr/>
+        </p:nvCxnSpPr>
+        <p:spPr>
+          <a:xfrm flipV="1">
+            <a:off x="12353572" y="2478775"/>
+            <a:ext cx="150848" cy="1055890"/>
+          </a:xfrm>
+          <a:prstGeom prst="bentConnector2">
+            <a:avLst/>
+          </a:prstGeom>
+          <a:ln w="31750">
+            <a:tailEnd type="triangle"/>
+          </a:ln>
+        </p:spPr>
+        <p:style>
+          <a:lnRef idx="2">
+            <a:schemeClr val="accent3"/>
+          </a:lnRef>
+          <a:fillRef idx="0">
+            <a:schemeClr val="accent3"/>
+          </a:fillRef>
+          <a:effectRef idx="1">
+            <a:schemeClr val="accent3"/>
+          </a:effectRef>
+          <a:fontRef idx="minor">
+            <a:schemeClr val="tx1"/>
+          </a:fontRef>
+        </p:style>
+      </p:cxnSp>
+      <p:sp>
+        <p:nvSpPr>
+          <p:cNvPr id="111" name="Retângulo 110">
+            <a:extLst>
+              <a:ext uri="{FF2B5EF4-FFF2-40B4-BE49-F238E27FC236}">
+                <a16:creationId xmlns:a16="http://schemas.microsoft.com/office/drawing/2014/main" id="{7E4833B3-6C36-E2E3-F244-183B0FE23715}"/>
+              </a:ext>
+            </a:extLst>
+          </p:cNvPr>
+          <p:cNvSpPr/>
+          <p:nvPr/>
+        </p:nvSpPr>
+        <p:spPr>
+          <a:xfrm>
+            <a:off x="12225333" y="3469455"/>
+            <a:ext cx="377027" cy="523220"/>
+          </a:xfrm>
+          <a:prstGeom prst="rect">
+            <a:avLst/>
+          </a:prstGeom>
+          <a:noFill/>
+        </p:spPr>
+        <p:txBody>
+          <a:bodyPr wrap="none" lIns="91440" tIns="45720" rIns="91440" bIns="45720">
+            <a:spAutoFit/>
+          </a:bodyPr>
+          <a:lstStyle/>
+          <a:p>
+            <a:pPr algn="ctr"/>
+            <a:r>
+              <a:rPr lang="pt-PT" sz="2800" b="1" cap="none" spc="0" dirty="0">
+                <a:ln w="0"/>
+                <a:solidFill>
+                  <a:schemeClr val="tx1"/>
+                </a:solidFill>
+                <a:effectLst>
+                  <a:outerShdw blurRad="38100" dist="19050" dir="2700000" algn="tl" rotWithShape="0">
+                    <a:schemeClr val="dk1">
+                      <a:alpha val="40000"/>
+                    </a:schemeClr>
+                  </a:outerShdw>
+                </a:effectLst>
+              </a:rPr>
+              <a:t>=</a:t>
+            </a:r>
+          </a:p>
+        </p:txBody>
+      </p:sp>
+      <p:sp>
+        <p:nvSpPr>
+          <p:cNvPr id="112" name="Retângulo 111">
+            <a:extLst>
+              <a:ext uri="{FF2B5EF4-FFF2-40B4-BE49-F238E27FC236}">
+                <a16:creationId xmlns:a16="http://schemas.microsoft.com/office/drawing/2014/main" id="{562BC2C9-1A99-5DEB-F641-E055A038DC1D}"/>
+              </a:ext>
+            </a:extLst>
+          </p:cNvPr>
+          <p:cNvSpPr/>
+          <p:nvPr/>
+        </p:nvSpPr>
+        <p:spPr>
+          <a:xfrm>
+            <a:off x="9607740" y="3469455"/>
+            <a:ext cx="377027" cy="523220"/>
+          </a:xfrm>
+          <a:prstGeom prst="rect">
+            <a:avLst/>
+          </a:prstGeom>
+          <a:noFill/>
+        </p:spPr>
+        <p:txBody>
+          <a:bodyPr wrap="none" lIns="91440" tIns="45720" rIns="91440" bIns="45720">
+            <a:spAutoFit/>
+          </a:bodyPr>
+          <a:lstStyle/>
+          <a:p>
+            <a:pPr algn="ctr"/>
+            <a:r>
+              <a:rPr lang="pt-PT" sz="2800" b="1" cap="none" spc="0" dirty="0">
+                <a:ln w="0"/>
+                <a:solidFill>
+                  <a:schemeClr val="tx1"/>
+                </a:solidFill>
+                <a:effectLst>
+                  <a:outerShdw blurRad="38100" dist="19050" dir="2700000" algn="tl" rotWithShape="0">
+                    <a:schemeClr val="dk1">
+                      <a:alpha val="40000"/>
+                    </a:schemeClr>
+                  </a:outerShdw>
+                </a:effectLst>
+              </a:rPr>
+              <a:t>&lt;</a:t>
+            </a:r>
+          </a:p>
+        </p:txBody>
+      </p:sp>
+      <p:sp>
+        <p:nvSpPr>
+          <p:cNvPr id="113" name="Retângulo: Cantos Arredondados 112">
+            <a:extLst>
+              <a:ext uri="{FF2B5EF4-FFF2-40B4-BE49-F238E27FC236}">
+                <a16:creationId xmlns:a16="http://schemas.microsoft.com/office/drawing/2014/main" id="{ACAE35B0-B7E4-29AA-0D12-6A055D2F2EC3}"/>
+              </a:ext>
+            </a:extLst>
+          </p:cNvPr>
+          <p:cNvSpPr/>
+          <p:nvPr/>
+        </p:nvSpPr>
+        <p:spPr>
+          <a:xfrm>
+            <a:off x="10251322" y="6408824"/>
+            <a:ext cx="2444323" cy="720000"/>
+          </a:xfrm>
+          <a:prstGeom prst="roundRect">
+            <a:avLst/>
+          </a:prstGeom>
+          <a:ln w="31750"/>
+        </p:spPr>
+        <p:style>
+          <a:lnRef idx="2">
+            <a:schemeClr val="accent3"/>
+          </a:lnRef>
+          <a:fillRef idx="1">
+            <a:schemeClr val="lt1"/>
+          </a:fillRef>
+          <a:effectRef idx="0">
+            <a:schemeClr val="accent3"/>
+          </a:effectRef>
+          <a:fontRef idx="minor">
+            <a:schemeClr val="dk1"/>
+          </a:fontRef>
+        </p:style>
+        <p:txBody>
+          <a:bodyPr rtlCol="0" anchor="ctr"/>
+          <a:lstStyle/>
+          <a:p>
+            <a:pPr algn="ctr"/>
+            <a:r>
+              <a:rPr lang="pt-PT" b="1" dirty="0"/>
+              <a:t>Itera registos remotos</a:t>
+            </a:r>
+          </a:p>
+        </p:txBody>
+      </p:sp>
+      <p:sp>
+        <p:nvSpPr>
+          <p:cNvPr id="118" name="Retângulo: Cantos Arredondados 117">
+            <a:extLst>
+              <a:ext uri="{FF2B5EF4-FFF2-40B4-BE49-F238E27FC236}">
+                <a16:creationId xmlns:a16="http://schemas.microsoft.com/office/drawing/2014/main" id="{1EC73A4C-C09B-8DF8-4D93-FF1F3534EE92}"/>
+              </a:ext>
+            </a:extLst>
+          </p:cNvPr>
+          <p:cNvSpPr/>
+          <p:nvPr/>
+        </p:nvSpPr>
+        <p:spPr>
+          <a:xfrm>
+            <a:off x="6325179" y="305990"/>
+            <a:ext cx="6383742" cy="720000"/>
+          </a:xfrm>
+          <a:prstGeom prst="roundRect">
+            <a:avLst/>
+          </a:prstGeom>
+          <a:ln w="31750"/>
+        </p:spPr>
+        <p:style>
+          <a:lnRef idx="2">
+            <a:schemeClr val="accent3"/>
+          </a:lnRef>
+          <a:fillRef idx="1">
+            <a:schemeClr val="lt1"/>
+          </a:fillRef>
+          <a:effectRef idx="0">
+            <a:schemeClr val="accent3"/>
+          </a:effectRef>
+          <a:fontRef idx="minor">
+            <a:schemeClr val="dk1"/>
+          </a:fontRef>
+        </p:style>
+        <p:txBody>
+          <a:bodyPr rtlCol="0" anchor="ctr"/>
+          <a:lstStyle/>
+          <a:p>
+            <a:pPr algn="ctr"/>
+            <a:r>
+              <a:rPr lang="pt-PT" b="1" dirty="0"/>
+              <a:t>Fim de sincronização</a:t>
+            </a:r>
+            <a:endParaRPr lang="pt-PT" dirty="0"/>
+          </a:p>
+        </p:txBody>
+      </p:sp>
+      <p:cxnSp>
+        <p:nvCxnSpPr>
+          <p:cNvPr id="119" name="Conexão reta unidirecional 118">
+            <a:extLst>
+              <a:ext uri="{FF2B5EF4-FFF2-40B4-BE49-F238E27FC236}">
+                <a16:creationId xmlns:a16="http://schemas.microsoft.com/office/drawing/2014/main" id="{D5042DB2-1194-27A8-6C83-FB725B3D2E99}"/>
+              </a:ext>
+            </a:extLst>
+          </p:cNvPr>
+          <p:cNvCxnSpPr>
+            <a:cxnSpLocks/>
+            <a:stCxn id="104" idx="0"/>
+          </p:cNvCxnSpPr>
+          <p:nvPr/>
+        </p:nvCxnSpPr>
+        <p:spPr>
+          <a:xfrm flipV="1">
+            <a:off x="11905484" y="1025990"/>
+            <a:ext cx="0" cy="732786"/>
+          </a:xfrm>
+          <a:prstGeom prst="straightConnector1">
+            <a:avLst/>
+          </a:prstGeom>
+          <a:ln w="31750">
+            <a:tailEnd type="triangle"/>
+          </a:ln>
+        </p:spPr>
+        <p:style>
+          <a:lnRef idx="2">
+            <a:schemeClr val="accent3"/>
+          </a:lnRef>
+          <a:fillRef idx="0">
+            <a:schemeClr val="accent3"/>
+          </a:fillRef>
+          <a:effectRef idx="1">
+            <a:schemeClr val="accent3"/>
+          </a:effectRef>
+          <a:fontRef idx="minor">
+            <a:schemeClr val="tx1"/>
+          </a:fontRef>
+        </p:style>
+      </p:cxnSp>
+      <p:cxnSp>
+        <p:nvCxnSpPr>
+          <p:cNvPr id="124" name="Conexão reta unidirecional 123">
+            <a:extLst>
+              <a:ext uri="{FF2B5EF4-FFF2-40B4-BE49-F238E27FC236}">
+                <a16:creationId xmlns:a16="http://schemas.microsoft.com/office/drawing/2014/main" id="{8842345B-82CA-F011-E74B-55CA115F49A3}"/>
+              </a:ext>
+            </a:extLst>
+          </p:cNvPr>
+          <p:cNvCxnSpPr>
+            <a:cxnSpLocks/>
+            <a:endCxn id="113" idx="2"/>
+          </p:cNvCxnSpPr>
+          <p:nvPr/>
+        </p:nvCxnSpPr>
+        <p:spPr>
+          <a:xfrm flipV="1">
+            <a:off x="11473483" y="7128824"/>
+            <a:ext cx="1" cy="380692"/>
+          </a:xfrm>
+          <a:prstGeom prst="straightConnector1">
+            <a:avLst/>
+          </a:prstGeom>
+          <a:ln w="31750">
+            <a:tailEnd type="triangle"/>
+          </a:ln>
+        </p:spPr>
+        <p:style>
+          <a:lnRef idx="2">
+            <a:schemeClr val="accent3"/>
+          </a:lnRef>
+          <a:fillRef idx="0">
+            <a:schemeClr val="accent3"/>
+          </a:fillRef>
+          <a:effectRef idx="1">
+            <a:schemeClr val="accent3"/>
+          </a:effectRef>
+          <a:fontRef idx="minor">
+            <a:schemeClr val="tx1"/>
+          </a:fontRef>
+        </p:style>
+      </p:cxnSp>
+      <p:sp>
+        <p:nvSpPr>
+          <p:cNvPr id="127" name="Losango 126">
+            <a:extLst>
+              <a:ext uri="{FF2B5EF4-FFF2-40B4-BE49-F238E27FC236}">
+                <a16:creationId xmlns:a16="http://schemas.microsoft.com/office/drawing/2014/main" id="{EAB795B0-B1D2-A9C0-4ED5-3EC99908FDDF}"/>
+              </a:ext>
+            </a:extLst>
+          </p:cNvPr>
+          <p:cNvSpPr/>
+          <p:nvPr/>
+        </p:nvSpPr>
+        <p:spPr>
+          <a:xfrm>
+            <a:off x="10219148" y="4800600"/>
+            <a:ext cx="2476498" cy="1164909"/>
+          </a:xfrm>
+          <a:prstGeom prst="diamond">
+            <a:avLst/>
+          </a:prstGeom>
+          <a:ln w="31750"/>
+        </p:spPr>
+        <p:style>
+          <a:lnRef idx="2">
+            <a:schemeClr val="accent3"/>
+          </a:lnRef>
+          <a:fillRef idx="1">
+            <a:schemeClr val="lt1"/>
+          </a:fillRef>
+          <a:effectRef idx="0">
+            <a:schemeClr val="accent3"/>
+          </a:effectRef>
+          <a:fontRef idx="minor">
+            <a:schemeClr val="dk1"/>
+          </a:fontRef>
+        </p:style>
+        <p:txBody>
+          <a:bodyPr rtlCol="0" anchor="ctr"/>
+          <a:lstStyle/>
+          <a:p>
+            <a:pPr algn="ctr"/>
+            <a:endParaRPr lang="pt-PT" sz="1600" dirty="0">
+              <a:solidFill>
+                <a:schemeClr val="dk1"/>
+              </a:solidFill>
+            </a:endParaRPr>
+          </a:p>
+        </p:txBody>
+      </p:sp>
+      <p:sp>
+        <p:nvSpPr>
+          <p:cNvPr id="128" name="Retângulo 127">
+            <a:extLst>
+              <a:ext uri="{FF2B5EF4-FFF2-40B4-BE49-F238E27FC236}">
+                <a16:creationId xmlns:a16="http://schemas.microsoft.com/office/drawing/2014/main" id="{F17B4BF2-1FB2-5687-13D1-D0B3457B2E6B}"/>
+              </a:ext>
+            </a:extLst>
+          </p:cNvPr>
+          <p:cNvSpPr/>
+          <p:nvPr/>
+        </p:nvSpPr>
+        <p:spPr>
+          <a:xfrm>
+            <a:off x="10733832" y="5010009"/>
+            <a:ext cx="1493872" cy="646331"/>
+          </a:xfrm>
+          <a:prstGeom prst="rect">
+            <a:avLst/>
+          </a:prstGeom>
+          <a:noFill/>
+        </p:spPr>
+        <p:txBody>
+          <a:bodyPr wrap="none" lIns="91440" tIns="45720" rIns="91440" bIns="45720">
+            <a:spAutoFit/>
+          </a:bodyPr>
+          <a:lstStyle/>
+          <a:p>
+            <a:pPr algn="ctr"/>
+            <a:r>
+              <a:rPr lang="pt-PT" b="1" dirty="0">
+                <a:solidFill>
+                  <a:schemeClr val="dk1"/>
+                </a:solidFill>
+              </a:rPr>
+              <a:t>Existe</a:t>
+            </a:r>
+            <a:br>
+              <a:rPr lang="pt-PT" b="1" dirty="0">
+                <a:solidFill>
+                  <a:schemeClr val="dk1"/>
+                </a:solidFill>
+              </a:rPr>
+            </a:br>
+            <a:r>
+              <a:rPr lang="pt-PT" b="1" dirty="0">
+                <a:solidFill>
+                  <a:schemeClr val="dk1"/>
+                </a:solidFill>
+              </a:rPr>
+              <a:t>localmente?</a:t>
+            </a:r>
+            <a:endParaRPr lang="pt-PT" sz="1600" dirty="0">
+              <a:solidFill>
+                <a:schemeClr val="dk1"/>
+              </a:solidFill>
+            </a:endParaRPr>
+          </a:p>
+        </p:txBody>
+      </p:sp>
+      <p:sp>
+        <p:nvSpPr>
+          <p:cNvPr id="129" name="Retângulo: Cantos Arredondados 128">
+            <a:extLst>
+              <a:ext uri="{FF2B5EF4-FFF2-40B4-BE49-F238E27FC236}">
+                <a16:creationId xmlns:a16="http://schemas.microsoft.com/office/drawing/2014/main" id="{2CD8294A-DD70-28E6-7BB8-194D58874442}"/>
+              </a:ext>
+            </a:extLst>
+          </p:cNvPr>
+          <p:cNvSpPr/>
+          <p:nvPr/>
+        </p:nvSpPr>
+        <p:spPr>
+          <a:xfrm>
+            <a:off x="7972822" y="1758776"/>
+            <a:ext cx="1471286" cy="720000"/>
+          </a:xfrm>
+          <a:prstGeom prst="roundRect">
+            <a:avLst/>
+          </a:prstGeom>
+          <a:ln w="31750"/>
+        </p:spPr>
+        <p:style>
+          <a:lnRef idx="2">
+            <a:schemeClr val="accent3"/>
+          </a:lnRef>
+          <a:fillRef idx="1">
+            <a:schemeClr val="lt1"/>
+          </a:fillRef>
+          <a:effectRef idx="0">
+            <a:schemeClr val="accent3"/>
+          </a:effectRef>
+          <a:fontRef idx="minor">
+            <a:schemeClr val="dk1"/>
+          </a:fontRef>
+        </p:style>
+        <p:txBody>
+          <a:bodyPr rtlCol="0" anchor="ctr"/>
+          <a:lstStyle/>
+          <a:p>
+            <a:pPr algn="ctr"/>
+            <a:r>
+              <a:rPr lang="pt-PT" b="1" dirty="0"/>
+              <a:t>Guarda</a:t>
+            </a:r>
+            <a:br>
+              <a:rPr lang="pt-PT" b="1" dirty="0"/>
+            </a:br>
+            <a:r>
+              <a:rPr lang="pt-PT" b="1" dirty="0"/>
+              <a:t>localmente</a:t>
+            </a:r>
+            <a:endParaRPr lang="pt-PT" dirty="0"/>
+          </a:p>
+        </p:txBody>
+      </p:sp>
+      <p:cxnSp>
+        <p:nvCxnSpPr>
+          <p:cNvPr id="130" name="Conexão reta unidirecional 129">
+            <a:extLst>
+              <a:ext uri="{FF2B5EF4-FFF2-40B4-BE49-F238E27FC236}">
+                <a16:creationId xmlns:a16="http://schemas.microsoft.com/office/drawing/2014/main" id="{21EFCB10-9377-CF22-C2BA-BA9AFAD4D983}"/>
+              </a:ext>
+            </a:extLst>
+          </p:cNvPr>
+          <p:cNvCxnSpPr>
+            <a:cxnSpLocks/>
+            <a:endCxn id="127" idx="2"/>
+          </p:cNvCxnSpPr>
+          <p:nvPr/>
+        </p:nvCxnSpPr>
+        <p:spPr>
+          <a:xfrm flipV="1">
+            <a:off x="11457397" y="5965509"/>
+            <a:ext cx="0" cy="443315"/>
+          </a:xfrm>
+          <a:prstGeom prst="straightConnector1">
+            <a:avLst/>
+          </a:prstGeom>
+          <a:ln w="31750">
+            <a:tailEnd type="triangle"/>
+          </a:ln>
+        </p:spPr>
+        <p:style>
+          <a:lnRef idx="2">
+            <a:schemeClr val="accent3"/>
+          </a:lnRef>
+          <a:fillRef idx="0">
+            <a:schemeClr val="accent3"/>
+          </a:fillRef>
+          <a:effectRef idx="1">
+            <a:schemeClr val="accent3"/>
+          </a:effectRef>
+          <a:fontRef idx="minor">
+            <a:schemeClr val="tx1"/>
+          </a:fontRef>
+        </p:style>
+      </p:cxnSp>
+      <p:sp>
+        <p:nvSpPr>
+          <p:cNvPr id="137" name="Retângulo 136">
+            <a:extLst>
+              <a:ext uri="{FF2B5EF4-FFF2-40B4-BE49-F238E27FC236}">
+                <a16:creationId xmlns:a16="http://schemas.microsoft.com/office/drawing/2014/main" id="{50291D36-7DDD-C748-2A8C-A5C8CF4D4853}"/>
+              </a:ext>
+            </a:extLst>
+          </p:cNvPr>
+          <p:cNvSpPr/>
+          <p:nvPr/>
+        </p:nvSpPr>
+        <p:spPr>
+          <a:xfrm>
+            <a:off x="11483504" y="4438694"/>
+            <a:ext cx="696024" cy="461665"/>
+          </a:xfrm>
+          <a:prstGeom prst="rect">
+            <a:avLst/>
+          </a:prstGeom>
+          <a:noFill/>
+        </p:spPr>
+        <p:txBody>
+          <a:bodyPr wrap="none" lIns="91440" tIns="45720" rIns="91440" bIns="45720">
+            <a:spAutoFit/>
+          </a:bodyPr>
+          <a:lstStyle/>
+          <a:p>
+            <a:pPr algn="ctr"/>
+            <a:r>
+              <a:rPr lang="pt-PT" sz="2400" b="0" cap="none" spc="0" dirty="0">
+                <a:ln w="0"/>
+                <a:solidFill>
+                  <a:schemeClr val="tx1"/>
+                </a:solidFill>
+                <a:effectLst>
+                  <a:outerShdw blurRad="38100" dist="19050" dir="2700000" algn="tl" rotWithShape="0">
+                    <a:schemeClr val="dk1">
+                      <a:alpha val="40000"/>
+                    </a:schemeClr>
+                  </a:outerShdw>
+                </a:effectLst>
+              </a:rPr>
+              <a:t>Sim</a:t>
+            </a:r>
+          </a:p>
+        </p:txBody>
+      </p:sp>
+      <p:cxnSp>
+        <p:nvCxnSpPr>
+          <p:cNvPr id="138" name="Conexão reta unidirecional 17">
+            <a:extLst>
+              <a:ext uri="{FF2B5EF4-FFF2-40B4-BE49-F238E27FC236}">
+                <a16:creationId xmlns:a16="http://schemas.microsoft.com/office/drawing/2014/main" id="{A90B06D9-B205-8DDB-0949-DA20C66B4941}"/>
+              </a:ext>
+            </a:extLst>
+          </p:cNvPr>
+          <p:cNvCxnSpPr>
+            <a:cxnSpLocks/>
+            <a:stCxn id="127" idx="0"/>
+            <a:endCxn id="97" idx="2"/>
+          </p:cNvCxnSpPr>
+          <p:nvPr/>
+        </p:nvCxnSpPr>
+        <p:spPr>
+          <a:xfrm rot="16200000" flipV="1">
+            <a:off x="10944620" y="4287823"/>
+            <a:ext cx="683481" cy="342074"/>
+          </a:xfrm>
+          <a:prstGeom prst="bentConnector3">
+            <a:avLst>
+              <a:gd name="adj1" fmla="val 50000"/>
+            </a:avLst>
+          </a:prstGeom>
+          <a:ln w="31750">
+            <a:tailEnd type="triangle"/>
+          </a:ln>
+        </p:spPr>
+        <p:style>
+          <a:lnRef idx="2">
+            <a:schemeClr val="accent3"/>
+          </a:lnRef>
+          <a:fillRef idx="0">
+            <a:schemeClr val="accent3"/>
+          </a:fillRef>
+          <a:effectRef idx="1">
+            <a:schemeClr val="accent3"/>
+          </a:effectRef>
+          <a:fontRef idx="minor">
+            <a:schemeClr val="tx1"/>
+          </a:fontRef>
+        </p:style>
+      </p:cxnSp>
+      <p:sp>
+        <p:nvSpPr>
+          <p:cNvPr id="141" name="Retângulo 140">
+            <a:extLst>
+              <a:ext uri="{FF2B5EF4-FFF2-40B4-BE49-F238E27FC236}">
+                <a16:creationId xmlns:a16="http://schemas.microsoft.com/office/drawing/2014/main" id="{489DE72C-DB3F-76B2-B7FC-1EFFBFDE6AEF}"/>
+              </a:ext>
+            </a:extLst>
+          </p:cNvPr>
+          <p:cNvSpPr/>
+          <p:nvPr/>
+        </p:nvSpPr>
+        <p:spPr>
+          <a:xfrm>
+            <a:off x="10131537" y="4800599"/>
+            <a:ext cx="736100" cy="461665"/>
+          </a:xfrm>
+          <a:prstGeom prst="rect">
+            <a:avLst/>
+          </a:prstGeom>
+          <a:noFill/>
+        </p:spPr>
+        <p:txBody>
+          <a:bodyPr wrap="none" lIns="91440" tIns="45720" rIns="91440" bIns="45720">
+            <a:spAutoFit/>
+          </a:bodyPr>
+          <a:lstStyle/>
+          <a:p>
+            <a:pPr algn="ctr"/>
+            <a:r>
+              <a:rPr lang="pt-PT" sz="2400" b="0" cap="none" spc="0" dirty="0">
+                <a:ln w="0"/>
+                <a:solidFill>
+                  <a:schemeClr val="tx1"/>
+                </a:solidFill>
+                <a:effectLst>
+                  <a:outerShdw blurRad="38100" dist="19050" dir="2700000" algn="tl" rotWithShape="0">
+                    <a:schemeClr val="dk1">
+                      <a:alpha val="40000"/>
+                    </a:schemeClr>
+                  </a:outerShdw>
+                </a:effectLst>
+              </a:rPr>
+              <a:t>Não</a:t>
+            </a:r>
+          </a:p>
+        </p:txBody>
+      </p:sp>
+      <p:cxnSp>
+        <p:nvCxnSpPr>
+          <p:cNvPr id="143" name="Conexão reta unidirecional 142">
+            <a:extLst>
+              <a:ext uri="{FF2B5EF4-FFF2-40B4-BE49-F238E27FC236}">
+                <a16:creationId xmlns:a16="http://schemas.microsoft.com/office/drawing/2014/main" id="{31DF6904-68AA-29F7-8214-B2690DABC9BB}"/>
+              </a:ext>
+            </a:extLst>
+          </p:cNvPr>
+          <p:cNvCxnSpPr>
+            <a:cxnSpLocks/>
+            <a:stCxn id="102" idx="0"/>
+          </p:cNvCxnSpPr>
+          <p:nvPr/>
+        </p:nvCxnSpPr>
+        <p:spPr>
+          <a:xfrm flipV="1">
+            <a:off x="10290102" y="1025990"/>
+            <a:ext cx="0" cy="732786"/>
+          </a:xfrm>
+          <a:prstGeom prst="straightConnector1">
+            <a:avLst/>
+          </a:prstGeom>
+          <a:ln w="31750">
+            <a:tailEnd type="triangle"/>
+          </a:ln>
+        </p:spPr>
+        <p:style>
+          <a:lnRef idx="2">
+            <a:schemeClr val="accent3"/>
+          </a:lnRef>
+          <a:fillRef idx="0">
+            <a:schemeClr val="accent3"/>
+          </a:fillRef>
+          <a:effectRef idx="1">
+            <a:schemeClr val="accent3"/>
+          </a:effectRef>
+          <a:fontRef idx="minor">
+            <a:schemeClr val="tx1"/>
+          </a:fontRef>
+        </p:style>
+      </p:cxnSp>
+      <p:sp>
+        <p:nvSpPr>
+          <p:cNvPr id="162" name="Retângulo: Cantos Arredondados 161">
+            <a:extLst>
+              <a:ext uri="{FF2B5EF4-FFF2-40B4-BE49-F238E27FC236}">
+                <a16:creationId xmlns:a16="http://schemas.microsoft.com/office/drawing/2014/main" id="{95665AB1-DE01-89CB-FF1A-A9F1CD744649}"/>
+              </a:ext>
+            </a:extLst>
+          </p:cNvPr>
+          <p:cNvSpPr/>
+          <p:nvPr/>
+        </p:nvSpPr>
+        <p:spPr>
+          <a:xfrm>
+            <a:off x="6402687" y="1758776"/>
+            <a:ext cx="1485185" cy="720000"/>
+          </a:xfrm>
+          <a:prstGeom prst="roundRect">
+            <a:avLst/>
+          </a:prstGeom>
+          <a:ln w="31750"/>
+        </p:spPr>
+        <p:style>
+          <a:lnRef idx="2">
+            <a:schemeClr val="accent3"/>
+          </a:lnRef>
+          <a:fillRef idx="1">
+            <a:schemeClr val="lt1"/>
+          </a:fillRef>
+          <a:effectRef idx="0">
+            <a:schemeClr val="accent3"/>
+          </a:effectRef>
+          <a:fontRef idx="minor">
+            <a:schemeClr val="dk1"/>
+          </a:fontRef>
+        </p:style>
+        <p:txBody>
+          <a:bodyPr rtlCol="0" anchor="ctr"/>
+          <a:lstStyle/>
+          <a:p>
+            <a:pPr algn="ctr"/>
+            <a:r>
+              <a:rPr lang="pt-PT" b="1" dirty="0"/>
+              <a:t>Elimina</a:t>
+            </a:r>
+            <a:br>
+              <a:rPr lang="pt-PT" b="1" dirty="0"/>
+            </a:br>
+            <a:r>
+              <a:rPr lang="pt-PT" b="1" dirty="0"/>
+              <a:t>localmente</a:t>
+            </a:r>
+          </a:p>
+        </p:txBody>
+      </p:sp>
+      <p:cxnSp>
+        <p:nvCxnSpPr>
+          <p:cNvPr id="167" name="Conexão reta unidirecional 166">
+            <a:extLst>
+              <a:ext uri="{FF2B5EF4-FFF2-40B4-BE49-F238E27FC236}">
+                <a16:creationId xmlns:a16="http://schemas.microsoft.com/office/drawing/2014/main" id="{7DF5ACD3-B6C9-7B6D-7C08-74E6B7BE6E4B}"/>
+              </a:ext>
+            </a:extLst>
+          </p:cNvPr>
+          <p:cNvCxnSpPr>
+            <a:cxnSpLocks/>
+            <a:stCxn id="162" idx="0"/>
+          </p:cNvCxnSpPr>
+          <p:nvPr/>
+        </p:nvCxnSpPr>
+        <p:spPr>
+          <a:xfrm flipV="1">
+            <a:off x="7145280" y="1025990"/>
+            <a:ext cx="0" cy="732786"/>
+          </a:xfrm>
+          <a:prstGeom prst="straightConnector1">
+            <a:avLst/>
+          </a:prstGeom>
+          <a:ln w="31750">
+            <a:tailEnd type="triangle"/>
+          </a:ln>
+        </p:spPr>
+        <p:style>
+          <a:lnRef idx="2">
+            <a:schemeClr val="accent3"/>
+          </a:lnRef>
+          <a:fillRef idx="0">
+            <a:schemeClr val="accent3"/>
+          </a:fillRef>
+          <a:effectRef idx="1">
+            <a:schemeClr val="accent3"/>
+          </a:effectRef>
+          <a:fontRef idx="minor">
+            <a:schemeClr val="tx1"/>
+          </a:fontRef>
+        </p:style>
+      </p:cxnSp>
+      <p:sp>
+        <p:nvSpPr>
+          <p:cNvPr id="183" name="Retângulo: Cantos Arredondados 182">
+            <a:extLst>
+              <a:ext uri="{FF2B5EF4-FFF2-40B4-BE49-F238E27FC236}">
+                <a16:creationId xmlns:a16="http://schemas.microsoft.com/office/drawing/2014/main" id="{EFA250CC-C389-381C-C8EC-35C7A284B402}"/>
+              </a:ext>
+            </a:extLst>
+          </p:cNvPr>
+          <p:cNvSpPr/>
+          <p:nvPr/>
+        </p:nvSpPr>
+        <p:spPr>
+          <a:xfrm>
+            <a:off x="6764375" y="6408824"/>
+            <a:ext cx="2616725" cy="720000"/>
+          </a:xfrm>
+          <a:prstGeom prst="roundRect">
+            <a:avLst/>
+          </a:prstGeom>
+          <a:ln w="31750"/>
+        </p:spPr>
+        <p:style>
+          <a:lnRef idx="2">
+            <a:schemeClr val="accent3"/>
+          </a:lnRef>
+          <a:fillRef idx="1">
+            <a:schemeClr val="lt1"/>
+          </a:fillRef>
+          <a:effectRef idx="0">
+            <a:schemeClr val="accent3"/>
+          </a:effectRef>
+          <a:fontRef idx="minor">
+            <a:schemeClr val="dk1"/>
+          </a:fontRef>
+        </p:style>
+        <p:txBody>
+          <a:bodyPr rtlCol="0" anchor="ctr"/>
+          <a:lstStyle/>
+          <a:p>
+            <a:pPr algn="ctr"/>
+            <a:r>
+              <a:rPr lang="pt-PT" b="1" dirty="0"/>
+              <a:t>Itera registos locais</a:t>
+            </a:r>
+            <a:endParaRPr lang="pt-PT" dirty="0"/>
+          </a:p>
+        </p:txBody>
+      </p:sp>
+      <p:cxnSp>
+        <p:nvCxnSpPr>
+          <p:cNvPr id="192" name="Conexão reta unidirecional 191">
+            <a:extLst>
+              <a:ext uri="{FF2B5EF4-FFF2-40B4-BE49-F238E27FC236}">
+                <a16:creationId xmlns:a16="http://schemas.microsoft.com/office/drawing/2014/main" id="{C16A2FEB-7CE8-EF16-706B-D044C3C96213}"/>
+              </a:ext>
+            </a:extLst>
+          </p:cNvPr>
+          <p:cNvCxnSpPr>
+            <a:cxnSpLocks/>
+            <a:endCxn id="183" idx="2"/>
+          </p:cNvCxnSpPr>
+          <p:nvPr/>
+        </p:nvCxnSpPr>
+        <p:spPr>
+          <a:xfrm flipV="1">
+            <a:off x="8072738" y="7128824"/>
+            <a:ext cx="0" cy="380692"/>
+          </a:xfrm>
+          <a:prstGeom prst="straightConnector1">
+            <a:avLst/>
+          </a:prstGeom>
+          <a:ln w="31750">
+            <a:tailEnd type="triangle"/>
+          </a:ln>
+        </p:spPr>
+        <p:style>
+          <a:lnRef idx="2">
+            <a:schemeClr val="accent3"/>
+          </a:lnRef>
+          <a:fillRef idx="0">
+            <a:schemeClr val="accent3"/>
+          </a:fillRef>
+          <a:effectRef idx="1">
+            <a:schemeClr val="accent3"/>
+          </a:effectRef>
+          <a:fontRef idx="minor">
+            <a:schemeClr val="tx1"/>
+          </a:fontRef>
+        </p:style>
+      </p:cxnSp>
+      <p:sp>
+        <p:nvSpPr>
+          <p:cNvPr id="198" name="Losango 197">
+            <a:extLst>
+              <a:ext uri="{FF2B5EF4-FFF2-40B4-BE49-F238E27FC236}">
+                <a16:creationId xmlns:a16="http://schemas.microsoft.com/office/drawing/2014/main" id="{97430353-C3E3-0E27-2FAA-C09FE2BAEB61}"/>
+              </a:ext>
+            </a:extLst>
+          </p:cNvPr>
+          <p:cNvSpPr/>
+          <p:nvPr/>
+        </p:nvSpPr>
+        <p:spPr>
+          <a:xfrm>
+            <a:off x="6853537" y="4800600"/>
+            <a:ext cx="2444325" cy="1164909"/>
+          </a:xfrm>
+          <a:prstGeom prst="diamond">
+            <a:avLst/>
+          </a:prstGeom>
+          <a:ln w="31750"/>
+        </p:spPr>
+        <p:style>
+          <a:lnRef idx="2">
+            <a:schemeClr val="accent3"/>
+          </a:lnRef>
+          <a:fillRef idx="1">
+            <a:schemeClr val="lt1"/>
+          </a:fillRef>
+          <a:effectRef idx="0">
+            <a:schemeClr val="accent3"/>
+          </a:effectRef>
+          <a:fontRef idx="minor">
+            <a:schemeClr val="dk1"/>
+          </a:fontRef>
+        </p:style>
+        <p:txBody>
+          <a:bodyPr rtlCol="0" anchor="ctr"/>
+          <a:lstStyle/>
+          <a:p>
+            <a:pPr algn="ctr"/>
+            <a:endParaRPr lang="pt-PT" sz="1600" dirty="0">
+              <a:solidFill>
+                <a:schemeClr val="dk1"/>
+              </a:solidFill>
+            </a:endParaRPr>
+          </a:p>
+        </p:txBody>
+      </p:sp>
+      <p:sp>
+        <p:nvSpPr>
+          <p:cNvPr id="199" name="Retângulo 198">
+            <a:extLst>
+              <a:ext uri="{FF2B5EF4-FFF2-40B4-BE49-F238E27FC236}">
+                <a16:creationId xmlns:a16="http://schemas.microsoft.com/office/drawing/2014/main" id="{83044D0B-9D2C-0D6B-D87F-DF806ED19347}"/>
+              </a:ext>
+            </a:extLst>
+          </p:cNvPr>
+          <p:cNvSpPr/>
+          <p:nvPr/>
+        </p:nvSpPr>
+        <p:spPr>
+          <a:xfrm>
+            <a:off x="7208462" y="4981226"/>
+            <a:ext cx="1728550" cy="646331"/>
+          </a:xfrm>
+          <a:prstGeom prst="rect">
+            <a:avLst/>
+          </a:prstGeom>
+          <a:noFill/>
+        </p:spPr>
+        <p:txBody>
+          <a:bodyPr wrap="none" lIns="91440" tIns="45720" rIns="91440" bIns="45720">
+            <a:spAutoFit/>
+          </a:bodyPr>
+          <a:lstStyle/>
+          <a:p>
+            <a:pPr algn="ctr"/>
+            <a:r>
+              <a:rPr lang="pt-PT" b="1" dirty="0">
+                <a:solidFill>
+                  <a:schemeClr val="dk1"/>
+                </a:solidFill>
+              </a:rPr>
+              <a:t>Existe</a:t>
+            </a:r>
+            <a:br>
+              <a:rPr lang="pt-PT" b="1" dirty="0">
+                <a:solidFill>
+                  <a:schemeClr val="dk1"/>
+                </a:solidFill>
+              </a:rPr>
+            </a:br>
+            <a:r>
+              <a:rPr lang="pt-PT" b="1" dirty="0">
+                <a:solidFill>
+                  <a:schemeClr val="dk1"/>
+                </a:solidFill>
+              </a:rPr>
+              <a:t>remotamente?</a:t>
+            </a:r>
+            <a:endParaRPr lang="pt-PT" sz="1600" dirty="0">
+              <a:solidFill>
+                <a:schemeClr val="dk1"/>
+              </a:solidFill>
+            </a:endParaRPr>
+          </a:p>
+        </p:txBody>
+      </p:sp>
+      <p:cxnSp>
+        <p:nvCxnSpPr>
+          <p:cNvPr id="201" name="Conexão reta unidirecional 17">
+            <a:extLst>
+              <a:ext uri="{FF2B5EF4-FFF2-40B4-BE49-F238E27FC236}">
+                <a16:creationId xmlns:a16="http://schemas.microsoft.com/office/drawing/2014/main" id="{06231D03-AC31-0FC9-7C8D-B896238A84BE}"/>
+              </a:ext>
+            </a:extLst>
+          </p:cNvPr>
+          <p:cNvCxnSpPr>
+            <a:cxnSpLocks/>
+            <a:stCxn id="198" idx="0"/>
+            <a:endCxn id="162" idx="2"/>
+          </p:cNvCxnSpPr>
+          <p:nvPr/>
+        </p:nvCxnSpPr>
+        <p:spPr>
+          <a:xfrm rot="16200000" flipV="1">
+            <a:off x="6449578" y="3174478"/>
+            <a:ext cx="2321824" cy="930420"/>
+          </a:xfrm>
+          <a:prstGeom prst="bentConnector3">
+            <a:avLst>
+              <a:gd name="adj1" fmla="val 50000"/>
+            </a:avLst>
+          </a:prstGeom>
+          <a:ln w="31750">
+            <a:tailEnd type="triangle"/>
+          </a:ln>
+        </p:spPr>
+        <p:style>
+          <a:lnRef idx="2">
+            <a:schemeClr val="accent3"/>
+          </a:lnRef>
+          <a:fillRef idx="0">
+            <a:schemeClr val="accent3"/>
+          </a:fillRef>
+          <a:effectRef idx="1">
+            <a:schemeClr val="accent3"/>
+          </a:effectRef>
+          <a:fontRef idx="minor">
+            <a:schemeClr val="tx1"/>
+          </a:fontRef>
+        </p:style>
+      </p:cxnSp>
+      <p:sp>
+        <p:nvSpPr>
+          <p:cNvPr id="204" name="Retângulo 203">
+            <a:extLst>
+              <a:ext uri="{FF2B5EF4-FFF2-40B4-BE49-F238E27FC236}">
+                <a16:creationId xmlns:a16="http://schemas.microsoft.com/office/drawing/2014/main" id="{7E1169EA-C4FB-BE2D-7E96-37FC5FC01917}"/>
+              </a:ext>
+            </a:extLst>
+          </p:cNvPr>
+          <p:cNvSpPr/>
+          <p:nvPr/>
+        </p:nvSpPr>
+        <p:spPr>
+          <a:xfrm>
+            <a:off x="7419129" y="4457788"/>
+            <a:ext cx="736100" cy="461665"/>
+          </a:xfrm>
+          <a:prstGeom prst="rect">
+            <a:avLst/>
+          </a:prstGeom>
+          <a:noFill/>
+        </p:spPr>
+        <p:txBody>
+          <a:bodyPr wrap="none" lIns="91440" tIns="45720" rIns="91440" bIns="45720">
+            <a:spAutoFit/>
+          </a:bodyPr>
+          <a:lstStyle/>
+          <a:p>
+            <a:pPr algn="ctr"/>
+            <a:r>
+              <a:rPr lang="pt-PT" sz="2400" b="0" cap="none" spc="0" dirty="0">
+                <a:ln w="0"/>
+                <a:solidFill>
+                  <a:schemeClr val="tx1"/>
+                </a:solidFill>
+                <a:effectLst>
+                  <a:outerShdw blurRad="38100" dist="19050" dir="2700000" algn="tl" rotWithShape="0">
+                    <a:schemeClr val="dk1">
+                      <a:alpha val="40000"/>
+                    </a:schemeClr>
+                  </a:outerShdw>
+                </a:effectLst>
+              </a:rPr>
+              <a:t>Não</a:t>
+            </a:r>
+          </a:p>
+        </p:txBody>
+      </p:sp>
+      <p:cxnSp>
+        <p:nvCxnSpPr>
+          <p:cNvPr id="206" name="Conexão reta unidirecional 205">
+            <a:extLst>
+              <a:ext uri="{FF2B5EF4-FFF2-40B4-BE49-F238E27FC236}">
+                <a16:creationId xmlns:a16="http://schemas.microsoft.com/office/drawing/2014/main" id="{0B646F89-9FBA-26F2-9B60-0CF5BA8CE23F}"/>
+              </a:ext>
+            </a:extLst>
+          </p:cNvPr>
+          <p:cNvCxnSpPr>
+            <a:cxnSpLocks/>
+            <a:stCxn id="183" idx="0"/>
+            <a:endCxn id="198" idx="2"/>
+          </p:cNvCxnSpPr>
+          <p:nvPr/>
+        </p:nvCxnSpPr>
+        <p:spPr>
+          <a:xfrm flipV="1">
+            <a:off x="8072738" y="5965509"/>
+            <a:ext cx="2962" cy="443315"/>
+          </a:xfrm>
+          <a:prstGeom prst="straightConnector1">
+            <a:avLst/>
+          </a:prstGeom>
+          <a:ln w="31750">
+            <a:tailEnd type="triangle"/>
+          </a:ln>
+        </p:spPr>
+        <p:style>
+          <a:lnRef idx="2">
+            <a:schemeClr val="accent3"/>
+          </a:lnRef>
+          <a:fillRef idx="0">
+            <a:schemeClr val="accent3"/>
+          </a:fillRef>
+          <a:effectRef idx="1">
+            <a:schemeClr val="accent3"/>
+          </a:effectRef>
+          <a:fontRef idx="minor">
+            <a:schemeClr val="tx1"/>
+          </a:fontRef>
+        </p:style>
+      </p:cxnSp>
+      <p:cxnSp>
+        <p:nvCxnSpPr>
+          <p:cNvPr id="226" name="Conexão reta unidirecional 225">
+            <a:extLst>
+              <a:ext uri="{FF2B5EF4-FFF2-40B4-BE49-F238E27FC236}">
+                <a16:creationId xmlns:a16="http://schemas.microsoft.com/office/drawing/2014/main" id="{68C5D8A9-E83E-D4BB-1A8C-485F86B532B8}"/>
+              </a:ext>
+            </a:extLst>
+          </p:cNvPr>
+          <p:cNvCxnSpPr>
+            <a:cxnSpLocks/>
+            <a:stCxn id="129" idx="0"/>
+          </p:cNvCxnSpPr>
+          <p:nvPr/>
+        </p:nvCxnSpPr>
+        <p:spPr>
+          <a:xfrm flipV="1">
+            <a:off x="8708465" y="1025990"/>
+            <a:ext cx="0" cy="732786"/>
+          </a:xfrm>
+          <a:prstGeom prst="straightConnector1">
+            <a:avLst/>
+          </a:prstGeom>
+          <a:ln w="31750">
+            <a:tailEnd type="triangle"/>
+          </a:ln>
+        </p:spPr>
+        <p:style>
+          <a:lnRef idx="2">
+            <a:schemeClr val="accent3"/>
+          </a:lnRef>
+          <a:fillRef idx="0">
+            <a:schemeClr val="accent3"/>
+          </a:fillRef>
+          <a:effectRef idx="1">
+            <a:schemeClr val="accent3"/>
+          </a:effectRef>
+          <a:fontRef idx="minor">
+            <a:schemeClr val="tx1"/>
+          </a:fontRef>
+        </p:style>
+      </p:cxnSp>
+      <p:cxnSp>
+        <p:nvCxnSpPr>
+          <p:cNvPr id="240" name="Conexão reta unidirecional 17">
+            <a:extLst>
+              <a:ext uri="{FF2B5EF4-FFF2-40B4-BE49-F238E27FC236}">
+                <a16:creationId xmlns:a16="http://schemas.microsoft.com/office/drawing/2014/main" id="{C5CC29B3-DD69-843C-6B9D-7DC637681668}"/>
+              </a:ext>
+            </a:extLst>
+          </p:cNvPr>
+          <p:cNvCxnSpPr>
+            <a:cxnSpLocks/>
+            <a:endCxn id="129" idx="2"/>
+          </p:cNvCxnSpPr>
+          <p:nvPr/>
+        </p:nvCxnSpPr>
+        <p:spPr>
+          <a:xfrm rot="16200000" flipV="1">
+            <a:off x="8173848" y="3013393"/>
+            <a:ext cx="2578484" cy="1509249"/>
+          </a:xfrm>
+          <a:prstGeom prst="bentConnector3">
+            <a:avLst>
+              <a:gd name="adj1" fmla="val 25619"/>
+            </a:avLst>
+          </a:prstGeom>
+          <a:ln w="31750">
+            <a:tailEnd type="triangle"/>
+          </a:ln>
+        </p:spPr>
+        <p:style>
+          <a:lnRef idx="2">
+            <a:schemeClr val="accent3"/>
+          </a:lnRef>
+          <a:fillRef idx="0">
+            <a:schemeClr val="accent3"/>
+          </a:fillRef>
+          <a:effectRef idx="1">
+            <a:schemeClr val="accent3"/>
+          </a:effectRef>
+          <a:fontRef idx="minor">
+            <a:schemeClr val="tx1"/>
+          </a:fontRef>
+        </p:style>
+      </p:cxnSp>
+      <p:cxnSp>
+        <p:nvCxnSpPr>
+          <p:cNvPr id="270" name="Conexão reta 269">
+            <a:extLst>
+              <a:ext uri="{FF2B5EF4-FFF2-40B4-BE49-F238E27FC236}">
+                <a16:creationId xmlns:a16="http://schemas.microsoft.com/office/drawing/2014/main" id="{65C64211-5106-EB2B-8C39-55643A0DB73D}"/>
+              </a:ext>
+            </a:extLst>
+          </p:cNvPr>
+          <p:cNvCxnSpPr>
+            <a:cxnSpLocks/>
+            <a:endCxn id="127" idx="1"/>
+          </p:cNvCxnSpPr>
+          <p:nvPr/>
+        </p:nvCxnSpPr>
+        <p:spPr>
+          <a:xfrm>
+            <a:off x="10219148" y="5010009"/>
+            <a:ext cx="0" cy="373046"/>
+          </a:xfrm>
+          <a:prstGeom prst="line">
+            <a:avLst/>
+          </a:prstGeom>
+          <a:ln w="31750"/>
+        </p:spPr>
+        <p:style>
+          <a:lnRef idx="2">
+            <a:schemeClr val="accent3"/>
+          </a:lnRef>
+          <a:fillRef idx="0">
+            <a:schemeClr val="accent3"/>
+          </a:fillRef>
+          <a:effectRef idx="1">
+            <a:schemeClr val="accent3"/>
+          </a:effectRef>
+          <a:fontRef idx="minor">
+            <a:schemeClr val="tx1"/>
+          </a:fontRef>
+        </p:style>
+      </p:cxnSp>
+    </p:spTree>
+    <p:extLst>
+      <p:ext uri="{BB962C8B-B14F-4D97-AF65-F5344CB8AC3E}">
+        <p14:creationId xmlns:p14="http://schemas.microsoft.com/office/powerpoint/2010/main" val="2644902661"/>
+      </p:ext>
+    </p:extLst>
+  </p:cSld>
+  <p:clrMapOvr>
+    <a:masterClrMapping/>
+  </p:clrMapOvr>
+</p:sld>
+</file>
+
+<file path=ppt/slides/slide14.xml><?xml version="1.0" encoding="utf-8"?>
+<p:sld xmlns:a="http://schemas.openxmlformats.org/drawingml/2006/main" xmlns:r="http://schemas.openxmlformats.org/officeDocument/2006/relationships" xmlns:p="http://schemas.openxmlformats.org/presentationml/2006/main">
+  <p:cSld>
+    <p:spTree>
+      <p:nvGrpSpPr>
+        <p:cNvPr id="1" name=""/>
+        <p:cNvGrpSpPr/>
+        <p:nvPr/>
+      </p:nvGrpSpPr>
+      <p:grpSpPr>
+        <a:xfrm>
+          <a:off x="0" y="0"/>
+          <a:ext cx="0" cy="0"/>
+          <a:chOff x="0" y="0"/>
+          <a:chExt cx="0" cy="0"/>
+        </a:xfrm>
+      </p:grpSpPr>
+    </p:spTree>
+    <p:extLst>
+      <p:ext uri="{BB962C8B-B14F-4D97-AF65-F5344CB8AC3E}">
+        <p14:creationId xmlns:p14="http://schemas.microsoft.com/office/powerpoint/2010/main" val="3882398256"/>
       </p:ext>
     </p:extLst>
   </p:cSld>
@@ -15033,6 +20640,829 @@
         <p:cNvPr id="1" name="">
           <a:extLst>
             <a:ext uri="{FF2B5EF4-FFF2-40B4-BE49-F238E27FC236}">
+              <a16:creationId xmlns:a16="http://schemas.microsoft.com/office/drawing/2014/main" id="{B60C8674-DE50-EAEE-B43C-563884DA694F}"/>
+            </a:ext>
+          </a:extLst>
+        </p:cNvPr>
+        <p:cNvGrpSpPr/>
+        <p:nvPr/>
+      </p:nvGrpSpPr>
+      <p:grpSpPr>
+        <a:xfrm>
+          <a:off x="0" y="0"/>
+          <a:ext cx="0" cy="0"/>
+          <a:chOff x="0" y="0"/>
+          <a:chExt cx="0" cy="0"/>
+        </a:xfrm>
+      </p:grpSpPr>
+      <p:sp>
+        <p:nvSpPr>
+          <p:cNvPr id="22" name="Retângulo: Cantos Arredondados 21">
+            <a:extLst>
+              <a:ext uri="{FF2B5EF4-FFF2-40B4-BE49-F238E27FC236}">
+                <a16:creationId xmlns:a16="http://schemas.microsoft.com/office/drawing/2014/main" id="{035C4010-6A3E-3851-E75F-A551E9BF3153}"/>
+              </a:ext>
+            </a:extLst>
+          </p:cNvPr>
+          <p:cNvSpPr/>
+          <p:nvPr/>
+        </p:nvSpPr>
+        <p:spPr>
+          <a:xfrm rot="16200000">
+            <a:off x="4297161" y="-1256543"/>
+            <a:ext cx="4207276" cy="12801603"/>
+          </a:xfrm>
+          <a:prstGeom prst="roundRect">
+            <a:avLst/>
+          </a:prstGeom>
+          <a:gradFill>
+            <a:gsLst>
+              <a:gs pos="42000">
+                <a:srgbClr val="FFFF00">
+                  <a:alpha val="79000"/>
+                </a:srgbClr>
+              </a:gs>
+              <a:gs pos="40000">
+                <a:srgbClr val="FFFF00">
+                  <a:alpha val="48000"/>
+                  <a:lumMod val="100000"/>
+                </a:srgbClr>
+              </a:gs>
+              <a:gs pos="0">
+                <a:srgbClr val="FF0000"/>
+              </a:gs>
+              <a:gs pos="100000">
+                <a:srgbClr val="00B050"/>
+              </a:gs>
+            </a:gsLst>
+          </a:gradFill>
+          <a:ln w="19050" cap="rnd">
+            <a:solidFill>
+              <a:schemeClr val="tx1">
+                <a:alpha val="96000"/>
+              </a:schemeClr>
+            </a:solidFill>
+            <a:round/>
+          </a:ln>
+        </p:spPr>
+        <p:style>
+          <a:lnRef idx="1">
+            <a:schemeClr val="accent2"/>
+          </a:lnRef>
+          <a:fillRef idx="2">
+            <a:schemeClr val="accent2"/>
+          </a:fillRef>
+          <a:effectRef idx="1">
+            <a:schemeClr val="accent2"/>
+          </a:effectRef>
+          <a:fontRef idx="minor">
+            <a:schemeClr val="dk1"/>
+          </a:fontRef>
+        </p:style>
+        <p:txBody>
+          <a:bodyPr rtlCol="0" anchor="ctr"/>
+          <a:lstStyle/>
+          <a:p>
+            <a:pPr algn="ctr"/>
+            <a:endParaRPr lang="pt-PT">
+              <a:solidFill>
+                <a:schemeClr val="dk1"/>
+              </a:solidFill>
+            </a:endParaRPr>
+          </a:p>
+        </p:txBody>
+      </p:sp>
+      <p:sp>
+        <p:nvSpPr>
+          <p:cNvPr id="6" name="Retângulo 5">
+            <a:extLst>
+              <a:ext uri="{FF2B5EF4-FFF2-40B4-BE49-F238E27FC236}">
+                <a16:creationId xmlns:a16="http://schemas.microsoft.com/office/drawing/2014/main" id="{710E9661-3336-92DE-767C-74F5EAA15434}"/>
+              </a:ext>
+            </a:extLst>
+          </p:cNvPr>
+          <p:cNvSpPr/>
+          <p:nvPr/>
+        </p:nvSpPr>
+        <p:spPr>
+          <a:xfrm>
+            <a:off x="7269840" y="2961253"/>
+            <a:ext cx="2638917" cy="941796"/>
+          </a:xfrm>
+          <a:prstGeom prst="rect">
+            <a:avLst/>
+          </a:prstGeom>
+          <a:noFill/>
+        </p:spPr>
+        <p:txBody>
+          <a:bodyPr wrap="square" lIns="170688" tIns="85344" rIns="170688" bIns="85344">
+            <a:spAutoFit/>
+          </a:bodyPr>
+          <a:lstStyle/>
+          <a:p>
+            <a:pPr algn="ctr"/>
+            <a:r>
+              <a:rPr lang="pt-PT" sz="3600" b="1" dirty="0" err="1">
+                <a:ln w="0"/>
+                <a:solidFill>
+                  <a:schemeClr val="accent1"/>
+                </a:solidFill>
+                <a:effectLst>
+                  <a:outerShdw blurRad="38100" dist="19050" dir="2700000" algn="tl" rotWithShape="0">
+                    <a:schemeClr val="dk1">
+                      <a:alpha val="40000"/>
+                    </a:schemeClr>
+                  </a:outerShdw>
+                </a:effectLst>
+              </a:rPr>
+              <a:t>ZCAPNet</a:t>
+            </a:r>
+            <a:endParaRPr lang="pt-PT" sz="3600" b="1" dirty="0">
+              <a:ln w="0"/>
+              <a:solidFill>
+                <a:schemeClr val="accent1"/>
+              </a:solidFill>
+              <a:effectLst>
+                <a:outerShdw blurRad="38100" dist="19050" dir="2700000" algn="tl" rotWithShape="0">
+                  <a:schemeClr val="dk1">
+                    <a:alpha val="40000"/>
+                  </a:schemeClr>
+                </a:outerShdw>
+              </a:effectLst>
+            </a:endParaRPr>
+          </a:p>
+          <a:p>
+            <a:pPr algn="ctr"/>
+            <a:r>
+              <a:rPr lang="pt-PT" sz="1200" dirty="0">
+                <a:ln w="0"/>
+                <a:solidFill>
+                  <a:schemeClr val="accent1"/>
+                </a:solidFill>
+                <a:effectLst>
+                  <a:outerShdw blurRad="38100" dist="19050" dir="2700000" algn="tl" rotWithShape="0">
+                    <a:schemeClr val="dk1">
+                      <a:alpha val="40000"/>
+                    </a:schemeClr>
+                  </a:outerShdw>
+                </a:effectLst>
+              </a:rPr>
+              <a:t>Sistema de apoio à Proteção Civil</a:t>
+            </a:r>
+            <a:endParaRPr lang="pt-PT" sz="1600" dirty="0">
+              <a:ln w="0"/>
+              <a:solidFill>
+                <a:schemeClr val="accent1"/>
+              </a:solidFill>
+              <a:effectLst>
+                <a:outerShdw blurRad="38100" dist="19050" dir="2700000" algn="tl" rotWithShape="0">
+                  <a:schemeClr val="dk1">
+                    <a:alpha val="40000"/>
+                  </a:schemeClr>
+                </a:outerShdw>
+              </a:effectLst>
+            </a:endParaRPr>
+          </a:p>
+        </p:txBody>
+      </p:sp>
+      <p:grpSp>
+        <p:nvGrpSpPr>
+          <p:cNvPr id="5" name="Agrupar 4">
+            <a:extLst>
+              <a:ext uri="{FF2B5EF4-FFF2-40B4-BE49-F238E27FC236}">
+                <a16:creationId xmlns:a16="http://schemas.microsoft.com/office/drawing/2014/main" id="{3E8604DE-536B-A66E-4743-7EFCB87CCA74}"/>
+              </a:ext>
+            </a:extLst>
+          </p:cNvPr>
+          <p:cNvGrpSpPr>
+            <a:grpSpLocks noChangeAspect="1"/>
+          </p:cNvGrpSpPr>
+          <p:nvPr/>
+        </p:nvGrpSpPr>
+        <p:grpSpPr>
+          <a:xfrm>
+            <a:off x="289238" y="3308598"/>
+            <a:ext cx="2445906" cy="3669120"/>
+            <a:chOff x="-3091989" y="3251089"/>
+            <a:chExt cx="2183848" cy="3302113"/>
+          </a:xfrm>
+        </p:grpSpPr>
+        <p:pic>
+          <p:nvPicPr>
+            <p:cNvPr id="7" name="Picture 2" descr="Earthquake - Free nature icons">
+              <a:extLst>
+                <a:ext uri="{FF2B5EF4-FFF2-40B4-BE49-F238E27FC236}">
+                  <a16:creationId xmlns:a16="http://schemas.microsoft.com/office/drawing/2014/main" id="{49090462-E13E-4FF1-B7AB-4C3E81395F5F}"/>
+                </a:ext>
+              </a:extLst>
+            </p:cNvPr>
+            <p:cNvPicPr>
+              <a:picLocks noChangeAspect="1" noChangeArrowheads="1"/>
+            </p:cNvPicPr>
+            <p:nvPr/>
+          </p:nvPicPr>
+          <p:blipFill>
+            <a:blip r:embed="rId3">
+              <a:extLst>
+                <a:ext uri="{28A0092B-C50C-407E-A947-70E740481C1C}">
+                  <a14:useLocalDpi xmlns:a14="http://schemas.microsoft.com/office/drawing/2010/main" val="0"/>
+                </a:ext>
+              </a:extLst>
+            </a:blip>
+            <a:srcRect/>
+            <a:stretch>
+              <a:fillRect/>
+            </a:stretch>
+          </p:blipFill>
+          <p:spPr bwMode="auto">
+            <a:xfrm>
+              <a:off x="-3091989" y="3251089"/>
+              <a:ext cx="1006011" cy="1006011"/>
+            </a:xfrm>
+            <a:prstGeom prst="rect">
+              <a:avLst/>
+            </a:prstGeom>
+            <a:noFill/>
+            <a:extLst>
+              <a:ext uri="{909E8E84-426E-40DD-AFC4-6F175D3DCCD1}">
+                <a14:hiddenFill xmlns:a14="http://schemas.microsoft.com/office/drawing/2010/main">
+                  <a:solidFill>
+                    <a:srgbClr val="FFFFFF"/>
+                  </a:solidFill>
+                </a14:hiddenFill>
+              </a:ext>
+            </a:extLst>
+          </p:spPr>
+        </p:pic>
+        <p:pic>
+          <p:nvPicPr>
+            <p:cNvPr id="9" name="Picture 10" descr="Casa inundada - ícones de natureza grátis">
+              <a:extLst>
+                <a:ext uri="{FF2B5EF4-FFF2-40B4-BE49-F238E27FC236}">
+                  <a16:creationId xmlns:a16="http://schemas.microsoft.com/office/drawing/2014/main" id="{40C6344F-77D7-C25C-C367-54761E7D5556}"/>
+                </a:ext>
+              </a:extLst>
+            </p:cNvPr>
+            <p:cNvPicPr>
+              <a:picLocks noChangeAspect="1" noChangeArrowheads="1"/>
+            </p:cNvPicPr>
+            <p:nvPr/>
+          </p:nvPicPr>
+          <p:blipFill>
+            <a:blip r:embed="rId4">
+              <a:extLst>
+                <a:ext uri="{28A0092B-C50C-407E-A947-70E740481C1C}">
+                  <a14:useLocalDpi xmlns:a14="http://schemas.microsoft.com/office/drawing/2010/main" val="0"/>
+                </a:ext>
+              </a:extLst>
+            </a:blip>
+            <a:srcRect/>
+            <a:stretch>
+              <a:fillRect/>
+            </a:stretch>
+          </p:blipFill>
+          <p:spPr bwMode="auto">
+            <a:xfrm>
+              <a:off x="-1914152" y="4405078"/>
+              <a:ext cx="1006011" cy="1006011"/>
+            </a:xfrm>
+            <a:prstGeom prst="rect">
+              <a:avLst/>
+            </a:prstGeom>
+            <a:noFill/>
+            <a:extLst>
+              <a:ext uri="{909E8E84-426E-40DD-AFC4-6F175D3DCCD1}">
+                <a14:hiddenFill xmlns:a14="http://schemas.microsoft.com/office/drawing/2010/main">
+                  <a:solidFill>
+                    <a:srgbClr val="FFFFFF"/>
+                  </a:solidFill>
+                </a14:hiddenFill>
+              </a:ext>
+            </a:extLst>
+          </p:spPr>
+        </p:pic>
+        <p:pic>
+          <p:nvPicPr>
+            <p:cNvPr id="11" name="Imagem 10">
+              <a:extLst>
+                <a:ext uri="{FF2B5EF4-FFF2-40B4-BE49-F238E27FC236}">
+                  <a16:creationId xmlns:a16="http://schemas.microsoft.com/office/drawing/2014/main" id="{C93E4C7F-E34E-8889-3564-9BEF56115206}"/>
+                </a:ext>
+              </a:extLst>
+            </p:cNvPr>
+            <p:cNvPicPr>
+              <a:picLocks noChangeAspect="1"/>
+            </p:cNvPicPr>
+            <p:nvPr/>
+          </p:nvPicPr>
+          <p:blipFill>
+            <a:blip r:embed="rId5"/>
+            <a:stretch>
+              <a:fillRect/>
+            </a:stretch>
+          </p:blipFill>
+          <p:spPr>
+            <a:xfrm>
+              <a:off x="-3091989" y="4405078"/>
+              <a:ext cx="1006011" cy="1006011"/>
+            </a:xfrm>
+            <a:prstGeom prst="rect">
+              <a:avLst/>
+            </a:prstGeom>
+          </p:spPr>
+        </p:pic>
+        <p:pic>
+          <p:nvPicPr>
+            <p:cNvPr id="19" name="Imagem 18">
+              <a:extLst>
+                <a:ext uri="{FF2B5EF4-FFF2-40B4-BE49-F238E27FC236}">
+                  <a16:creationId xmlns:a16="http://schemas.microsoft.com/office/drawing/2014/main" id="{62DA0B54-531B-DD9D-BFC2-743EA04230EB}"/>
+                </a:ext>
+              </a:extLst>
+            </p:cNvPr>
+            <p:cNvPicPr>
+              <a:picLocks noChangeAspect="1"/>
+            </p:cNvPicPr>
+            <p:nvPr/>
+          </p:nvPicPr>
+          <p:blipFill>
+            <a:blip r:embed="rId6"/>
+            <a:stretch>
+              <a:fillRect/>
+            </a:stretch>
+          </p:blipFill>
+          <p:spPr>
+            <a:xfrm>
+              <a:off x="-1914152" y="3251089"/>
+              <a:ext cx="1006011" cy="1006011"/>
+            </a:xfrm>
+            <a:prstGeom prst="rect">
+              <a:avLst/>
+            </a:prstGeom>
+          </p:spPr>
+        </p:pic>
+        <p:pic>
+          <p:nvPicPr>
+            <p:cNvPr id="23" name="Imagem 22">
+              <a:extLst>
+                <a:ext uri="{FF2B5EF4-FFF2-40B4-BE49-F238E27FC236}">
+                  <a16:creationId xmlns:a16="http://schemas.microsoft.com/office/drawing/2014/main" id="{04201D78-5A23-49B2-F9AB-4E75205F131F}"/>
+                </a:ext>
+              </a:extLst>
+            </p:cNvPr>
+            <p:cNvPicPr>
+              <a:picLocks noChangeAspect="1"/>
+            </p:cNvPicPr>
+            <p:nvPr/>
+          </p:nvPicPr>
+          <p:blipFill>
+            <a:blip r:embed="rId7"/>
+            <a:stretch>
+              <a:fillRect/>
+            </a:stretch>
+          </p:blipFill>
+          <p:spPr>
+            <a:xfrm>
+              <a:off x="-3091989" y="5547191"/>
+              <a:ext cx="1006011" cy="1006011"/>
+            </a:xfrm>
+            <a:prstGeom prst="rect">
+              <a:avLst/>
+            </a:prstGeom>
+          </p:spPr>
+        </p:pic>
+        <p:pic>
+          <p:nvPicPr>
+            <p:cNvPr id="24" name="Imagem 23">
+              <a:extLst>
+                <a:ext uri="{FF2B5EF4-FFF2-40B4-BE49-F238E27FC236}">
+                  <a16:creationId xmlns:a16="http://schemas.microsoft.com/office/drawing/2014/main" id="{A3799D38-E3DC-9DBA-7BD9-09E1885C9254}"/>
+                </a:ext>
+              </a:extLst>
+            </p:cNvPr>
+            <p:cNvPicPr>
+              <a:picLocks noChangeAspect="1"/>
+            </p:cNvPicPr>
+            <p:nvPr/>
+          </p:nvPicPr>
+          <p:blipFill>
+            <a:blip r:embed="rId8"/>
+            <a:stretch>
+              <a:fillRect/>
+            </a:stretch>
+          </p:blipFill>
+          <p:spPr>
+            <a:xfrm>
+              <a:off x="-1914152" y="5547191"/>
+              <a:ext cx="1006011" cy="1006011"/>
+            </a:xfrm>
+            <a:prstGeom prst="rect">
+              <a:avLst/>
+            </a:prstGeom>
+          </p:spPr>
+        </p:pic>
+      </p:grpSp>
+      <p:pic>
+        <p:nvPicPr>
+          <p:cNvPr id="26" name="Imagem 25">
+            <a:extLst>
+              <a:ext uri="{FF2B5EF4-FFF2-40B4-BE49-F238E27FC236}">
+                <a16:creationId xmlns:a16="http://schemas.microsoft.com/office/drawing/2014/main" id="{D29F47A1-7FC6-8DA8-F38C-357CD728D36A}"/>
+              </a:ext>
+            </a:extLst>
+          </p:cNvPr>
+          <p:cNvPicPr>
+            <a:picLocks noChangeAspect="1"/>
+          </p:cNvPicPr>
+          <p:nvPr/>
+        </p:nvPicPr>
+        <p:blipFill>
+          <a:blip r:embed="rId9"/>
+          <a:stretch>
+            <a:fillRect/>
+          </a:stretch>
+        </p:blipFill>
+        <p:spPr>
+          <a:xfrm>
+            <a:off x="4138516" y="4668273"/>
+            <a:ext cx="1188000" cy="1188000"/>
+          </a:xfrm>
+          <a:prstGeom prst="rect">
+            <a:avLst/>
+          </a:prstGeom>
+        </p:spPr>
+      </p:pic>
+      <p:pic>
+        <p:nvPicPr>
+          <p:cNvPr id="28" name="Imagem 27">
+            <a:extLst>
+              <a:ext uri="{FF2B5EF4-FFF2-40B4-BE49-F238E27FC236}">
+                <a16:creationId xmlns:a16="http://schemas.microsoft.com/office/drawing/2014/main" id="{BD2F0786-009D-5BA8-FBFA-3CB7DE3B3763}"/>
+              </a:ext>
+            </a:extLst>
+          </p:cNvPr>
+          <p:cNvPicPr>
+            <a:picLocks noChangeAspect="1"/>
+          </p:cNvPicPr>
+          <p:nvPr/>
+        </p:nvPicPr>
+        <p:blipFill>
+          <a:blip r:embed="rId10"/>
+          <a:stretch>
+            <a:fillRect/>
+          </a:stretch>
+        </p:blipFill>
+        <p:spPr>
+          <a:xfrm>
+            <a:off x="11623850" y="5365358"/>
+            <a:ext cx="900000" cy="900000"/>
+          </a:xfrm>
+          <a:prstGeom prst="rect">
+            <a:avLst/>
+          </a:prstGeom>
+        </p:spPr>
+      </p:pic>
+      <p:sp>
+        <p:nvSpPr>
+          <p:cNvPr id="51" name="Retângulo 50">
+            <a:extLst>
+              <a:ext uri="{FF2B5EF4-FFF2-40B4-BE49-F238E27FC236}">
+                <a16:creationId xmlns:a16="http://schemas.microsoft.com/office/drawing/2014/main" id="{E033FA1A-F96E-9315-ADB8-86C9FD5BED4F}"/>
+              </a:ext>
+            </a:extLst>
+          </p:cNvPr>
+          <p:cNvSpPr>
+            <a:spLocks noChangeAspect="1"/>
+          </p:cNvSpPr>
+          <p:nvPr/>
+        </p:nvSpPr>
+        <p:spPr>
+          <a:xfrm rot="21174172">
+            <a:off x="-964532" y="16857007"/>
+            <a:ext cx="5939679" cy="746808"/>
+          </a:xfrm>
+          <a:prstGeom prst="rect">
+            <a:avLst/>
+          </a:prstGeom>
+          <a:noFill/>
+        </p:spPr>
+        <p:txBody>
+          <a:bodyPr wrap="square" lIns="170688" tIns="85344" rIns="170688" bIns="85344">
+            <a:spAutoFit/>
+          </a:bodyPr>
+          <a:lstStyle/>
+          <a:p>
+            <a:pPr algn="ctr"/>
+            <a:r>
+              <a:rPr lang="pt-PT" sz="3733" dirty="0">
+                <a:ln w="0"/>
+                <a:effectLst>
+                  <a:outerShdw blurRad="38100" dist="19050" dir="2700000" algn="tl" rotWithShape="0">
+                    <a:schemeClr val="dk1">
+                      <a:alpha val="40000"/>
+                    </a:schemeClr>
+                  </a:outerShdw>
+                </a:effectLst>
+              </a:rPr>
+              <a:t>Web App</a:t>
+            </a:r>
+          </a:p>
+        </p:txBody>
+      </p:sp>
+      <p:pic>
+        <p:nvPicPr>
+          <p:cNvPr id="81" name="Imagem 80">
+            <a:extLst>
+              <a:ext uri="{FF2B5EF4-FFF2-40B4-BE49-F238E27FC236}">
+                <a16:creationId xmlns:a16="http://schemas.microsoft.com/office/drawing/2014/main" id="{8C8F74EA-474D-7143-056A-E2EC87769F5C}"/>
+              </a:ext>
+            </a:extLst>
+          </p:cNvPr>
+          <p:cNvPicPr>
+            <a:picLocks noChangeAspect="1"/>
+          </p:cNvPicPr>
+          <p:nvPr/>
+        </p:nvPicPr>
+        <p:blipFill>
+          <a:blip r:embed="rId11"/>
+          <a:stretch>
+            <a:fillRect/>
+          </a:stretch>
+        </p:blipFill>
+        <p:spPr>
+          <a:xfrm>
+            <a:off x="6729888" y="4063158"/>
+            <a:ext cx="1080000" cy="1080000"/>
+          </a:xfrm>
+          <a:prstGeom prst="rect">
+            <a:avLst/>
+          </a:prstGeom>
+        </p:spPr>
+      </p:pic>
+      <p:pic>
+        <p:nvPicPr>
+          <p:cNvPr id="13" name="Imagem 12">
+            <a:extLst>
+              <a:ext uri="{FF2B5EF4-FFF2-40B4-BE49-F238E27FC236}">
+                <a16:creationId xmlns:a16="http://schemas.microsoft.com/office/drawing/2014/main" id="{93919CE7-05B9-4727-8CEF-228E0AB0CE87}"/>
+              </a:ext>
+            </a:extLst>
+          </p:cNvPr>
+          <p:cNvPicPr>
+            <a:picLocks noChangeAspect="1"/>
+          </p:cNvPicPr>
+          <p:nvPr/>
+        </p:nvPicPr>
+        <p:blipFill>
+          <a:blip r:embed="rId10"/>
+          <a:stretch>
+            <a:fillRect/>
+          </a:stretch>
+        </p:blipFill>
+        <p:spPr>
+          <a:xfrm>
+            <a:off x="10950632" y="4113148"/>
+            <a:ext cx="900000" cy="900000"/>
+          </a:xfrm>
+          <a:prstGeom prst="rect">
+            <a:avLst/>
+          </a:prstGeom>
+        </p:spPr>
+      </p:pic>
+      <p:pic>
+        <p:nvPicPr>
+          <p:cNvPr id="14" name="Imagem 13">
+            <a:extLst>
+              <a:ext uri="{FF2B5EF4-FFF2-40B4-BE49-F238E27FC236}">
+                <a16:creationId xmlns:a16="http://schemas.microsoft.com/office/drawing/2014/main" id="{FA331E40-28DC-E83F-E955-61F25D83ABA8}"/>
+              </a:ext>
+            </a:extLst>
+          </p:cNvPr>
+          <p:cNvPicPr>
+            <a:picLocks noChangeAspect="1"/>
+          </p:cNvPicPr>
+          <p:nvPr/>
+        </p:nvPicPr>
+        <p:blipFill>
+          <a:blip r:embed="rId10"/>
+          <a:stretch>
+            <a:fillRect/>
+          </a:stretch>
+        </p:blipFill>
+        <p:spPr>
+          <a:xfrm>
+            <a:off x="10293187" y="5365358"/>
+            <a:ext cx="900000" cy="900000"/>
+          </a:xfrm>
+          <a:prstGeom prst="rect">
+            <a:avLst/>
+          </a:prstGeom>
+        </p:spPr>
+      </p:pic>
+      <p:pic>
+        <p:nvPicPr>
+          <p:cNvPr id="59" name="Imagem 58">
+            <a:extLst>
+              <a:ext uri="{FF2B5EF4-FFF2-40B4-BE49-F238E27FC236}">
+                <a16:creationId xmlns:a16="http://schemas.microsoft.com/office/drawing/2014/main" id="{19171FA3-B577-D4F0-5BA4-299B1BF885B2}"/>
+              </a:ext>
+            </a:extLst>
+          </p:cNvPr>
+          <p:cNvPicPr>
+            <a:picLocks noChangeAspect="1"/>
+          </p:cNvPicPr>
+          <p:nvPr/>
+        </p:nvPicPr>
+        <p:blipFill>
+          <a:blip r:embed="rId11"/>
+          <a:stretch>
+            <a:fillRect/>
+          </a:stretch>
+        </p:blipFill>
+        <p:spPr>
+          <a:xfrm>
+            <a:off x="6724094" y="5692613"/>
+            <a:ext cx="1080000" cy="1080000"/>
+          </a:xfrm>
+          <a:prstGeom prst="rect">
+            <a:avLst/>
+          </a:prstGeom>
+        </p:spPr>
+      </p:pic>
+      <p:sp>
+        <p:nvSpPr>
+          <p:cNvPr id="2" name="Retângulo 1">
+            <a:extLst>
+              <a:ext uri="{FF2B5EF4-FFF2-40B4-BE49-F238E27FC236}">
+                <a16:creationId xmlns:a16="http://schemas.microsoft.com/office/drawing/2014/main" id="{37626412-17E5-160E-4578-CFADB9CF0F5A}"/>
+              </a:ext>
+            </a:extLst>
+          </p:cNvPr>
+          <p:cNvSpPr/>
+          <p:nvPr/>
+        </p:nvSpPr>
+        <p:spPr>
+          <a:xfrm>
+            <a:off x="10190044" y="3159761"/>
+            <a:ext cx="2611556" cy="664797"/>
+          </a:xfrm>
+          <a:prstGeom prst="rect">
+            <a:avLst/>
+          </a:prstGeom>
+          <a:noFill/>
+        </p:spPr>
+        <p:txBody>
+          <a:bodyPr wrap="square" lIns="170688" tIns="85344" rIns="170688" bIns="85344">
+            <a:spAutoFit/>
+          </a:bodyPr>
+          <a:lstStyle/>
+          <a:p>
+            <a:pPr algn="ctr"/>
+            <a:r>
+              <a:rPr lang="pt-PT" sz="3200" b="1" dirty="0">
+                <a:ln w="0"/>
+                <a:solidFill>
+                  <a:schemeClr val="accent1"/>
+                </a:solidFill>
+                <a:effectLst>
+                  <a:outerShdw blurRad="38100" dist="19050" dir="2700000" algn="tl" rotWithShape="0">
+                    <a:schemeClr val="dk1">
+                      <a:alpha val="40000"/>
+                    </a:schemeClr>
+                  </a:outerShdw>
+                </a:effectLst>
+              </a:rPr>
+              <a:t>ZCAPs</a:t>
+            </a:r>
+          </a:p>
+        </p:txBody>
+      </p:sp>
+      <p:pic>
+        <p:nvPicPr>
+          <p:cNvPr id="68" name="Imagem 67">
+            <a:extLst>
+              <a:ext uri="{FF2B5EF4-FFF2-40B4-BE49-F238E27FC236}">
+                <a16:creationId xmlns:a16="http://schemas.microsoft.com/office/drawing/2014/main" id="{98FFECB4-27E2-DC09-2BE7-2BADA3DE43A5}"/>
+              </a:ext>
+            </a:extLst>
+          </p:cNvPr>
+          <p:cNvPicPr>
+            <a:picLocks noChangeAspect="1"/>
+          </p:cNvPicPr>
+          <p:nvPr/>
+        </p:nvPicPr>
+        <p:blipFill>
+          <a:blip r:embed="rId12"/>
+          <a:stretch>
+            <a:fillRect/>
+          </a:stretch>
+        </p:blipFill>
+        <p:spPr>
+          <a:xfrm flipH="1">
+            <a:off x="8049160" y="4023148"/>
+            <a:ext cx="1081961" cy="1080000"/>
+          </a:xfrm>
+          <a:prstGeom prst="rect">
+            <a:avLst/>
+          </a:prstGeom>
+        </p:spPr>
+      </p:pic>
+      <p:pic>
+        <p:nvPicPr>
+          <p:cNvPr id="8" name="Imagem 7">
+            <a:extLst>
+              <a:ext uri="{FF2B5EF4-FFF2-40B4-BE49-F238E27FC236}">
+                <a16:creationId xmlns:a16="http://schemas.microsoft.com/office/drawing/2014/main" id="{933F047A-42D4-6924-F0B3-8ABAADF312AB}"/>
+              </a:ext>
+            </a:extLst>
+          </p:cNvPr>
+          <p:cNvPicPr>
+            <a:picLocks noChangeAspect="1"/>
+          </p:cNvPicPr>
+          <p:nvPr/>
+        </p:nvPicPr>
+        <p:blipFill>
+          <a:blip r:embed="rId12"/>
+          <a:stretch>
+            <a:fillRect/>
+          </a:stretch>
+        </p:blipFill>
+        <p:spPr>
+          <a:xfrm flipH="1">
+            <a:off x="8045870" y="5698152"/>
+            <a:ext cx="1081961" cy="1080000"/>
+          </a:xfrm>
+          <a:prstGeom prst="rect">
+            <a:avLst/>
+          </a:prstGeom>
+        </p:spPr>
+      </p:pic>
+      <p:sp>
+        <p:nvSpPr>
+          <p:cNvPr id="21" name="Retângulo: Cantos Arredondados 20">
+            <a:extLst>
+              <a:ext uri="{FF2B5EF4-FFF2-40B4-BE49-F238E27FC236}">
+                <a16:creationId xmlns:a16="http://schemas.microsoft.com/office/drawing/2014/main" id="{896F7E8B-86A6-D9ED-AA87-3A433F759A41}"/>
+              </a:ext>
+            </a:extLst>
+          </p:cNvPr>
+          <p:cNvSpPr/>
+          <p:nvPr/>
+        </p:nvSpPr>
+        <p:spPr>
+          <a:xfrm>
+            <a:off x="7454900" y="3040624"/>
+            <a:ext cx="2267348" cy="4207278"/>
+          </a:xfrm>
+          <a:prstGeom prst="roundRect">
+            <a:avLst/>
+          </a:prstGeom>
+          <a:noFill/>
+        </p:spPr>
+        <p:style>
+          <a:lnRef idx="2">
+            <a:schemeClr val="dk1"/>
+          </a:lnRef>
+          <a:fillRef idx="1">
+            <a:schemeClr val="lt1"/>
+          </a:fillRef>
+          <a:effectRef idx="0">
+            <a:schemeClr val="dk1"/>
+          </a:effectRef>
+          <a:fontRef idx="minor">
+            <a:schemeClr val="dk1"/>
+          </a:fontRef>
+        </p:style>
+        <p:txBody>
+          <a:bodyPr rtlCol="0" anchor="ctr"/>
+          <a:lstStyle/>
+          <a:p>
+            <a:pPr algn="ctr"/>
+            <a:endParaRPr lang="pt-PT"/>
+          </a:p>
+        </p:txBody>
+      </p:sp>
+    </p:spTree>
+    <p:extLst>
+      <p:ext uri="{BB962C8B-B14F-4D97-AF65-F5344CB8AC3E}">
+        <p14:creationId xmlns:p14="http://schemas.microsoft.com/office/powerpoint/2010/main" val="1640879314"/>
+      </p:ext>
+    </p:extLst>
+  </p:cSld>
+  <p:clrMapOvr>
+    <a:masterClrMapping/>
+  </p:clrMapOvr>
+</p:sld>
+</file>
+
+<file path=ppt/slides/slide4.xml><?xml version="1.0" encoding="utf-8"?>
+<p:sld xmlns:a="http://schemas.openxmlformats.org/drawingml/2006/main" xmlns:r="http://schemas.openxmlformats.org/officeDocument/2006/relationships" xmlns:p="http://schemas.openxmlformats.org/presentationml/2006/main">
+  <p:cSld>
+    <p:spTree>
+      <p:nvGrpSpPr>
+        <p:cNvPr id="1" name="">
+          <a:extLst>
+            <a:ext uri="{FF2B5EF4-FFF2-40B4-BE49-F238E27FC236}">
               <a16:creationId xmlns:a16="http://schemas.microsoft.com/office/drawing/2014/main" id="{7EC35C6E-4BD8-FF24-55DC-595D564A954D}"/>
             </a:ext>
           </a:extLst>
@@ -16368,7 +22798,7 @@
 </p:sld>
 </file>
 
-<file path=ppt/slides/slide4.xml><?xml version="1.0" encoding="utf-8"?>
+<file path=ppt/slides/slide5.xml><?xml version="1.0" encoding="utf-8"?>
 <p:sld xmlns:a="http://schemas.openxmlformats.org/drawingml/2006/main" xmlns:r="http://schemas.openxmlformats.org/officeDocument/2006/relationships" xmlns:p="http://schemas.openxmlformats.org/presentationml/2006/main">
   <p:cSld>
     <p:spTree>
@@ -17920,7 +24350,7 @@
 </p:sld>
 </file>
 
-<file path=ppt/slides/slide5.xml><?xml version="1.0" encoding="utf-8"?>
+<file path=ppt/slides/slide6.xml><?xml version="1.0" encoding="utf-8"?>
 <p:sld xmlns:a="http://schemas.openxmlformats.org/drawingml/2006/main" xmlns:r="http://schemas.openxmlformats.org/officeDocument/2006/relationships" xmlns:p="http://schemas.openxmlformats.org/presentationml/2006/main">
   <p:cSld>
     <p:spTree>
@@ -20215,7 +26645,7 @@
 </p:sld>
 </file>
 
-<file path=ppt/slides/slide6.xml><?xml version="1.0" encoding="utf-8"?>
+<file path=ppt/slides/slide7.xml><?xml version="1.0" encoding="utf-8"?>
 <p:sld xmlns:a="http://schemas.openxmlformats.org/drawingml/2006/main" xmlns:r="http://schemas.openxmlformats.org/officeDocument/2006/relationships" xmlns:p="http://schemas.openxmlformats.org/presentationml/2006/main">
   <p:cSld>
     <p:spTree>
@@ -20547,7 +26977,7 @@
 </p:sld>
 </file>
 
-<file path=ppt/slides/slide7.xml><?xml version="1.0" encoding="utf-8"?>
+<file path=ppt/slides/slide8.xml><?xml version="1.0" encoding="utf-8"?>
 <p:sld xmlns:a="http://schemas.openxmlformats.org/drawingml/2006/main" xmlns:r="http://schemas.openxmlformats.org/officeDocument/2006/relationships" xmlns:p="http://schemas.openxmlformats.org/presentationml/2006/main">
   <p:cSld>
     <p:spTree>
@@ -21135,7 +27565,7 @@
 </p:sld>
 </file>
 
-<file path=ppt/slides/slide8.xml><?xml version="1.0" encoding="utf-8"?>
+<file path=ppt/slides/slide9.xml><?xml version="1.0" encoding="utf-8"?>
 <p:sld xmlns:a="http://schemas.openxmlformats.org/drawingml/2006/main" xmlns:r="http://schemas.openxmlformats.org/officeDocument/2006/relationships" xmlns:p="http://schemas.openxmlformats.org/presentationml/2006/main">
   <p:cSld>
     <p:spTree>
@@ -22908,1130 +29338,6 @@
     <p:extLst>
       <p:ext uri="{BB962C8B-B14F-4D97-AF65-F5344CB8AC3E}">
         <p14:creationId xmlns:p14="http://schemas.microsoft.com/office/powerpoint/2010/main" val="1467072477"/>
-      </p:ext>
-    </p:extLst>
-  </p:cSld>
-  <p:clrMapOvr>
-    <a:masterClrMapping/>
-  </p:clrMapOvr>
-</p:sld>
-</file>
-
-<file path=ppt/slides/slide9.xml><?xml version="1.0" encoding="utf-8"?>
-<p:sld xmlns:a="http://schemas.openxmlformats.org/drawingml/2006/main" xmlns:r="http://schemas.openxmlformats.org/officeDocument/2006/relationships" xmlns:p="http://schemas.openxmlformats.org/presentationml/2006/main">
-  <p:cSld>
-    <p:spTree>
-      <p:nvGrpSpPr>
-        <p:cNvPr id="1" name="">
-          <a:extLst>
-            <a:ext uri="{FF2B5EF4-FFF2-40B4-BE49-F238E27FC236}">
-              <a16:creationId xmlns:a16="http://schemas.microsoft.com/office/drawing/2014/main" id="{1B64089B-9AB7-DDCD-EE84-2805676DA16D}"/>
-            </a:ext>
-          </a:extLst>
-        </p:cNvPr>
-        <p:cNvGrpSpPr/>
-        <p:nvPr/>
-      </p:nvGrpSpPr>
-      <p:grpSpPr>
-        <a:xfrm>
-          <a:off x="0" y="0"/>
-          <a:ext cx="0" cy="0"/>
-          <a:chOff x="0" y="0"/>
-          <a:chExt cx="0" cy="0"/>
-        </a:xfrm>
-      </p:grpSpPr>
-      <p:sp>
-        <p:nvSpPr>
-          <p:cNvPr id="3" name="Retângulo: Cantos Arredondados 2">
-            <a:extLst>
-              <a:ext uri="{FF2B5EF4-FFF2-40B4-BE49-F238E27FC236}">
-                <a16:creationId xmlns:a16="http://schemas.microsoft.com/office/drawing/2014/main" id="{2D2712BD-6F10-ACED-14A6-F22481761721}"/>
-              </a:ext>
-            </a:extLst>
-          </p:cNvPr>
-          <p:cNvSpPr/>
-          <p:nvPr/>
-        </p:nvSpPr>
-        <p:spPr>
-          <a:xfrm>
-            <a:off x="4412850" y="205015"/>
-            <a:ext cx="2896000" cy="720000"/>
-          </a:xfrm>
-          <a:prstGeom prst="roundRect">
-            <a:avLst/>
-          </a:prstGeom>
-          <a:ln w="31750"/>
-        </p:spPr>
-        <p:style>
-          <a:lnRef idx="2">
-            <a:schemeClr val="accent3"/>
-          </a:lnRef>
-          <a:fillRef idx="1">
-            <a:schemeClr val="lt1"/>
-          </a:fillRef>
-          <a:effectRef idx="0">
-            <a:schemeClr val="accent3"/>
-          </a:effectRef>
-          <a:fontRef idx="minor">
-            <a:schemeClr val="dk1"/>
-          </a:fontRef>
-        </p:style>
-        <p:txBody>
-          <a:bodyPr rtlCol="0" anchor="ctr"/>
-          <a:lstStyle/>
-          <a:p>
-            <a:pPr algn="ctr"/>
-            <a:r>
-              <a:rPr lang="pt-PT" b="1" dirty="0"/>
-              <a:t>Arvore</a:t>
-            </a:r>
-            <a:r>
-              <a:rPr lang="pt-PT" dirty="0"/>
-              <a:t> </a:t>
-            </a:r>
-            <a:r>
-              <a:rPr lang="pt-PT" b="1" dirty="0"/>
-              <a:t>Hierárquica</a:t>
-            </a:r>
-            <a:br>
-              <a:rPr lang="pt-PT" dirty="0"/>
-            </a:br>
-            <a:r>
-              <a:rPr lang="pt-PT" sz="1600" dirty="0"/>
-              <a:t>(ex.: Município Odivelas)</a:t>
-            </a:r>
-            <a:endParaRPr lang="pt-PT" dirty="0"/>
-          </a:p>
-        </p:txBody>
-      </p:sp>
-      <p:cxnSp>
-        <p:nvCxnSpPr>
-          <p:cNvPr id="8" name="Conexão reta unidirecional 7">
-            <a:extLst>
-              <a:ext uri="{FF2B5EF4-FFF2-40B4-BE49-F238E27FC236}">
-                <a16:creationId xmlns:a16="http://schemas.microsoft.com/office/drawing/2014/main" id="{EDEEF49A-91AC-369B-2587-6BE0AF76B59F}"/>
-              </a:ext>
-            </a:extLst>
-          </p:cNvPr>
-          <p:cNvCxnSpPr>
-            <a:cxnSpLocks/>
-            <a:stCxn id="3" idx="2"/>
-            <a:endCxn id="2" idx="0"/>
-          </p:cNvCxnSpPr>
-          <p:nvPr/>
-        </p:nvCxnSpPr>
-        <p:spPr>
-          <a:xfrm flipH="1">
-            <a:off x="5860849" y="925015"/>
-            <a:ext cx="1" cy="429716"/>
-          </a:xfrm>
-          <a:prstGeom prst="straightConnector1">
-            <a:avLst/>
-          </a:prstGeom>
-          <a:ln w="31750">
-            <a:tailEnd type="triangle"/>
-          </a:ln>
-        </p:spPr>
-        <p:style>
-          <a:lnRef idx="2">
-            <a:schemeClr val="accent3"/>
-          </a:lnRef>
-          <a:fillRef idx="0">
-            <a:schemeClr val="accent3"/>
-          </a:fillRef>
-          <a:effectRef idx="1">
-            <a:schemeClr val="accent3"/>
-          </a:effectRef>
-          <a:fontRef idx="minor">
-            <a:schemeClr val="tx1"/>
-          </a:fontRef>
-        </p:style>
-      </p:cxnSp>
-      <p:sp>
-        <p:nvSpPr>
-          <p:cNvPr id="2" name="Retângulo: Cantos Arredondados 1">
-            <a:extLst>
-              <a:ext uri="{FF2B5EF4-FFF2-40B4-BE49-F238E27FC236}">
-                <a16:creationId xmlns:a16="http://schemas.microsoft.com/office/drawing/2014/main" id="{90D297B6-AA6C-21B9-F6BF-21F3BD70DCE5}"/>
-              </a:ext>
-            </a:extLst>
-          </p:cNvPr>
-          <p:cNvSpPr/>
-          <p:nvPr/>
-        </p:nvSpPr>
-        <p:spPr>
-          <a:xfrm>
-            <a:off x="4412850" y="1354731"/>
-            <a:ext cx="2895998" cy="842100"/>
-          </a:xfrm>
-          <a:prstGeom prst="roundRect">
-            <a:avLst/>
-          </a:prstGeom>
-          <a:solidFill>
-            <a:schemeClr val="accent6">
-              <a:lumMod val="20000"/>
-              <a:lumOff val="80000"/>
-            </a:schemeClr>
-          </a:solidFill>
-          <a:ln w="31750"/>
-        </p:spPr>
-        <p:style>
-          <a:lnRef idx="2">
-            <a:schemeClr val="accent3"/>
-          </a:lnRef>
-          <a:fillRef idx="1">
-            <a:schemeClr val="lt1"/>
-          </a:fillRef>
-          <a:effectRef idx="0">
-            <a:schemeClr val="accent3"/>
-          </a:effectRef>
-          <a:fontRef idx="minor">
-            <a:schemeClr val="dk1"/>
-          </a:fontRef>
-        </p:style>
-        <p:txBody>
-          <a:bodyPr rtlCol="0" anchor="ctr"/>
-          <a:lstStyle/>
-          <a:p>
-            <a:pPr algn="ctr"/>
-            <a:r>
-              <a:rPr lang="pt-PT" b="1" dirty="0"/>
-              <a:t>ZCAP</a:t>
-            </a:r>
-            <a:br>
-              <a:rPr lang="pt-PT" dirty="0"/>
-            </a:br>
-            <a:r>
-              <a:rPr lang="pt-PT" sz="1600" dirty="0"/>
-              <a:t>(ex.: Escola Secundária)</a:t>
-            </a:r>
-            <a:endParaRPr lang="pt-PT" dirty="0"/>
-          </a:p>
-        </p:txBody>
-      </p:sp>
-      <p:sp>
-        <p:nvSpPr>
-          <p:cNvPr id="4" name="Retângulo: Cantos Arredondados 3">
-            <a:extLst>
-              <a:ext uri="{FF2B5EF4-FFF2-40B4-BE49-F238E27FC236}">
-                <a16:creationId xmlns:a16="http://schemas.microsoft.com/office/drawing/2014/main" id="{57CD46D0-0F08-AAE9-05C2-BD7811154492}"/>
-              </a:ext>
-            </a:extLst>
-          </p:cNvPr>
-          <p:cNvSpPr/>
-          <p:nvPr/>
-        </p:nvSpPr>
-        <p:spPr>
-          <a:xfrm>
-            <a:off x="6400800" y="4194182"/>
-            <a:ext cx="2476498" cy="720000"/>
-          </a:xfrm>
-          <a:prstGeom prst="roundRect">
-            <a:avLst/>
-          </a:prstGeom>
-          <a:ln w="31750"/>
-        </p:spPr>
-        <p:style>
-          <a:lnRef idx="2">
-            <a:schemeClr val="accent3"/>
-          </a:lnRef>
-          <a:fillRef idx="1">
-            <a:schemeClr val="lt1"/>
-          </a:fillRef>
-          <a:effectRef idx="0">
-            <a:schemeClr val="accent3"/>
-          </a:effectRef>
-          <a:fontRef idx="minor">
-            <a:schemeClr val="dk1"/>
-          </a:fontRef>
-        </p:style>
-        <p:txBody>
-          <a:bodyPr rtlCol="0" anchor="ctr"/>
-          <a:lstStyle/>
-          <a:p>
-            <a:pPr algn="ctr"/>
-            <a:r>
-              <a:rPr lang="pt-PT" sz="1600" b="1" dirty="0"/>
-              <a:t>Categoria de detalhe</a:t>
-            </a:r>
-          </a:p>
-          <a:p>
-            <a:pPr algn="ctr"/>
-            <a:r>
-              <a:rPr lang="pt-PT" sz="1600" dirty="0"/>
-              <a:t>(ex. Área de Refeições)</a:t>
-            </a:r>
-          </a:p>
-        </p:txBody>
-      </p:sp>
-      <p:sp>
-        <p:nvSpPr>
-          <p:cNvPr id="5" name="Retângulo: Cantos Arredondados 4">
-            <a:extLst>
-              <a:ext uri="{FF2B5EF4-FFF2-40B4-BE49-F238E27FC236}">
-                <a16:creationId xmlns:a16="http://schemas.microsoft.com/office/drawing/2014/main" id="{AB6F5238-A7D8-27D5-EEA5-1E7E5FAE0AF9}"/>
-              </a:ext>
-            </a:extLst>
-          </p:cNvPr>
-          <p:cNvSpPr/>
-          <p:nvPr/>
-        </p:nvSpPr>
-        <p:spPr>
-          <a:xfrm>
-            <a:off x="7149298" y="5238896"/>
-            <a:ext cx="1728000" cy="720000"/>
-          </a:xfrm>
-          <a:prstGeom prst="roundRect">
-            <a:avLst/>
-          </a:prstGeom>
-          <a:ln w="31750"/>
-        </p:spPr>
-        <p:style>
-          <a:lnRef idx="2">
-            <a:schemeClr val="accent3"/>
-          </a:lnRef>
-          <a:fillRef idx="1">
-            <a:schemeClr val="lt1"/>
-          </a:fillRef>
-          <a:effectRef idx="0">
-            <a:schemeClr val="accent3"/>
-          </a:effectRef>
-          <a:fontRef idx="minor">
-            <a:schemeClr val="dk1"/>
-          </a:fontRef>
-        </p:style>
-        <p:txBody>
-          <a:bodyPr rtlCol="0" anchor="ctr"/>
-          <a:lstStyle/>
-          <a:p>
-            <a:pPr algn="ctr"/>
-            <a:r>
-              <a:rPr lang="pt-PT" b="1" dirty="0"/>
-              <a:t>Detalhe</a:t>
-            </a:r>
-            <a:r>
-              <a:rPr lang="pt-PT" dirty="0"/>
-              <a:t> </a:t>
-            </a:r>
-            <a:r>
-              <a:rPr lang="pt-PT" sz="1600" dirty="0"/>
-              <a:t>(</a:t>
-            </a:r>
-            <a:r>
-              <a:rPr lang="pt-PT" sz="1600" i="1" dirty="0" err="1"/>
-              <a:t>bool</a:t>
-            </a:r>
-            <a:r>
-              <a:rPr lang="pt-PT" sz="1600" dirty="0"/>
-              <a:t>)</a:t>
-            </a:r>
-            <a:br>
-              <a:rPr lang="pt-PT" dirty="0"/>
-            </a:br>
-            <a:r>
-              <a:rPr lang="pt-PT" sz="1600" dirty="0"/>
-              <a:t>(ex.: Cozinha)</a:t>
-            </a:r>
-            <a:endParaRPr lang="pt-PT" dirty="0"/>
-          </a:p>
-        </p:txBody>
-      </p:sp>
-      <p:sp>
-        <p:nvSpPr>
-          <p:cNvPr id="12" name="Retângulo: Cantos Arredondados 11">
-            <a:extLst>
-              <a:ext uri="{FF2B5EF4-FFF2-40B4-BE49-F238E27FC236}">
-                <a16:creationId xmlns:a16="http://schemas.microsoft.com/office/drawing/2014/main" id="{013F77CA-0E62-7507-EE07-6D225DC7B7EE}"/>
-              </a:ext>
-            </a:extLst>
-          </p:cNvPr>
-          <p:cNvSpPr/>
-          <p:nvPr/>
-        </p:nvSpPr>
-        <p:spPr>
-          <a:xfrm>
-            <a:off x="2609850" y="2995550"/>
-            <a:ext cx="3168250" cy="2368930"/>
-          </a:xfrm>
-          <a:prstGeom prst="roundRect">
-            <a:avLst/>
-          </a:prstGeom>
-          <a:ln w="31750"/>
-        </p:spPr>
-        <p:style>
-          <a:lnRef idx="2">
-            <a:schemeClr val="accent3"/>
-          </a:lnRef>
-          <a:fillRef idx="1">
-            <a:schemeClr val="lt1"/>
-          </a:fillRef>
-          <a:effectRef idx="0">
-            <a:schemeClr val="accent3"/>
-          </a:effectRef>
-          <a:fontRef idx="minor">
-            <a:schemeClr val="dk1"/>
-          </a:fontRef>
-        </p:style>
-        <p:txBody>
-          <a:bodyPr rtlCol="0" anchor="ctr"/>
-          <a:lstStyle/>
-          <a:p>
-            <a:pPr algn="ctr"/>
-            <a:r>
-              <a:rPr lang="pt-PT" b="1" dirty="0"/>
-              <a:t>Dados</a:t>
-            </a:r>
-            <a:r>
-              <a:rPr lang="pt-PT" dirty="0"/>
-              <a:t> </a:t>
-            </a:r>
-            <a:r>
-              <a:rPr lang="pt-PT" b="1" dirty="0"/>
-              <a:t>obrigatórios:</a:t>
-            </a:r>
-          </a:p>
-          <a:p>
-            <a:pPr marL="285750" indent="-285750">
-              <a:buFont typeface="Arial" panose="020B0604020202020204" pitchFamily="34" charset="0"/>
-              <a:buChar char="•"/>
-            </a:pPr>
-            <a:r>
-              <a:rPr lang="pt-PT" sz="1600" dirty="0"/>
-              <a:t>Morada</a:t>
-            </a:r>
-          </a:p>
-          <a:p>
-            <a:pPr marL="285750" indent="-285750">
-              <a:buFont typeface="Arial" panose="020B0604020202020204" pitchFamily="34" charset="0"/>
-              <a:buChar char="•"/>
-            </a:pPr>
-            <a:r>
-              <a:rPr lang="pt-PT" sz="1600" dirty="0"/>
-              <a:t>Entidade (lista de valores)</a:t>
-            </a:r>
-          </a:p>
-          <a:p>
-            <a:pPr marL="285750" indent="-285750">
-              <a:buFont typeface="Arial" panose="020B0604020202020204" pitchFamily="34" charset="0"/>
-              <a:buChar char="•"/>
-            </a:pPr>
-            <a:r>
-              <a:rPr lang="pt-PT" sz="1600" dirty="0"/>
-              <a:t>Tipologia (lista de valores)</a:t>
-            </a:r>
-          </a:p>
-          <a:p>
-            <a:pPr marL="285750" indent="-285750">
-              <a:buFont typeface="Arial" panose="020B0604020202020204" pitchFamily="34" charset="0"/>
-              <a:buChar char="•"/>
-            </a:pPr>
-            <a:r>
-              <a:rPr lang="pt-PT" sz="1600" dirty="0"/>
-              <a:t>Latitude</a:t>
-            </a:r>
-          </a:p>
-          <a:p>
-            <a:pPr marL="285750" indent="-285750">
-              <a:buFont typeface="Arial" panose="020B0604020202020204" pitchFamily="34" charset="0"/>
-              <a:buChar char="•"/>
-            </a:pPr>
-            <a:r>
-              <a:rPr lang="pt-PT" sz="1600" dirty="0"/>
-              <a:t>Longitude</a:t>
-            </a:r>
-          </a:p>
-          <a:p>
-            <a:pPr marL="285750" indent="-285750">
-              <a:buFont typeface="Arial" panose="020B0604020202020204" pitchFamily="34" charset="0"/>
-              <a:buChar char="•"/>
-            </a:pPr>
-            <a:r>
-              <a:rPr lang="pt-PT" sz="1600" dirty="0"/>
-              <a:t>…</a:t>
-            </a:r>
-            <a:endParaRPr lang="pt-PT" dirty="0"/>
-          </a:p>
-        </p:txBody>
-      </p:sp>
-      <p:sp>
-        <p:nvSpPr>
-          <p:cNvPr id="15" name="Retângulo: Cantos Arredondados 14">
-            <a:extLst>
-              <a:ext uri="{FF2B5EF4-FFF2-40B4-BE49-F238E27FC236}">
-                <a16:creationId xmlns:a16="http://schemas.microsoft.com/office/drawing/2014/main" id="{E996A90A-5E02-6850-83B2-5FD1A2CF4ADD}"/>
-              </a:ext>
-            </a:extLst>
-          </p:cNvPr>
-          <p:cNvSpPr/>
-          <p:nvPr/>
-        </p:nvSpPr>
-        <p:spPr>
-          <a:xfrm>
-            <a:off x="5981300" y="3027368"/>
-            <a:ext cx="2895998" cy="842100"/>
-          </a:xfrm>
-          <a:prstGeom prst="roundRect">
-            <a:avLst/>
-          </a:prstGeom>
-          <a:ln w="31750"/>
-        </p:spPr>
-        <p:style>
-          <a:lnRef idx="2">
-            <a:schemeClr val="accent3"/>
-          </a:lnRef>
-          <a:fillRef idx="1">
-            <a:schemeClr val="lt1"/>
-          </a:fillRef>
-          <a:effectRef idx="0">
-            <a:schemeClr val="accent3"/>
-          </a:effectRef>
-          <a:fontRef idx="minor">
-            <a:schemeClr val="dk1"/>
-          </a:fontRef>
-        </p:style>
-        <p:txBody>
-          <a:bodyPr rtlCol="0" anchor="ctr"/>
-          <a:lstStyle/>
-          <a:p>
-            <a:pPr algn="ctr"/>
-            <a:r>
-              <a:rPr lang="pt-PT" b="1" dirty="0"/>
-              <a:t>ZCAP Detalhes</a:t>
-            </a:r>
-          </a:p>
-        </p:txBody>
-      </p:sp>
-      <p:sp>
-        <p:nvSpPr>
-          <p:cNvPr id="16" name="Retângulo: Cantos Arredondados 15">
-            <a:extLst>
-              <a:ext uri="{FF2B5EF4-FFF2-40B4-BE49-F238E27FC236}">
-                <a16:creationId xmlns:a16="http://schemas.microsoft.com/office/drawing/2014/main" id="{A9FC112B-B517-AAFD-C86B-59EA42CF6E7F}"/>
-              </a:ext>
-            </a:extLst>
-          </p:cNvPr>
-          <p:cNvSpPr/>
-          <p:nvPr/>
-        </p:nvSpPr>
-        <p:spPr>
-          <a:xfrm>
-            <a:off x="7149298" y="6500818"/>
-            <a:ext cx="1728000" cy="720000"/>
-          </a:xfrm>
-          <a:prstGeom prst="roundRect">
-            <a:avLst/>
-          </a:prstGeom>
-          <a:ln w="31750"/>
-        </p:spPr>
-        <p:style>
-          <a:lnRef idx="2">
-            <a:schemeClr val="accent3"/>
-          </a:lnRef>
-          <a:fillRef idx="1">
-            <a:schemeClr val="lt1"/>
-          </a:fillRef>
-          <a:effectRef idx="0">
-            <a:schemeClr val="accent3"/>
-          </a:effectRef>
-          <a:fontRef idx="minor">
-            <a:schemeClr val="dk1"/>
-          </a:fontRef>
-        </p:style>
-        <p:txBody>
-          <a:bodyPr rtlCol="0" anchor="ctr"/>
-          <a:lstStyle/>
-          <a:p>
-            <a:pPr algn="ctr"/>
-            <a:r>
-              <a:rPr lang="pt-PT" b="1" dirty="0"/>
-              <a:t>Detalhe</a:t>
-            </a:r>
-            <a:r>
-              <a:rPr lang="pt-PT" dirty="0"/>
-              <a:t> </a:t>
-            </a:r>
-            <a:r>
-              <a:rPr lang="pt-PT" sz="1600" dirty="0"/>
-              <a:t>(</a:t>
-            </a:r>
-            <a:r>
-              <a:rPr lang="pt-PT" sz="1600" i="1" dirty="0" err="1"/>
-              <a:t>int</a:t>
-            </a:r>
-            <a:r>
-              <a:rPr lang="pt-PT" sz="1600" dirty="0"/>
-              <a:t>)</a:t>
-            </a:r>
-            <a:br>
-              <a:rPr lang="pt-PT" dirty="0"/>
-            </a:br>
-            <a:r>
-              <a:rPr lang="pt-PT" sz="1400" dirty="0"/>
-              <a:t>(ex.: Capacidade refeições)</a:t>
-            </a:r>
-            <a:endParaRPr lang="pt-PT" dirty="0"/>
-          </a:p>
-        </p:txBody>
-      </p:sp>
-      <p:cxnSp>
-        <p:nvCxnSpPr>
-          <p:cNvPr id="18" name="Conexão reta unidirecional 17">
-            <a:extLst>
-              <a:ext uri="{FF2B5EF4-FFF2-40B4-BE49-F238E27FC236}">
-                <a16:creationId xmlns:a16="http://schemas.microsoft.com/office/drawing/2014/main" id="{926F3D79-70D6-0BCC-C894-368B4C16F8DB}"/>
-              </a:ext>
-            </a:extLst>
-          </p:cNvPr>
-          <p:cNvCxnSpPr>
-            <a:cxnSpLocks/>
-            <a:stCxn id="2" idx="2"/>
-            <a:endCxn id="12" idx="0"/>
-          </p:cNvCxnSpPr>
-          <p:nvPr/>
-        </p:nvCxnSpPr>
-        <p:spPr>
-          <a:xfrm rot="5400000">
-            <a:off x="4628053" y="1762753"/>
-            <a:ext cx="798719" cy="1666874"/>
-          </a:xfrm>
-          <a:prstGeom prst="bentConnector3">
-            <a:avLst>
-              <a:gd name="adj1" fmla="val 50000"/>
-            </a:avLst>
-          </a:prstGeom>
-          <a:ln w="31750">
-            <a:tailEnd type="triangle"/>
-          </a:ln>
-        </p:spPr>
-        <p:style>
-          <a:lnRef idx="2">
-            <a:schemeClr val="accent3"/>
-          </a:lnRef>
-          <a:fillRef idx="0">
-            <a:schemeClr val="accent3"/>
-          </a:fillRef>
-          <a:effectRef idx="1">
-            <a:schemeClr val="accent3"/>
-          </a:effectRef>
-          <a:fontRef idx="minor">
-            <a:schemeClr val="tx1"/>
-          </a:fontRef>
-        </p:style>
-      </p:cxnSp>
-      <p:cxnSp>
-        <p:nvCxnSpPr>
-          <p:cNvPr id="27" name="Conexão reta unidirecional 17">
-            <a:extLst>
-              <a:ext uri="{FF2B5EF4-FFF2-40B4-BE49-F238E27FC236}">
-                <a16:creationId xmlns:a16="http://schemas.microsoft.com/office/drawing/2014/main" id="{1893C241-E4A0-3958-A719-09F88AA2AEBC}"/>
-              </a:ext>
-            </a:extLst>
-          </p:cNvPr>
-          <p:cNvCxnSpPr>
-            <a:cxnSpLocks/>
-            <a:stCxn id="2" idx="2"/>
-            <a:endCxn id="15" idx="0"/>
-          </p:cNvCxnSpPr>
-          <p:nvPr/>
-        </p:nvCxnSpPr>
-        <p:spPr>
-          <a:xfrm rot="16200000" flipH="1">
-            <a:off x="6229806" y="1827874"/>
-            <a:ext cx="830537" cy="1568450"/>
-          </a:xfrm>
-          <a:prstGeom prst="bentConnector3">
-            <a:avLst>
-              <a:gd name="adj1" fmla="val 47993"/>
-            </a:avLst>
-          </a:prstGeom>
-          <a:ln w="31750">
-            <a:tailEnd type="triangle"/>
-          </a:ln>
-        </p:spPr>
-        <p:style>
-          <a:lnRef idx="2">
-            <a:schemeClr val="accent3"/>
-          </a:lnRef>
-          <a:fillRef idx="0">
-            <a:schemeClr val="accent3"/>
-          </a:fillRef>
-          <a:effectRef idx="1">
-            <a:schemeClr val="accent3"/>
-          </a:effectRef>
-          <a:fontRef idx="minor">
-            <a:schemeClr val="tx1"/>
-          </a:fontRef>
-        </p:style>
-      </p:cxnSp>
-      <p:cxnSp>
-        <p:nvCxnSpPr>
-          <p:cNvPr id="33" name="Conexão reta unidirecional 17">
-            <a:extLst>
-              <a:ext uri="{FF2B5EF4-FFF2-40B4-BE49-F238E27FC236}">
-                <a16:creationId xmlns:a16="http://schemas.microsoft.com/office/drawing/2014/main" id="{413DC254-B62E-7DDE-CA82-27CC61D3D9AB}"/>
-              </a:ext>
-            </a:extLst>
-          </p:cNvPr>
-          <p:cNvCxnSpPr>
-            <a:cxnSpLocks/>
-            <a:endCxn id="4" idx="1"/>
-          </p:cNvCxnSpPr>
-          <p:nvPr/>
-        </p:nvCxnSpPr>
-        <p:spPr>
-          <a:xfrm rot="16200000" flipH="1">
-            <a:off x="5962897" y="4116279"/>
-            <a:ext cx="684710" cy="191096"/>
-          </a:xfrm>
-          <a:prstGeom prst="bentConnector2">
-            <a:avLst/>
-          </a:prstGeom>
-          <a:ln w="31750">
-            <a:tailEnd type="triangle"/>
-          </a:ln>
-        </p:spPr>
-        <p:style>
-          <a:lnRef idx="2">
-            <a:schemeClr val="accent3"/>
-          </a:lnRef>
-          <a:fillRef idx="0">
-            <a:schemeClr val="accent3"/>
-          </a:fillRef>
-          <a:effectRef idx="1">
-            <a:schemeClr val="accent3"/>
-          </a:effectRef>
-          <a:fontRef idx="minor">
-            <a:schemeClr val="tx1"/>
-          </a:fontRef>
-        </p:style>
-      </p:cxnSp>
-      <p:sp>
-        <p:nvSpPr>
-          <p:cNvPr id="36" name="Retângulo: Cantos Arredondados 35">
-            <a:extLst>
-              <a:ext uri="{FF2B5EF4-FFF2-40B4-BE49-F238E27FC236}">
-                <a16:creationId xmlns:a16="http://schemas.microsoft.com/office/drawing/2014/main" id="{7844AA58-FE87-DC33-E8F5-7C331922E4F6}"/>
-              </a:ext>
-            </a:extLst>
-          </p:cNvPr>
-          <p:cNvSpPr/>
-          <p:nvPr/>
-        </p:nvSpPr>
-        <p:spPr>
-          <a:xfrm>
-            <a:off x="6400800" y="7366007"/>
-            <a:ext cx="2476498" cy="720000"/>
-          </a:xfrm>
-          <a:prstGeom prst="roundRect">
-            <a:avLst/>
-          </a:prstGeom>
-          <a:ln w="31750"/>
-        </p:spPr>
-        <p:style>
-          <a:lnRef idx="2">
-            <a:schemeClr val="accent3"/>
-          </a:lnRef>
-          <a:fillRef idx="1">
-            <a:schemeClr val="lt1"/>
-          </a:fillRef>
-          <a:effectRef idx="0">
-            <a:schemeClr val="accent3"/>
-          </a:effectRef>
-          <a:fontRef idx="minor">
-            <a:schemeClr val="dk1"/>
-          </a:fontRef>
-        </p:style>
-        <p:txBody>
-          <a:bodyPr rtlCol="0" anchor="ctr"/>
-          <a:lstStyle/>
-          <a:p>
-            <a:pPr algn="ctr"/>
-            <a:r>
-              <a:rPr lang="pt-PT" sz="1600" b="1" dirty="0"/>
-              <a:t>Categoria de detalhe</a:t>
-            </a:r>
-          </a:p>
-          <a:p>
-            <a:pPr algn="ctr"/>
-            <a:r>
-              <a:rPr lang="pt-PT" sz="1600" dirty="0"/>
-              <a:t>(ex. Específicos)</a:t>
-            </a:r>
-          </a:p>
-        </p:txBody>
-      </p:sp>
-      <p:cxnSp>
-        <p:nvCxnSpPr>
-          <p:cNvPr id="37" name="Conexão reta unidirecional 17">
-            <a:extLst>
-              <a:ext uri="{FF2B5EF4-FFF2-40B4-BE49-F238E27FC236}">
-                <a16:creationId xmlns:a16="http://schemas.microsoft.com/office/drawing/2014/main" id="{60294D71-174D-6729-8850-6275B8610E08}"/>
-              </a:ext>
-            </a:extLst>
-          </p:cNvPr>
-          <p:cNvCxnSpPr>
-            <a:cxnSpLocks/>
-            <a:endCxn id="36" idx="1"/>
-          </p:cNvCxnSpPr>
-          <p:nvPr/>
-        </p:nvCxnSpPr>
-        <p:spPr>
-          <a:xfrm rot="16200000" flipH="1">
-            <a:off x="4376982" y="5702189"/>
-            <a:ext cx="3856540" cy="191096"/>
-          </a:xfrm>
-          <a:prstGeom prst="bentConnector2">
-            <a:avLst/>
-          </a:prstGeom>
-          <a:ln w="31750">
-            <a:tailEnd type="triangle"/>
-          </a:ln>
-        </p:spPr>
-        <p:style>
-          <a:lnRef idx="2">
-            <a:schemeClr val="accent3"/>
-          </a:lnRef>
-          <a:fillRef idx="0">
-            <a:schemeClr val="accent3"/>
-          </a:fillRef>
-          <a:effectRef idx="1">
-            <a:schemeClr val="accent3"/>
-          </a:effectRef>
-          <a:fontRef idx="minor">
-            <a:schemeClr val="tx1"/>
-          </a:fontRef>
-        </p:style>
-      </p:cxnSp>
-      <p:cxnSp>
-        <p:nvCxnSpPr>
-          <p:cNvPr id="45" name="Conexão reta unidirecional 17">
-            <a:extLst>
-              <a:ext uri="{FF2B5EF4-FFF2-40B4-BE49-F238E27FC236}">
-                <a16:creationId xmlns:a16="http://schemas.microsoft.com/office/drawing/2014/main" id="{63240237-714D-0356-2C00-5F2B93515B3A}"/>
-              </a:ext>
-            </a:extLst>
-          </p:cNvPr>
-          <p:cNvCxnSpPr>
-            <a:cxnSpLocks/>
-            <a:endCxn id="5" idx="1"/>
-          </p:cNvCxnSpPr>
-          <p:nvPr/>
-        </p:nvCxnSpPr>
-        <p:spPr>
-          <a:xfrm rot="16200000" flipH="1">
-            <a:off x="6552946" y="5002544"/>
-            <a:ext cx="684714" cy="507990"/>
-          </a:xfrm>
-          <a:prstGeom prst="bentConnector2">
-            <a:avLst/>
-          </a:prstGeom>
-          <a:ln w="31750">
-            <a:tailEnd type="triangle"/>
-          </a:ln>
-        </p:spPr>
-        <p:style>
-          <a:lnRef idx="2">
-            <a:schemeClr val="accent3"/>
-          </a:lnRef>
-          <a:fillRef idx="0">
-            <a:schemeClr val="accent3"/>
-          </a:fillRef>
-          <a:effectRef idx="1">
-            <a:schemeClr val="accent3"/>
-          </a:effectRef>
-          <a:fontRef idx="minor">
-            <a:schemeClr val="tx1"/>
-          </a:fontRef>
-        </p:style>
-      </p:cxnSp>
-      <p:cxnSp>
-        <p:nvCxnSpPr>
-          <p:cNvPr id="52" name="Conexão reta unidirecional 17">
-            <a:extLst>
-              <a:ext uri="{FF2B5EF4-FFF2-40B4-BE49-F238E27FC236}">
-                <a16:creationId xmlns:a16="http://schemas.microsoft.com/office/drawing/2014/main" id="{7453ACF5-0138-156F-5927-0B044A1E951C}"/>
-              </a:ext>
-            </a:extLst>
-          </p:cNvPr>
-          <p:cNvCxnSpPr>
-            <a:cxnSpLocks/>
-            <a:endCxn id="16" idx="1"/>
-          </p:cNvCxnSpPr>
-          <p:nvPr/>
-        </p:nvCxnSpPr>
-        <p:spPr>
-          <a:xfrm rot="16200000" flipH="1">
-            <a:off x="5921984" y="5633504"/>
-            <a:ext cx="1946638" cy="507990"/>
-          </a:xfrm>
-          <a:prstGeom prst="bentConnector2">
-            <a:avLst/>
-          </a:prstGeom>
-          <a:ln w="31750">
-            <a:tailEnd type="triangle"/>
-          </a:ln>
-        </p:spPr>
-        <p:style>
-          <a:lnRef idx="2">
-            <a:schemeClr val="accent3"/>
-          </a:lnRef>
-          <a:fillRef idx="0">
-            <a:schemeClr val="accent3"/>
-          </a:fillRef>
-          <a:effectRef idx="1">
-            <a:schemeClr val="accent3"/>
-          </a:effectRef>
-          <a:fontRef idx="minor">
-            <a:schemeClr val="tx1"/>
-          </a:fontRef>
-        </p:style>
-      </p:cxnSp>
-      <p:cxnSp>
-        <p:nvCxnSpPr>
-          <p:cNvPr id="64" name="Conexão reta 63">
-            <a:extLst>
-              <a:ext uri="{FF2B5EF4-FFF2-40B4-BE49-F238E27FC236}">
-                <a16:creationId xmlns:a16="http://schemas.microsoft.com/office/drawing/2014/main" id="{7DB2220D-4894-70D0-2563-16131368BF52}"/>
-              </a:ext>
-            </a:extLst>
-          </p:cNvPr>
-          <p:cNvCxnSpPr>
-            <a:cxnSpLocks/>
-            <a:stCxn id="5" idx="2"/>
-            <a:endCxn id="16" idx="0"/>
-          </p:cNvCxnSpPr>
-          <p:nvPr/>
-        </p:nvCxnSpPr>
-        <p:spPr>
-          <a:xfrm>
-            <a:off x="8013298" y="5958896"/>
-            <a:ext cx="0" cy="541922"/>
-          </a:xfrm>
-          <a:prstGeom prst="line">
-            <a:avLst/>
-          </a:prstGeom>
-          <a:ln w="31750">
-            <a:prstDash val="dash"/>
-          </a:ln>
-        </p:spPr>
-        <p:style>
-          <a:lnRef idx="2">
-            <a:schemeClr val="accent3"/>
-          </a:lnRef>
-          <a:fillRef idx="0">
-            <a:schemeClr val="accent3"/>
-          </a:fillRef>
-          <a:effectRef idx="1">
-            <a:schemeClr val="accent3"/>
-          </a:effectRef>
-          <a:fontRef idx="minor">
-            <a:schemeClr val="tx1"/>
-          </a:fontRef>
-        </p:style>
-      </p:cxnSp>
-      <p:sp>
-        <p:nvSpPr>
-          <p:cNvPr id="71" name="Retângulo: Cantos Arredondados 70">
-            <a:extLst>
-              <a:ext uri="{FF2B5EF4-FFF2-40B4-BE49-F238E27FC236}">
-                <a16:creationId xmlns:a16="http://schemas.microsoft.com/office/drawing/2014/main" id="{13FF6301-EAE7-1548-C704-17F9D0FD9075}"/>
-              </a:ext>
-            </a:extLst>
-          </p:cNvPr>
-          <p:cNvSpPr/>
-          <p:nvPr/>
-        </p:nvSpPr>
-        <p:spPr>
-          <a:xfrm>
-            <a:off x="7149298" y="8410721"/>
-            <a:ext cx="1728000" cy="720000"/>
-          </a:xfrm>
-          <a:prstGeom prst="roundRect">
-            <a:avLst/>
-          </a:prstGeom>
-          <a:ln w="31750"/>
-        </p:spPr>
-        <p:style>
-          <a:lnRef idx="2">
-            <a:schemeClr val="accent3"/>
-          </a:lnRef>
-          <a:fillRef idx="1">
-            <a:schemeClr val="lt1"/>
-          </a:fillRef>
-          <a:effectRef idx="0">
-            <a:schemeClr val="accent3"/>
-          </a:effectRef>
-          <a:fontRef idx="minor">
-            <a:schemeClr val="dk1"/>
-          </a:fontRef>
-        </p:style>
-        <p:txBody>
-          <a:bodyPr rtlCol="0" anchor="ctr"/>
-          <a:lstStyle/>
-          <a:p>
-            <a:pPr algn="ctr"/>
-            <a:r>
-              <a:rPr lang="pt-PT" b="1" dirty="0"/>
-              <a:t>Detalhe</a:t>
-            </a:r>
-            <a:r>
-              <a:rPr lang="pt-PT" dirty="0"/>
-              <a:t> </a:t>
-            </a:r>
-            <a:r>
-              <a:rPr lang="pt-PT" sz="1600" dirty="0"/>
-              <a:t>(</a:t>
-            </a:r>
-            <a:r>
-              <a:rPr lang="pt-PT" sz="1600" i="1" dirty="0"/>
-              <a:t>real</a:t>
-            </a:r>
-            <a:r>
-              <a:rPr lang="pt-PT" sz="1600" dirty="0"/>
-              <a:t>)</a:t>
-            </a:r>
-            <a:br>
-              <a:rPr lang="pt-PT" dirty="0"/>
-            </a:br>
-            <a:r>
-              <a:rPr lang="pt-PT" sz="1600" dirty="0"/>
-              <a:t>(ex.: Área)</a:t>
-            </a:r>
-            <a:endParaRPr lang="pt-PT" dirty="0"/>
-          </a:p>
-        </p:txBody>
-      </p:sp>
-      <p:cxnSp>
-        <p:nvCxnSpPr>
-          <p:cNvPr id="72" name="Conexão reta unidirecional 17">
-            <a:extLst>
-              <a:ext uri="{FF2B5EF4-FFF2-40B4-BE49-F238E27FC236}">
-                <a16:creationId xmlns:a16="http://schemas.microsoft.com/office/drawing/2014/main" id="{9F7BA2A0-BCF0-CD95-FAA0-447B3583E94C}"/>
-              </a:ext>
-            </a:extLst>
-          </p:cNvPr>
-          <p:cNvCxnSpPr>
-            <a:cxnSpLocks/>
-            <a:endCxn id="71" idx="1"/>
-          </p:cNvCxnSpPr>
-          <p:nvPr/>
-        </p:nvCxnSpPr>
-        <p:spPr>
-          <a:xfrm rot="16200000" flipH="1">
-            <a:off x="6629541" y="8250964"/>
-            <a:ext cx="684714" cy="354800"/>
-          </a:xfrm>
-          <a:prstGeom prst="bentConnector2">
-            <a:avLst/>
-          </a:prstGeom>
-          <a:ln w="31750">
-            <a:tailEnd type="triangle"/>
-          </a:ln>
-        </p:spPr>
-        <p:style>
-          <a:lnRef idx="2">
-            <a:schemeClr val="accent3"/>
-          </a:lnRef>
-          <a:fillRef idx="0">
-            <a:schemeClr val="accent3"/>
-          </a:fillRef>
-          <a:effectRef idx="1">
-            <a:schemeClr val="accent3"/>
-          </a:effectRef>
-          <a:fontRef idx="minor">
-            <a:schemeClr val="tx1"/>
-          </a:fontRef>
-        </p:style>
-      </p:cxnSp>
-      <p:cxnSp>
-        <p:nvCxnSpPr>
-          <p:cNvPr id="75" name="Conexão reta 74">
-            <a:extLst>
-              <a:ext uri="{FF2B5EF4-FFF2-40B4-BE49-F238E27FC236}">
-                <a16:creationId xmlns:a16="http://schemas.microsoft.com/office/drawing/2014/main" id="{448C3053-E6DB-65DA-6EEB-01BD6F30716D}"/>
-              </a:ext>
-            </a:extLst>
-          </p:cNvPr>
-          <p:cNvCxnSpPr>
-            <a:cxnSpLocks/>
-            <a:endCxn id="71" idx="2"/>
-          </p:cNvCxnSpPr>
-          <p:nvPr/>
-        </p:nvCxnSpPr>
-        <p:spPr>
-          <a:xfrm flipV="1">
-            <a:off x="8013297" y="9130721"/>
-            <a:ext cx="1" cy="470479"/>
-          </a:xfrm>
-          <a:prstGeom prst="line">
-            <a:avLst/>
-          </a:prstGeom>
-          <a:ln w="31750">
-            <a:prstDash val="dash"/>
-          </a:ln>
-        </p:spPr>
-        <p:style>
-          <a:lnRef idx="2">
-            <a:schemeClr val="accent3"/>
-          </a:lnRef>
-          <a:fillRef idx="0">
-            <a:schemeClr val="accent3"/>
-          </a:fillRef>
-          <a:effectRef idx="1">
-            <a:schemeClr val="accent3"/>
-          </a:effectRef>
-          <a:fontRef idx="minor">
-            <a:schemeClr val="tx1"/>
-          </a:fontRef>
-        </p:style>
-      </p:cxnSp>
-      <p:cxnSp>
-        <p:nvCxnSpPr>
-          <p:cNvPr id="93" name="Conexão reta unidirecional 17">
-            <a:extLst>
-              <a:ext uri="{FF2B5EF4-FFF2-40B4-BE49-F238E27FC236}">
-                <a16:creationId xmlns:a16="http://schemas.microsoft.com/office/drawing/2014/main" id="{6B685491-5E53-9EEB-43D0-7BF871C32669}"/>
-              </a:ext>
-            </a:extLst>
-          </p:cNvPr>
-          <p:cNvCxnSpPr>
-            <a:cxnSpLocks/>
-            <a:endCxn id="3" idx="1"/>
-          </p:cNvCxnSpPr>
-          <p:nvPr/>
-        </p:nvCxnSpPr>
-        <p:spPr>
-          <a:xfrm rot="16200000" flipH="1">
-            <a:off x="3645356" y="-202479"/>
-            <a:ext cx="789716" cy="745271"/>
-          </a:xfrm>
-          <a:prstGeom prst="bentConnector2">
-            <a:avLst/>
-          </a:prstGeom>
-          <a:ln w="31750">
-            <a:prstDash val="dash"/>
-            <a:tailEnd type="triangle"/>
-          </a:ln>
-        </p:spPr>
-        <p:style>
-          <a:lnRef idx="2">
-            <a:schemeClr val="accent3"/>
-          </a:lnRef>
-          <a:fillRef idx="0">
-            <a:schemeClr val="accent3"/>
-          </a:fillRef>
-          <a:effectRef idx="1">
-            <a:schemeClr val="accent3"/>
-          </a:effectRef>
-          <a:fontRef idx="minor">
-            <a:schemeClr val="tx1"/>
-          </a:fontRef>
-        </p:style>
-      </p:cxnSp>
-    </p:spTree>
-    <p:extLst>
-      <p:ext uri="{BB962C8B-B14F-4D97-AF65-F5344CB8AC3E}">
-        <p14:creationId xmlns:p14="http://schemas.microsoft.com/office/powerpoint/2010/main" val="202619048"/>
       </p:ext>
     </p:extLst>
   </p:cSld>
